--- a/presentations/output/P3_Интерфейс_подсистем.pptx
+++ b/presentations/output/P3_Интерфейс_подсистем.pptx
@@ -20,9 +20,10 @@
     <p:sldId id="268" r:id="rId14"/>
     <p:sldId id="269" r:id="rId15"/>
     <p:sldId id="270" r:id="rId16"/>
+    <p:sldId id="271" r:id="rId17"/>
   </p:sldIdLst>
   <p:notesMasterIdLst>
-    <p:notesMasterId r:id="rId17"/>
+    <p:notesMasterId r:id="rId18"/>
   </p:notesMasterIdLst>
   <p:sldSz cx="9144000" cy="5143500"/>
   <p:notesSz cx="5143500" cy="9144000"/>
@@ -1068,6 +1069,94 @@
             <a:fld id="{F7021451-1387-4CA6-816F-3879F97B5CBC}" type="slidenum">
               <a:rPr lang="en-US"/>
               <a:t>15</a:t>
+            </a:fld>
+            <a:endParaRPr lang="en-US"/>
+          </a:p>
+        </p:txBody>
+      </p:sp>
+    </p:spTree>
+    <p:extLst>
+      <p:ext uri="{BB962C8B-B14F-4D97-AF65-F5344CB8AC3E}">
+        <p14:creationId xmlns:p14="http://schemas.microsoft.com/office/powerpoint/2010/main" val="1024086991"/>
+      </p:ext>
+    </p:extLst>
+  </p:cSld>
+  <p:clrMapOvr>
+    <a:masterClrMapping/>
+  </p:clrMapOvr>
+</p:notes>
+</file>
+
+<file path=ppt/notesSlides/notesSlide16.xml><?xml version="1.0" encoding="utf-8"?>
+<p:notes xmlns:a="http://schemas.openxmlformats.org/drawingml/2006/main" xmlns:r="http://schemas.openxmlformats.org/officeDocument/2006/relationships" xmlns:p="http://schemas.openxmlformats.org/presentationml/2006/main">
+  <p:cSld>
+    <p:spTree>
+      <p:nvGrpSpPr>
+        <p:cNvPr id="1" name=""/>
+        <p:cNvGrpSpPr/>
+        <p:nvPr/>
+      </p:nvGrpSpPr>
+      <p:grpSpPr>
+        <a:xfrm>
+          <a:off x="0" y="0"/>
+          <a:ext cx="0" cy="0"/>
+          <a:chOff x="0" y="0"/>
+          <a:chExt cx="0" cy="0"/>
+        </a:xfrm>
+      </p:grpSpPr>
+      <p:sp>
+        <p:nvSpPr>
+          <p:cNvPr id="2" name="Slide Image Placeholder 1"/>
+          <p:cNvSpPr>
+            <a:spLocks noGrp="1" noRot="1" noChangeAspect="1"/>
+          </p:cNvSpPr>
+          <p:nvPr>
+            <p:ph type="sldImg"/>
+          </p:nvPr>
+        </p:nvSpPr>
+        <p:spPr/>
+      </p:sp>
+      <p:sp>
+        <p:nvSpPr>
+          <p:cNvPr id="3" name="Notes Placeholder 2"/>
+          <p:cNvSpPr>
+            <a:spLocks noGrp="1"/>
+          </p:cNvSpPr>
+          <p:nvPr>
+            <p:ph type="body" idx="1"/>
+          </p:nvPr>
+        </p:nvSpPr>
+        <p:spPr/>
+        <p:txBody>
+          <a:bodyPr/>
+          <a:lstStyle/>
+          <a:p>
+            <a:r>
+              <a:rPr lang="en-US" dirty="0"/>
+              <a:t/>
+            </a:r>
+            <a:endParaRPr lang="en-US" dirty="0"/>
+          </a:p>
+        </p:txBody>
+      </p:sp>
+      <p:sp>
+        <p:nvSpPr>
+          <p:cNvPr id="4" name="Slide Number Placeholder 3"/>
+          <p:cNvSpPr>
+            <a:spLocks noGrp="1"/>
+          </p:cNvSpPr>
+          <p:nvPr>
+            <p:ph type="sldNum" sz="quarter" idx="10"/>
+          </p:nvPr>
+        </p:nvSpPr>
+        <p:spPr/>
+        <p:txBody>
+          <a:bodyPr/>
+          <a:lstStyle/>
+          <a:p>
+            <a:fld id="{F7021451-1387-4CA6-816F-3879F97B5CBC}" type="slidenum">
+              <a:rPr lang="en-US"/>
+              <a:t>16</a:t>
             </a:fld>
             <a:endParaRPr lang="en-US"/>
           </a:p>
@@ -2103,7 +2192,7 @@
     <p:bg>
       <p:bgPr>
         <a:solidFill>
-          <a:srgbClr val="0F1E36"/>
+          <a:srgbClr val="000000"/>
         </a:solidFill>
       </p:bgPr>
     </p:bg>
@@ -2129,21 +2218,21 @@
         </p:nvSpPr>
         <p:spPr>
           <a:xfrm>
-            <a:off x="6675120" y="-822960"/>
-            <a:ext cx="3200400" cy="3200400"/>
+            <a:off x="6217920" y="-914400"/>
+            <a:ext cx="3657600" cy="3657600"/>
           </a:xfrm>
           <a:prstGeom prst="ellipse">
             <a:avLst/>
           </a:prstGeom>
           <a:solidFill>
-            <a:srgbClr val="EA580C">
-              <a:alpha val="20000"/>
+            <a:srgbClr val="F5A623">
+              <a:alpha val="30000"/>
             </a:srgbClr>
           </a:solidFill>
           <a:ln w="12700">
             <a:solidFill>
-              <a:srgbClr val="EA580C">
-                <a:alpha val="20000"/>
+              <a:srgbClr val="F5A623">
+                <a:alpha val="30000"/>
               </a:srgbClr>
             </a:solidFill>
             <a:prstDash val="solid"/>
@@ -2158,21 +2247,21 @@
         </p:nvSpPr>
         <p:spPr>
           <a:xfrm>
-            <a:off x="-457200" y="3566160"/>
-            <a:ext cx="2377440" cy="2377440"/>
+            <a:off x="-548640" y="3474720"/>
+            <a:ext cx="2011680" cy="2011680"/>
           </a:xfrm>
           <a:prstGeom prst="ellipse">
             <a:avLst/>
           </a:prstGeom>
           <a:solidFill>
-            <a:srgbClr val="FFEDD5">
-              <a:alpha val="13000"/>
+            <a:srgbClr val="E94560">
+              <a:alpha val="40000"/>
             </a:srgbClr>
           </a:solidFill>
           <a:ln w="12700">
             <a:solidFill>
-              <a:srgbClr val="FFEDD5">
-                <a:alpha val="13000"/>
+              <a:srgbClr val="E94560">
+                <a:alpha val="40000"/>
               </a:srgbClr>
             </a:solidFill>
             <a:prstDash val="solid"/>
@@ -2196,11 +2285,11 @@
             </a:avLst>
           </a:prstGeom>
           <a:solidFill>
-            <a:srgbClr val="EA580C"/>
+            <a:srgbClr val="E94560"/>
           </a:solidFill>
           <a:ln w="12700">
             <a:solidFill>
-              <a:srgbClr val="EA580C"/>
+              <a:srgbClr val="E94560"/>
             </a:solidFill>
             <a:prstDash val="solid"/>
           </a:ln>
@@ -2235,9 +2324,9 @@
                 <a:solidFill>
                   <a:srgbClr val="FFFFFF"/>
                 </a:solidFill>
-                <a:latin typeface="Calibri" pitchFamily="34" charset="0"/>
-                <a:ea typeface="Calibri" pitchFamily="34" charset="-122"/>
-                <a:cs typeface="Calibri" pitchFamily="34" charset="-120"/>
+                <a:latin typeface="Times New Roman" pitchFamily="34" charset="0"/>
+                <a:ea typeface="Times New Roman" pitchFamily="34" charset="-122"/>
+                <a:cs typeface="Times New Roman" pitchFamily="34" charset="-120"/>
               </a:rPr>
               <a:t>Тема 3</a:t>
             </a:r>
@@ -2270,34 +2359,34 @@
               <a:buNone/>
             </a:pPr>
             <a:r>
-              <a:rPr lang="en-US" sz="2500" b="1" dirty="0">
+              <a:rPr lang="en-US" sz="2600" b="1" dirty="0">
                 <a:solidFill>
                   <a:srgbClr val="FFFFFF"/>
                 </a:solidFill>
-                <a:latin typeface="Cambria" pitchFamily="34" charset="0"/>
-                <a:ea typeface="Cambria" pitchFamily="34" charset="-122"/>
-                <a:cs typeface="Cambria" pitchFamily="34" charset="-120"/>
+                <a:latin typeface="Georgia" pitchFamily="34" charset="0"/>
+                <a:ea typeface="Georgia" pitchFamily="34" charset="-122"/>
+                <a:cs typeface="Georgia" pitchFamily="34" charset="-120"/>
               </a:rPr>
               <a:t>Интерфейс подсистем</a:t>
             </a:r>
-            <a:endParaRPr lang="en-US" sz="2500" dirty="0"/>
+            <a:endParaRPr lang="en-US" sz="2600" dirty="0"/>
           </a:p>
           <a:p>
             <a:pPr algn="l" indent="0" marL="0">
               <a:buNone/>
             </a:pPr>
             <a:r>
-              <a:rPr lang="en-US" sz="2500" b="1" dirty="0">
+              <a:rPr lang="en-US" sz="2600" b="1" dirty="0">
                 <a:solidFill>
                   <a:srgbClr val="FFFFFF"/>
                 </a:solidFill>
-                <a:latin typeface="Cambria" pitchFamily="34" charset="0"/>
-                <a:ea typeface="Cambria" pitchFamily="34" charset="-122"/>
-                <a:cs typeface="Cambria" pitchFamily="34" charset="-120"/>
+                <a:latin typeface="Georgia" pitchFamily="34" charset="0"/>
+                <a:ea typeface="Georgia" pitchFamily="34" charset="-122"/>
+                <a:cs typeface="Georgia" pitchFamily="34" charset="-120"/>
               </a:rPr>
               <a:t>Subsystem Interfaces</a:t>
             </a:r>
-            <a:endParaRPr lang="en-US" sz="2500" dirty="0"/>
+            <a:endParaRPr lang="en-US" sz="2600" dirty="0"/>
           </a:p>
         </p:txBody>
       </p:sp>
@@ -2326,17 +2415,17 @@
               <a:buNone/>
             </a:pPr>
             <a:r>
-              <a:rPr lang="en-US" sz="1300" dirty="0">
+              <a:rPr lang="en-US" sz="1200" dirty="0">
                 <a:solidFill>
-                  <a:srgbClr val="FFF7ED"/>
+                  <a:srgbClr val="F8F4F0"/>
                 </a:solidFill>
-                <a:latin typeface="Calibri" pitchFamily="34" charset="0"/>
-                <a:ea typeface="Calibri" pitchFamily="34" charset="-122"/>
-                <a:cs typeface="Calibri" pitchFamily="34" charset="-120"/>
+                <a:latin typeface="Times New Roman" pitchFamily="34" charset="0"/>
+                <a:ea typeface="Times New Roman" pitchFamily="34" charset="-122"/>
+                <a:cs typeface="Times New Roman" pitchFamily="34" charset="-120"/>
               </a:rPr>
               <a:t>Проект ТППО: «Личный кабинет для клиентов компании»</a:t>
             </a:r>
-            <a:endParaRPr lang="en-US" sz="1300" dirty="0"/>
+            <a:endParaRPr lang="en-US" sz="1200" dirty="0"/>
           </a:p>
         </p:txBody>
       </p:sp>
@@ -2355,11 +2444,11 @@
             <a:avLst/>
           </a:prstGeom>
           <a:solidFill>
-            <a:srgbClr val="0A1424"/>
+            <a:srgbClr val="0D0D1A"/>
           </a:solidFill>
           <a:ln w="12700">
             <a:solidFill>
-              <a:srgbClr val="0A1424"/>
+              <a:srgbClr val="0D0D1A"/>
             </a:solidFill>
             <a:prstDash val="solid"/>
           </a:ln>
@@ -2392,13 +2481,13 @@
             <a:r>
               <a:rPr lang="en-US" sz="1100" dirty="0">
                 <a:solidFill>
-                  <a:srgbClr val="7B9BC0"/>
+                  <a:srgbClr val="B8B0C0"/>
                 </a:solidFill>
-                <a:latin typeface="Calibri" pitchFamily="34" charset="0"/>
-                <a:ea typeface="Calibri" pitchFamily="34" charset="-122"/>
-                <a:cs typeface="Calibri" pitchFamily="34" charset="-120"/>
+                <a:latin typeface="Times New Roman" pitchFamily="34" charset="0"/>
+                <a:ea typeface="Times New Roman" pitchFamily="34" charset="-122"/>
+                <a:cs typeface="Times New Roman" pitchFamily="34" charset="-120"/>
               </a:rPr>
-              <a:t>Выполнила: Ломазина А., гр.22307   |   Руководитель: Корзун Д.Ж.   |   ИМИТ ПетрГУ, 2024/25</a:t>
+              <a:t>Выполнила: Ломазина Александра, гр 22307   |   Руководитель: Корзун Дмитрий Жоржевич   |   ИМИТ ПетрГУ, 2026</a:t>
             </a:r>
             <a:endParaRPr lang="en-US" sz="1100" dirty="0"/>
           </a:p>
@@ -2461,17 +2550,17 @@
               <a:buNone/>
             </a:pPr>
             <a:r>
-              <a:rPr lang="en-US" sz="2000" b="1" dirty="0">
+              <a:rPr lang="en-US" sz="1600" b="1" dirty="0">
                 <a:solidFill>
-                  <a:srgbClr val="0F1E36"/>
+                  <a:srgbClr val="1A1A2E"/>
                 </a:solidFill>
-                <a:latin typeface="Cambria" pitchFamily="34" charset="0"/>
-                <a:ea typeface="Cambria" pitchFamily="34" charset="-122"/>
-                <a:cs typeface="Cambria" pitchFamily="34" charset="-120"/>
+                <a:latin typeface="Georgia" pitchFamily="34" charset="0"/>
+                <a:ea typeface="Georgia" pitchFamily="34" charset="-122"/>
+                <a:cs typeface="Georgia" pitchFamily="34" charset="-120"/>
               </a:rPr>
-              <a:t>Интерфейс СУБД: Drizzle ORM + Пул соединений</a:t>
-            </a:r>
-            <a:endParaRPr lang="en-US" sz="2000" dirty="0"/>
+              <a:t>Интерфейс хранилища файлов: S3 Presigned URLs</a:t>
+            </a:r>
+            <a:endParaRPr lang="en-US" sz="1600" dirty="0"/>
           </a:p>
         </p:txBody>
       </p:sp>
@@ -2484,26 +2573,26 @@
         <p:spPr>
           <a:xfrm>
             <a:off x="384048" y="822960"/>
-            <a:ext cx="4023360" cy="4119372"/>
+            <a:ext cx="8375904" cy="4119372"/>
           </a:xfrm>
           <a:prstGeom prst="roundRect">
             <a:avLst>
-              <a:gd name="adj" fmla="val 2273"/>
+              <a:gd name="adj" fmla="val 2220"/>
             </a:avLst>
           </a:prstGeom>
           <a:solidFill>
-            <a:srgbClr val="FFF7ED"/>
+            <a:srgbClr val="F8F4F0"/>
           </a:solidFill>
           <a:ln w="12700">
             <a:solidFill>
-              <a:srgbClr val="FFF7ED"/>
+              <a:srgbClr val="EFEAE3"/>
             </a:solidFill>
             <a:prstDash val="solid"/>
           </a:ln>
           <a:effectLst>
-            <a:outerShdw sx="100000" sy="100000" kx="0" ky="0" algn="bl" rotWithShape="0" blurRad="88900" dist="25400" dir="2700000">
+            <a:outerShdw sx="100000" sy="100000" kx="0" ky="0" algn="bl" rotWithShape="0" blurRad="152400" dist="38100" dir="2700000">
               <a:srgbClr val="000000">
-                <a:alpha val="9000"/>
+                <a:alpha val="12000"/>
               </a:srgbClr>
             </a:outerShdw>
           </a:effectLst>
@@ -2518,7 +2607,7 @@
         <p:spPr>
           <a:xfrm>
             <a:off x="548640" y="932688"/>
-            <a:ext cx="3694176" cy="365760"/>
+            <a:ext cx="8046720" cy="411480"/>
           </a:xfrm>
           <a:prstGeom prst="rect">
             <a:avLst/>
@@ -2527,24 +2616,24 @@
           <a:ln/>
         </p:spPr>
         <p:txBody>
-          <a:bodyPr wrap="square" rtlCol="0" anchor="ctr"/>
+          <a:bodyPr wrap="square" rtlCol="0" anchor="t"/>
           <a:lstStyle/>
           <a:p>
-            <a:pPr indent="0" marL="0">
-              <a:buNone/>
-            </a:pPr>
-            <a:r>
-              <a:rPr lang="en-US" sz="1300" b="1" dirty="0">
+            <a:pPr algn="l" indent="0" marL="0">
+              <a:buNone/>
+            </a:pPr>
+            <a:r>
+              <a:rPr lang="en-US" sz="1200" b="1" dirty="0">
                 <a:solidFill>
-                  <a:srgbClr val="0F1E36"/>
+                  <a:srgbClr val="1A1A2E"/>
                 </a:solidFill>
                 <a:latin typeface="Cambria" pitchFamily="34" charset="0"/>
                 <a:ea typeface="Cambria" pitchFamily="34" charset="-122"/>
                 <a:cs typeface="Cambria" pitchFamily="34" charset="-120"/>
               </a:rPr>
-              <a:t>Пул соединений (Connection Pool)</a:t>
-            </a:r>
-            <a:endParaRPr lang="en-US" sz="1300" dirty="0"/>
+              <a:t>Проблема классического подхода и решение через presigned URLs</a:t>
+            </a:r>
+            <a:endParaRPr lang="en-US" sz="1200" dirty="0"/>
           </a:p>
         </p:txBody>
       </p:sp>
@@ -2556,8 +2645,8 @@
         </p:nvSpPr>
         <p:spPr>
           <a:xfrm>
-            <a:off x="548640" y="1389888"/>
-            <a:ext cx="3694176" cy="2926080"/>
+            <a:off x="548640" y="1417320"/>
+            <a:ext cx="8046720" cy="3296412"/>
           </a:xfrm>
           <a:prstGeom prst="rect">
             <a:avLst/>
@@ -2566,170 +2655,98 @@
           <a:ln/>
         </p:spPr>
         <p:txBody>
-          <a:bodyPr wrap="square" rtlCol="0" anchor="ctr"/>
+          <a:bodyPr wrap="square" rtlCol="0" anchor="t"/>
           <a:lstStyle/>
           <a:p>
-            <a:pPr indent="0" marL="0">
-              <a:buNone/>
-            </a:pPr>
-            <a:r>
-              <a:rPr lang="en-US" sz="1100" dirty="0">
+            <a:pPr algn="l" indent="0" marL="0">
+              <a:buNone/>
+            </a:pPr>
+            <a:r>
+              <a:rPr lang="en-US" sz="1600" dirty="0">
                 <a:solidFill>
-                  <a:srgbClr val="1E293B"/>
+                  <a:srgbClr val="2D2D3A"/>
                 </a:solidFill>
-                <a:latin typeface="Calibri" pitchFamily="34" charset="0"/>
-                <a:ea typeface="Calibri" pitchFamily="34" charset="-122"/>
-                <a:cs typeface="Calibri" pitchFamily="34" charset="-120"/>
+                <a:latin typeface="Times New Roman" pitchFamily="34" charset="0"/>
+                <a:ea typeface="Times New Roman" pitchFamily="34" charset="-122"/>
+                <a:cs typeface="Times New Roman" pitchFamily="34" charset="-120"/>
               </a:rPr>
-              <a:t>Создание TCP-соединения с Postgres на каждый запрос — дорогая операция. Бэкенд инициализирует пул соединений `node-postgres` с лимитом от 10 до 20 активных сессий. Это позволяет мгновенно выполнять SQL-запросы за счет повторного использования открытых сокетов.</a:t>
-            </a:r>
-            <a:endParaRPr lang="en-US" sz="1100" dirty="0"/>
-          </a:p>
-        </p:txBody>
-      </p:sp>
-      <p:sp>
-        <p:nvSpPr>
-          <p:cNvPr id="6" name="Shape 4"/>
-          <p:cNvSpPr/>
-          <p:nvPr/>
-        </p:nvSpPr>
-        <p:spPr>
-          <a:xfrm>
-            <a:off x="4681728" y="822960"/>
-            <a:ext cx="4078224" cy="4119372"/>
-          </a:xfrm>
-          <a:prstGeom prst="roundRect">
-            <a:avLst>
-              <a:gd name="adj" fmla="val 2242"/>
-            </a:avLst>
-          </a:prstGeom>
-          <a:solidFill>
-            <a:srgbClr val="D1FAE5"/>
-          </a:solidFill>
-          <a:ln w="12700">
-            <a:solidFill>
-              <a:srgbClr val="D1FAE5"/>
-            </a:solidFill>
-            <a:prstDash val="solid"/>
-          </a:ln>
-          <a:effectLst>
-            <a:outerShdw sx="100000" sy="100000" kx="0" ky="0" algn="bl" rotWithShape="0" blurRad="88900" dist="25400" dir="2700000">
-              <a:srgbClr val="000000">
-                <a:alpha val="9000"/>
-              </a:srgbClr>
-            </a:outerShdw>
-          </a:effectLst>
-        </p:spPr>
-      </p:sp>
-      <p:sp>
-        <p:nvSpPr>
-          <p:cNvPr id="7" name="Text 5"/>
-          <p:cNvSpPr/>
-          <p:nvPr/>
-        </p:nvSpPr>
-        <p:spPr>
-          <a:xfrm>
-            <a:off x="4846320" y="932688"/>
-            <a:ext cx="3749040" cy="365760"/>
-          </a:xfrm>
-          <a:prstGeom prst="rect">
-            <a:avLst/>
-          </a:prstGeom>
-          <a:noFill/>
-          <a:ln/>
-        </p:spPr>
-        <p:txBody>
-          <a:bodyPr wrap="square" rtlCol="0" anchor="ctr"/>
-          <a:lstStyle/>
-          <a:p>
-            <a:pPr indent="0" marL="0">
-              <a:buNone/>
-            </a:pPr>
-            <a:r>
-              <a:rPr lang="en-US" sz="1300" b="1" dirty="0">
+              <a:t>Обычно файлы загружают на бэкенд API-сервера, а тот перекладывает их в хранилище. Это забивает дисковый кэш, перегружает оперативную память Node.js бинарным буфером данных и блокирует поток событий (Event Loop) при загрузке тяжелых логов или баз 1С.</a:t>
+            </a:r>
+            <a:endParaRPr lang="en-US" sz="1600" dirty="0"/>
+          </a:p>
+          <a:p>
+            <a:pPr algn="l" indent="0" marL="0">
+              <a:buNone/>
+            </a:pPr>
+            <a:endParaRPr lang="en-US" sz="1600" dirty="0"/>
+          </a:p>
+          <a:p>
+            <a:pPr algn="l" indent="0" marL="0">
+              <a:buNone/>
+            </a:pPr>
+            <a:r>
+              <a:rPr lang="en-US" sz="1600" dirty="0">
                 <a:solidFill>
-                  <a:srgbClr val="0F1E36"/>
+                  <a:srgbClr val="2D2D3A"/>
                 </a:solidFill>
-                <a:latin typeface="Cambria" pitchFamily="34" charset="0"/>
-                <a:ea typeface="Cambria" pitchFamily="34" charset="-122"/>
-                <a:cs typeface="Cambria" pitchFamily="34" charset="-120"/>
+                <a:latin typeface="Times New Roman" pitchFamily="34" charset="0"/>
+                <a:ea typeface="Times New Roman" pitchFamily="34" charset="-122"/>
+                <a:cs typeface="Times New Roman" pitchFamily="34" charset="-120"/>
               </a:rPr>
-              <a:t>Преимущества Drizzle ORM</a:t>
-            </a:r>
-            <a:endParaRPr lang="en-US" sz="1300" dirty="0"/>
-          </a:p>
-        </p:txBody>
-      </p:sp>
-      <p:sp>
-        <p:nvSpPr>
-          <p:cNvPr id="8" name="Text 6"/>
-          <p:cNvSpPr/>
-          <p:nvPr/>
-        </p:nvSpPr>
-        <p:spPr>
-          <a:xfrm>
-            <a:off x="4846320" y="1389888"/>
-            <a:ext cx="3749040" cy="2926080"/>
-          </a:xfrm>
-          <a:prstGeom prst="rect">
-            <a:avLst/>
-          </a:prstGeom>
-          <a:noFill/>
-          <a:ln/>
-        </p:spPr>
-        <p:txBody>
-          <a:bodyPr wrap="square" rtlCol="0" anchor="ctr"/>
-          <a:lstStyle/>
-          <a:p>
-            <a:pPr indent="0" marL="0">
-              <a:buNone/>
-            </a:pPr>
-            <a:r>
-              <a:rPr lang="en-US" sz="1100" dirty="0">
+              <a:t>Решение: Временные ссылки S3</a:t>
+            </a:r>
+            <a:endParaRPr lang="en-US" sz="1600" dirty="0"/>
+          </a:p>
+          <a:p>
+            <a:pPr algn="l" indent="0" marL="0">
+              <a:buNone/>
+            </a:pPr>
+            <a:r>
+              <a:rPr lang="en-US" sz="1600" dirty="0">
                 <a:solidFill>
-                  <a:srgbClr val="1E293B"/>
+                  <a:srgbClr val="2D2D3A"/>
                 </a:solidFill>
-                <a:latin typeface="Calibri" pitchFamily="34" charset="0"/>
-                <a:ea typeface="Calibri" pitchFamily="34" charset="-122"/>
-                <a:cs typeface="Calibri" pitchFamily="34" charset="-120"/>
+                <a:latin typeface="Times New Roman" pitchFamily="34" charset="0"/>
+                <a:ea typeface="Times New Roman" pitchFamily="34" charset="-122"/>
+                <a:cs typeface="Times New Roman" pitchFamily="34" charset="-120"/>
               </a:rPr>
-              <a:t>• Полная типобезопасность возвращаемых строк.</a:t>
-            </a:r>
-            <a:endParaRPr lang="en-US" sz="1100" dirty="0"/>
-          </a:p>
-          <a:p>
-            <a:pPr indent="0" marL="0">
-              <a:buNone/>
-            </a:pPr>
-            <a:r>
-              <a:rPr lang="en-US" sz="1100" dirty="0">
+              <a:t>1. Фронтенд шлет запрос на `/api/files/presigned-put`.</a:t>
+            </a:r>
+            <a:endParaRPr lang="en-US" sz="1600" dirty="0"/>
+          </a:p>
+          <a:p>
+            <a:pPr algn="l" indent="0" marL="0">
+              <a:buNone/>
+            </a:pPr>
+            <a:r>
+              <a:rPr lang="en-US" sz="1600" dirty="0">
                 <a:solidFill>
-                  <a:srgbClr val="1E293B"/>
+                  <a:srgbClr val="2D2D3A"/>
                 </a:solidFill>
-                <a:latin typeface="Calibri" pitchFamily="34" charset="0"/>
-                <a:ea typeface="Calibri" pitchFamily="34" charset="-122"/>
-                <a:cs typeface="Calibri" pitchFamily="34" charset="-120"/>
+                <a:latin typeface="Times New Roman" pitchFamily="34" charset="0"/>
+                <a:ea typeface="Times New Roman" pitchFamily="34" charset="-122"/>
+                <a:cs typeface="Times New Roman" pitchFamily="34" charset="-120"/>
               </a:rPr>
-              <a:t>• Отсутствие оверхеда традиционных тяжелых ORM (код Drizzle компилируется в эффективные нативные сырые SQL-запросы).</a:t>
-            </a:r>
-            <a:endParaRPr lang="en-US" sz="1100" dirty="0"/>
-          </a:p>
-          <a:p>
-            <a:pPr indent="0" marL="0">
-              <a:buNone/>
-            </a:pPr>
-            <a:r>
-              <a:rPr lang="en-US" sz="1100" dirty="0">
+              <a:t>2. Бэкенд за миллисекунду генерирует криптографически подписанный URL с лимитом жизни 15 минут.</a:t>
+            </a:r>
+            <a:endParaRPr lang="en-US" sz="1600" dirty="0"/>
+          </a:p>
+          <a:p>
+            <a:pPr algn="l" indent="0" marL="0">
+              <a:buNone/>
+            </a:pPr>
+            <a:r>
+              <a:rPr lang="en-US" sz="1600" dirty="0">
                 <a:solidFill>
-                  <a:srgbClr val="1E293B"/>
+                  <a:srgbClr val="2D2D3A"/>
                 </a:solidFill>
-                <a:latin typeface="Calibri" pitchFamily="34" charset="0"/>
-                <a:ea typeface="Calibri" pitchFamily="34" charset="-122"/>
-                <a:cs typeface="Calibri" pitchFamily="34" charset="-120"/>
+                <a:latin typeface="Times New Roman" pitchFamily="34" charset="0"/>
+                <a:ea typeface="Times New Roman" pitchFamily="34" charset="-122"/>
+                <a:cs typeface="Times New Roman" pitchFamily="34" charset="-120"/>
               </a:rPr>
-              <a:t>• Автоматическое управление миграциями и версионированием таблиц.</a:t>
-            </a:r>
-            <a:endParaRPr lang="en-US" sz="1100" dirty="0"/>
+              <a:t>3. Фронтенд шлет бинарный файл напрямую в корзину MinIO. Бэкенд не нагружается.</a:t>
+            </a:r>
+            <a:endParaRPr lang="en-US" sz="1600" dirty="0"/>
           </a:p>
         </p:txBody>
       </p:sp>
@@ -2790,17 +2807,17 @@
               <a:buNone/>
             </a:pPr>
             <a:r>
-              <a:rPr lang="en-US" sz="2000" b="1" dirty="0">
+              <a:rPr lang="en-US" sz="1600" b="1" dirty="0">
                 <a:solidFill>
-                  <a:srgbClr val="0F1E36"/>
+                  <a:srgbClr val="1A1A2E"/>
                 </a:solidFill>
-                <a:latin typeface="Cambria" pitchFamily="34" charset="0"/>
-                <a:ea typeface="Cambria" pitchFamily="34" charset="-122"/>
-                <a:cs typeface="Cambria" pitchFamily="34" charset="-120"/>
+                <a:latin typeface="Georgia" pitchFamily="34" charset="0"/>
+                <a:ea typeface="Georgia" pitchFamily="34" charset="-122"/>
+                <a:cs typeface="Georgia" pitchFamily="34" charset="-120"/>
               </a:rPr>
-              <a:t>Интеграция с 1С: Асинхронный Outbox Pattern</a:t>
-            </a:r>
-            <a:endParaRPr lang="en-US" sz="2000" dirty="0"/>
+              <a:t>Интерфейс СУБД: Drizzle ORM + Пул соединений</a:t>
+            </a:r>
+            <a:endParaRPr lang="en-US" sz="1600" dirty="0"/>
           </a:p>
         </p:txBody>
       </p:sp>
@@ -2813,26 +2830,26 @@
         <p:spPr>
           <a:xfrm>
             <a:off x="384048" y="822960"/>
-            <a:ext cx="4023360" cy="4119372"/>
+            <a:ext cx="8375904" cy="4119372"/>
           </a:xfrm>
           <a:prstGeom prst="roundRect">
             <a:avLst>
-              <a:gd name="adj" fmla="val 2273"/>
+              <a:gd name="adj" fmla="val 2220"/>
             </a:avLst>
           </a:prstGeom>
           <a:solidFill>
-            <a:srgbClr val="FFF7ED"/>
+            <a:srgbClr val="F8F4F0"/>
           </a:solidFill>
           <a:ln w="12700">
             <a:solidFill>
-              <a:srgbClr val="FFF7ED"/>
+              <a:srgbClr val="EFEAE3"/>
             </a:solidFill>
             <a:prstDash val="solid"/>
           </a:ln>
           <a:effectLst>
-            <a:outerShdw sx="100000" sy="100000" kx="0" ky="0" algn="bl" rotWithShape="0" blurRad="88900" dist="25400" dir="2700000">
+            <a:outerShdw sx="100000" sy="100000" kx="0" ky="0" algn="bl" rotWithShape="0" blurRad="152400" dist="38100" dir="2700000">
               <a:srgbClr val="000000">
-                <a:alpha val="9000"/>
+                <a:alpha val="12000"/>
               </a:srgbClr>
             </a:outerShdw>
           </a:effectLst>
@@ -2847,7 +2864,7 @@
         <p:spPr>
           <a:xfrm>
             <a:off x="548640" y="932688"/>
-            <a:ext cx="3694176" cy="365760"/>
+            <a:ext cx="8046720" cy="411480"/>
           </a:xfrm>
           <a:prstGeom prst="rect">
             <a:avLst/>
@@ -2863,17 +2880,17 @@
               <a:buNone/>
             </a:pPr>
             <a:r>
-              <a:rPr lang="en-US" sz="1300" b="1" dirty="0">
+              <a:rPr lang="en-US" sz="1200" b="1" dirty="0">
                 <a:solidFill>
-                  <a:srgbClr val="DC2626"/>
+                  <a:srgbClr val="1A1A2E"/>
                 </a:solidFill>
                 <a:latin typeface="Cambria" pitchFamily="34" charset="0"/>
                 <a:ea typeface="Cambria" pitchFamily="34" charset="-122"/>
                 <a:cs typeface="Cambria" pitchFamily="34" charset="-120"/>
               </a:rPr>
-              <a:t>Проблема синхронной интеграции</a:t>
-            </a:r>
-            <a:endParaRPr lang="en-US" sz="1300" dirty="0"/>
+              <a:t>Пул соединений и преимущества Drizzle ORM</a:t>
+            </a:r>
+            <a:endParaRPr lang="en-US" sz="1200" dirty="0"/>
           </a:p>
         </p:txBody>
       </p:sp>
@@ -2885,8 +2902,8 @@
         </p:nvSpPr>
         <p:spPr>
           <a:xfrm>
-            <a:off x="548640" y="1389888"/>
-            <a:ext cx="3694176" cy="2926080"/>
+            <a:off x="548640" y="1417320"/>
+            <a:ext cx="8046720" cy="3296412"/>
           </a:xfrm>
           <a:prstGeom prst="rect">
             <a:avLst/>
@@ -2895,170 +2912,98 @@
           <a:ln/>
         </p:spPr>
         <p:txBody>
-          <a:bodyPr wrap="square" rtlCol="0" anchor="ctr"/>
+          <a:bodyPr wrap="square" rtlCol="0" anchor="t"/>
           <a:lstStyle/>
           <a:p>
-            <a:pPr indent="0" marL="0">
-              <a:buNone/>
-            </a:pPr>
-            <a:r>
-              <a:rPr lang="en-US" sz="1100" dirty="0">
+            <a:pPr algn="l" indent="0" marL="0">
+              <a:buNone/>
+            </a:pPr>
+            <a:r>
+              <a:rPr lang="en-US" sz="1600" dirty="0">
                 <a:solidFill>
-                  <a:srgbClr val="1E293B"/>
+                  <a:srgbClr val="2D2D3A"/>
                 </a:solidFill>
-                <a:latin typeface="Calibri" pitchFamily="34" charset="0"/>
-                <a:ea typeface="Calibri" pitchFamily="34" charset="-122"/>
-                <a:cs typeface="Calibri" pitchFamily="34" charset="-120"/>
+                <a:latin typeface="Times New Roman" pitchFamily="34" charset="0"/>
+                <a:ea typeface="Times New Roman" pitchFamily="34" charset="-122"/>
+                <a:cs typeface="Times New Roman" pitchFamily="34" charset="-120"/>
               </a:rPr>
-              <a:t>Если при нажатии кнопки 'Создать тикет' слать запрос напрямую в 1С по HTTP REST: при сбое связи, перегрузке или плановом перезапуске 1С клиент получит ошибку 500, а тикет будет потерян. Это недопустимо для бизнес-системы.</a:t>
-            </a:r>
-            <a:endParaRPr lang="en-US" sz="1100" dirty="0"/>
-          </a:p>
-        </p:txBody>
-      </p:sp>
-      <p:sp>
-        <p:nvSpPr>
-          <p:cNvPr id="6" name="Shape 4"/>
-          <p:cNvSpPr/>
-          <p:nvPr/>
-        </p:nvSpPr>
-        <p:spPr>
-          <a:xfrm>
-            <a:off x="4681728" y="822960"/>
-            <a:ext cx="4078224" cy="4119372"/>
-          </a:xfrm>
-          <a:prstGeom prst="roundRect">
-            <a:avLst>
-              <a:gd name="adj" fmla="val 2242"/>
-            </a:avLst>
-          </a:prstGeom>
-          <a:solidFill>
-            <a:srgbClr val="D1FAE5"/>
-          </a:solidFill>
-          <a:ln w="12700">
-            <a:solidFill>
-              <a:srgbClr val="D1FAE5"/>
-            </a:solidFill>
-            <a:prstDash val="solid"/>
-          </a:ln>
-          <a:effectLst>
-            <a:outerShdw sx="100000" sy="100000" kx="0" ky="0" algn="bl" rotWithShape="0" blurRad="88900" dist="25400" dir="2700000">
-              <a:srgbClr val="000000">
-                <a:alpha val="9000"/>
-              </a:srgbClr>
-            </a:outerShdw>
-          </a:effectLst>
-        </p:spPr>
-      </p:sp>
-      <p:sp>
-        <p:nvSpPr>
-          <p:cNvPr id="7" name="Text 5"/>
-          <p:cNvSpPr/>
-          <p:nvPr/>
-        </p:nvSpPr>
-        <p:spPr>
-          <a:xfrm>
-            <a:off x="4846320" y="932688"/>
-            <a:ext cx="3749040" cy="365760"/>
-          </a:xfrm>
-          <a:prstGeom prst="rect">
-            <a:avLst/>
-          </a:prstGeom>
-          <a:noFill/>
-          <a:ln/>
-        </p:spPr>
-        <p:txBody>
-          <a:bodyPr wrap="square" rtlCol="0" anchor="ctr"/>
-          <a:lstStyle/>
-          <a:p>
-            <a:pPr indent="0" marL="0">
-              <a:buNone/>
-            </a:pPr>
-            <a:r>
-              <a:rPr lang="en-US" sz="1300" b="1" dirty="0">
+              <a:t>Создание TCP-соединения с Postgres на каждый запрос — дорогая операция. Бэкенд инициализирует пул соединений `node-postgres` с лимитом от 10 до 20 активных сессий. Это позволяет мгновенно выполнять SQL-запросы за счет повторного использования открытых сокетов.</a:t>
+            </a:r>
+            <a:endParaRPr lang="en-US" sz="1600" dirty="0"/>
+          </a:p>
+          <a:p>
+            <a:pPr algn="l" indent="0" marL="0">
+              <a:buNone/>
+            </a:pPr>
+            <a:endParaRPr lang="en-US" sz="1600" dirty="0"/>
+          </a:p>
+          <a:p>
+            <a:pPr algn="l" indent="0" marL="0">
+              <a:buNone/>
+            </a:pPr>
+            <a:r>
+              <a:rPr lang="en-US" sz="1600" dirty="0">
                 <a:solidFill>
-                  <a:srgbClr val="059669"/>
+                  <a:srgbClr val="2D2D3A"/>
                 </a:solidFill>
-                <a:latin typeface="Cambria" pitchFamily="34" charset="0"/>
-                <a:ea typeface="Cambria" pitchFamily="34" charset="-122"/>
-                <a:cs typeface="Cambria" pitchFamily="34" charset="-120"/>
+                <a:latin typeface="Times New Roman" pitchFamily="34" charset="0"/>
+                <a:ea typeface="Times New Roman" pitchFamily="34" charset="-122"/>
+                <a:cs typeface="Times New Roman" pitchFamily="34" charset="-120"/>
               </a:rPr>
-              <a:t>Асинхронное решение Outbox</a:t>
-            </a:r>
-            <a:endParaRPr lang="en-US" sz="1300" dirty="0"/>
-          </a:p>
-        </p:txBody>
-      </p:sp>
-      <p:sp>
-        <p:nvSpPr>
-          <p:cNvPr id="8" name="Text 6"/>
-          <p:cNvSpPr/>
-          <p:nvPr/>
-        </p:nvSpPr>
-        <p:spPr>
-          <a:xfrm>
-            <a:off x="4846320" y="1389888"/>
-            <a:ext cx="3749040" cy="2926080"/>
-          </a:xfrm>
-          <a:prstGeom prst="rect">
-            <a:avLst/>
-          </a:prstGeom>
-          <a:noFill/>
-          <a:ln/>
-        </p:spPr>
-        <p:txBody>
-          <a:bodyPr wrap="square" rtlCol="0" anchor="ctr"/>
-          <a:lstStyle/>
-          <a:p>
-            <a:pPr indent="0" marL="0">
-              <a:buNone/>
-            </a:pPr>
-            <a:r>
-              <a:rPr lang="en-US" sz="1100" dirty="0">
+              <a:t>Преимущества Drizzle ORM:</a:t>
+            </a:r>
+            <a:endParaRPr lang="en-US" sz="1600" dirty="0"/>
+          </a:p>
+          <a:p>
+            <a:pPr algn="l" indent="0" marL="0">
+              <a:buNone/>
+            </a:pPr>
+            <a:r>
+              <a:rPr lang="en-US" sz="1600" dirty="0">
                 <a:solidFill>
-                  <a:srgbClr val="1E293B"/>
+                  <a:srgbClr val="2D2D3A"/>
                 </a:solidFill>
-                <a:latin typeface="Calibri" pitchFamily="34" charset="0"/>
-                <a:ea typeface="Calibri" pitchFamily="34" charset="-122"/>
-                <a:cs typeface="Calibri" pitchFamily="34" charset="-120"/>
+                <a:latin typeface="Times New Roman" pitchFamily="34" charset="0"/>
+                <a:ea typeface="Times New Roman" pitchFamily="34" charset="-122"/>
+                <a:cs typeface="Times New Roman" pitchFamily="34" charset="-120"/>
               </a:rPr>
-              <a:t>1. Тикет и событие в таблицу `outbox` пишутся в локальный Postgres в рамках одной ACID транзакции.</a:t>
-            </a:r>
-            <a:endParaRPr lang="en-US" sz="1100" dirty="0"/>
-          </a:p>
-          <a:p>
-            <a:pPr indent="0" marL="0">
-              <a:buNone/>
-            </a:pPr>
-            <a:r>
-              <a:rPr lang="en-US" sz="1100" dirty="0">
+              <a:t>• Полная типобезопасность возвращаемых строк.</a:t>
+            </a:r>
+            <a:endParaRPr lang="en-US" sz="1600" dirty="0"/>
+          </a:p>
+          <a:p>
+            <a:pPr algn="l" indent="0" marL="0">
+              <a:buNone/>
+            </a:pPr>
+            <a:r>
+              <a:rPr lang="en-US" sz="1600" dirty="0">
                 <a:solidFill>
-                  <a:srgbClr val="1E293B"/>
+                  <a:srgbClr val="2D2D3A"/>
                 </a:solidFill>
-                <a:latin typeface="Calibri" pitchFamily="34" charset="0"/>
-                <a:ea typeface="Calibri" pitchFamily="34" charset="-122"/>
-                <a:cs typeface="Calibri" pitchFamily="34" charset="-120"/>
+                <a:latin typeface="Times New Roman" pitchFamily="34" charset="0"/>
+                <a:ea typeface="Times New Roman" pitchFamily="34" charset="-122"/>
+                <a:cs typeface="Times New Roman" pitchFamily="34" charset="-120"/>
               </a:rPr>
-              <a:t>2. Фоновый воркер Node.js раз в 5с шлет события в симулятор 1С.</a:t>
-            </a:r>
-            <a:endParaRPr lang="en-US" sz="1100" dirty="0"/>
-          </a:p>
-          <a:p>
-            <a:pPr indent="0" marL="0">
-              <a:buNone/>
-            </a:pPr>
-            <a:r>
-              <a:rPr lang="en-US" sz="1100" dirty="0">
+              <a:t>• Отсутствие оверхеда традиционных тяжелых ORM (код Drizzle компилируется в эффективные нативные сырые SQL-запросы).</a:t>
+            </a:r>
+            <a:endParaRPr lang="en-US" sz="1600" dirty="0"/>
+          </a:p>
+          <a:p>
+            <a:pPr algn="l" indent="0" marL="0">
+              <a:buNone/>
+            </a:pPr>
+            <a:r>
+              <a:rPr lang="en-US" sz="1600" dirty="0">
                 <a:solidFill>
-                  <a:srgbClr val="1E293B"/>
+                  <a:srgbClr val="2D2D3A"/>
                 </a:solidFill>
-                <a:latin typeface="Calibri" pitchFamily="34" charset="0"/>
-                <a:ea typeface="Calibri" pitchFamily="34" charset="-122"/>
-                <a:cs typeface="Calibri" pitchFamily="34" charset="-120"/>
+                <a:latin typeface="Times New Roman" pitchFamily="34" charset="0"/>
+                <a:ea typeface="Times New Roman" pitchFamily="34" charset="-122"/>
+                <a:cs typeface="Times New Roman" pitchFamily="34" charset="-120"/>
               </a:rPr>
-              <a:t>3. При успехе ставит статус `processed`. При сбое повторяет попытку с задержкой.</a:t>
-            </a:r>
-            <a:endParaRPr lang="en-US" sz="1100" dirty="0"/>
+              <a:t>• Автоматическое управление миграциями и версионированием таблиц.</a:t>
+            </a:r>
+            <a:endParaRPr lang="en-US" sz="1600" dirty="0"/>
           </a:p>
         </p:txBody>
       </p:sp>
@@ -3119,17 +3064,17 @@
               <a:buNone/>
             </a:pPr>
             <a:r>
-              <a:rPr lang="en-US" sz="2000" b="1" dirty="0">
+              <a:rPr lang="en-US" sz="1600" b="1" dirty="0">
                 <a:solidFill>
-                  <a:srgbClr val="0F1E36"/>
+                  <a:srgbClr val="1A1A2E"/>
                 </a:solidFill>
-                <a:latin typeface="Cambria" pitchFamily="34" charset="0"/>
-                <a:ea typeface="Cambria" pitchFamily="34" charset="-122"/>
-                <a:cs typeface="Cambria" pitchFamily="34" charset="-120"/>
+                <a:latin typeface="Georgia" pitchFamily="34" charset="0"/>
+                <a:ea typeface="Georgia" pitchFamily="34" charset="-122"/>
+                <a:cs typeface="Georgia" pitchFamily="34" charset="-120"/>
               </a:rPr>
-              <a:t>Защита стыков: CORS, Rate Limiting и Валидация</a:t>
-            </a:r>
-            <a:endParaRPr lang="en-US" sz="2000" dirty="0"/>
+              <a:t>Интеграция с 1С: Асинхронный Outbox Pattern</a:t>
+            </a:r>
+            <a:endParaRPr lang="en-US" sz="1600" dirty="0"/>
           </a:p>
         </p:txBody>
       </p:sp>
@@ -3142,26 +3087,26 @@
         <p:spPr>
           <a:xfrm>
             <a:off x="384048" y="822960"/>
-            <a:ext cx="4023360" cy="4119372"/>
+            <a:ext cx="8375904" cy="4119372"/>
           </a:xfrm>
           <a:prstGeom prst="roundRect">
             <a:avLst>
-              <a:gd name="adj" fmla="val 2273"/>
+              <a:gd name="adj" fmla="val 2220"/>
             </a:avLst>
           </a:prstGeom>
           <a:solidFill>
-            <a:srgbClr val="FFF7ED"/>
+            <a:srgbClr val="F8F4F0"/>
           </a:solidFill>
           <a:ln w="12700">
             <a:solidFill>
-              <a:srgbClr val="FFF7ED"/>
+              <a:srgbClr val="EFEAE3"/>
             </a:solidFill>
             <a:prstDash val="solid"/>
           </a:ln>
           <a:effectLst>
-            <a:outerShdw sx="100000" sy="100000" kx="0" ky="0" algn="bl" rotWithShape="0" blurRad="88900" dist="25400" dir="2700000">
+            <a:outerShdw sx="100000" sy="100000" kx="0" ky="0" algn="bl" rotWithShape="0" blurRad="152400" dist="38100" dir="2700000">
               <a:srgbClr val="000000">
-                <a:alpha val="9000"/>
+                <a:alpha val="12000"/>
               </a:srgbClr>
             </a:outerShdw>
           </a:effectLst>
@@ -3176,7 +3121,7 @@
         <p:spPr>
           <a:xfrm>
             <a:off x="548640" y="932688"/>
-            <a:ext cx="3694176" cy="365760"/>
+            <a:ext cx="8046720" cy="411480"/>
           </a:xfrm>
           <a:prstGeom prst="rect">
             <a:avLst/>
@@ -3192,17 +3137,17 @@
               <a:buNone/>
             </a:pPr>
             <a:r>
-              <a:rPr lang="en-US" sz="1300" b="1" dirty="0">
+              <a:rPr lang="en-US" sz="1200" b="1" dirty="0">
                 <a:solidFill>
-                  <a:srgbClr val="0F1E36"/>
+                  <a:srgbClr val="1A1A2E"/>
                 </a:solidFill>
                 <a:latin typeface="Cambria" pitchFamily="34" charset="0"/>
                 <a:ea typeface="Cambria" pitchFamily="34" charset="-122"/>
                 <a:cs typeface="Cambria" pitchFamily="34" charset="-120"/>
               </a:rPr>
-              <a:t>Rate Limiting (Защита от DOS)</a:t>
-            </a:r>
-            <a:endParaRPr lang="en-US" sz="1300" dirty="0"/>
+              <a:t>Проблема синхронной интеграции и решение Outbox</a:t>
+            </a:r>
+            <a:endParaRPr lang="en-US" sz="1200" dirty="0"/>
           </a:p>
         </p:txBody>
       </p:sp>
@@ -3214,8 +3159,8 @@
         </p:nvSpPr>
         <p:spPr>
           <a:xfrm>
-            <a:off x="548640" y="1389888"/>
-            <a:ext cx="3694176" cy="2926080"/>
+            <a:off x="548640" y="1417320"/>
+            <a:ext cx="8046720" cy="3296412"/>
           </a:xfrm>
           <a:prstGeom prst="rect">
             <a:avLst/>
@@ -3224,136 +3169,98 @@
           <a:ln/>
         </p:spPr>
         <p:txBody>
-          <a:bodyPr wrap="square" rtlCol="0" anchor="ctr"/>
+          <a:bodyPr wrap="square" rtlCol="0" anchor="t"/>
           <a:lstStyle/>
           <a:p>
-            <a:pPr indent="0" marL="0">
-              <a:buNone/>
-            </a:pPr>
-            <a:r>
-              <a:rPr lang="en-US" sz="1100" dirty="0">
+            <a:pPr algn="l" indent="0" marL="0">
+              <a:buNone/>
+            </a:pPr>
+            <a:r>
+              <a:rPr lang="en-US" sz="1600" dirty="0">
                 <a:solidFill>
-                  <a:srgbClr val="1E293B"/>
+                  <a:srgbClr val="2D2D3A"/>
                 </a:solidFill>
-                <a:latin typeface="Calibri" pitchFamily="34" charset="0"/>
-                <a:ea typeface="Calibri" pitchFamily="34" charset="-122"/>
-                <a:cs typeface="Calibri" pitchFamily="34" charset="-120"/>
+                <a:latin typeface="Times New Roman" pitchFamily="34" charset="0"/>
+                <a:ea typeface="Times New Roman" pitchFamily="34" charset="-122"/>
+                <a:cs typeface="Times New Roman" pitchFamily="34" charset="-120"/>
               </a:rPr>
-              <a:t>Чтобы злоумышленники не завалили базу запросами и не перегрузили СУБД, на бэкенде включен `express-rate-limit`. Ограничение: максимум 150 запросов в 1 минуту с одного IP-адреса. Для роутов отправки SMS-кодов лимит еще жестче: 3 запроса в минуту.</a:t>
-            </a:r>
-            <a:endParaRPr lang="en-US" sz="1100" dirty="0"/>
-          </a:p>
-        </p:txBody>
-      </p:sp>
-      <p:sp>
-        <p:nvSpPr>
-          <p:cNvPr id="6" name="Shape 4"/>
-          <p:cNvSpPr/>
-          <p:nvPr/>
-        </p:nvSpPr>
-        <p:spPr>
-          <a:xfrm>
-            <a:off x="4681728" y="822960"/>
-            <a:ext cx="4078224" cy="4119372"/>
-          </a:xfrm>
-          <a:prstGeom prst="roundRect">
-            <a:avLst>
-              <a:gd name="adj" fmla="val 2242"/>
-            </a:avLst>
-          </a:prstGeom>
-          <a:solidFill>
-            <a:srgbClr val="D1FAE5"/>
-          </a:solidFill>
-          <a:ln w="12700">
-            <a:solidFill>
-              <a:srgbClr val="D1FAE5"/>
-            </a:solidFill>
-            <a:prstDash val="solid"/>
-          </a:ln>
-          <a:effectLst>
-            <a:outerShdw sx="100000" sy="100000" kx="0" ky="0" algn="bl" rotWithShape="0" blurRad="88900" dist="25400" dir="2700000">
-              <a:srgbClr val="000000">
-                <a:alpha val="9000"/>
-              </a:srgbClr>
-            </a:outerShdw>
-          </a:effectLst>
-        </p:spPr>
-      </p:sp>
-      <p:sp>
-        <p:nvSpPr>
-          <p:cNvPr id="7" name="Text 5"/>
-          <p:cNvSpPr/>
-          <p:nvPr/>
-        </p:nvSpPr>
-        <p:spPr>
-          <a:xfrm>
-            <a:off x="4846320" y="932688"/>
-            <a:ext cx="3749040" cy="365760"/>
-          </a:xfrm>
-          <a:prstGeom prst="rect">
-            <a:avLst/>
-          </a:prstGeom>
-          <a:noFill/>
-          <a:ln/>
-        </p:spPr>
-        <p:txBody>
-          <a:bodyPr wrap="square" rtlCol="0" anchor="ctr"/>
-          <a:lstStyle/>
-          <a:p>
-            <a:pPr indent="0" marL="0">
-              <a:buNone/>
-            </a:pPr>
-            <a:r>
-              <a:rPr lang="en-US" sz="1300" b="1" dirty="0">
+              <a:t>Если при нажатии кнопки 'Создать тикет' слать запрос напрямую в 1С по HTTP REST: при сбое связи, перегрузке или плановом перезапуске 1С клиент получит ошибку 500, а тикет будет потерян. Это недопустимо для бизнес-системы.</a:t>
+            </a:r>
+            <a:endParaRPr lang="en-US" sz="1600" dirty="0"/>
+          </a:p>
+          <a:p>
+            <a:pPr algn="l" indent="0" marL="0">
+              <a:buNone/>
+            </a:pPr>
+            <a:endParaRPr lang="en-US" sz="1600" dirty="0"/>
+          </a:p>
+          <a:p>
+            <a:pPr algn="l" indent="0" marL="0">
+              <a:buNone/>
+            </a:pPr>
+            <a:r>
+              <a:rPr lang="en-US" sz="1600" dirty="0">
                 <a:solidFill>
-                  <a:srgbClr val="0F1E36"/>
+                  <a:srgbClr val="2D2D3A"/>
                 </a:solidFill>
-                <a:latin typeface="Cambria" pitchFamily="34" charset="0"/>
-                <a:ea typeface="Cambria" pitchFamily="34" charset="-122"/>
-                <a:cs typeface="Cambria" pitchFamily="34" charset="-120"/>
+                <a:latin typeface="Times New Roman" pitchFamily="34" charset="0"/>
+                <a:ea typeface="Times New Roman" pitchFamily="34" charset="-122"/>
+                <a:cs typeface="Times New Roman" pitchFamily="34" charset="-120"/>
               </a:rPr>
-              <a:t>Cross-Origin Resource Sharing (CORS)</a:t>
-            </a:r>
-            <a:endParaRPr lang="en-US" sz="1300" dirty="0"/>
-          </a:p>
-        </p:txBody>
-      </p:sp>
-      <p:sp>
-        <p:nvSpPr>
-          <p:cNvPr id="8" name="Text 6"/>
-          <p:cNvSpPr/>
-          <p:nvPr/>
-        </p:nvSpPr>
-        <p:spPr>
-          <a:xfrm>
-            <a:off x="4846320" y="1389888"/>
-            <a:ext cx="3749040" cy="2926080"/>
-          </a:xfrm>
-          <a:prstGeom prst="rect">
-            <a:avLst/>
-          </a:prstGeom>
-          <a:noFill/>
-          <a:ln/>
-        </p:spPr>
-        <p:txBody>
-          <a:bodyPr wrap="square" rtlCol="0" anchor="ctr"/>
-          <a:lstStyle/>
-          <a:p>
-            <a:pPr indent="0" marL="0">
-              <a:buNone/>
-            </a:pPr>
-            <a:r>
-              <a:rPr lang="en-US" sz="1100" dirty="0">
+              <a:t>Асинхронное решение Outbox:</a:t>
+            </a:r>
+            <a:endParaRPr lang="en-US" sz="1600" dirty="0"/>
+          </a:p>
+          <a:p>
+            <a:pPr algn="l" indent="0" marL="0">
+              <a:buNone/>
+            </a:pPr>
+            <a:r>
+              <a:rPr lang="en-US" sz="1600" dirty="0">
                 <a:solidFill>
-                  <a:srgbClr val="1E293B"/>
+                  <a:srgbClr val="2D2D3A"/>
                 </a:solidFill>
-                <a:latin typeface="Calibri" pitchFamily="34" charset="0"/>
-                <a:ea typeface="Calibri" pitchFamily="34" charset="-122"/>
-                <a:cs typeface="Calibri" pitchFamily="34" charset="-120"/>
+                <a:latin typeface="Times New Roman" pitchFamily="34" charset="0"/>
+                <a:ea typeface="Times New Roman" pitchFamily="34" charset="-122"/>
+                <a:cs typeface="Times New Roman" pitchFamily="34" charset="-120"/>
               </a:rPr>
-              <a:t>Бэкенд принимает запросы только со строго разрешенного списка доменов (White List), прописанных в переменной `CORS_ALLOWED_ORIGINS`. Попытки отправки AJAX-запросов со сторонних вредоносных фишинговых сайтов блокируются на уровне браузера.</a:t>
-            </a:r>
-            <a:endParaRPr lang="en-US" sz="1100" dirty="0"/>
+              <a:t>1. Тикет и событие в таблицу `outbox` пишутся в локальный Postgres в рамках одной ACID транзакции.</a:t>
+            </a:r>
+            <a:endParaRPr lang="en-US" sz="1600" dirty="0"/>
+          </a:p>
+          <a:p>
+            <a:pPr algn="l" indent="0" marL="0">
+              <a:buNone/>
+            </a:pPr>
+            <a:r>
+              <a:rPr lang="en-US" sz="1600" dirty="0">
+                <a:solidFill>
+                  <a:srgbClr val="2D2D3A"/>
+                </a:solidFill>
+                <a:latin typeface="Times New Roman" pitchFamily="34" charset="0"/>
+                <a:ea typeface="Times New Roman" pitchFamily="34" charset="-122"/>
+                <a:cs typeface="Times New Roman" pitchFamily="34" charset="-120"/>
+              </a:rPr>
+              <a:t>2. Фоновый воркер Node.js раз в 5с шлет события в симулятор 1С.</a:t>
+            </a:r>
+            <a:endParaRPr lang="en-US" sz="1600" dirty="0"/>
+          </a:p>
+          <a:p>
+            <a:pPr algn="l" indent="0" marL="0">
+              <a:buNone/>
+            </a:pPr>
+            <a:r>
+              <a:rPr lang="en-US" sz="1600" dirty="0">
+                <a:solidFill>
+                  <a:srgbClr val="2D2D3A"/>
+                </a:solidFill>
+                <a:latin typeface="Times New Roman" pitchFamily="34" charset="0"/>
+                <a:ea typeface="Times New Roman" pitchFamily="34" charset="-122"/>
+                <a:cs typeface="Times New Roman" pitchFamily="34" charset="-120"/>
+              </a:rPr>
+              <a:t>3. При успехе ставит статус `processed`. При сбое повторяет попытку с задержкой.</a:t>
+            </a:r>
+            <a:endParaRPr lang="en-US" sz="1600" dirty="0"/>
           </a:p>
         </p:txBody>
       </p:sp>
@@ -3414,17 +3321,17 @@
               <a:buNone/>
             </a:pPr>
             <a:r>
-              <a:rPr lang="en-US" sz="2000" b="1" dirty="0">
+              <a:rPr lang="en-US" sz="1600" b="1" dirty="0">
                 <a:solidFill>
-                  <a:srgbClr val="0F1E36"/>
+                  <a:srgbClr val="1A1A2E"/>
                 </a:solidFill>
-                <a:latin typeface="Cambria" pitchFamily="34" charset="0"/>
-                <a:ea typeface="Cambria" pitchFamily="34" charset="-122"/>
-                <a:cs typeface="Cambria" pitchFamily="34" charset="-120"/>
+                <a:latin typeface="Georgia" pitchFamily="34" charset="0"/>
+                <a:ea typeface="Georgia" pitchFamily="34" charset="-122"/>
+                <a:cs typeface="Georgia" pitchFamily="34" charset="-120"/>
               </a:rPr>
-              <a:t>Гибкость и заменяемость интерфейсов</a:t>
-            </a:r>
-            <a:endParaRPr lang="en-US" sz="2000" dirty="0"/>
+              <a:t>Защита стыков: CORS, Rate Limiting и Валидация</a:t>
+            </a:r>
+            <a:endParaRPr lang="en-US" sz="1600" dirty="0"/>
           </a:p>
         </p:txBody>
       </p:sp>
@@ -3437,26 +3344,26 @@
         <p:spPr>
           <a:xfrm>
             <a:off x="384048" y="822960"/>
-            <a:ext cx="4023360" cy="4119372"/>
+            <a:ext cx="8375904" cy="4119372"/>
           </a:xfrm>
           <a:prstGeom prst="roundRect">
             <a:avLst>
-              <a:gd name="adj" fmla="val 2273"/>
+              <a:gd name="adj" fmla="val 2220"/>
             </a:avLst>
           </a:prstGeom>
           <a:solidFill>
-            <a:srgbClr val="FFF7ED"/>
+            <a:srgbClr val="F8F4F0"/>
           </a:solidFill>
           <a:ln w="12700">
             <a:solidFill>
-              <a:srgbClr val="FFF7ED"/>
+              <a:srgbClr val="EFEAE3"/>
             </a:solidFill>
             <a:prstDash val="solid"/>
           </a:ln>
           <a:effectLst>
-            <a:outerShdw sx="100000" sy="100000" kx="0" ky="0" algn="bl" rotWithShape="0" blurRad="88900" dist="25400" dir="2700000">
+            <a:outerShdw sx="100000" sy="100000" kx="0" ky="0" algn="bl" rotWithShape="0" blurRad="152400" dist="38100" dir="2700000">
               <a:srgbClr val="000000">
-                <a:alpha val="9000"/>
+                <a:alpha val="12000"/>
               </a:srgbClr>
             </a:outerShdw>
           </a:effectLst>
@@ -3471,7 +3378,7 @@
         <p:spPr>
           <a:xfrm>
             <a:off x="548640" y="932688"/>
-            <a:ext cx="3694176" cy="365760"/>
+            <a:ext cx="8046720" cy="411480"/>
           </a:xfrm>
           <a:prstGeom prst="rect">
             <a:avLst/>
@@ -3487,17 +3394,17 @@
               <a:buNone/>
             </a:pPr>
             <a:r>
-              <a:rPr lang="en-US" sz="1300" b="1" dirty="0">
+              <a:rPr lang="en-US" sz="1200" b="1" dirty="0">
                 <a:solidFill>
-                  <a:srgbClr val="0F1E36"/>
+                  <a:srgbClr val="1A1A2E"/>
                 </a:solidFill>
                 <a:latin typeface="Cambria" pitchFamily="34" charset="0"/>
                 <a:ea typeface="Cambria" pitchFamily="34" charset="-122"/>
                 <a:cs typeface="Cambria" pitchFamily="34" charset="-120"/>
               </a:rPr>
-              <a:t>Замена S3-провайдера за 1 минуту</a:t>
-            </a:r>
-            <a:endParaRPr lang="en-US" sz="1300" dirty="0"/>
+              <a:t>Ограничение запросов и контроль источников</a:t>
+            </a:r>
+            <a:endParaRPr lang="en-US" sz="1200" dirty="0"/>
           </a:p>
         </p:txBody>
       </p:sp>
@@ -3509,8 +3416,8 @@
         </p:nvSpPr>
         <p:spPr>
           <a:xfrm>
-            <a:off x="548640" y="1389888"/>
-            <a:ext cx="3694176" cy="2926080"/>
+            <a:off x="548640" y="1417320"/>
+            <a:ext cx="8046720" cy="3296412"/>
           </a:xfrm>
           <a:prstGeom prst="rect">
             <a:avLst/>
@@ -3519,136 +3426,81 @@
           <a:ln/>
         </p:spPr>
         <p:txBody>
-          <a:bodyPr wrap="square" rtlCol="0" anchor="ctr"/>
+          <a:bodyPr wrap="square" rtlCol="0" anchor="t"/>
           <a:lstStyle/>
           <a:p>
-            <a:pPr indent="0" marL="0">
-              <a:buNone/>
-            </a:pPr>
-            <a:r>
-              <a:rPr lang="en-US" sz="1100" dirty="0">
+            <a:pPr algn="l" indent="0" marL="0">
+              <a:buNone/>
+            </a:pPr>
+            <a:r>
+              <a:rPr lang="en-US" sz="1600" dirty="0">
                 <a:solidFill>
-                  <a:srgbClr val="1E293B"/>
+                  <a:srgbClr val="2D2D3A"/>
                 </a:solidFill>
-                <a:latin typeface="Calibri" pitchFamily="34" charset="0"/>
-                <a:ea typeface="Calibri" pitchFamily="34" charset="-122"/>
-                <a:cs typeface="Calibri" pitchFamily="34" charset="-120"/>
+                <a:latin typeface="Times New Roman" pitchFamily="34" charset="0"/>
+                <a:ea typeface="Times New Roman" pitchFamily="34" charset="-122"/>
+                <a:cs typeface="Times New Roman" pitchFamily="34" charset="-120"/>
               </a:rPr>
-              <a:t>Поскольку загрузка файлов спроектирована по стандартному протоколу AWS S3 API, мы можем заменить локальный контейнер MinIO на коммерческое Яндекс.Облако (Yandex Object Storage) без изменения единой строчки кода бэкенда — просто изменив `S3_ENDPOINT` в `.env`.</a:t>
-            </a:r>
-            <a:endParaRPr lang="en-US" sz="1100" dirty="0"/>
-          </a:p>
-        </p:txBody>
-      </p:sp>
-      <p:sp>
-        <p:nvSpPr>
-          <p:cNvPr id="6" name="Shape 4"/>
-          <p:cNvSpPr/>
-          <p:nvPr/>
-        </p:nvSpPr>
-        <p:spPr>
-          <a:xfrm>
-            <a:off x="4681728" y="822960"/>
-            <a:ext cx="4078224" cy="4119372"/>
-          </a:xfrm>
-          <a:prstGeom prst="roundRect">
-            <a:avLst>
-              <a:gd name="adj" fmla="val 2242"/>
-            </a:avLst>
-          </a:prstGeom>
-          <a:solidFill>
-            <a:srgbClr val="D1FAE5"/>
-          </a:solidFill>
-          <a:ln w="12700">
-            <a:solidFill>
-              <a:srgbClr val="D1FAE5"/>
-            </a:solidFill>
-            <a:prstDash val="solid"/>
-          </a:ln>
-          <a:effectLst>
-            <a:outerShdw sx="100000" sy="100000" kx="0" ky="0" algn="bl" rotWithShape="0" blurRad="88900" dist="25400" dir="2700000">
-              <a:srgbClr val="000000">
-                <a:alpha val="9000"/>
-              </a:srgbClr>
-            </a:outerShdw>
-          </a:effectLst>
-        </p:spPr>
-      </p:sp>
-      <p:sp>
-        <p:nvSpPr>
-          <p:cNvPr id="7" name="Text 5"/>
-          <p:cNvSpPr/>
-          <p:nvPr/>
-        </p:nvSpPr>
-        <p:spPr>
-          <a:xfrm>
-            <a:off x="4846320" y="932688"/>
-            <a:ext cx="3749040" cy="365760"/>
-          </a:xfrm>
-          <a:prstGeom prst="rect">
-            <a:avLst/>
-          </a:prstGeom>
-          <a:noFill/>
-          <a:ln/>
-        </p:spPr>
-        <p:txBody>
-          <a:bodyPr wrap="square" rtlCol="0" anchor="ctr"/>
-          <a:lstStyle/>
-          <a:p>
-            <a:pPr indent="0" marL="0">
-              <a:buNone/>
-            </a:pPr>
-            <a:r>
-              <a:rPr lang="en-US" sz="1300" b="1" dirty="0">
+              <a:t>Rate Limiting (Защита от DOS):</a:t>
+            </a:r>
+            <a:endParaRPr lang="en-US" sz="1600" dirty="0"/>
+          </a:p>
+          <a:p>
+            <a:pPr algn="l" indent="0" marL="0">
+              <a:buNone/>
+            </a:pPr>
+            <a:r>
+              <a:rPr lang="en-US" sz="1600" dirty="0">
                 <a:solidFill>
-                  <a:srgbClr val="0F1E36"/>
+                  <a:srgbClr val="2D2D3A"/>
                 </a:solidFill>
-                <a:latin typeface="Cambria" pitchFamily="34" charset="0"/>
-                <a:ea typeface="Cambria" pitchFamily="34" charset="-122"/>
-                <a:cs typeface="Cambria" pitchFamily="34" charset="-120"/>
+                <a:latin typeface="Times New Roman" pitchFamily="34" charset="0"/>
+                <a:ea typeface="Times New Roman" pitchFamily="34" charset="-122"/>
+                <a:cs typeface="Times New Roman" pitchFamily="34" charset="-120"/>
               </a:rPr>
-              <a:t>Масштабирование бэкенда</a:t>
-            </a:r>
-            <a:endParaRPr lang="en-US" sz="1300" dirty="0"/>
-          </a:p>
-        </p:txBody>
-      </p:sp>
-      <p:sp>
-        <p:nvSpPr>
-          <p:cNvPr id="8" name="Text 6"/>
-          <p:cNvSpPr/>
-          <p:nvPr/>
-        </p:nvSpPr>
-        <p:spPr>
-          <a:xfrm>
-            <a:off x="4846320" y="1389888"/>
-            <a:ext cx="3749040" cy="2926080"/>
-          </a:xfrm>
-          <a:prstGeom prst="rect">
-            <a:avLst/>
-          </a:prstGeom>
-          <a:noFill/>
-          <a:ln/>
-        </p:spPr>
-        <p:txBody>
-          <a:bodyPr wrap="square" rtlCol="0" anchor="ctr"/>
-          <a:lstStyle/>
-          <a:p>
-            <a:pPr indent="0" marL="0">
-              <a:buNone/>
-            </a:pPr>
-            <a:r>
-              <a:rPr lang="en-US" sz="1100" dirty="0">
+              <a:t>Чтобы злоумышленники не завалили базу запросами и не перегрузили СУБД, на бэкенде включен `express-rate-limit`. Ограничение: максимум 150 запросов в 1 минуту с одного IP-адреса. Для роутов отправки SMS-кодов лимит еще жестче: 3 запроса в минуту.</a:t>
+            </a:r>
+            <a:endParaRPr lang="en-US" sz="1600" dirty="0"/>
+          </a:p>
+          <a:p>
+            <a:pPr algn="l" indent="0" marL="0">
+              <a:buNone/>
+            </a:pPr>
+            <a:endParaRPr lang="en-US" sz="1600" dirty="0"/>
+          </a:p>
+          <a:p>
+            <a:pPr algn="l" indent="0" marL="0">
+              <a:buNone/>
+            </a:pPr>
+            <a:r>
+              <a:rPr lang="en-US" sz="1600" dirty="0">
                 <a:solidFill>
-                  <a:srgbClr val="1E293B"/>
+                  <a:srgbClr val="2D2D3A"/>
                 </a:solidFill>
-                <a:latin typeface="Calibri" pitchFamily="34" charset="0"/>
-                <a:ea typeface="Calibri" pitchFamily="34" charset="-122"/>
-                <a:cs typeface="Calibri" pitchFamily="34" charset="-120"/>
+                <a:latin typeface="Times New Roman" pitchFamily="34" charset="0"/>
+                <a:ea typeface="Times New Roman" pitchFamily="34" charset="-122"/>
+                <a:cs typeface="Times New Roman" pitchFamily="34" charset="-120"/>
               </a:rPr>
-              <a:t>Так как бэкенд спроектирован по принципу 'Stateless' (состояние сессии не хранится в памяти Node.js, а пишется в СУБД Postgres), мы можем запустить 5 параллельных контейнеров Express за балансировщиком Nginx для распределения нагрузки.</a:t>
-            </a:r>
-            <a:endParaRPr lang="en-US" sz="1100" dirty="0"/>
+              <a:t>Cross-Origin Resource Sharing (CORS):</a:t>
+            </a:r>
+            <a:endParaRPr lang="en-US" sz="1600" dirty="0"/>
+          </a:p>
+          <a:p>
+            <a:pPr algn="l" indent="0" marL="0">
+              <a:buNone/>
+            </a:pPr>
+            <a:r>
+              <a:rPr lang="en-US" sz="1600" dirty="0">
+                <a:solidFill>
+                  <a:srgbClr val="2D2D3A"/>
+                </a:solidFill>
+                <a:latin typeface="Times New Roman" pitchFamily="34" charset="0"/>
+                <a:ea typeface="Times New Roman" pitchFamily="34" charset="-122"/>
+                <a:cs typeface="Times New Roman" pitchFamily="34" charset="-120"/>
+              </a:rPr>
+              <a:t>Бэкенд принимает запросы только со строго разрешенного списка доменов (White List), прописанных в переменной `CORS_ALLOWED_ORIGINS`. Попытки отправки AJAX-запросов со сторонних вредоносных фишинговых сайтов блокируются на уровне браузера.</a:t>
+            </a:r>
+            <a:endParaRPr lang="en-US" sz="1600" dirty="0"/>
           </a:p>
         </p:txBody>
       </p:sp>
@@ -3709,17 +3561,17 @@
               <a:buNone/>
             </a:pPr>
             <a:r>
-              <a:rPr lang="en-US" sz="2000" b="1" dirty="0">
+              <a:rPr lang="en-US" sz="1600" b="1" dirty="0">
                 <a:solidFill>
-                  <a:srgbClr val="0F1E36"/>
+                  <a:srgbClr val="1A1A2E"/>
                 </a:solidFill>
-                <a:latin typeface="Cambria" pitchFamily="34" charset="0"/>
-                <a:ea typeface="Cambria" pitchFamily="34" charset="-122"/>
-                <a:cs typeface="Cambria" pitchFamily="34" charset="-120"/>
+                <a:latin typeface="Georgia" pitchFamily="34" charset="0"/>
+                <a:ea typeface="Georgia" pitchFamily="34" charset="-122"/>
+                <a:cs typeface="Georgia" pitchFamily="34" charset="-120"/>
               </a:rPr>
-              <a:t>Отказоустойчивость интерфейсов и сбои</a:t>
-            </a:r>
-            <a:endParaRPr lang="en-US" sz="2000" dirty="0"/>
+              <a:t>Гибкость и заменяемость интерфейсов</a:t>
+            </a:r>
+            <a:endParaRPr lang="en-US" sz="1600" dirty="0"/>
           </a:p>
         </p:txBody>
       </p:sp>
@@ -3732,26 +3584,26 @@
         <p:spPr>
           <a:xfrm>
             <a:off x="384048" y="822960"/>
-            <a:ext cx="4023360" cy="4119372"/>
+            <a:ext cx="8375904" cy="4119372"/>
           </a:xfrm>
           <a:prstGeom prst="roundRect">
             <a:avLst>
-              <a:gd name="adj" fmla="val 2273"/>
+              <a:gd name="adj" fmla="val 2220"/>
             </a:avLst>
           </a:prstGeom>
           <a:solidFill>
-            <a:srgbClr val="FFF7ED"/>
+            <a:srgbClr val="F8F4F0"/>
           </a:solidFill>
           <a:ln w="12700">
             <a:solidFill>
-              <a:srgbClr val="FFF7ED"/>
+              <a:srgbClr val="EFEAE3"/>
             </a:solidFill>
             <a:prstDash val="solid"/>
           </a:ln>
           <a:effectLst>
-            <a:outerShdw sx="100000" sy="100000" kx="0" ky="0" algn="bl" rotWithShape="0" blurRad="88900" dist="25400" dir="2700000">
+            <a:outerShdw sx="100000" sy="100000" kx="0" ky="0" algn="bl" rotWithShape="0" blurRad="152400" dist="38100" dir="2700000">
               <a:srgbClr val="000000">
-                <a:alpha val="9000"/>
+                <a:alpha val="12000"/>
               </a:srgbClr>
             </a:outerShdw>
           </a:effectLst>
@@ -3766,7 +3618,7 @@
         <p:spPr>
           <a:xfrm>
             <a:off x="548640" y="932688"/>
-            <a:ext cx="3694176" cy="365760"/>
+            <a:ext cx="8046720" cy="411480"/>
           </a:xfrm>
           <a:prstGeom prst="rect">
             <a:avLst/>
@@ -3775,24 +3627,24 @@
           <a:ln/>
         </p:spPr>
         <p:txBody>
-          <a:bodyPr wrap="square" rtlCol="0" anchor="ctr"/>
+          <a:bodyPr wrap="square" rtlCol="0" anchor="t"/>
           <a:lstStyle/>
           <a:p>
-            <a:pPr indent="0" marL="0">
-              <a:buNone/>
-            </a:pPr>
-            <a:r>
-              <a:rPr lang="en-US" sz="1300" b="1" dirty="0">
+            <a:pPr algn="l" indent="0" marL="0">
+              <a:buNone/>
+            </a:pPr>
+            <a:r>
+              <a:rPr lang="en-US" sz="1200" b="1" dirty="0">
                 <a:solidFill>
-                  <a:srgbClr val="0F1E36"/>
+                  <a:srgbClr val="1A1A2E"/>
                 </a:solidFill>
                 <a:latin typeface="Cambria" pitchFamily="34" charset="0"/>
                 <a:ea typeface="Cambria" pitchFamily="34" charset="-122"/>
                 <a:cs typeface="Cambria" pitchFamily="34" charset="-120"/>
               </a:rPr>
-              <a:t>Сбои сетевого подключения (Offline-First WS)</a:t>
-            </a:r>
-            <a:endParaRPr lang="en-US" sz="1300" dirty="0"/>
+              <a:t>Замена S3-провайдера и масштабирование бэкенда</a:t>
+            </a:r>
+            <a:endParaRPr lang="en-US" sz="1200" dirty="0"/>
           </a:p>
         </p:txBody>
       </p:sp>
@@ -3804,8 +3656,8 @@
         </p:nvSpPr>
         <p:spPr>
           <a:xfrm>
-            <a:off x="548640" y="1389888"/>
-            <a:ext cx="3694176" cy="2926080"/>
+            <a:off x="548640" y="1417320"/>
+            <a:ext cx="8046720" cy="3296412"/>
           </a:xfrm>
           <a:prstGeom prst="rect">
             <a:avLst/>
@@ -3814,136 +3666,81 @@
           <a:ln/>
         </p:spPr>
         <p:txBody>
-          <a:bodyPr wrap="square" rtlCol="0" anchor="ctr"/>
+          <a:bodyPr wrap="square" rtlCol="0" anchor="t"/>
           <a:lstStyle/>
           <a:p>
-            <a:pPr indent="0" marL="0">
-              <a:buNone/>
-            </a:pPr>
-            <a:r>
-              <a:rPr lang="en-US" sz="1100" dirty="0">
+            <a:pPr algn="l" indent="0" marL="0">
+              <a:buNone/>
+            </a:pPr>
+            <a:r>
+              <a:rPr lang="en-US" sz="1600" dirty="0">
                 <a:solidFill>
-                  <a:srgbClr val="1E293B"/>
+                  <a:srgbClr val="2D2D3A"/>
                 </a:solidFill>
-                <a:latin typeface="Calibri" pitchFamily="34" charset="0"/>
-                <a:ea typeface="Calibri" pitchFamily="34" charset="-122"/>
-                <a:cs typeface="Calibri" pitchFamily="34" charset="-120"/>
+                <a:latin typeface="Times New Roman" pitchFamily="34" charset="0"/>
+                <a:ea typeface="Times New Roman" pitchFamily="34" charset="-122"/>
+                <a:cs typeface="Times New Roman" pitchFamily="34" charset="-120"/>
               </a:rPr>
-              <a:t>При отсутствии интернета во время отправки сообщений по WebSocket, чат-клиент временно сохраняет сообщение в LocalStorage и включает статус 'Ожидание сети'. После реконнекта сокета сообщения отправляются автоматически с сохранением исходного порядка.</a:t>
-            </a:r>
-            <a:endParaRPr lang="en-US" sz="1100" dirty="0"/>
-          </a:p>
-        </p:txBody>
-      </p:sp>
-      <p:sp>
-        <p:nvSpPr>
-          <p:cNvPr id="6" name="Shape 4"/>
-          <p:cNvSpPr/>
-          <p:nvPr/>
-        </p:nvSpPr>
-        <p:spPr>
-          <a:xfrm>
-            <a:off x="4681728" y="822960"/>
-            <a:ext cx="4078224" cy="4119372"/>
-          </a:xfrm>
-          <a:prstGeom prst="roundRect">
-            <a:avLst>
-              <a:gd name="adj" fmla="val 2242"/>
-            </a:avLst>
-          </a:prstGeom>
-          <a:solidFill>
-            <a:srgbClr val="D1FAE5"/>
-          </a:solidFill>
-          <a:ln w="12700">
-            <a:solidFill>
-              <a:srgbClr val="D1FAE5"/>
-            </a:solidFill>
-            <a:prstDash val="solid"/>
-          </a:ln>
-          <a:effectLst>
-            <a:outerShdw sx="100000" sy="100000" kx="0" ky="0" algn="bl" rotWithShape="0" blurRad="88900" dist="25400" dir="2700000">
-              <a:srgbClr val="000000">
-                <a:alpha val="9000"/>
-              </a:srgbClr>
-            </a:outerShdw>
-          </a:effectLst>
-        </p:spPr>
-      </p:sp>
-      <p:sp>
-        <p:nvSpPr>
-          <p:cNvPr id="7" name="Text 5"/>
-          <p:cNvSpPr/>
-          <p:nvPr/>
-        </p:nvSpPr>
-        <p:spPr>
-          <a:xfrm>
-            <a:off x="4846320" y="932688"/>
-            <a:ext cx="3749040" cy="365760"/>
-          </a:xfrm>
-          <a:prstGeom prst="rect">
-            <a:avLst/>
-          </a:prstGeom>
-          <a:noFill/>
-          <a:ln/>
-        </p:spPr>
-        <p:txBody>
-          <a:bodyPr wrap="square" rtlCol="0" anchor="ctr"/>
-          <a:lstStyle/>
-          <a:p>
-            <a:pPr indent="0" marL="0">
-              <a:buNone/>
-            </a:pPr>
-            <a:r>
-              <a:rPr lang="en-US" sz="1300" b="1" dirty="0">
+              <a:t>Замена S3-провайдера за 1 минуту:</a:t>
+            </a:r>
+            <a:endParaRPr lang="en-US" sz="1600" dirty="0"/>
+          </a:p>
+          <a:p>
+            <a:pPr algn="l" indent="0" marL="0">
+              <a:buNone/>
+            </a:pPr>
+            <a:r>
+              <a:rPr lang="en-US" sz="1600" dirty="0">
                 <a:solidFill>
-                  <a:srgbClr val="0F1E36"/>
+                  <a:srgbClr val="2D2D3A"/>
                 </a:solidFill>
-                <a:latin typeface="Cambria" pitchFamily="34" charset="0"/>
-                <a:ea typeface="Cambria" pitchFamily="34" charset="-122"/>
-                <a:cs typeface="Cambria" pitchFamily="34" charset="-120"/>
+                <a:latin typeface="Times New Roman" pitchFamily="34" charset="0"/>
+                <a:ea typeface="Times New Roman" pitchFamily="34" charset="-122"/>
+                <a:cs typeface="Times New Roman" pitchFamily="34" charset="-120"/>
               </a:rPr>
-              <a:t>Конфликты API (Optimistic Locking)</a:t>
-            </a:r>
-            <a:endParaRPr lang="en-US" sz="1300" dirty="0"/>
-          </a:p>
-        </p:txBody>
-      </p:sp>
-      <p:sp>
-        <p:nvSpPr>
-          <p:cNvPr id="8" name="Text 6"/>
-          <p:cNvSpPr/>
-          <p:nvPr/>
-        </p:nvSpPr>
-        <p:spPr>
-          <a:xfrm>
-            <a:off x="4846320" y="1389888"/>
-            <a:ext cx="3749040" cy="2926080"/>
-          </a:xfrm>
-          <a:prstGeom prst="rect">
-            <a:avLst/>
-          </a:prstGeom>
-          <a:noFill/>
-          <a:ln/>
-        </p:spPr>
-        <p:txBody>
-          <a:bodyPr wrap="square" rtlCol="0" anchor="ctr"/>
-          <a:lstStyle/>
-          <a:p>
-            <a:pPr indent="0" marL="0">
-              <a:buNone/>
-            </a:pPr>
-            <a:r>
-              <a:rPr lang="en-US" sz="1100" dirty="0">
+              <a:t>Поскольку загрузка файлов спроектирована по стандартному протоколу AWS S3 API, мы можем заменить локальный контейнер MinIO на коммерческое Яндекс.Облако (Yandex Object Storage) без изменения единой строчки кода бэкенда — просто изменив `S3_ENDPOINT` в `.env`.</a:t>
+            </a:r>
+            <a:endParaRPr lang="en-US" sz="1600" dirty="0"/>
+          </a:p>
+          <a:p>
+            <a:pPr algn="l" indent="0" marL="0">
+              <a:buNone/>
+            </a:pPr>
+            <a:endParaRPr lang="en-US" sz="1600" dirty="0"/>
+          </a:p>
+          <a:p>
+            <a:pPr algn="l" indent="0" marL="0">
+              <a:buNone/>
+            </a:pPr>
+            <a:r>
+              <a:rPr lang="en-US" sz="1600" dirty="0">
                 <a:solidFill>
-                  <a:srgbClr val="1E293B"/>
+                  <a:srgbClr val="2D2D3A"/>
                 </a:solidFill>
-                <a:latin typeface="Calibri" pitchFamily="34" charset="0"/>
-                <a:ea typeface="Calibri" pitchFamily="34" charset="-122"/>
-                <a:cs typeface="Calibri" pitchFamily="34" charset="-120"/>
+                <a:latin typeface="Times New Roman" pitchFamily="34" charset="0"/>
+                <a:ea typeface="Times New Roman" pitchFamily="34" charset="-122"/>
+                <a:cs typeface="Times New Roman" pitchFamily="34" charset="-120"/>
               </a:rPr>
-              <a:t>Если клиент и менеджер редактируют одно обращение через REST-интерфейс одновременно, бэкенд сверяет поле 'version'. Первая транзакция успешно фиксируется, а второй возвращается код ошибки 409 Conflict с предложением обновить форму.</a:t>
-            </a:r>
-            <a:endParaRPr lang="en-US" sz="1100" dirty="0"/>
+              <a:t>Масштабирование бэкенда:</a:t>
+            </a:r>
+            <a:endParaRPr lang="en-US" sz="1600" dirty="0"/>
+          </a:p>
+          <a:p>
+            <a:pPr algn="l" indent="0" marL="0">
+              <a:buNone/>
+            </a:pPr>
+            <a:r>
+              <a:rPr lang="en-US" sz="1600" dirty="0">
+                <a:solidFill>
+                  <a:srgbClr val="2D2D3A"/>
+                </a:solidFill>
+                <a:latin typeface="Times New Roman" pitchFamily="34" charset="0"/>
+                <a:ea typeface="Times New Roman" pitchFamily="34" charset="-122"/>
+                <a:cs typeface="Times New Roman" pitchFamily="34" charset="-120"/>
+              </a:rPr>
+              <a:t>Так как бэкенд спроектирован по принципу 'Stateless' (состояние сессии не хранится в памяти Node.js, а пишется в СУБД Postgres), мы можем запустить 5 параллельных контейнеров Express за балансировщиком Nginx для распределения нагрузки.</a:t>
+            </a:r>
+            <a:endParaRPr lang="en-US" sz="1600" dirty="0"/>
           </a:p>
         </p:txBody>
       </p:sp>
@@ -4004,17 +3801,17 @@
               <a:buNone/>
             </a:pPr>
             <a:r>
-              <a:rPr lang="en-US" sz="2000" b="1" dirty="0">
+              <a:rPr lang="en-US" sz="1600" b="1" dirty="0">
                 <a:solidFill>
-                  <a:srgbClr val="0F1E36"/>
+                  <a:srgbClr val="1A1A2E"/>
                 </a:solidFill>
-                <a:latin typeface="Cambria" pitchFamily="34" charset="0"/>
-                <a:ea typeface="Cambria" pitchFamily="34" charset="-122"/>
-                <a:cs typeface="Cambria" pitchFamily="34" charset="-120"/>
+                <a:latin typeface="Georgia" pitchFamily="34" charset="0"/>
+                <a:ea typeface="Georgia" pitchFamily="34" charset="-122"/>
+                <a:cs typeface="Georgia" pitchFamily="34" charset="-120"/>
               </a:rPr>
-              <a:t>Выводы по теме</a:t>
-            </a:r>
-            <a:endParaRPr lang="en-US" sz="2000" dirty="0"/>
+              <a:t>Отказоустойчивость интерфейсов и сбои</a:t>
+            </a:r>
+            <a:endParaRPr lang="en-US" sz="1600" dirty="0"/>
           </a:p>
         </p:txBody>
       </p:sp>
@@ -4026,23 +3823,30 @@
         </p:nvSpPr>
         <p:spPr>
           <a:xfrm>
-            <a:off x="384048" y="3918204"/>
-            <a:ext cx="8375904" cy="960120"/>
+            <a:off x="384048" y="822960"/>
+            <a:ext cx="8375904" cy="4119372"/>
           </a:xfrm>
           <a:prstGeom prst="roundRect">
             <a:avLst>
-              <a:gd name="adj" fmla="val 9524"/>
+              <a:gd name="adj" fmla="val 2220"/>
             </a:avLst>
           </a:prstGeom>
           <a:solidFill>
-            <a:srgbClr val="0F1E36"/>
+            <a:srgbClr val="F8F4F0"/>
           </a:solidFill>
           <a:ln w="12700">
             <a:solidFill>
-              <a:srgbClr val="0F1E36"/>
+              <a:srgbClr val="EFEAE3"/>
             </a:solidFill>
             <a:prstDash val="solid"/>
           </a:ln>
+          <a:effectLst>
+            <a:outerShdw sx="100000" sy="100000" kx="0" ky="0" algn="bl" rotWithShape="0" blurRad="152400" dist="38100" dir="2700000">
+              <a:srgbClr val="000000">
+                <a:alpha val="12000"/>
+              </a:srgbClr>
+            </a:outerShdw>
+          </a:effectLst>
         </p:spPr>
       </p:sp>
       <p:sp>
@@ -4053,8 +3857,8 @@
         </p:nvSpPr>
         <p:spPr>
           <a:xfrm>
-            <a:off x="548640" y="3918204"/>
-            <a:ext cx="8046720" cy="960120"/>
+            <a:off x="548640" y="932688"/>
+            <a:ext cx="8046720" cy="411480"/>
           </a:xfrm>
           <a:prstGeom prst="rect">
             <a:avLst/>
@@ -4066,21 +3870,230 @@
           <a:bodyPr wrap="square" rtlCol="0" anchor="ctr"/>
           <a:lstStyle/>
           <a:p>
+            <a:pPr indent="0" marL="0">
+              <a:buNone/>
+            </a:pPr>
+            <a:r>
+              <a:rPr lang="en-US" sz="1200" b="1" dirty="0">
+                <a:solidFill>
+                  <a:srgbClr val="1A1A2E"/>
+                </a:solidFill>
+                <a:latin typeface="Cambria" pitchFamily="34" charset="0"/>
+                <a:ea typeface="Cambria" pitchFamily="34" charset="-122"/>
+                <a:cs typeface="Cambria" pitchFamily="34" charset="-120"/>
+              </a:rPr>
+              <a:t>Сбои сети и конфликты API</a:t>
+            </a:r>
+            <a:endParaRPr lang="en-US" sz="1200" dirty="0"/>
+          </a:p>
+        </p:txBody>
+      </p:sp>
+      <p:sp>
+        <p:nvSpPr>
+          <p:cNvPr id="5" name="Text 3"/>
+          <p:cNvSpPr/>
+          <p:nvPr/>
+        </p:nvSpPr>
+        <p:spPr>
+          <a:xfrm>
+            <a:off x="548640" y="1417320"/>
+            <a:ext cx="8046720" cy="3296412"/>
+          </a:xfrm>
+          <a:prstGeom prst="rect">
+            <a:avLst/>
+          </a:prstGeom>
+          <a:noFill/>
+          <a:ln/>
+        </p:spPr>
+        <p:txBody>
+          <a:bodyPr wrap="square" rtlCol="0" anchor="t"/>
+          <a:lstStyle/>
+          <a:p>
             <a:pPr algn="l" indent="0" marL="0">
               <a:buNone/>
             </a:pPr>
             <a:r>
-              <a:rPr lang="en-US" sz="1200" dirty="0">
+              <a:rPr lang="en-US" sz="1600" dirty="0">
                 <a:solidFill>
-                  <a:srgbClr val="FFFFFF"/>
+                  <a:srgbClr val="2D2D3A"/>
                 </a:solidFill>
-                <a:latin typeface="Calibri" pitchFamily="34" charset="0"/>
-                <a:ea typeface="Calibri" pitchFamily="34" charset="-122"/>
-                <a:cs typeface="Calibri" pitchFamily="34" charset="-120"/>
+                <a:latin typeface="Times New Roman" pitchFamily="34" charset="0"/>
+                <a:ea typeface="Times New Roman" pitchFamily="34" charset="-122"/>
+                <a:cs typeface="Times New Roman" pitchFamily="34" charset="-120"/>
+              </a:rPr>
+              <a:t>Сбои сетевого подключения (Offline-First WS):</a:t>
+            </a:r>
+            <a:endParaRPr lang="en-US" sz="1600" dirty="0"/>
+          </a:p>
+          <a:p>
+            <a:pPr algn="l" indent="0" marL="0">
+              <a:buNone/>
+            </a:pPr>
+            <a:r>
+              <a:rPr lang="en-US" sz="1600" dirty="0">
+                <a:solidFill>
+                  <a:srgbClr val="2D2D3A"/>
+                </a:solidFill>
+                <a:latin typeface="Times New Roman" pitchFamily="34" charset="0"/>
+                <a:ea typeface="Times New Roman" pitchFamily="34" charset="-122"/>
+                <a:cs typeface="Times New Roman" pitchFamily="34" charset="-120"/>
+              </a:rPr>
+              <a:t>При отсутствии интернета во время отправки сообщений по WebSocket, чат-клиент временно сохраняет сообщение в LocalStorage и включает статус 'Ожидание сети'. После реконнекта сокета сообщения отправляются автоматически с сохранением исходного порядка.</a:t>
+            </a:r>
+            <a:endParaRPr lang="en-US" sz="1600" dirty="0"/>
+          </a:p>
+          <a:p>
+            <a:pPr algn="l" indent="0" marL="0">
+              <a:buNone/>
+            </a:pPr>
+            <a:endParaRPr lang="en-US" sz="1600" dirty="0"/>
+          </a:p>
+          <a:p>
+            <a:pPr algn="l" indent="0" marL="0">
+              <a:buNone/>
+            </a:pPr>
+            <a:r>
+              <a:rPr lang="en-US" sz="1600" dirty="0">
+                <a:solidFill>
+                  <a:srgbClr val="2D2D3A"/>
+                </a:solidFill>
+                <a:latin typeface="Times New Roman" pitchFamily="34" charset="0"/>
+                <a:ea typeface="Times New Roman" pitchFamily="34" charset="-122"/>
+                <a:cs typeface="Times New Roman" pitchFamily="34" charset="-120"/>
+              </a:rPr>
+              <a:t>Конфликты API (Optimistic Locking):</a:t>
+            </a:r>
+            <a:endParaRPr lang="en-US" sz="1600" dirty="0"/>
+          </a:p>
+          <a:p>
+            <a:pPr algn="l" indent="0" marL="0">
+              <a:buNone/>
+            </a:pPr>
+            <a:r>
+              <a:rPr lang="en-US" sz="1600" dirty="0">
+                <a:solidFill>
+                  <a:srgbClr val="2D2D3A"/>
+                </a:solidFill>
+                <a:latin typeface="Times New Roman" pitchFamily="34" charset="0"/>
+                <a:ea typeface="Times New Roman" pitchFamily="34" charset="-122"/>
+                <a:cs typeface="Times New Roman" pitchFamily="34" charset="-120"/>
+              </a:rPr>
+              <a:t>Если клиент и менеджер редактируют одно обращение через REST-интерфейс одновременно, бэкенд сверяет поле 'version'. Первая транзакция успешно фиксируется, а второй возвращается код ошибки 409 Conflict с предложением обновить форму.</a:t>
+            </a:r>
+            <a:endParaRPr lang="en-US" sz="1600" dirty="0"/>
+          </a:p>
+        </p:txBody>
+      </p:sp>
+    </p:spTree>
+  </p:cSld>
+  <p:clrMapOvr>
+    <a:masterClrMapping/>
+  </p:clrMapOvr>
+</p:sld>
+</file>
+
+<file path=ppt/slides/slide16.xml><?xml version="1.0" encoding="utf-8"?>
+<p:sld xmlns:a="http://schemas.openxmlformats.org/drawingml/2006/main" xmlns:r="http://schemas.openxmlformats.org/officeDocument/2006/relationships" xmlns:p="http://schemas.openxmlformats.org/presentationml/2006/main">
+  <p:cSld name="Slide 16">
+    <p:bg>
+      <p:bgPr>
+        <a:solidFill>
+          <a:srgbClr val="FFFFFF"/>
+        </a:solidFill>
+      </p:bgPr>
+    </p:bg>
+    <p:spTree>
+      <p:nvGrpSpPr>
+        <p:cNvPr id="1" name=""/>
+        <p:cNvGrpSpPr/>
+        <p:nvPr/>
+      </p:nvGrpSpPr>
+      <p:grpSpPr>
+        <a:xfrm>
+          <a:off x="0" y="0"/>
+          <a:ext cx="0" cy="0"/>
+          <a:chOff x="0" y="0"/>
+          <a:chExt cx="0" cy="0"/>
+        </a:xfrm>
+      </p:grpSpPr>
+      <p:sp>
+        <p:nvSpPr>
+          <p:cNvPr id="2" name="Text 0"/>
+          <p:cNvSpPr/>
+          <p:nvPr/>
+        </p:nvSpPr>
+        <p:spPr>
+          <a:xfrm>
+            <a:off x="384048" y="164592"/>
+            <a:ext cx="8375904" cy="548640"/>
+          </a:xfrm>
+          <a:prstGeom prst="rect">
+            <a:avLst/>
+          </a:prstGeom>
+          <a:noFill/>
+          <a:ln/>
+        </p:spPr>
+        <p:txBody>
+          <a:bodyPr wrap="square" rtlCol="0" anchor="b"/>
+          <a:lstStyle/>
+          <a:p>
+            <a:pPr algn="l" indent="0" marL="0">
+              <a:buNone/>
+            </a:pPr>
+            <a:r>
+              <a:rPr lang="en-US" sz="1600" b="1" dirty="0">
+                <a:solidFill>
+                  <a:srgbClr val="1A1A2E"/>
+                </a:solidFill>
+                <a:latin typeface="Georgia" pitchFamily="34" charset="0"/>
+                <a:ea typeface="Georgia" pitchFamily="34" charset="-122"/>
+                <a:cs typeface="Georgia" pitchFamily="34" charset="-120"/>
+              </a:rPr>
+              <a:t>Выводы по теме</a:t>
+            </a:r>
+            <a:endParaRPr lang="en-US" sz="1600" dirty="0"/>
+          </a:p>
+        </p:txBody>
+      </p:sp>
+      <p:sp>
+        <p:nvSpPr>
+          <p:cNvPr id="3" name="Text 1"/>
+          <p:cNvSpPr/>
+          <p:nvPr/>
+        </p:nvSpPr>
+        <p:spPr>
+          <a:xfrm>
+            <a:off x="475488" y="868680"/>
+            <a:ext cx="8193024" cy="4027932"/>
+          </a:xfrm>
+          <a:prstGeom prst="rect">
+            <a:avLst/>
+          </a:prstGeom>
+          <a:noFill/>
+          <a:ln/>
+        </p:spPr>
+        <p:txBody>
+          <a:bodyPr wrap="square" rtlCol="0" anchor="t"/>
+          <a:lstStyle/>
+          <a:p>
+            <a:pPr algn="l" indent="0" marL="0">
+              <a:lnSpc>
+                <a:spcPts val="3200"/>
+              </a:lnSpc>
+              <a:buNone/>
+            </a:pPr>
+            <a:r>
+              <a:rPr lang="en-US" sz="1800" dirty="0">
+                <a:solidFill>
+                  <a:srgbClr val="2D2D3A"/>
+                </a:solidFill>
+                <a:latin typeface="Times New Roman" pitchFamily="34" charset="0"/>
+                <a:ea typeface="Times New Roman" pitchFamily="34" charset="-122"/>
+                <a:cs typeface="Times New Roman" pitchFamily="34" charset="-120"/>
               </a:rPr>
               <a:t>Проектирование интерфейсов подсистем является центральным ядром архитектуры «Личного кабинета». Благодаря четкому разделению на 6 подсистем и стандартизации их контрактов (REST JSON, WebSocket events, S3 API), нам удалось построить отказоустойчивую, безопасную и слабосвязанную систему. Асинхронная интеграция с 1С через Outbox гарантирует сохранность заявок клиентов даже при падении или сбоях учетной базы предприятия.</a:t>
             </a:r>
-            <a:endParaRPr lang="en-US" sz="1200" dirty="0"/>
+            <a:endParaRPr lang="en-US" sz="1800" dirty="0"/>
           </a:p>
         </p:txBody>
       </p:sp>
@@ -4141,17 +4154,17 @@
               <a:buNone/>
             </a:pPr>
             <a:r>
-              <a:rPr lang="en-US" sz="2000" b="1" dirty="0">
+              <a:rPr lang="en-US" sz="1600" b="1" dirty="0">
                 <a:solidFill>
-                  <a:srgbClr val="0F1E36"/>
+                  <a:srgbClr val="1A1A2E"/>
                 </a:solidFill>
-                <a:latin typeface="Cambria" pitchFamily="34" charset="0"/>
-                <a:ea typeface="Cambria" pitchFamily="34" charset="-122"/>
-                <a:cs typeface="Cambria" pitchFamily="34" charset="-120"/>
+                <a:latin typeface="Georgia" pitchFamily="34" charset="0"/>
+                <a:ea typeface="Georgia" pitchFamily="34" charset="-122"/>
+                <a:cs typeface="Georgia" pitchFamily="34" charset="-120"/>
               </a:rPr>
-              <a:t>Что такое интерфейс подсистемы?</a:t>
-            </a:r>
-            <a:endParaRPr lang="en-US" sz="2000" dirty="0"/>
+              <a:t>Постановка задачи моделирования</a:t>
+            </a:r>
+            <a:endParaRPr lang="en-US" sz="1600" dirty="0"/>
           </a:p>
         </p:txBody>
       </p:sp>
@@ -4164,26 +4177,26 @@
         <p:spPr>
           <a:xfrm>
             <a:off x="384048" y="822960"/>
-            <a:ext cx="4023360" cy="4119372"/>
+            <a:ext cx="8375904" cy="4119372"/>
           </a:xfrm>
           <a:prstGeom prst="roundRect">
             <a:avLst>
-              <a:gd name="adj" fmla="val 2273"/>
+              <a:gd name="adj" fmla="val 2220"/>
             </a:avLst>
           </a:prstGeom>
           <a:solidFill>
-            <a:srgbClr val="FFF7ED"/>
+            <a:srgbClr val="F8F4F0"/>
           </a:solidFill>
           <a:ln w="12700">
             <a:solidFill>
-              <a:srgbClr val="FFF7ED"/>
+              <a:srgbClr val="EFEAE3"/>
             </a:solidFill>
             <a:prstDash val="solid"/>
           </a:ln>
           <a:effectLst>
-            <a:outerShdw sx="100000" sy="100000" kx="0" ky="0" algn="bl" rotWithShape="0" blurRad="88900" dist="25400" dir="2700000">
+            <a:outerShdw sx="100000" sy="100000" kx="0" ky="0" algn="bl" rotWithShape="0" blurRad="152400" dist="38100" dir="2700000">
               <a:srgbClr val="000000">
-                <a:alpha val="9000"/>
+                <a:alpha val="12000"/>
               </a:srgbClr>
             </a:outerShdw>
           </a:effectLst>
@@ -4198,7 +4211,7 @@
         <p:spPr>
           <a:xfrm>
             <a:off x="548640" y="932688"/>
-            <a:ext cx="3694176" cy="365760"/>
+            <a:ext cx="8046720" cy="411480"/>
           </a:xfrm>
           <a:prstGeom prst="rect">
             <a:avLst/>
@@ -4214,17 +4227,17 @@
               <a:buNone/>
             </a:pPr>
             <a:r>
-              <a:rPr lang="en-US" sz="1300" b="1" dirty="0">
+              <a:rPr lang="en-US" sz="1200" b="1" dirty="0">
                 <a:solidFill>
-                  <a:srgbClr val="0F1E36"/>
+                  <a:srgbClr val="1A1A2E"/>
                 </a:solidFill>
                 <a:latin typeface="Cambria" pitchFamily="34" charset="0"/>
                 <a:ea typeface="Cambria" pitchFamily="34" charset="-122"/>
                 <a:cs typeface="Cambria" pitchFamily="34" charset="-120"/>
               </a:rPr>
-              <a:t>Понятие интерфейса-контракта</a:t>
-            </a:r>
-            <a:endParaRPr lang="en-US" sz="1300" dirty="0"/>
+              <a:t>Постановка практической задачи</a:t>
+            </a:r>
+            <a:endParaRPr lang="en-US" sz="1200" dirty="0"/>
           </a:p>
         </p:txBody>
       </p:sp>
@@ -4236,8 +4249,8 @@
         </p:nvSpPr>
         <p:spPr>
           <a:xfrm>
-            <a:off x="548640" y="1389888"/>
-            <a:ext cx="3694176" cy="2926080"/>
+            <a:off x="548640" y="1417320"/>
+            <a:ext cx="8046720" cy="3296412"/>
           </a:xfrm>
           <a:prstGeom prst="rect">
             <a:avLst/>
@@ -4246,173 +4259,64 @@
           <a:ln/>
         </p:spPr>
         <p:txBody>
-          <a:bodyPr wrap="square" rtlCol="0" anchor="ctr"/>
+          <a:bodyPr wrap="square" rtlCol="0" anchor="t"/>
           <a:lstStyle/>
           <a:p>
-            <a:pPr indent="0" marL="0">
-              <a:buNone/>
-            </a:pPr>
-            <a:r>
-              <a:rPr lang="en-US" sz="1150" dirty="0">
+            <a:pPr algn="l" indent="0" marL="0">
+              <a:buNone/>
+            </a:pPr>
+            <a:r>
+              <a:rPr lang="en-US" sz="1600" dirty="0">
                 <a:solidFill>
-                  <a:srgbClr val="1E293B"/>
+                  <a:srgbClr val="2D2D3A"/>
                 </a:solidFill>
-                <a:latin typeface="Calibri" pitchFamily="34" charset="0"/>
-                <a:ea typeface="Calibri" pitchFamily="34" charset="-122"/>
-                <a:cs typeface="Calibri" pitchFamily="34" charset="-120"/>
+                <a:latin typeface="Times New Roman" pitchFamily="34" charset="0"/>
+                <a:ea typeface="Times New Roman" pitchFamily="34" charset="-122"/>
+                <a:cs typeface="Times New Roman" pitchFamily="34" charset="-120"/>
               </a:rPr>
-              <a:t>Интерфейс — это четко определенная граница взаимодействия (стык) между независимыми частями системы. Он выступает в роли контракта: одна сторона обязуется предоставить данные строго определенного формата, а вторая — принять их.</a:t>
-            </a:r>
-            <a:endParaRPr lang="en-US" sz="1150" dirty="0"/>
-          </a:p>
-        </p:txBody>
-      </p:sp>
-      <p:sp>
-        <p:nvSpPr>
-          <p:cNvPr id="6" name="Shape 4"/>
-          <p:cNvSpPr/>
-          <p:nvPr/>
-        </p:nvSpPr>
-        <p:spPr>
-          <a:xfrm>
-            <a:off x="4681728" y="822960"/>
-            <a:ext cx="4078224" cy="4119372"/>
-          </a:xfrm>
-          <a:prstGeom prst="roundRect">
-            <a:avLst>
-              <a:gd name="adj" fmla="val 2242"/>
-            </a:avLst>
-          </a:prstGeom>
-          <a:solidFill>
-            <a:srgbClr val="D1FAE5"/>
-          </a:solidFill>
-          <a:ln w="12700">
-            <a:solidFill>
-              <a:srgbClr val="D1FAE5"/>
-            </a:solidFill>
-            <a:prstDash val="solid"/>
-          </a:ln>
-          <a:effectLst>
-            <a:outerShdw sx="100000" sy="100000" kx="0" ky="0" algn="bl" rotWithShape="0" blurRad="88900" dist="25400" dir="2700000">
-              <a:srgbClr val="000000">
-                <a:alpha val="9000"/>
-              </a:srgbClr>
-            </a:outerShdw>
-          </a:effectLst>
-        </p:spPr>
-      </p:sp>
-      <p:sp>
-        <p:nvSpPr>
-          <p:cNvPr id="7" name="Text 5"/>
-          <p:cNvSpPr/>
-          <p:nvPr/>
-        </p:nvSpPr>
-        <p:spPr>
-          <a:xfrm>
-            <a:off x="4846320" y="932688"/>
-            <a:ext cx="3749040" cy="365760"/>
-          </a:xfrm>
-          <a:prstGeom prst="rect">
-            <a:avLst/>
-          </a:prstGeom>
-          <a:noFill/>
-          <a:ln/>
-        </p:spPr>
-        <p:txBody>
-          <a:bodyPr wrap="square" rtlCol="0" anchor="ctr"/>
-          <a:lstStyle/>
-          <a:p>
-            <a:pPr indent="0" marL="0">
-              <a:buNone/>
-            </a:pPr>
-            <a:r>
-              <a:rPr lang="en-US" sz="1300" b="1" dirty="0">
+              <a:t>• Обеспечить стабильное взаимодействие Frontend, Backend, двух баз PostgreSQL, MinIO и внешней системы 1С.</a:t>
+            </a:r>
+            <a:endParaRPr lang="en-US" sz="1600" dirty="0"/>
+          </a:p>
+          <a:p>
+            <a:pPr algn="l" indent="0" marL="0">
+              <a:buNone/>
+            </a:pPr>
+            <a:endParaRPr lang="en-US" sz="1600" dirty="0"/>
+          </a:p>
+          <a:p>
+            <a:pPr algn="l" indent="0" marL="0">
+              <a:buNone/>
+            </a:pPr>
+            <a:r>
+              <a:rPr lang="en-US" sz="1600" dirty="0">
                 <a:solidFill>
-                  <a:srgbClr val="0F1E36"/>
+                  <a:srgbClr val="2D2D3A"/>
                 </a:solidFill>
-                <a:latin typeface="Cambria" pitchFamily="34" charset="0"/>
-                <a:ea typeface="Cambria" pitchFamily="34" charset="-122"/>
-                <a:cs typeface="Cambria" pitchFamily="34" charset="-120"/>
+                <a:latin typeface="Times New Roman" pitchFamily="34" charset="0"/>
+                <a:ea typeface="Times New Roman" pitchFamily="34" charset="-122"/>
+                <a:cs typeface="Times New Roman" pitchFamily="34" charset="-120"/>
               </a:rPr>
-              <a:t>Зачем проектировать интерфейсы?</a:t>
-            </a:r>
-            <a:endParaRPr lang="en-US" sz="1300" dirty="0"/>
-          </a:p>
-        </p:txBody>
-      </p:sp>
-      <p:sp>
-        <p:nvSpPr>
-          <p:cNvPr id="8" name="Text 6"/>
-          <p:cNvSpPr/>
-          <p:nvPr/>
-        </p:nvSpPr>
-        <p:spPr>
-          <a:xfrm>
-            <a:off x="4846320" y="1389888"/>
-            <a:ext cx="3749040" cy="2926080"/>
-          </a:xfrm>
-          <a:prstGeom prst="rect">
-            <a:avLst/>
-          </a:prstGeom>
-          <a:noFill/>
-          <a:ln/>
-        </p:spPr>
-        <p:txBody>
-          <a:bodyPr wrap="square" rtlCol="0" anchor="ctr"/>
-          <a:lstStyle/>
-          <a:p>
-            <a:pPr marL="342900" indent="-342900">
-              <a:buSzPct val="100000"/>
-              <a:buChar char="•"/>
-            </a:pPr>
-            <a:r>
-              <a:rPr lang="en-US" sz="1150" dirty="0">
+              <a:t>Конкретная задача моделирования:</a:t>
+            </a:r>
+            <a:endParaRPr lang="en-US" sz="1600" dirty="0"/>
+          </a:p>
+          <a:p>
+            <a:pPr algn="l" indent="0" marL="0">
+              <a:buNone/>
+            </a:pPr>
+            <a:r>
+              <a:rPr lang="en-US" sz="1600" dirty="0">
                 <a:solidFill>
-                  <a:srgbClr val="1E293B"/>
+                  <a:srgbClr val="2D2D3A"/>
                 </a:solidFill>
-                <a:latin typeface="Calibri" pitchFamily="34" charset="0"/>
-                <a:ea typeface="Calibri" pitchFamily="34" charset="-122"/>
-                <a:cs typeface="Calibri" pitchFamily="34" charset="-120"/>
+                <a:latin typeface="Times New Roman" pitchFamily="34" charset="0"/>
+                <a:ea typeface="Times New Roman" pitchFamily="34" charset="-122"/>
+                <a:cs typeface="Times New Roman" pitchFamily="34" charset="-120"/>
               </a:rPr>
-              <a:t>Полная инкапсуляция: скрытие деталей реализации подсистемы.</a:t>
-            </a:r>
-            <a:endParaRPr lang="en-US" sz="1150" dirty="0"/>
-          </a:p>
-          <a:p>
-            <a:pPr marL="342900" indent="-342900">
-              <a:buSzPct val="100000"/>
-              <a:buChar char="•"/>
-            </a:pPr>
-            <a:r>
-              <a:rPr lang="en-US" sz="1150" dirty="0">
-                <a:solidFill>
-                  <a:srgbClr val="1E293B"/>
-                </a:solidFill>
-                <a:latin typeface="Calibri" pitchFamily="34" charset="0"/>
-                <a:ea typeface="Calibri" pitchFamily="34" charset="-122"/>
-                <a:cs typeface="Calibri" pitchFamily="34" charset="-120"/>
-              </a:rPr>
-              <a:t>Слабая связанность: замена бэкенда не ломает верстку фронтенда.</a:t>
-            </a:r>
-            <a:endParaRPr lang="en-US" sz="1150" dirty="0"/>
-          </a:p>
-          <a:p>
-            <a:pPr marL="342900" indent="-342900">
-              <a:buSzPct val="100000"/>
-              <a:buChar char="•"/>
-            </a:pPr>
-            <a:r>
-              <a:rPr lang="en-US" sz="1150" dirty="0">
-                <a:solidFill>
-                  <a:srgbClr val="1E293B"/>
-                </a:solidFill>
-                <a:latin typeface="Calibri" pitchFamily="34" charset="0"/>
-                <a:ea typeface="Calibri" pitchFamily="34" charset="-122"/>
-                <a:cs typeface="Calibri" pitchFamily="34" charset="-120"/>
-              </a:rPr>
-              <a:t>Параллельная разработка команд по заранее согласованным мокам.</a:t>
-            </a:r>
-            <a:endParaRPr lang="en-US" sz="1150" dirty="0"/>
+              <a:t>• Описать интерфейсы (контракты) между всеми подсистемами для достижения слабой связанности, масштабируемости и отказоустойчивости.</a:t>
+            </a:r>
+            <a:endParaRPr lang="en-US" sz="1600" dirty="0"/>
           </a:p>
         </p:txBody>
       </p:sp>
@@ -4473,17 +4377,17 @@
               <a:buNone/>
             </a:pPr>
             <a:r>
-              <a:rPr lang="en-US" sz="2000" b="1" dirty="0">
+              <a:rPr lang="en-US" sz="1600" b="1" dirty="0">
                 <a:solidFill>
-                  <a:srgbClr val="0F1E36"/>
+                  <a:srgbClr val="1A1A2E"/>
                 </a:solidFill>
-                <a:latin typeface="Cambria" pitchFamily="34" charset="0"/>
-                <a:ea typeface="Cambria" pitchFamily="34" charset="-122"/>
-                <a:cs typeface="Cambria" pitchFamily="34" charset="-120"/>
+                <a:latin typeface="Georgia" pitchFamily="34" charset="0"/>
+                <a:ea typeface="Georgia" pitchFamily="34" charset="-122"/>
+                <a:cs typeface="Georgia" pitchFamily="34" charset="-120"/>
               </a:rPr>
-              <a:t>Подсистемы в проекте client-portal</a:t>
-            </a:r>
-            <a:endParaRPr lang="en-US" sz="2000" dirty="0"/>
+              <a:t>Что такое интерфейс подсистемы?</a:t>
+            </a:r>
+            <a:endParaRPr lang="en-US" sz="1600" dirty="0"/>
           </a:p>
         </p:txBody>
       </p:sp>
@@ -4496,26 +4400,26 @@
         <p:spPr>
           <a:xfrm>
             <a:off x="384048" y="822960"/>
-            <a:ext cx="4096512" cy="1312164"/>
+            <a:ext cx="8375904" cy="4119372"/>
           </a:xfrm>
           <a:prstGeom prst="roundRect">
             <a:avLst>
-              <a:gd name="adj" fmla="val 6969"/>
+              <a:gd name="adj" fmla="val 2220"/>
             </a:avLst>
           </a:prstGeom>
           <a:solidFill>
-            <a:srgbClr val="FFF7ED"/>
+            <a:srgbClr val="F8F4F0"/>
           </a:solidFill>
           <a:ln w="12700">
             <a:solidFill>
-              <a:srgbClr val="FFF7ED"/>
+              <a:srgbClr val="EFEAE3"/>
             </a:solidFill>
             <a:prstDash val="solid"/>
           </a:ln>
           <a:effectLst>
-            <a:outerShdw sx="100000" sy="100000" kx="0" ky="0" algn="bl" rotWithShape="0" blurRad="88900" dist="25400" dir="2700000">
+            <a:outerShdw sx="100000" sy="100000" kx="0" ky="0" algn="bl" rotWithShape="0" blurRad="152400" dist="38100" dir="2700000">
               <a:srgbClr val="000000">
-                <a:alpha val="9000"/>
+                <a:alpha val="12000"/>
               </a:srgbClr>
             </a:outerShdw>
           </a:effectLst>
@@ -4529,8 +4433,8 @@
         </p:nvSpPr>
         <p:spPr>
           <a:xfrm>
-            <a:off x="521208" y="896112"/>
-            <a:ext cx="3822192" cy="292608"/>
+            <a:off x="548640" y="932688"/>
+            <a:ext cx="8046720" cy="411480"/>
           </a:xfrm>
           <a:prstGeom prst="rect">
             <a:avLst/>
@@ -4548,13 +4452,13 @@
             <a:r>
               <a:rPr lang="en-US" sz="1200" b="1" dirty="0">
                 <a:solidFill>
-                  <a:srgbClr val="0F1E36"/>
+                  <a:srgbClr val="1A1A2E"/>
                 </a:solidFill>
                 <a:latin typeface="Cambria" pitchFamily="34" charset="0"/>
                 <a:ea typeface="Cambria" pitchFamily="34" charset="-122"/>
                 <a:cs typeface="Cambria" pitchFamily="34" charset="-120"/>
               </a:rPr>
-              <a:t>1. Web / Mobile Frontend</a:t>
+              <a:t>Понятие интерфейса-контракта и зачем его проектировать</a:t>
             </a:r>
             <a:endParaRPr lang="en-US" sz="1200" dirty="0"/>
           </a:p>
@@ -4568,8 +4472,8 @@
         </p:nvSpPr>
         <p:spPr>
           <a:xfrm>
-            <a:off x="521208" y="1207008"/>
-            <a:ext cx="3822192" cy="854964"/>
+            <a:off x="548640" y="1417320"/>
+            <a:ext cx="8046720" cy="3296412"/>
           </a:xfrm>
           <a:prstGeom prst="rect">
             <a:avLst/>
@@ -4578,584 +4482,98 @@
           <a:ln/>
         </p:spPr>
         <p:txBody>
-          <a:bodyPr wrap="square" rtlCol="0" anchor="ctr"/>
+          <a:bodyPr wrap="square" rtlCol="0" anchor="t"/>
           <a:lstStyle/>
           <a:p>
-            <a:pPr indent="0" marL="0">
-              <a:buNone/>
-            </a:pPr>
-            <a:r>
-              <a:rPr lang="en-US" sz="1050" dirty="0">
+            <a:pPr algn="l" indent="0" marL="0">
+              <a:buNone/>
+            </a:pPr>
+            <a:r>
+              <a:rPr lang="en-US" sz="1600" dirty="0">
                 <a:solidFill>
-                  <a:srgbClr val="1E293B"/>
+                  <a:srgbClr val="2D2D3A"/>
                 </a:solidFill>
-                <a:latin typeface="Calibri" pitchFamily="34" charset="0"/>
-                <a:ea typeface="Calibri" pitchFamily="34" charset="-122"/>
-                <a:cs typeface="Calibri" pitchFamily="34" charset="-120"/>
+                <a:latin typeface="Times New Roman" pitchFamily="34" charset="0"/>
+                <a:ea typeface="Times New Roman" pitchFamily="34" charset="-122"/>
+                <a:cs typeface="Times New Roman" pitchFamily="34" charset="-120"/>
               </a:rPr>
-              <a:t>Клиентская часть на React. Отправляет JSON-запросы на Backend API, отрисовывает UI, рендерит чат и загружает файлы.</a:t>
-            </a:r>
-            <a:endParaRPr lang="en-US" sz="1050" dirty="0"/>
-          </a:p>
-        </p:txBody>
-      </p:sp>
-      <p:sp>
-        <p:nvSpPr>
-          <p:cNvPr id="6" name="Shape 4"/>
-          <p:cNvSpPr/>
-          <p:nvPr/>
-        </p:nvSpPr>
-        <p:spPr>
-          <a:xfrm>
-            <a:off x="4663440" y="822960"/>
-            <a:ext cx="4096512" cy="1312164"/>
-          </a:xfrm>
-          <a:prstGeom prst="roundRect">
-            <a:avLst>
-              <a:gd name="adj" fmla="val 6969"/>
-            </a:avLst>
-          </a:prstGeom>
-          <a:solidFill>
-            <a:srgbClr val="D1FAE5"/>
-          </a:solidFill>
-          <a:ln w="12700">
-            <a:solidFill>
-              <a:srgbClr val="D1FAE5"/>
-            </a:solidFill>
-            <a:prstDash val="solid"/>
-          </a:ln>
-          <a:effectLst>
-            <a:outerShdw sx="100000" sy="100000" kx="0" ky="0" algn="bl" rotWithShape="0" blurRad="88900" dist="25400" dir="2700000">
-              <a:srgbClr val="000000">
-                <a:alpha val="9000"/>
-              </a:srgbClr>
-            </a:outerShdw>
-          </a:effectLst>
-        </p:spPr>
-      </p:sp>
-      <p:sp>
-        <p:nvSpPr>
-          <p:cNvPr id="7" name="Text 5"/>
-          <p:cNvSpPr/>
-          <p:nvPr/>
-        </p:nvSpPr>
-        <p:spPr>
-          <a:xfrm>
-            <a:off x="4800600" y="896112"/>
-            <a:ext cx="3822192" cy="292608"/>
-          </a:xfrm>
-          <a:prstGeom prst="rect">
-            <a:avLst/>
-          </a:prstGeom>
-          <a:noFill/>
-          <a:ln/>
-        </p:spPr>
-        <p:txBody>
-          <a:bodyPr wrap="square" rtlCol="0" anchor="ctr"/>
-          <a:lstStyle/>
-          <a:p>
-            <a:pPr indent="0" marL="0">
-              <a:buNone/>
-            </a:pPr>
-            <a:r>
-              <a:rPr lang="en-US" sz="1200" b="1" dirty="0">
+              <a:t>Интерфейс — это четко определенная граница взаимодействия (стык) между независимыми частями системы. Он выступает в роли контракта: одна сторона обязуется предоставить данные строго определенного формата, а вторая — принять их.</a:t>
+            </a:r>
+            <a:endParaRPr lang="en-US" sz="1600" dirty="0"/>
+          </a:p>
+          <a:p>
+            <a:pPr algn="l" indent="0" marL="0">
+              <a:buNone/>
+            </a:pPr>
+            <a:endParaRPr lang="en-US" sz="1600" dirty="0"/>
+          </a:p>
+          <a:p>
+            <a:pPr algn="l" indent="0" marL="0">
+              <a:buNone/>
+            </a:pPr>
+            <a:r>
+              <a:rPr lang="en-US" sz="1600" dirty="0">
                 <a:solidFill>
-                  <a:srgbClr val="0F1E36"/>
+                  <a:srgbClr val="2D2D3A"/>
                 </a:solidFill>
-                <a:latin typeface="Cambria" pitchFamily="34" charset="0"/>
-                <a:ea typeface="Cambria" pitchFamily="34" charset="-122"/>
-                <a:cs typeface="Cambria" pitchFamily="34" charset="-120"/>
+                <a:latin typeface="Times New Roman" pitchFamily="34" charset="0"/>
+                <a:ea typeface="Times New Roman" pitchFamily="34" charset="-122"/>
+                <a:cs typeface="Times New Roman" pitchFamily="34" charset="-120"/>
               </a:rPr>
-              <a:t>2. Backend API</a:t>
-            </a:r>
-            <a:endParaRPr lang="en-US" sz="1200" dirty="0"/>
-          </a:p>
-        </p:txBody>
-      </p:sp>
-      <p:sp>
-        <p:nvSpPr>
-          <p:cNvPr id="8" name="Text 6"/>
-          <p:cNvSpPr/>
-          <p:nvPr/>
-        </p:nvSpPr>
-        <p:spPr>
-          <a:xfrm>
-            <a:off x="4800600" y="1207008"/>
-            <a:ext cx="3822192" cy="854964"/>
-          </a:xfrm>
-          <a:prstGeom prst="rect">
-            <a:avLst/>
-          </a:prstGeom>
-          <a:noFill/>
-          <a:ln/>
-        </p:spPr>
-        <p:txBody>
-          <a:bodyPr wrap="square" rtlCol="0" anchor="ctr"/>
-          <a:lstStyle/>
-          <a:p>
-            <a:pPr indent="0" marL="0">
-              <a:buNone/>
-            </a:pPr>
-            <a:r>
-              <a:rPr lang="en-US" sz="1050" dirty="0">
+              <a:t>Зачем проектировать интерфейсы?</a:t>
+            </a:r>
+            <a:endParaRPr lang="en-US" sz="1600" dirty="0"/>
+          </a:p>
+          <a:p>
+            <a:pPr algn="l" indent="0" marL="0">
+              <a:buNone/>
+            </a:pPr>
+            <a:r>
+              <a:rPr lang="en-US" sz="1600" dirty="0">
                 <a:solidFill>
-                  <a:srgbClr val="1E293B"/>
+                  <a:srgbClr val="2D2D3A"/>
                 </a:solidFill>
-                <a:latin typeface="Calibri" pitchFamily="34" charset="0"/>
-                <a:ea typeface="Calibri" pitchFamily="34" charset="-122"/>
-                <a:cs typeface="Calibri" pitchFamily="34" charset="-120"/>
+                <a:latin typeface="Times New Roman" pitchFamily="34" charset="0"/>
+                <a:ea typeface="Times New Roman" pitchFamily="34" charset="-122"/>
+                <a:cs typeface="Times New Roman" pitchFamily="34" charset="-120"/>
               </a:rPr>
-              <a:t>Серверное ядро на Node.js (Express). Отвечает за роутинг, валидацию данных, JWT-авторизацию и фоновые задачи.</a:t>
-            </a:r>
-            <a:endParaRPr lang="en-US" sz="1050" dirty="0"/>
-          </a:p>
-        </p:txBody>
-      </p:sp>
-      <p:sp>
-        <p:nvSpPr>
-          <p:cNvPr id="9" name="Shape 7"/>
-          <p:cNvSpPr/>
-          <p:nvPr/>
-        </p:nvSpPr>
-        <p:spPr>
-          <a:xfrm>
-            <a:off x="384048" y="2226564"/>
-            <a:ext cx="4096512" cy="1312164"/>
-          </a:xfrm>
-          <a:prstGeom prst="roundRect">
-            <a:avLst>
-              <a:gd name="adj" fmla="val 6969"/>
-            </a:avLst>
-          </a:prstGeom>
-          <a:solidFill>
-            <a:srgbClr val="FFF7ED"/>
-          </a:solidFill>
-          <a:ln w="12700">
-            <a:solidFill>
-              <a:srgbClr val="FFF7ED"/>
-            </a:solidFill>
-            <a:prstDash val="solid"/>
-          </a:ln>
-          <a:effectLst>
-            <a:outerShdw sx="100000" sy="100000" kx="0" ky="0" algn="bl" rotWithShape="0" blurRad="88900" dist="25400" dir="2700000">
-              <a:srgbClr val="000000">
-                <a:alpha val="9000"/>
-              </a:srgbClr>
-            </a:outerShdw>
-          </a:effectLst>
-        </p:spPr>
-      </p:sp>
-      <p:sp>
-        <p:nvSpPr>
-          <p:cNvPr id="10" name="Text 8"/>
-          <p:cNvSpPr/>
-          <p:nvPr/>
-        </p:nvSpPr>
-        <p:spPr>
-          <a:xfrm>
-            <a:off x="521208" y="2299716"/>
-            <a:ext cx="3822192" cy="292608"/>
-          </a:xfrm>
-          <a:prstGeom prst="rect">
-            <a:avLst/>
-          </a:prstGeom>
-          <a:noFill/>
-          <a:ln/>
-        </p:spPr>
-        <p:txBody>
-          <a:bodyPr wrap="square" rtlCol="0" anchor="ctr"/>
-          <a:lstStyle/>
-          <a:p>
-            <a:pPr indent="0" marL="0">
-              <a:buNone/>
-            </a:pPr>
-            <a:r>
-              <a:rPr lang="en-US" sz="1200" b="1" dirty="0">
+              <a:t>• Полная инкапсуляция: скрытие деталей реализации подсистемы.</a:t>
+            </a:r>
+            <a:endParaRPr lang="en-US" sz="1600" dirty="0"/>
+          </a:p>
+          <a:p>
+            <a:pPr algn="l" indent="0" marL="0">
+              <a:buNone/>
+            </a:pPr>
+            <a:r>
+              <a:rPr lang="en-US" sz="1600" dirty="0">
                 <a:solidFill>
-                  <a:srgbClr val="0F1E36"/>
+                  <a:srgbClr val="2D2D3A"/>
                 </a:solidFill>
-                <a:latin typeface="Cambria" pitchFamily="34" charset="0"/>
-                <a:ea typeface="Cambria" pitchFamily="34" charset="-122"/>
-                <a:cs typeface="Cambria" pitchFamily="34" charset="-120"/>
+                <a:latin typeface="Times New Roman" pitchFamily="34" charset="0"/>
+                <a:ea typeface="Times New Roman" pitchFamily="34" charset="-122"/>
+                <a:cs typeface="Times New Roman" pitchFamily="34" charset="-120"/>
               </a:rPr>
-              <a:t>3. PostgreSQL Database</a:t>
-            </a:r>
-            <a:endParaRPr lang="en-US" sz="1200" dirty="0"/>
-          </a:p>
-        </p:txBody>
-      </p:sp>
-      <p:sp>
-        <p:nvSpPr>
-          <p:cNvPr id="11" name="Text 9"/>
-          <p:cNvSpPr/>
-          <p:nvPr/>
-        </p:nvSpPr>
-        <p:spPr>
-          <a:xfrm>
-            <a:off x="521208" y="2610612"/>
-            <a:ext cx="3822192" cy="854964"/>
-          </a:xfrm>
-          <a:prstGeom prst="rect">
-            <a:avLst/>
-          </a:prstGeom>
-          <a:noFill/>
-          <a:ln/>
-        </p:spPr>
-        <p:txBody>
-          <a:bodyPr wrap="square" rtlCol="0" anchor="ctr"/>
-          <a:lstStyle/>
-          <a:p>
-            <a:pPr indent="0" marL="0">
-              <a:buNone/>
-            </a:pPr>
-            <a:r>
-              <a:rPr lang="en-US" sz="1050" dirty="0">
+              <a:t>• Слабая связанность: замена бэкенда не ломает верстку фронтенда.</a:t>
+            </a:r>
+            <a:endParaRPr lang="en-US" sz="1600" dirty="0"/>
+          </a:p>
+          <a:p>
+            <a:pPr algn="l" indent="0" marL="0">
+              <a:buNone/>
+            </a:pPr>
+            <a:r>
+              <a:rPr lang="en-US" sz="1600" dirty="0">
                 <a:solidFill>
-                  <a:srgbClr val="1E293B"/>
+                  <a:srgbClr val="2D2D3A"/>
                 </a:solidFill>
-                <a:latin typeface="Calibri" pitchFamily="34" charset="0"/>
-                <a:ea typeface="Calibri" pitchFamily="34" charset="-122"/>
-                <a:cs typeface="Calibri" pitchFamily="34" charset="-120"/>
+                <a:latin typeface="Times New Roman" pitchFamily="34" charset="0"/>
+                <a:ea typeface="Times New Roman" pitchFamily="34" charset="-122"/>
+                <a:cs typeface="Times New Roman" pitchFamily="34" charset="-120"/>
               </a:rPr>
-              <a:t>Основная реляционная БД портала. Хранит учетные записи пользователей, сессии чата, логи синхронизации и тикеты.</a:t>
-            </a:r>
-            <a:endParaRPr lang="en-US" sz="1050" dirty="0"/>
-          </a:p>
-        </p:txBody>
-      </p:sp>
-      <p:sp>
-        <p:nvSpPr>
-          <p:cNvPr id="12" name="Shape 10"/>
-          <p:cNvSpPr/>
-          <p:nvPr/>
-        </p:nvSpPr>
-        <p:spPr>
-          <a:xfrm>
-            <a:off x="4663440" y="2226564"/>
-            <a:ext cx="4096512" cy="1312164"/>
-          </a:xfrm>
-          <a:prstGeom prst="roundRect">
-            <a:avLst>
-              <a:gd name="adj" fmla="val 6969"/>
-            </a:avLst>
-          </a:prstGeom>
-          <a:solidFill>
-            <a:srgbClr val="D1FAE5"/>
-          </a:solidFill>
-          <a:ln w="12700">
-            <a:solidFill>
-              <a:srgbClr val="D1FAE5"/>
-            </a:solidFill>
-            <a:prstDash val="solid"/>
-          </a:ln>
-          <a:effectLst>
-            <a:outerShdw sx="100000" sy="100000" kx="0" ky="0" algn="bl" rotWithShape="0" blurRad="88900" dist="25400" dir="2700000">
-              <a:srgbClr val="000000">
-                <a:alpha val="9000"/>
-              </a:srgbClr>
-            </a:outerShdw>
-          </a:effectLst>
-        </p:spPr>
-      </p:sp>
-      <p:sp>
-        <p:nvSpPr>
-          <p:cNvPr id="13" name="Text 11"/>
-          <p:cNvSpPr/>
-          <p:nvPr/>
-        </p:nvSpPr>
-        <p:spPr>
-          <a:xfrm>
-            <a:off x="4800600" y="2299716"/>
-            <a:ext cx="3822192" cy="292608"/>
-          </a:xfrm>
-          <a:prstGeom prst="rect">
-            <a:avLst/>
-          </a:prstGeom>
-          <a:noFill/>
-          <a:ln/>
-        </p:spPr>
-        <p:txBody>
-          <a:bodyPr wrap="square" rtlCol="0" anchor="ctr"/>
-          <a:lstStyle/>
-          <a:p>
-            <a:pPr indent="0" marL="0">
-              <a:buNone/>
-            </a:pPr>
-            <a:r>
-              <a:rPr lang="en-US" sz="1200" b="1" dirty="0">
-                <a:solidFill>
-                  <a:srgbClr val="0F1E36"/>
-                </a:solidFill>
-                <a:latin typeface="Cambria" pitchFamily="34" charset="0"/>
-                <a:ea typeface="Cambria" pitchFamily="34" charset="-122"/>
-                <a:cs typeface="Cambria" pitchFamily="34" charset="-120"/>
-              </a:rPr>
-              <a:t>4. S3 Storage MinIO</a:t>
-            </a:r>
-            <a:endParaRPr lang="en-US" sz="1200" dirty="0"/>
-          </a:p>
-        </p:txBody>
-      </p:sp>
-      <p:sp>
-        <p:nvSpPr>
-          <p:cNvPr id="14" name="Text 12"/>
-          <p:cNvSpPr/>
-          <p:nvPr/>
-        </p:nvSpPr>
-        <p:spPr>
-          <a:xfrm>
-            <a:off x="4800600" y="2610612"/>
-            <a:ext cx="3822192" cy="854964"/>
-          </a:xfrm>
-          <a:prstGeom prst="rect">
-            <a:avLst/>
-          </a:prstGeom>
-          <a:noFill/>
-          <a:ln/>
-        </p:spPr>
-        <p:txBody>
-          <a:bodyPr wrap="square" rtlCol="0" anchor="ctr"/>
-          <a:lstStyle/>
-          <a:p>
-            <a:pPr indent="0" marL="0">
-              <a:buNone/>
-            </a:pPr>
-            <a:r>
-              <a:rPr lang="en-US" sz="1050" dirty="0">
-                <a:solidFill>
-                  <a:srgbClr val="1E293B"/>
-                </a:solidFill>
-                <a:latin typeface="Calibri" pitchFamily="34" charset="0"/>
-                <a:ea typeface="Calibri" pitchFamily="34" charset="-122"/>
-                <a:cs typeface="Calibri" pitchFamily="34" charset="-120"/>
-              </a:rPr>
-              <a:t>Объектное хранилище для тяжелых вложений (скриншоты ошибок, базы данных 1С клиентов, логи, отчеты).</a:t>
-            </a:r>
-            <a:endParaRPr lang="en-US" sz="1050" dirty="0"/>
-          </a:p>
-        </p:txBody>
-      </p:sp>
-      <p:sp>
-        <p:nvSpPr>
-          <p:cNvPr id="15" name="Shape 13"/>
-          <p:cNvSpPr/>
-          <p:nvPr/>
-        </p:nvSpPr>
-        <p:spPr>
-          <a:xfrm>
-            <a:off x="384048" y="3630168"/>
-            <a:ext cx="4096512" cy="1312164"/>
-          </a:xfrm>
-          <a:prstGeom prst="roundRect">
-            <a:avLst>
-              <a:gd name="adj" fmla="val 6969"/>
-            </a:avLst>
-          </a:prstGeom>
-          <a:solidFill>
-            <a:srgbClr val="FFF7ED"/>
-          </a:solidFill>
-          <a:ln w="12700">
-            <a:solidFill>
-              <a:srgbClr val="FFF7ED"/>
-            </a:solidFill>
-            <a:prstDash val="solid"/>
-          </a:ln>
-          <a:effectLst>
-            <a:outerShdw sx="100000" sy="100000" kx="0" ky="0" algn="bl" rotWithShape="0" blurRad="88900" dist="25400" dir="2700000">
-              <a:srgbClr val="000000">
-                <a:alpha val="9000"/>
-              </a:srgbClr>
-            </a:outerShdw>
-          </a:effectLst>
-        </p:spPr>
-      </p:sp>
-      <p:sp>
-        <p:nvSpPr>
-          <p:cNvPr id="16" name="Text 14"/>
-          <p:cNvSpPr/>
-          <p:nvPr/>
-        </p:nvSpPr>
-        <p:spPr>
-          <a:xfrm>
-            <a:off x="521208" y="3703320"/>
-            <a:ext cx="3822192" cy="292608"/>
-          </a:xfrm>
-          <a:prstGeom prst="rect">
-            <a:avLst/>
-          </a:prstGeom>
-          <a:noFill/>
-          <a:ln/>
-        </p:spPr>
-        <p:txBody>
-          <a:bodyPr wrap="square" rtlCol="0" anchor="ctr"/>
-          <a:lstStyle/>
-          <a:p>
-            <a:pPr indent="0" marL="0">
-              <a:buNone/>
-            </a:pPr>
-            <a:r>
-              <a:rPr lang="en-US" sz="1200" b="1" dirty="0">
-                <a:solidFill>
-                  <a:srgbClr val="0F1E36"/>
-                </a:solidFill>
-                <a:latin typeface="Cambria" pitchFamily="34" charset="0"/>
-                <a:ea typeface="Cambria" pitchFamily="34" charset="-122"/>
-                <a:cs typeface="Cambria" pitchFamily="34" charset="-120"/>
-              </a:rPr>
-              <a:t>5. WebSocket Service</a:t>
-            </a:r>
-            <a:endParaRPr lang="en-US" sz="1200" dirty="0"/>
-          </a:p>
-        </p:txBody>
-      </p:sp>
-      <p:sp>
-        <p:nvSpPr>
-          <p:cNvPr id="17" name="Text 15"/>
-          <p:cNvSpPr/>
-          <p:nvPr/>
-        </p:nvSpPr>
-        <p:spPr>
-          <a:xfrm>
-            <a:off x="521208" y="4014216"/>
-            <a:ext cx="3822192" cy="854964"/>
-          </a:xfrm>
-          <a:prstGeom prst="rect">
-            <a:avLst/>
-          </a:prstGeom>
-          <a:noFill/>
-          <a:ln/>
-        </p:spPr>
-        <p:txBody>
-          <a:bodyPr wrap="square" rtlCol="0" anchor="ctr"/>
-          <a:lstStyle/>
-          <a:p>
-            <a:pPr indent="0" marL="0">
-              <a:buNone/>
-            </a:pPr>
-            <a:r>
-              <a:rPr lang="en-US" sz="1050" dirty="0">
-                <a:solidFill>
-                  <a:srgbClr val="1E293B"/>
-                </a:solidFill>
-                <a:latin typeface="Calibri" pitchFamily="34" charset="0"/>
-                <a:ea typeface="Calibri" pitchFamily="34" charset="-122"/>
-                <a:cs typeface="Calibri" pitchFamily="34" charset="-120"/>
-              </a:rPr>
-              <a:t>Служба мгновенной доставки сообщений и нотификаций. Держит постоянное дуплексное сетевое соединение.</a:t>
-            </a:r>
-            <a:endParaRPr lang="en-US" sz="1050" dirty="0"/>
-          </a:p>
-        </p:txBody>
-      </p:sp>
-      <p:sp>
-        <p:nvSpPr>
-          <p:cNvPr id="18" name="Shape 16"/>
-          <p:cNvSpPr/>
-          <p:nvPr/>
-        </p:nvSpPr>
-        <p:spPr>
-          <a:xfrm>
-            <a:off x="4663440" y="3630168"/>
-            <a:ext cx="4096512" cy="1312164"/>
-          </a:xfrm>
-          <a:prstGeom prst="roundRect">
-            <a:avLst>
-              <a:gd name="adj" fmla="val 6969"/>
-            </a:avLst>
-          </a:prstGeom>
-          <a:solidFill>
-            <a:srgbClr val="D1FAE5"/>
-          </a:solidFill>
-          <a:ln w="12700">
-            <a:solidFill>
-              <a:srgbClr val="D1FAE5"/>
-            </a:solidFill>
-            <a:prstDash val="solid"/>
-          </a:ln>
-          <a:effectLst>
-            <a:outerShdw sx="100000" sy="100000" kx="0" ky="0" algn="bl" rotWithShape="0" blurRad="88900" dist="25400" dir="2700000">
-              <a:srgbClr val="000000">
-                <a:alpha val="9000"/>
-              </a:srgbClr>
-            </a:outerShdw>
-          </a:effectLst>
-        </p:spPr>
-      </p:sp>
-      <p:sp>
-        <p:nvSpPr>
-          <p:cNvPr id="19" name="Text 17"/>
-          <p:cNvSpPr/>
-          <p:nvPr/>
-        </p:nvSpPr>
-        <p:spPr>
-          <a:xfrm>
-            <a:off x="4800600" y="3703320"/>
-            <a:ext cx="3822192" cy="292608"/>
-          </a:xfrm>
-          <a:prstGeom prst="rect">
-            <a:avLst/>
-          </a:prstGeom>
-          <a:noFill/>
-          <a:ln/>
-        </p:spPr>
-        <p:txBody>
-          <a:bodyPr wrap="square" rtlCol="0" anchor="ctr"/>
-          <a:lstStyle/>
-          <a:p>
-            <a:pPr indent="0" marL="0">
-              <a:buNone/>
-            </a:pPr>
-            <a:r>
-              <a:rPr lang="en-US" sz="1200" b="1" dirty="0">
-                <a:solidFill>
-                  <a:srgbClr val="0F1E36"/>
-                </a:solidFill>
-                <a:latin typeface="Cambria" pitchFamily="34" charset="0"/>
-                <a:ea typeface="Cambria" pitchFamily="34" charset="-122"/>
-                <a:cs typeface="Cambria" pitchFamily="34" charset="-120"/>
-              </a:rPr>
-              <a:t>6. Sync &amp; 1C Simulator</a:t>
-            </a:r>
-            <a:endParaRPr lang="en-US" sz="1200" dirty="0"/>
-          </a:p>
-        </p:txBody>
-      </p:sp>
-      <p:sp>
-        <p:nvSpPr>
-          <p:cNvPr id="20" name="Text 18"/>
-          <p:cNvSpPr/>
-          <p:nvPr/>
-        </p:nvSpPr>
-        <p:spPr>
-          <a:xfrm>
-            <a:off x="4800600" y="4014216"/>
-            <a:ext cx="3822192" cy="854964"/>
-          </a:xfrm>
-          <a:prstGeom prst="rect">
-            <a:avLst/>
-          </a:prstGeom>
-          <a:noFill/>
-          <a:ln/>
-        </p:spPr>
-        <p:txBody>
-          <a:bodyPr wrap="square" rtlCol="0" anchor="ctr"/>
-          <a:lstStyle/>
-          <a:p>
-            <a:pPr indent="0" marL="0">
-              <a:buNone/>
-            </a:pPr>
-            <a:r>
-              <a:rPr lang="en-US" sz="1050" dirty="0">
-                <a:solidFill>
-                  <a:srgbClr val="1E293B"/>
-                </a:solidFill>
-                <a:latin typeface="Calibri" pitchFamily="34" charset="0"/>
-                <a:ea typeface="Calibri" pitchFamily="34" charset="-122"/>
-                <a:cs typeface="Calibri" pitchFamily="34" charset="-120"/>
-              </a:rPr>
-              <a:t>Внешняя база-реплика и фоновые процессы обмена, симулирующие учетный контур 1С на предприятии.</a:t>
-            </a:r>
-            <a:endParaRPr lang="en-US" sz="1050" dirty="0"/>
+              <a:t>• Параллельная разработка команд по заранее согласованным мокам.</a:t>
+            </a:r>
+            <a:endParaRPr lang="en-US" sz="1600" dirty="0"/>
           </a:p>
         </p:txBody>
       </p:sp>
@@ -5216,23 +4634,766 @@
               <a:buNone/>
             </a:pPr>
             <a:r>
-              <a:rPr lang="en-US" sz="2000" b="1" dirty="0">
+              <a:rPr lang="en-US" sz="1600" b="1" dirty="0">
                 <a:solidFill>
-                  <a:srgbClr val="0F1E36"/>
+                  <a:srgbClr val="1A1A2E"/>
+                </a:solidFill>
+                <a:latin typeface="Georgia" pitchFamily="34" charset="0"/>
+                <a:ea typeface="Georgia" pitchFamily="34" charset="-122"/>
+                <a:cs typeface="Georgia" pitchFamily="34" charset="-120"/>
+              </a:rPr>
+              <a:t>Подсистемы в проекте client-portal</a:t>
+            </a:r>
+            <a:endParaRPr lang="en-US" sz="1600" dirty="0"/>
+          </a:p>
+        </p:txBody>
+      </p:sp>
+      <p:sp>
+        <p:nvSpPr>
+          <p:cNvPr id="3" name="Shape 1"/>
+          <p:cNvSpPr/>
+          <p:nvPr/>
+        </p:nvSpPr>
+        <p:spPr>
+          <a:xfrm>
+            <a:off x="384048" y="822960"/>
+            <a:ext cx="4096512" cy="1312164"/>
+          </a:xfrm>
+          <a:prstGeom prst="roundRect">
+            <a:avLst>
+              <a:gd name="adj" fmla="val 6969"/>
+            </a:avLst>
+          </a:prstGeom>
+          <a:solidFill>
+            <a:srgbClr val="F8F4F0"/>
+          </a:solidFill>
+          <a:ln w="12700">
+            <a:solidFill>
+              <a:srgbClr val="EFEAE3"/>
+            </a:solidFill>
+            <a:prstDash val="solid"/>
+          </a:ln>
+          <a:effectLst>
+            <a:outerShdw sx="100000" sy="100000" kx="0" ky="0" algn="bl" rotWithShape="0" blurRad="152400" dist="38100" dir="2700000">
+              <a:srgbClr val="000000">
+                <a:alpha val="12000"/>
+              </a:srgbClr>
+            </a:outerShdw>
+          </a:effectLst>
+        </p:spPr>
+      </p:sp>
+      <p:sp>
+        <p:nvSpPr>
+          <p:cNvPr id="4" name="Text 2"/>
+          <p:cNvSpPr/>
+          <p:nvPr/>
+        </p:nvSpPr>
+        <p:spPr>
+          <a:xfrm>
+            <a:off x="521208" y="896112"/>
+            <a:ext cx="3822192" cy="292608"/>
+          </a:xfrm>
+          <a:prstGeom prst="rect">
+            <a:avLst/>
+          </a:prstGeom>
+          <a:noFill/>
+          <a:ln/>
+        </p:spPr>
+        <p:txBody>
+          <a:bodyPr wrap="square" rtlCol="0" anchor="ctr"/>
+          <a:lstStyle/>
+          <a:p>
+            <a:pPr indent="0" marL="0">
+              <a:buNone/>
+            </a:pPr>
+            <a:r>
+              <a:rPr lang="en-US" sz="1200" b="1" dirty="0">
+                <a:solidFill>
+                  <a:srgbClr val="1A1A2E"/>
                 </a:solidFill>
                 <a:latin typeface="Cambria" pitchFamily="34" charset="0"/>
                 <a:ea typeface="Cambria" pitchFamily="34" charset="-122"/>
                 <a:cs typeface="Cambria" pitchFamily="34" charset="-120"/>
               </a:rPr>
+              <a:t>1. Web / Mobile Frontend</a:t>
+            </a:r>
+            <a:endParaRPr lang="en-US" sz="1200" dirty="0"/>
+          </a:p>
+        </p:txBody>
+      </p:sp>
+      <p:sp>
+        <p:nvSpPr>
+          <p:cNvPr id="5" name="Text 3"/>
+          <p:cNvSpPr/>
+          <p:nvPr/>
+        </p:nvSpPr>
+        <p:spPr>
+          <a:xfrm>
+            <a:off x="521208" y="1207008"/>
+            <a:ext cx="3822192" cy="854964"/>
+          </a:xfrm>
+          <a:prstGeom prst="rect">
+            <a:avLst/>
+          </a:prstGeom>
+          <a:noFill/>
+          <a:ln/>
+        </p:spPr>
+        <p:txBody>
+          <a:bodyPr wrap="square" rtlCol="0" anchor="t"/>
+          <a:lstStyle/>
+          <a:p>
+            <a:pPr algn="l" indent="0" marL="0">
+              <a:buNone/>
+            </a:pPr>
+            <a:r>
+              <a:rPr lang="en-US" sz="1200" dirty="0">
+                <a:solidFill>
+                  <a:srgbClr val="2D2D3A"/>
+                </a:solidFill>
+                <a:latin typeface="Times New Roman" pitchFamily="34" charset="0"/>
+                <a:ea typeface="Times New Roman" pitchFamily="34" charset="-122"/>
+                <a:cs typeface="Times New Roman" pitchFamily="34" charset="-120"/>
+              </a:rPr>
+              <a:t>Клиентская часть на React. Отправляет JSON-запросы на Backend API, отрисовывает UI, рендерит чат и загружает файлы.</a:t>
+            </a:r>
+            <a:endParaRPr lang="en-US" sz="1200" dirty="0"/>
+          </a:p>
+        </p:txBody>
+      </p:sp>
+      <p:sp>
+        <p:nvSpPr>
+          <p:cNvPr id="6" name="Shape 4"/>
+          <p:cNvSpPr/>
+          <p:nvPr/>
+        </p:nvSpPr>
+        <p:spPr>
+          <a:xfrm>
+            <a:off x="4663440" y="822960"/>
+            <a:ext cx="4096512" cy="1312164"/>
+          </a:xfrm>
+          <a:prstGeom prst="roundRect">
+            <a:avLst>
+              <a:gd name="adj" fmla="val 6969"/>
+            </a:avLst>
+          </a:prstGeom>
+          <a:solidFill>
+            <a:srgbClr val="D4EDDA"/>
+          </a:solidFill>
+          <a:ln w="12700">
+            <a:solidFill>
+              <a:srgbClr val="EFEAE3"/>
+            </a:solidFill>
+            <a:prstDash val="solid"/>
+          </a:ln>
+          <a:effectLst>
+            <a:outerShdw sx="100000" sy="100000" kx="0" ky="0" algn="bl" rotWithShape="0" blurRad="152400" dist="38100" dir="2700000">
+              <a:srgbClr val="000000">
+                <a:alpha val="12000"/>
+              </a:srgbClr>
+            </a:outerShdw>
+          </a:effectLst>
+        </p:spPr>
+      </p:sp>
+      <p:sp>
+        <p:nvSpPr>
+          <p:cNvPr id="7" name="Text 5"/>
+          <p:cNvSpPr/>
+          <p:nvPr/>
+        </p:nvSpPr>
+        <p:spPr>
+          <a:xfrm>
+            <a:off x="4800600" y="896112"/>
+            <a:ext cx="3822192" cy="292608"/>
+          </a:xfrm>
+          <a:prstGeom prst="rect">
+            <a:avLst/>
+          </a:prstGeom>
+          <a:noFill/>
+          <a:ln/>
+        </p:spPr>
+        <p:txBody>
+          <a:bodyPr wrap="square" rtlCol="0" anchor="ctr"/>
+          <a:lstStyle/>
+          <a:p>
+            <a:pPr indent="0" marL="0">
+              <a:buNone/>
+            </a:pPr>
+            <a:r>
+              <a:rPr lang="en-US" sz="1200" b="1" dirty="0">
+                <a:solidFill>
+                  <a:srgbClr val="1A1A2E"/>
+                </a:solidFill>
+                <a:latin typeface="Cambria" pitchFamily="34" charset="0"/>
+                <a:ea typeface="Cambria" pitchFamily="34" charset="-122"/>
+                <a:cs typeface="Cambria" pitchFamily="34" charset="-120"/>
+              </a:rPr>
+              <a:t>2. Backend API</a:t>
+            </a:r>
+            <a:endParaRPr lang="en-US" sz="1200" dirty="0"/>
+          </a:p>
+        </p:txBody>
+      </p:sp>
+      <p:sp>
+        <p:nvSpPr>
+          <p:cNvPr id="8" name="Text 6"/>
+          <p:cNvSpPr/>
+          <p:nvPr/>
+        </p:nvSpPr>
+        <p:spPr>
+          <a:xfrm>
+            <a:off x="4800600" y="1207008"/>
+            <a:ext cx="3822192" cy="854964"/>
+          </a:xfrm>
+          <a:prstGeom prst="rect">
+            <a:avLst/>
+          </a:prstGeom>
+          <a:noFill/>
+          <a:ln/>
+        </p:spPr>
+        <p:txBody>
+          <a:bodyPr wrap="square" rtlCol="0" anchor="t"/>
+          <a:lstStyle/>
+          <a:p>
+            <a:pPr algn="l" indent="0" marL="0">
+              <a:buNone/>
+            </a:pPr>
+            <a:r>
+              <a:rPr lang="en-US" sz="1200" dirty="0">
+                <a:solidFill>
+                  <a:srgbClr val="2D2D3A"/>
+                </a:solidFill>
+                <a:latin typeface="Times New Roman" pitchFamily="34" charset="0"/>
+                <a:ea typeface="Times New Roman" pitchFamily="34" charset="-122"/>
+                <a:cs typeface="Times New Roman" pitchFamily="34" charset="-120"/>
+              </a:rPr>
+              <a:t>Серверное ядро на Node.js (Express). Отвечает за роутинг, валидацию данных, JWT-авторизацию и фоновые задачи.</a:t>
+            </a:r>
+            <a:endParaRPr lang="en-US" sz="1200" dirty="0"/>
+          </a:p>
+        </p:txBody>
+      </p:sp>
+      <p:sp>
+        <p:nvSpPr>
+          <p:cNvPr id="9" name="Shape 7"/>
+          <p:cNvSpPr/>
+          <p:nvPr/>
+        </p:nvSpPr>
+        <p:spPr>
+          <a:xfrm>
+            <a:off x="384048" y="2226564"/>
+            <a:ext cx="4096512" cy="1312164"/>
+          </a:xfrm>
+          <a:prstGeom prst="roundRect">
+            <a:avLst>
+              <a:gd name="adj" fmla="val 6969"/>
+            </a:avLst>
+          </a:prstGeom>
+          <a:solidFill>
+            <a:srgbClr val="F8F4F0"/>
+          </a:solidFill>
+          <a:ln w="12700">
+            <a:solidFill>
+              <a:srgbClr val="EFEAE3"/>
+            </a:solidFill>
+            <a:prstDash val="solid"/>
+          </a:ln>
+          <a:effectLst>
+            <a:outerShdw sx="100000" sy="100000" kx="0" ky="0" algn="bl" rotWithShape="0" blurRad="152400" dist="38100" dir="2700000">
+              <a:srgbClr val="000000">
+                <a:alpha val="12000"/>
+              </a:srgbClr>
+            </a:outerShdw>
+          </a:effectLst>
+        </p:spPr>
+      </p:sp>
+      <p:sp>
+        <p:nvSpPr>
+          <p:cNvPr id="10" name="Text 8"/>
+          <p:cNvSpPr/>
+          <p:nvPr/>
+        </p:nvSpPr>
+        <p:spPr>
+          <a:xfrm>
+            <a:off x="521208" y="2299716"/>
+            <a:ext cx="3822192" cy="292608"/>
+          </a:xfrm>
+          <a:prstGeom prst="rect">
+            <a:avLst/>
+          </a:prstGeom>
+          <a:noFill/>
+          <a:ln/>
+        </p:spPr>
+        <p:txBody>
+          <a:bodyPr wrap="square" rtlCol="0" anchor="ctr"/>
+          <a:lstStyle/>
+          <a:p>
+            <a:pPr indent="0" marL="0">
+              <a:buNone/>
+            </a:pPr>
+            <a:r>
+              <a:rPr lang="en-US" sz="1200" b="1" dirty="0">
+                <a:solidFill>
+                  <a:srgbClr val="1A1A2E"/>
+                </a:solidFill>
+                <a:latin typeface="Cambria" pitchFamily="34" charset="0"/>
+                <a:ea typeface="Cambria" pitchFamily="34" charset="-122"/>
+                <a:cs typeface="Cambria" pitchFamily="34" charset="-120"/>
+              </a:rPr>
+              <a:t>3. PostgreSQL Database</a:t>
+            </a:r>
+            <a:endParaRPr lang="en-US" sz="1200" dirty="0"/>
+          </a:p>
+        </p:txBody>
+      </p:sp>
+      <p:sp>
+        <p:nvSpPr>
+          <p:cNvPr id="11" name="Text 9"/>
+          <p:cNvSpPr/>
+          <p:nvPr/>
+        </p:nvSpPr>
+        <p:spPr>
+          <a:xfrm>
+            <a:off x="521208" y="2610612"/>
+            <a:ext cx="3822192" cy="854964"/>
+          </a:xfrm>
+          <a:prstGeom prst="rect">
+            <a:avLst/>
+          </a:prstGeom>
+          <a:noFill/>
+          <a:ln/>
+        </p:spPr>
+        <p:txBody>
+          <a:bodyPr wrap="square" rtlCol="0" anchor="t"/>
+          <a:lstStyle/>
+          <a:p>
+            <a:pPr algn="l" indent="0" marL="0">
+              <a:buNone/>
+            </a:pPr>
+            <a:r>
+              <a:rPr lang="en-US" sz="1200" dirty="0">
+                <a:solidFill>
+                  <a:srgbClr val="2D2D3A"/>
+                </a:solidFill>
+                <a:latin typeface="Times New Roman" pitchFamily="34" charset="0"/>
+                <a:ea typeface="Times New Roman" pitchFamily="34" charset="-122"/>
+                <a:cs typeface="Times New Roman" pitchFamily="34" charset="-120"/>
+              </a:rPr>
+              <a:t>Основная реляционная БД портала. Хранит учетные записи пользователей, сессии чата, логи синхронизации и тикеты.</a:t>
+            </a:r>
+            <a:endParaRPr lang="en-US" sz="1200" dirty="0"/>
+          </a:p>
+        </p:txBody>
+      </p:sp>
+      <p:sp>
+        <p:nvSpPr>
+          <p:cNvPr id="12" name="Shape 10"/>
+          <p:cNvSpPr/>
+          <p:nvPr/>
+        </p:nvSpPr>
+        <p:spPr>
+          <a:xfrm>
+            <a:off x="4663440" y="2226564"/>
+            <a:ext cx="4096512" cy="1312164"/>
+          </a:xfrm>
+          <a:prstGeom prst="roundRect">
+            <a:avLst>
+              <a:gd name="adj" fmla="val 6969"/>
+            </a:avLst>
+          </a:prstGeom>
+          <a:solidFill>
+            <a:srgbClr val="D4EDDA"/>
+          </a:solidFill>
+          <a:ln w="12700">
+            <a:solidFill>
+              <a:srgbClr val="EFEAE3"/>
+            </a:solidFill>
+            <a:prstDash val="solid"/>
+          </a:ln>
+          <a:effectLst>
+            <a:outerShdw sx="100000" sy="100000" kx="0" ky="0" algn="bl" rotWithShape="0" blurRad="152400" dist="38100" dir="2700000">
+              <a:srgbClr val="000000">
+                <a:alpha val="12000"/>
+              </a:srgbClr>
+            </a:outerShdw>
+          </a:effectLst>
+        </p:spPr>
+      </p:sp>
+      <p:sp>
+        <p:nvSpPr>
+          <p:cNvPr id="13" name="Text 11"/>
+          <p:cNvSpPr/>
+          <p:nvPr/>
+        </p:nvSpPr>
+        <p:spPr>
+          <a:xfrm>
+            <a:off x="4800600" y="2299716"/>
+            <a:ext cx="3822192" cy="292608"/>
+          </a:xfrm>
+          <a:prstGeom prst="rect">
+            <a:avLst/>
+          </a:prstGeom>
+          <a:noFill/>
+          <a:ln/>
+        </p:spPr>
+        <p:txBody>
+          <a:bodyPr wrap="square" rtlCol="0" anchor="ctr"/>
+          <a:lstStyle/>
+          <a:p>
+            <a:pPr indent="0" marL="0">
+              <a:buNone/>
+            </a:pPr>
+            <a:r>
+              <a:rPr lang="en-US" sz="1200" b="1" dirty="0">
+                <a:solidFill>
+                  <a:srgbClr val="1A1A2E"/>
+                </a:solidFill>
+                <a:latin typeface="Cambria" pitchFamily="34" charset="0"/>
+                <a:ea typeface="Cambria" pitchFamily="34" charset="-122"/>
+                <a:cs typeface="Cambria" pitchFamily="34" charset="-120"/>
+              </a:rPr>
+              <a:t>4. S3 Storage MinIO</a:t>
+            </a:r>
+            <a:endParaRPr lang="en-US" sz="1200" dirty="0"/>
+          </a:p>
+        </p:txBody>
+      </p:sp>
+      <p:sp>
+        <p:nvSpPr>
+          <p:cNvPr id="14" name="Text 12"/>
+          <p:cNvSpPr/>
+          <p:nvPr/>
+        </p:nvSpPr>
+        <p:spPr>
+          <a:xfrm>
+            <a:off x="4800600" y="2610612"/>
+            <a:ext cx="3822192" cy="854964"/>
+          </a:xfrm>
+          <a:prstGeom prst="rect">
+            <a:avLst/>
+          </a:prstGeom>
+          <a:noFill/>
+          <a:ln/>
+        </p:spPr>
+        <p:txBody>
+          <a:bodyPr wrap="square" rtlCol="0" anchor="t"/>
+          <a:lstStyle/>
+          <a:p>
+            <a:pPr algn="l" indent="0" marL="0">
+              <a:buNone/>
+            </a:pPr>
+            <a:r>
+              <a:rPr lang="en-US" sz="1200" dirty="0">
+                <a:solidFill>
+                  <a:srgbClr val="2D2D3A"/>
+                </a:solidFill>
+                <a:latin typeface="Times New Roman" pitchFamily="34" charset="0"/>
+                <a:ea typeface="Times New Roman" pitchFamily="34" charset="-122"/>
+                <a:cs typeface="Times New Roman" pitchFamily="34" charset="-120"/>
+              </a:rPr>
+              <a:t>Объектное хранилище для тяжелых вложений (скриншоты ошибок, базы данных 1С клиентов, логи, отчеты).</a:t>
+            </a:r>
+            <a:endParaRPr lang="en-US" sz="1200" dirty="0"/>
+          </a:p>
+        </p:txBody>
+      </p:sp>
+      <p:sp>
+        <p:nvSpPr>
+          <p:cNvPr id="15" name="Shape 13"/>
+          <p:cNvSpPr/>
+          <p:nvPr/>
+        </p:nvSpPr>
+        <p:spPr>
+          <a:xfrm>
+            <a:off x="384048" y="3630168"/>
+            <a:ext cx="4096512" cy="1312164"/>
+          </a:xfrm>
+          <a:prstGeom prst="roundRect">
+            <a:avLst>
+              <a:gd name="adj" fmla="val 6969"/>
+            </a:avLst>
+          </a:prstGeom>
+          <a:solidFill>
+            <a:srgbClr val="F8F4F0"/>
+          </a:solidFill>
+          <a:ln w="12700">
+            <a:solidFill>
+              <a:srgbClr val="EFEAE3"/>
+            </a:solidFill>
+            <a:prstDash val="solid"/>
+          </a:ln>
+          <a:effectLst>
+            <a:outerShdw sx="100000" sy="100000" kx="0" ky="0" algn="bl" rotWithShape="0" blurRad="152400" dist="38100" dir="2700000">
+              <a:srgbClr val="000000">
+                <a:alpha val="12000"/>
+              </a:srgbClr>
+            </a:outerShdw>
+          </a:effectLst>
+        </p:spPr>
+      </p:sp>
+      <p:sp>
+        <p:nvSpPr>
+          <p:cNvPr id="16" name="Text 14"/>
+          <p:cNvSpPr/>
+          <p:nvPr/>
+        </p:nvSpPr>
+        <p:spPr>
+          <a:xfrm>
+            <a:off x="521208" y="3703320"/>
+            <a:ext cx="3822192" cy="292608"/>
+          </a:xfrm>
+          <a:prstGeom prst="rect">
+            <a:avLst/>
+          </a:prstGeom>
+          <a:noFill/>
+          <a:ln/>
+        </p:spPr>
+        <p:txBody>
+          <a:bodyPr wrap="square" rtlCol="0" anchor="ctr"/>
+          <a:lstStyle/>
+          <a:p>
+            <a:pPr indent="0" marL="0">
+              <a:buNone/>
+            </a:pPr>
+            <a:r>
+              <a:rPr lang="en-US" sz="1200" b="1" dirty="0">
+                <a:solidFill>
+                  <a:srgbClr val="1A1A2E"/>
+                </a:solidFill>
+                <a:latin typeface="Cambria" pitchFamily="34" charset="0"/>
+                <a:ea typeface="Cambria" pitchFamily="34" charset="-122"/>
+                <a:cs typeface="Cambria" pitchFamily="34" charset="-120"/>
+              </a:rPr>
+              <a:t>5. WebSocket Service</a:t>
+            </a:r>
+            <a:endParaRPr lang="en-US" sz="1200" dirty="0"/>
+          </a:p>
+        </p:txBody>
+      </p:sp>
+      <p:sp>
+        <p:nvSpPr>
+          <p:cNvPr id="17" name="Text 15"/>
+          <p:cNvSpPr/>
+          <p:nvPr/>
+        </p:nvSpPr>
+        <p:spPr>
+          <a:xfrm>
+            <a:off x="521208" y="4014216"/>
+            <a:ext cx="3822192" cy="854964"/>
+          </a:xfrm>
+          <a:prstGeom prst="rect">
+            <a:avLst/>
+          </a:prstGeom>
+          <a:noFill/>
+          <a:ln/>
+        </p:spPr>
+        <p:txBody>
+          <a:bodyPr wrap="square" rtlCol="0" anchor="t"/>
+          <a:lstStyle/>
+          <a:p>
+            <a:pPr algn="l" indent="0" marL="0">
+              <a:buNone/>
+            </a:pPr>
+            <a:r>
+              <a:rPr lang="en-US" sz="1200" dirty="0">
+                <a:solidFill>
+                  <a:srgbClr val="2D2D3A"/>
+                </a:solidFill>
+                <a:latin typeface="Times New Roman" pitchFamily="34" charset="0"/>
+                <a:ea typeface="Times New Roman" pitchFamily="34" charset="-122"/>
+                <a:cs typeface="Times New Roman" pitchFamily="34" charset="-120"/>
+              </a:rPr>
+              <a:t>Служба мгновенной доставки сообщений и нотификаций. Держит постоянное дуплексное сетевое соединение.</a:t>
+            </a:r>
+            <a:endParaRPr lang="en-US" sz="1200" dirty="0"/>
+          </a:p>
+        </p:txBody>
+      </p:sp>
+      <p:sp>
+        <p:nvSpPr>
+          <p:cNvPr id="18" name="Shape 16"/>
+          <p:cNvSpPr/>
+          <p:nvPr/>
+        </p:nvSpPr>
+        <p:spPr>
+          <a:xfrm>
+            <a:off x="4663440" y="3630168"/>
+            <a:ext cx="4096512" cy="1312164"/>
+          </a:xfrm>
+          <a:prstGeom prst="roundRect">
+            <a:avLst>
+              <a:gd name="adj" fmla="val 6969"/>
+            </a:avLst>
+          </a:prstGeom>
+          <a:solidFill>
+            <a:srgbClr val="D4EDDA"/>
+          </a:solidFill>
+          <a:ln w="12700">
+            <a:solidFill>
+              <a:srgbClr val="EFEAE3"/>
+            </a:solidFill>
+            <a:prstDash val="solid"/>
+          </a:ln>
+          <a:effectLst>
+            <a:outerShdw sx="100000" sy="100000" kx="0" ky="0" algn="bl" rotWithShape="0" blurRad="152400" dist="38100" dir="2700000">
+              <a:srgbClr val="000000">
+                <a:alpha val="12000"/>
+              </a:srgbClr>
+            </a:outerShdw>
+          </a:effectLst>
+        </p:spPr>
+      </p:sp>
+      <p:sp>
+        <p:nvSpPr>
+          <p:cNvPr id="19" name="Text 17"/>
+          <p:cNvSpPr/>
+          <p:nvPr/>
+        </p:nvSpPr>
+        <p:spPr>
+          <a:xfrm>
+            <a:off x="4800600" y="3703320"/>
+            <a:ext cx="3822192" cy="292608"/>
+          </a:xfrm>
+          <a:prstGeom prst="rect">
+            <a:avLst/>
+          </a:prstGeom>
+          <a:noFill/>
+          <a:ln/>
+        </p:spPr>
+        <p:txBody>
+          <a:bodyPr wrap="square" rtlCol="0" anchor="ctr"/>
+          <a:lstStyle/>
+          <a:p>
+            <a:pPr indent="0" marL="0">
+              <a:buNone/>
+            </a:pPr>
+            <a:r>
+              <a:rPr lang="en-US" sz="1200" b="1" dirty="0">
+                <a:solidFill>
+                  <a:srgbClr val="1A1A2E"/>
+                </a:solidFill>
+                <a:latin typeface="Cambria" pitchFamily="34" charset="0"/>
+                <a:ea typeface="Cambria" pitchFamily="34" charset="-122"/>
+                <a:cs typeface="Cambria" pitchFamily="34" charset="-120"/>
+              </a:rPr>
+              <a:t>6. Sync &amp; 1C Simulator</a:t>
+            </a:r>
+            <a:endParaRPr lang="en-US" sz="1200" dirty="0"/>
+          </a:p>
+        </p:txBody>
+      </p:sp>
+      <p:sp>
+        <p:nvSpPr>
+          <p:cNvPr id="20" name="Text 18"/>
+          <p:cNvSpPr/>
+          <p:nvPr/>
+        </p:nvSpPr>
+        <p:spPr>
+          <a:xfrm>
+            <a:off x="4800600" y="4014216"/>
+            <a:ext cx="3822192" cy="854964"/>
+          </a:xfrm>
+          <a:prstGeom prst="rect">
+            <a:avLst/>
+          </a:prstGeom>
+          <a:noFill/>
+          <a:ln/>
+        </p:spPr>
+        <p:txBody>
+          <a:bodyPr wrap="square" rtlCol="0" anchor="t"/>
+          <a:lstStyle/>
+          <a:p>
+            <a:pPr algn="l" indent="0" marL="0">
+              <a:buNone/>
+            </a:pPr>
+            <a:r>
+              <a:rPr lang="en-US" sz="1200" dirty="0">
+                <a:solidFill>
+                  <a:srgbClr val="2D2D3A"/>
+                </a:solidFill>
+                <a:latin typeface="Times New Roman" pitchFamily="34" charset="0"/>
+                <a:ea typeface="Times New Roman" pitchFamily="34" charset="-122"/>
+                <a:cs typeface="Times New Roman" pitchFamily="34" charset="-120"/>
+              </a:rPr>
+              <a:t>Внешняя база-реплика и фоновые процессы обмена, симулирующие учетный контур 1С на предприятии.</a:t>
+            </a:r>
+            <a:endParaRPr lang="en-US" sz="1200" dirty="0"/>
+          </a:p>
+        </p:txBody>
+      </p:sp>
+    </p:spTree>
+  </p:cSld>
+  <p:clrMapOvr>
+    <a:masterClrMapping/>
+  </p:clrMapOvr>
+</p:sld>
+</file>
+
+<file path=ppt/slides/slide5.xml><?xml version="1.0" encoding="utf-8"?>
+<p:sld xmlns:a="http://schemas.openxmlformats.org/drawingml/2006/main" xmlns:r="http://schemas.openxmlformats.org/officeDocument/2006/relationships" xmlns:p="http://schemas.openxmlformats.org/presentationml/2006/main">
+  <p:cSld name="Slide 5">
+    <p:bg>
+      <p:bgPr>
+        <a:solidFill>
+          <a:srgbClr val="FFFFFF"/>
+        </a:solidFill>
+      </p:bgPr>
+    </p:bg>
+    <p:spTree>
+      <p:nvGrpSpPr>
+        <p:cNvPr id="1" name=""/>
+        <p:cNvGrpSpPr/>
+        <p:nvPr/>
+      </p:nvGrpSpPr>
+      <p:grpSpPr>
+        <a:xfrm>
+          <a:off x="0" y="0"/>
+          <a:ext cx="0" cy="0"/>
+          <a:chOff x="0" y="0"/>
+          <a:chExt cx="0" cy="0"/>
+        </a:xfrm>
+      </p:grpSpPr>
+      <p:sp>
+        <p:nvSpPr>
+          <p:cNvPr id="2" name="Text 0"/>
+          <p:cNvSpPr/>
+          <p:nvPr/>
+        </p:nvSpPr>
+        <p:spPr>
+          <a:xfrm>
+            <a:off x="384048" y="164592"/>
+            <a:ext cx="8375904" cy="548640"/>
+          </a:xfrm>
+          <a:prstGeom prst="rect">
+            <a:avLst/>
+          </a:prstGeom>
+          <a:noFill/>
+          <a:ln/>
+        </p:spPr>
+        <p:txBody>
+          <a:bodyPr wrap="square" rtlCol="0" anchor="b"/>
+          <a:lstStyle/>
+          <a:p>
+            <a:pPr algn="l" indent="0" marL="0">
+              <a:buNone/>
+            </a:pPr>
+            <a:r>
+              <a:rPr lang="en-US" sz="1600" b="1" dirty="0">
+                <a:solidFill>
+                  <a:srgbClr val="1A1A2E"/>
+                </a:solidFill>
+                <a:latin typeface="Georgia" pitchFamily="34" charset="0"/>
+                <a:ea typeface="Georgia" pitchFamily="34" charset="-122"/>
+                <a:cs typeface="Georgia" pitchFamily="34" charset="-120"/>
+              </a:rPr>
               <a:t>Стыковка подсистем: спецификация интерфейсов</a:t>
             </a:r>
-            <a:endParaRPr lang="en-US" sz="2000" dirty="0"/>
+            <a:endParaRPr lang="en-US" sz="1600" dirty="0"/>
           </a:p>
         </p:txBody>
       </p:sp>
       <p:graphicFrame>
         <p:nvGraphicFramePr>
-          <p:cNvPr id="5" name="Table 0"/>
+          <p:cNvPr id="6" name="Table 0"/>
           <p:cNvGraphicFramePr>
             <a:graphicFrameLocks noGrp="1"/>
           </p:cNvGraphicFramePr>
@@ -5267,27 +5428,27 @@
                         <a:buNone/>
                       </a:pPr>
                       <a:r>
-                        <a:rPr lang="en-US" sz="1050" b="1" dirty="0">
+                        <a:rPr lang="en-US" sz="1200" b="1" dirty="0">
                           <a:solidFill>
                             <a:srgbClr val="FFFFFF"/>
                           </a:solidFill>
-                          <a:latin typeface="Calibri" pitchFamily="34" charset="0"/>
-                          <a:ea typeface="Calibri" pitchFamily="34" charset="-122"/>
-                          <a:cs typeface="Calibri" pitchFamily="34" charset="-120"/>
+                          <a:latin typeface="Times New Roman" pitchFamily="34" charset="0"/>
+                          <a:ea typeface="Times New Roman" pitchFamily="34" charset="-122"/>
+                          <a:cs typeface="Times New Roman" pitchFamily="34" charset="-120"/>
                         </a:rPr>
                         <a:t>Пара подсистем</a:t>
                       </a:r>
-                      <a:endParaRPr lang="en-US" sz="1050" dirty="0">
-                        <a:latin typeface="Calibri" charset="0"/>
-                        <a:ea typeface="Calibri" charset="0"/>
-                        <a:cs typeface="Calibri" charset="0"/>
+                      <a:endParaRPr lang="en-US" sz="1200" dirty="0">
+                        <a:latin typeface="Times New Roman" charset="0"/>
+                        <a:ea typeface="Times New Roman" charset="0"/>
+                        <a:cs typeface="Times New Roman" charset="0"/>
                       </a:endParaRPr>
                     </a:p>
                   </a:txBody>
                   <a:tcPr marL="91440" marR="91440" marT="45720" marB="45720" anchor="ctr">
                     <a:lnL w="6350" cap="flat" cmpd="sng" algn="ctr">
                       <a:solidFill>
-                        <a:srgbClr val="FFEDD5"/>
+                        <a:srgbClr val="EFEAE3"/>
                       </a:solidFill>
                       <a:prstDash val="solid"/>
                       <a:round/>
@@ -5296,7 +5457,7 @@
                     </a:lnL>
                     <a:lnR w="6350" cap="flat" cmpd="sng" algn="ctr">
                       <a:solidFill>
-                        <a:srgbClr val="FFEDD5"/>
+                        <a:srgbClr val="EFEAE3"/>
                       </a:solidFill>
                       <a:prstDash val="solid"/>
                       <a:round/>
@@ -5305,7 +5466,7 @@
                     </a:lnR>
                     <a:lnT w="6350" cap="flat" cmpd="sng" algn="ctr">
                       <a:solidFill>
-                        <a:srgbClr val="FFEDD5"/>
+                        <a:srgbClr val="EFEAE3"/>
                       </a:solidFill>
                       <a:prstDash val="solid"/>
                       <a:round/>
@@ -5314,7 +5475,7 @@
                     </a:lnT>
                     <a:lnB w="6350" cap="flat" cmpd="sng" algn="ctr">
                       <a:solidFill>
-                        <a:srgbClr val="FFEDD5"/>
+                        <a:srgbClr val="EFEAE3"/>
                       </a:solidFill>
                       <a:prstDash val="solid"/>
                       <a:round/>
@@ -5322,7 +5483,7 @@
                       <a:tailEnd type="none" w="med" len="med"/>
                     </a:lnB>
                     <a:solidFill>
-                      <a:srgbClr val="0F1E36"/>
+                      <a:srgbClr val="1A1A2E"/>
                     </a:solidFill>
                   </a:tcPr>
                 </a:tc>
@@ -5335,27 +5496,27 @@
                         <a:buNone/>
                       </a:pPr>
                       <a:r>
-                        <a:rPr lang="en-US" sz="1050" b="1" dirty="0">
+                        <a:rPr lang="en-US" sz="1200" b="1" dirty="0">
                           <a:solidFill>
                             <a:srgbClr val="FFFFFF"/>
                           </a:solidFill>
-                          <a:latin typeface="Calibri" pitchFamily="34" charset="0"/>
-                          <a:ea typeface="Calibri" pitchFamily="34" charset="-122"/>
-                          <a:cs typeface="Calibri" pitchFamily="34" charset="-120"/>
+                          <a:latin typeface="Times New Roman" pitchFamily="34" charset="0"/>
+                          <a:ea typeface="Times New Roman" pitchFamily="34" charset="-122"/>
+                          <a:cs typeface="Times New Roman" pitchFamily="34" charset="-120"/>
                         </a:rPr>
                         <a:t>Протокол / Стык</a:t>
                       </a:r>
-                      <a:endParaRPr lang="en-US" sz="1050" dirty="0">
-                        <a:latin typeface="Calibri" charset="0"/>
-                        <a:ea typeface="Calibri" charset="0"/>
-                        <a:cs typeface="Calibri" charset="0"/>
+                      <a:endParaRPr lang="en-US" sz="1200" dirty="0">
+                        <a:latin typeface="Times New Roman" charset="0"/>
+                        <a:ea typeface="Times New Roman" charset="0"/>
+                        <a:cs typeface="Times New Roman" charset="0"/>
                       </a:endParaRPr>
                     </a:p>
                   </a:txBody>
                   <a:tcPr marL="91440" marR="91440" marT="45720" marB="45720" anchor="ctr">
                     <a:lnL w="6350" cap="flat" cmpd="sng" algn="ctr">
                       <a:solidFill>
-                        <a:srgbClr val="FFEDD5"/>
+                        <a:srgbClr val="EFEAE3"/>
                       </a:solidFill>
                       <a:prstDash val="solid"/>
                       <a:round/>
@@ -5364,7 +5525,7 @@
                     </a:lnL>
                     <a:lnR w="6350" cap="flat" cmpd="sng" algn="ctr">
                       <a:solidFill>
-                        <a:srgbClr val="FFEDD5"/>
+                        <a:srgbClr val="EFEAE3"/>
                       </a:solidFill>
                       <a:prstDash val="solid"/>
                       <a:round/>
@@ -5373,7 +5534,7 @@
                     </a:lnR>
                     <a:lnT w="6350" cap="flat" cmpd="sng" algn="ctr">
                       <a:solidFill>
-                        <a:srgbClr val="FFEDD5"/>
+                        <a:srgbClr val="EFEAE3"/>
                       </a:solidFill>
                       <a:prstDash val="solid"/>
                       <a:round/>
@@ -5382,7 +5543,7 @@
                     </a:lnT>
                     <a:lnB w="6350" cap="flat" cmpd="sng" algn="ctr">
                       <a:solidFill>
-                        <a:srgbClr val="FFEDD5"/>
+                        <a:srgbClr val="EFEAE3"/>
                       </a:solidFill>
                       <a:prstDash val="solid"/>
                       <a:round/>
@@ -5390,7 +5551,7 @@
                       <a:tailEnd type="none" w="med" len="med"/>
                     </a:lnB>
                     <a:solidFill>
-                      <a:srgbClr val="0F1E36"/>
+                      <a:srgbClr val="1A1A2E"/>
                     </a:solidFill>
                   </a:tcPr>
                 </a:tc>
@@ -5403,27 +5564,27 @@
                         <a:buNone/>
                       </a:pPr>
                       <a:r>
-                        <a:rPr lang="en-US" sz="1050" b="1" dirty="0">
+                        <a:rPr lang="en-US" sz="1200" b="1" dirty="0">
                           <a:solidFill>
                             <a:srgbClr val="FFFFFF"/>
                           </a:solidFill>
-                          <a:latin typeface="Calibri" pitchFamily="34" charset="0"/>
-                          <a:ea typeface="Calibri" pitchFamily="34" charset="-122"/>
-                          <a:cs typeface="Calibri" pitchFamily="34" charset="-120"/>
+                          <a:latin typeface="Times New Roman" pitchFamily="34" charset="0"/>
+                          <a:ea typeface="Times New Roman" pitchFamily="34" charset="-122"/>
+                          <a:cs typeface="Times New Roman" pitchFamily="34" charset="-120"/>
                         </a:rPr>
                         <a:t>Характер передачи данных</a:t>
                       </a:r>
-                      <a:endParaRPr lang="en-US" sz="1050" dirty="0">
-                        <a:latin typeface="Calibri" charset="0"/>
-                        <a:ea typeface="Calibri" charset="0"/>
-                        <a:cs typeface="Calibri" charset="0"/>
+                      <a:endParaRPr lang="en-US" sz="1200" dirty="0">
+                        <a:latin typeface="Times New Roman" charset="0"/>
+                        <a:ea typeface="Times New Roman" charset="0"/>
+                        <a:cs typeface="Times New Roman" charset="0"/>
                       </a:endParaRPr>
                     </a:p>
                   </a:txBody>
                   <a:tcPr marL="91440" marR="91440" marT="45720" marB="45720" anchor="ctr">
                     <a:lnL w="6350" cap="flat" cmpd="sng" algn="ctr">
                       <a:solidFill>
-                        <a:srgbClr val="FFEDD5"/>
+                        <a:srgbClr val="EFEAE3"/>
                       </a:solidFill>
                       <a:prstDash val="solid"/>
                       <a:round/>
@@ -5432,7 +5593,7 @@
                     </a:lnL>
                     <a:lnR w="6350" cap="flat" cmpd="sng" algn="ctr">
                       <a:solidFill>
-                        <a:srgbClr val="FFEDD5"/>
+                        <a:srgbClr val="EFEAE3"/>
                       </a:solidFill>
                       <a:prstDash val="solid"/>
                       <a:round/>
@@ -5441,7 +5602,7 @@
                     </a:lnR>
                     <a:lnT w="6350" cap="flat" cmpd="sng" algn="ctr">
                       <a:solidFill>
-                        <a:srgbClr val="FFEDD5"/>
+                        <a:srgbClr val="EFEAE3"/>
                       </a:solidFill>
                       <a:prstDash val="solid"/>
                       <a:round/>
@@ -5450,7 +5611,7 @@
                     </a:lnT>
                     <a:lnB w="6350" cap="flat" cmpd="sng" algn="ctr">
                       <a:solidFill>
-                        <a:srgbClr val="FFEDD5"/>
+                        <a:srgbClr val="EFEAE3"/>
                       </a:solidFill>
                       <a:prstDash val="solid"/>
                       <a:round/>
@@ -5458,7 +5619,7 @@
                       <a:tailEnd type="none" w="med" len="med"/>
                     </a:lnB>
                     <a:solidFill>
-                      <a:srgbClr val="0F1E36"/>
+                      <a:srgbClr val="1A1A2E"/>
                     </a:solidFill>
                   </a:tcPr>
                 </a:tc>
@@ -5473,27 +5634,27 @@
                         <a:buNone/>
                       </a:pPr>
                       <a:r>
-                        <a:rPr lang="en-US" sz="1050" dirty="0">
+                        <a:rPr lang="en-US" sz="1200" dirty="0">
                           <a:solidFill>
-                            <a:srgbClr val="1E293B"/>
+                            <a:srgbClr val="2D2D3A"/>
                           </a:solidFill>
-                          <a:latin typeface="Calibri" pitchFamily="34" charset="0"/>
-                          <a:ea typeface="Calibri" pitchFamily="34" charset="-122"/>
-                          <a:cs typeface="Calibri" pitchFamily="34" charset="-120"/>
+                          <a:latin typeface="Times New Roman" pitchFamily="34" charset="0"/>
+                          <a:ea typeface="Times New Roman" pitchFamily="34" charset="-122"/>
+                          <a:cs typeface="Times New Roman" pitchFamily="34" charset="-120"/>
                         </a:rPr>
                         <a:t>Frontend ↔ Backend API</a:t>
                       </a:r>
-                      <a:endParaRPr lang="en-US" sz="1050" dirty="0">
-                        <a:latin typeface="Calibri" charset="0"/>
-                        <a:ea typeface="Calibri" charset="0"/>
-                        <a:cs typeface="Calibri" charset="0"/>
+                      <a:endParaRPr lang="en-US" sz="1200" dirty="0">
+                        <a:latin typeface="Times New Roman" charset="0"/>
+                        <a:ea typeface="Times New Roman" charset="0"/>
+                        <a:cs typeface="Times New Roman" charset="0"/>
                       </a:endParaRPr>
                     </a:p>
                   </a:txBody>
                   <a:tcPr marL="91440" marR="91440" marT="45720" marB="45720" anchor="ctr">
                     <a:lnL w="6350" cap="flat" cmpd="sng" algn="ctr">
                       <a:solidFill>
-                        <a:srgbClr val="FFEDD5"/>
+                        <a:srgbClr val="EFEAE3"/>
                       </a:solidFill>
                       <a:prstDash val="solid"/>
                       <a:round/>
@@ -5502,7 +5663,7 @@
                     </a:lnL>
                     <a:lnR w="6350" cap="flat" cmpd="sng" algn="ctr">
                       <a:solidFill>
-                        <a:srgbClr val="FFEDD5"/>
+                        <a:srgbClr val="EFEAE3"/>
                       </a:solidFill>
                       <a:prstDash val="solid"/>
                       <a:round/>
@@ -5511,7 +5672,7 @@
                     </a:lnR>
                     <a:lnT w="6350" cap="flat" cmpd="sng" algn="ctr">
                       <a:solidFill>
-                        <a:srgbClr val="FFEDD5"/>
+                        <a:srgbClr val="EFEAE3"/>
                       </a:solidFill>
                       <a:prstDash val="solid"/>
                       <a:round/>
@@ -5520,7 +5681,7 @@
                     </a:lnT>
                     <a:lnB w="6350" cap="flat" cmpd="sng" algn="ctr">
                       <a:solidFill>
-                        <a:srgbClr val="FFEDD5"/>
+                        <a:srgbClr val="EFEAE3"/>
                       </a:solidFill>
                       <a:prstDash val="solid"/>
                       <a:round/>
@@ -5528,7 +5689,7 @@
                       <a:tailEnd type="none" w="med" len="med"/>
                     </a:lnB>
                     <a:solidFill>
-                      <a:srgbClr val="FFF7ED"/>
+                      <a:srgbClr val="F8F4F0"/>
                     </a:solidFill>
                   </a:tcPr>
                 </a:tc>
@@ -5541,27 +5702,27 @@
                         <a:buNone/>
                       </a:pPr>
                       <a:r>
-                        <a:rPr lang="en-US" sz="1050" dirty="0">
+                        <a:rPr lang="en-US" sz="1200" dirty="0">
                           <a:solidFill>
-                            <a:srgbClr val="1E293B"/>
+                            <a:srgbClr val="2D2D3A"/>
                           </a:solidFill>
-                          <a:latin typeface="Calibri" pitchFamily="34" charset="0"/>
-                          <a:ea typeface="Calibri" pitchFamily="34" charset="-122"/>
-                          <a:cs typeface="Calibri" pitchFamily="34" charset="-120"/>
+                          <a:latin typeface="Times New Roman" pitchFamily="34" charset="0"/>
+                          <a:ea typeface="Times New Roman" pitchFamily="34" charset="-122"/>
+                          <a:cs typeface="Times New Roman" pitchFamily="34" charset="-120"/>
                         </a:rPr>
                         <a:t>REST API (HTTP, JSON)</a:t>
                       </a:r>
-                      <a:endParaRPr lang="en-US" sz="1050" dirty="0">
-                        <a:latin typeface="Calibri" charset="0"/>
-                        <a:ea typeface="Calibri" charset="0"/>
-                        <a:cs typeface="Calibri" charset="0"/>
+                      <a:endParaRPr lang="en-US" sz="1200" dirty="0">
+                        <a:latin typeface="Times New Roman" charset="0"/>
+                        <a:ea typeface="Times New Roman" charset="0"/>
+                        <a:cs typeface="Times New Roman" charset="0"/>
                       </a:endParaRPr>
                     </a:p>
                   </a:txBody>
                   <a:tcPr marL="91440" marR="91440" marT="45720" marB="45720" anchor="ctr">
                     <a:lnL w="6350" cap="flat" cmpd="sng" algn="ctr">
                       <a:solidFill>
-                        <a:srgbClr val="FFEDD5"/>
+                        <a:srgbClr val="EFEAE3"/>
                       </a:solidFill>
                       <a:prstDash val="solid"/>
                       <a:round/>
@@ -5570,7 +5731,7 @@
                     </a:lnL>
                     <a:lnR w="6350" cap="flat" cmpd="sng" algn="ctr">
                       <a:solidFill>
-                        <a:srgbClr val="FFEDD5"/>
+                        <a:srgbClr val="EFEAE3"/>
                       </a:solidFill>
                       <a:prstDash val="solid"/>
                       <a:round/>
@@ -5579,7 +5740,7 @@
                     </a:lnR>
                     <a:lnT w="6350" cap="flat" cmpd="sng" algn="ctr">
                       <a:solidFill>
-                        <a:srgbClr val="FFEDD5"/>
+                        <a:srgbClr val="EFEAE3"/>
                       </a:solidFill>
                       <a:prstDash val="solid"/>
                       <a:round/>
@@ -5588,7 +5749,7 @@
                     </a:lnT>
                     <a:lnB w="6350" cap="flat" cmpd="sng" algn="ctr">
                       <a:solidFill>
-                        <a:srgbClr val="FFEDD5"/>
+                        <a:srgbClr val="EFEAE3"/>
                       </a:solidFill>
                       <a:prstDash val="solid"/>
                       <a:round/>
@@ -5596,7 +5757,7 @@
                       <a:tailEnd type="none" w="med" len="med"/>
                     </a:lnB>
                     <a:solidFill>
-                      <a:srgbClr val="FFF7ED"/>
+                      <a:srgbClr val="F8F4F0"/>
                     </a:solidFill>
                   </a:tcPr>
                 </a:tc>
@@ -5609,27 +5770,27 @@
                         <a:buNone/>
                       </a:pPr>
                       <a:r>
-                        <a:rPr lang="en-US" sz="1050" dirty="0">
+                        <a:rPr lang="en-US" sz="1200" dirty="0">
                           <a:solidFill>
-                            <a:srgbClr val="1E293B"/>
+                            <a:srgbClr val="2D2D3A"/>
                           </a:solidFill>
-                          <a:latin typeface="Calibri" pitchFamily="34" charset="0"/>
-                          <a:ea typeface="Calibri" pitchFamily="34" charset="-122"/>
-                          <a:cs typeface="Calibri" pitchFamily="34" charset="-120"/>
+                          <a:latin typeface="Times New Roman" pitchFamily="34" charset="0"/>
+                          <a:ea typeface="Times New Roman" pitchFamily="34" charset="-122"/>
+                          <a:cs typeface="Times New Roman" pitchFamily="34" charset="-120"/>
                         </a:rPr>
                         <a:t>Синхронный (запрос-ответ)</a:t>
                       </a:r>
-                      <a:endParaRPr lang="en-US" sz="1050" dirty="0">
-                        <a:latin typeface="Calibri" charset="0"/>
-                        <a:ea typeface="Calibri" charset="0"/>
-                        <a:cs typeface="Calibri" charset="0"/>
+                      <a:endParaRPr lang="en-US" sz="1200" dirty="0">
+                        <a:latin typeface="Times New Roman" charset="0"/>
+                        <a:ea typeface="Times New Roman" charset="0"/>
+                        <a:cs typeface="Times New Roman" charset="0"/>
                       </a:endParaRPr>
                     </a:p>
                   </a:txBody>
                   <a:tcPr marL="91440" marR="91440" marT="45720" marB="45720" anchor="ctr">
                     <a:lnL w="6350" cap="flat" cmpd="sng" algn="ctr">
                       <a:solidFill>
-                        <a:srgbClr val="FFEDD5"/>
+                        <a:srgbClr val="EFEAE3"/>
                       </a:solidFill>
                       <a:prstDash val="solid"/>
                       <a:round/>
@@ -5638,7 +5799,7 @@
                     </a:lnL>
                     <a:lnR w="6350" cap="flat" cmpd="sng" algn="ctr">
                       <a:solidFill>
-                        <a:srgbClr val="FFEDD5"/>
+                        <a:srgbClr val="EFEAE3"/>
                       </a:solidFill>
                       <a:prstDash val="solid"/>
                       <a:round/>
@@ -5647,7 +5808,7 @@
                     </a:lnR>
                     <a:lnT w="6350" cap="flat" cmpd="sng" algn="ctr">
                       <a:solidFill>
-                        <a:srgbClr val="FFEDD5"/>
+                        <a:srgbClr val="EFEAE3"/>
                       </a:solidFill>
                       <a:prstDash val="solid"/>
                       <a:round/>
@@ -5656,7 +5817,7 @@
                     </a:lnT>
                     <a:lnB w="6350" cap="flat" cmpd="sng" algn="ctr">
                       <a:solidFill>
-                        <a:srgbClr val="FFEDD5"/>
+                        <a:srgbClr val="EFEAE3"/>
                       </a:solidFill>
                       <a:prstDash val="solid"/>
                       <a:round/>
@@ -5664,7 +5825,7 @@
                       <a:tailEnd type="none" w="med" len="med"/>
                     </a:lnB>
                     <a:solidFill>
-                      <a:srgbClr val="FFF7ED"/>
+                      <a:srgbClr val="F8F4F0"/>
                     </a:solidFill>
                   </a:tcPr>
                 </a:tc>
@@ -5679,27 +5840,27 @@
                         <a:buNone/>
                       </a:pPr>
                       <a:r>
-                        <a:rPr lang="en-US" sz="1050" dirty="0">
+                        <a:rPr lang="en-US" sz="1200" dirty="0">
                           <a:solidFill>
-                            <a:srgbClr val="1E293B"/>
+                            <a:srgbClr val="2D2D3A"/>
                           </a:solidFill>
-                          <a:latin typeface="Calibri" pitchFamily="34" charset="0"/>
-                          <a:ea typeface="Calibri" pitchFamily="34" charset="-122"/>
-                          <a:cs typeface="Calibri" pitchFamily="34" charset="-120"/>
+                          <a:latin typeface="Times New Roman" pitchFamily="34" charset="0"/>
+                          <a:ea typeface="Times New Roman" pitchFamily="34" charset="-122"/>
+                          <a:cs typeface="Times New Roman" pitchFamily="34" charset="-120"/>
                         </a:rPr>
                         <a:t>Frontend ↔ WebSocket</a:t>
                       </a:r>
-                      <a:endParaRPr lang="en-US" sz="1050" dirty="0">
-                        <a:latin typeface="Calibri" charset="0"/>
-                        <a:ea typeface="Calibri" charset="0"/>
-                        <a:cs typeface="Calibri" charset="0"/>
+                      <a:endParaRPr lang="en-US" sz="1200" dirty="0">
+                        <a:latin typeface="Times New Roman" charset="0"/>
+                        <a:ea typeface="Times New Roman" charset="0"/>
+                        <a:cs typeface="Times New Roman" charset="0"/>
                       </a:endParaRPr>
                     </a:p>
                   </a:txBody>
                   <a:tcPr marL="91440" marR="91440" marT="45720" marB="45720" anchor="ctr">
                     <a:lnL w="6350" cap="flat" cmpd="sng" algn="ctr">
                       <a:solidFill>
-                        <a:srgbClr val="FFEDD5"/>
+                        <a:srgbClr val="EFEAE3"/>
                       </a:solidFill>
                       <a:prstDash val="solid"/>
                       <a:round/>
@@ -5708,7 +5869,7 @@
                     </a:lnL>
                     <a:lnR w="6350" cap="flat" cmpd="sng" algn="ctr">
                       <a:solidFill>
-                        <a:srgbClr val="FFEDD5"/>
+                        <a:srgbClr val="EFEAE3"/>
                       </a:solidFill>
                       <a:prstDash val="solid"/>
                       <a:round/>
@@ -5717,7 +5878,7 @@
                     </a:lnR>
                     <a:lnT w="6350" cap="flat" cmpd="sng" algn="ctr">
                       <a:solidFill>
-                        <a:srgbClr val="FFEDD5"/>
+                        <a:srgbClr val="EFEAE3"/>
                       </a:solidFill>
                       <a:prstDash val="solid"/>
                       <a:round/>
@@ -5726,7 +5887,7 @@
                     </a:lnT>
                     <a:lnB w="6350" cap="flat" cmpd="sng" algn="ctr">
                       <a:solidFill>
-                        <a:srgbClr val="FFEDD5"/>
+                        <a:srgbClr val="EFEAE3"/>
                       </a:solidFill>
                       <a:prstDash val="solid"/>
                       <a:round/>
@@ -5747,27 +5908,27 @@
                         <a:buNone/>
                       </a:pPr>
                       <a:r>
-                        <a:rPr lang="en-US" sz="1050" dirty="0">
+                        <a:rPr lang="en-US" sz="1200" dirty="0">
                           <a:solidFill>
-                            <a:srgbClr val="1E293B"/>
+                            <a:srgbClr val="2D2D3A"/>
                           </a:solidFill>
-                          <a:latin typeface="Calibri" pitchFamily="34" charset="0"/>
-                          <a:ea typeface="Calibri" pitchFamily="34" charset="-122"/>
-                          <a:cs typeface="Calibri" pitchFamily="34" charset="-120"/>
+                          <a:latin typeface="Times New Roman" pitchFamily="34" charset="0"/>
+                          <a:ea typeface="Times New Roman" pitchFamily="34" charset="-122"/>
+                          <a:cs typeface="Times New Roman" pitchFamily="34" charset="-120"/>
                         </a:rPr>
                         <a:t>WebSocket (WS, JSON)</a:t>
                       </a:r>
-                      <a:endParaRPr lang="en-US" sz="1050" dirty="0">
-                        <a:latin typeface="Calibri" charset="0"/>
-                        <a:ea typeface="Calibri" charset="0"/>
-                        <a:cs typeface="Calibri" charset="0"/>
+                      <a:endParaRPr lang="en-US" sz="1200" dirty="0">
+                        <a:latin typeface="Times New Roman" charset="0"/>
+                        <a:ea typeface="Times New Roman" charset="0"/>
+                        <a:cs typeface="Times New Roman" charset="0"/>
                       </a:endParaRPr>
                     </a:p>
                   </a:txBody>
                   <a:tcPr marL="91440" marR="91440" marT="45720" marB="45720" anchor="ctr">
                     <a:lnL w="6350" cap="flat" cmpd="sng" algn="ctr">
                       <a:solidFill>
-                        <a:srgbClr val="FFEDD5"/>
+                        <a:srgbClr val="EFEAE3"/>
                       </a:solidFill>
                       <a:prstDash val="solid"/>
                       <a:round/>
@@ -5776,7 +5937,7 @@
                     </a:lnL>
                     <a:lnR w="6350" cap="flat" cmpd="sng" algn="ctr">
                       <a:solidFill>
-                        <a:srgbClr val="FFEDD5"/>
+                        <a:srgbClr val="EFEAE3"/>
                       </a:solidFill>
                       <a:prstDash val="solid"/>
                       <a:round/>
@@ -5785,7 +5946,7 @@
                     </a:lnR>
                     <a:lnT w="6350" cap="flat" cmpd="sng" algn="ctr">
                       <a:solidFill>
-                        <a:srgbClr val="FFEDD5"/>
+                        <a:srgbClr val="EFEAE3"/>
                       </a:solidFill>
                       <a:prstDash val="solid"/>
                       <a:round/>
@@ -5794,7 +5955,7 @@
                     </a:lnT>
                     <a:lnB w="6350" cap="flat" cmpd="sng" algn="ctr">
                       <a:solidFill>
-                        <a:srgbClr val="FFEDD5"/>
+                        <a:srgbClr val="EFEAE3"/>
                       </a:solidFill>
                       <a:prstDash val="solid"/>
                       <a:round/>
@@ -5815,27 +5976,27 @@
                         <a:buNone/>
                       </a:pPr>
                       <a:r>
-                        <a:rPr lang="en-US" sz="1050" dirty="0">
+                        <a:rPr lang="en-US" sz="1200" dirty="0">
                           <a:solidFill>
-                            <a:srgbClr val="1E293B"/>
+                            <a:srgbClr val="2D2D3A"/>
                           </a:solidFill>
-                          <a:latin typeface="Calibri" pitchFamily="34" charset="0"/>
-                          <a:ea typeface="Calibri" pitchFamily="34" charset="-122"/>
-                          <a:cs typeface="Calibri" pitchFamily="34" charset="-120"/>
+                          <a:latin typeface="Times New Roman" pitchFamily="34" charset="0"/>
+                          <a:ea typeface="Times New Roman" pitchFamily="34" charset="-122"/>
+                          <a:cs typeface="Times New Roman" pitchFamily="34" charset="-120"/>
                         </a:rPr>
                         <a:t>Асинхронный дуплексный (push)</a:t>
                       </a:r>
-                      <a:endParaRPr lang="en-US" sz="1050" dirty="0">
-                        <a:latin typeface="Calibri" charset="0"/>
-                        <a:ea typeface="Calibri" charset="0"/>
-                        <a:cs typeface="Calibri" charset="0"/>
+                      <a:endParaRPr lang="en-US" sz="1200" dirty="0">
+                        <a:latin typeface="Times New Roman" charset="0"/>
+                        <a:ea typeface="Times New Roman" charset="0"/>
+                        <a:cs typeface="Times New Roman" charset="0"/>
                       </a:endParaRPr>
                     </a:p>
                   </a:txBody>
                   <a:tcPr marL="91440" marR="91440" marT="45720" marB="45720" anchor="ctr">
                     <a:lnL w="6350" cap="flat" cmpd="sng" algn="ctr">
                       <a:solidFill>
-                        <a:srgbClr val="FFEDD5"/>
+                        <a:srgbClr val="EFEAE3"/>
                       </a:solidFill>
                       <a:prstDash val="solid"/>
                       <a:round/>
@@ -5844,7 +6005,7 @@
                     </a:lnL>
                     <a:lnR w="6350" cap="flat" cmpd="sng" algn="ctr">
                       <a:solidFill>
-                        <a:srgbClr val="FFEDD5"/>
+                        <a:srgbClr val="EFEAE3"/>
                       </a:solidFill>
                       <a:prstDash val="solid"/>
                       <a:round/>
@@ -5853,7 +6014,7 @@
                     </a:lnR>
                     <a:lnT w="6350" cap="flat" cmpd="sng" algn="ctr">
                       <a:solidFill>
-                        <a:srgbClr val="FFEDD5"/>
+                        <a:srgbClr val="EFEAE3"/>
                       </a:solidFill>
                       <a:prstDash val="solid"/>
                       <a:round/>
@@ -5862,7 +6023,7 @@
                     </a:lnT>
                     <a:lnB w="6350" cap="flat" cmpd="sng" algn="ctr">
                       <a:solidFill>
-                        <a:srgbClr val="FFEDD5"/>
+                        <a:srgbClr val="EFEAE3"/>
                       </a:solidFill>
                       <a:prstDash val="solid"/>
                       <a:round/>
@@ -5885,27 +6046,27 @@
                         <a:buNone/>
                       </a:pPr>
                       <a:r>
-                        <a:rPr lang="en-US" sz="1050" dirty="0">
+                        <a:rPr lang="en-US" sz="1200" dirty="0">
                           <a:solidFill>
-                            <a:srgbClr val="1E293B"/>
+                            <a:srgbClr val="2D2D3A"/>
                           </a:solidFill>
-                          <a:latin typeface="Calibri" pitchFamily="34" charset="0"/>
-                          <a:ea typeface="Calibri" pitchFamily="34" charset="-122"/>
-                          <a:cs typeface="Calibri" pitchFamily="34" charset="-120"/>
+                          <a:latin typeface="Times New Roman" pitchFamily="34" charset="0"/>
+                          <a:ea typeface="Times New Roman" pitchFamily="34" charset="-122"/>
+                          <a:cs typeface="Times New Roman" pitchFamily="34" charset="-120"/>
                         </a:rPr>
                         <a:t>Backend ↔ PostgreSQL</a:t>
                       </a:r>
-                      <a:endParaRPr lang="en-US" sz="1050" dirty="0">
-                        <a:latin typeface="Calibri" charset="0"/>
-                        <a:ea typeface="Calibri" charset="0"/>
-                        <a:cs typeface="Calibri" charset="0"/>
+                      <a:endParaRPr lang="en-US" sz="1200" dirty="0">
+                        <a:latin typeface="Times New Roman" charset="0"/>
+                        <a:ea typeface="Times New Roman" charset="0"/>
+                        <a:cs typeface="Times New Roman" charset="0"/>
                       </a:endParaRPr>
                     </a:p>
                   </a:txBody>
                   <a:tcPr marL="91440" marR="91440" marT="45720" marB="45720" anchor="ctr">
                     <a:lnL w="6350" cap="flat" cmpd="sng" algn="ctr">
                       <a:solidFill>
-                        <a:srgbClr val="FFEDD5"/>
+                        <a:srgbClr val="EFEAE3"/>
                       </a:solidFill>
                       <a:prstDash val="solid"/>
                       <a:round/>
@@ -5914,7 +6075,7 @@
                     </a:lnL>
                     <a:lnR w="6350" cap="flat" cmpd="sng" algn="ctr">
                       <a:solidFill>
-                        <a:srgbClr val="FFEDD5"/>
+                        <a:srgbClr val="EFEAE3"/>
                       </a:solidFill>
                       <a:prstDash val="solid"/>
                       <a:round/>
@@ -5923,7 +6084,7 @@
                     </a:lnR>
                     <a:lnT w="6350" cap="flat" cmpd="sng" algn="ctr">
                       <a:solidFill>
-                        <a:srgbClr val="FFEDD5"/>
+                        <a:srgbClr val="EFEAE3"/>
                       </a:solidFill>
                       <a:prstDash val="solid"/>
                       <a:round/>
@@ -5932,7 +6093,7 @@
                     </a:lnT>
                     <a:lnB w="6350" cap="flat" cmpd="sng" algn="ctr">
                       <a:solidFill>
-                        <a:srgbClr val="FFEDD5"/>
+                        <a:srgbClr val="EFEAE3"/>
                       </a:solidFill>
                       <a:prstDash val="solid"/>
                       <a:round/>
@@ -5940,7 +6101,7 @@
                       <a:tailEnd type="none" w="med" len="med"/>
                     </a:lnB>
                     <a:solidFill>
-                      <a:srgbClr val="FFF7ED"/>
+                      <a:srgbClr val="F8F4F0"/>
                     </a:solidFill>
                   </a:tcPr>
                 </a:tc>
@@ -5953,27 +6114,27 @@
                         <a:buNone/>
                       </a:pPr>
                       <a:r>
-                        <a:rPr lang="en-US" sz="1050" dirty="0">
+                        <a:rPr lang="en-US" sz="1200" dirty="0">
                           <a:solidFill>
-                            <a:srgbClr val="1E293B"/>
+                            <a:srgbClr val="2D2D3A"/>
                           </a:solidFill>
-                          <a:latin typeface="Calibri" pitchFamily="34" charset="0"/>
-                          <a:ea typeface="Calibri" pitchFamily="34" charset="-122"/>
-                          <a:cs typeface="Calibri" pitchFamily="34" charset="-120"/>
+                          <a:latin typeface="Times New Roman" pitchFamily="34" charset="0"/>
+                          <a:ea typeface="Times New Roman" pitchFamily="34" charset="-122"/>
+                          <a:cs typeface="Times New Roman" pitchFamily="34" charset="-120"/>
                         </a:rPr>
                         <a:t>TCP / PostgreSQL Driver</a:t>
                       </a:r>
-                      <a:endParaRPr lang="en-US" sz="1050" dirty="0">
-                        <a:latin typeface="Calibri" charset="0"/>
-                        <a:ea typeface="Calibri" charset="0"/>
-                        <a:cs typeface="Calibri" charset="0"/>
+                      <a:endParaRPr lang="en-US" sz="1200" dirty="0">
+                        <a:latin typeface="Times New Roman" charset="0"/>
+                        <a:ea typeface="Times New Roman" charset="0"/>
+                        <a:cs typeface="Times New Roman" charset="0"/>
                       </a:endParaRPr>
                     </a:p>
                   </a:txBody>
                   <a:tcPr marL="91440" marR="91440" marT="45720" marB="45720" anchor="ctr">
                     <a:lnL w="6350" cap="flat" cmpd="sng" algn="ctr">
                       <a:solidFill>
-                        <a:srgbClr val="FFEDD5"/>
+                        <a:srgbClr val="EFEAE3"/>
                       </a:solidFill>
                       <a:prstDash val="solid"/>
                       <a:round/>
@@ -5982,7 +6143,7 @@
                     </a:lnL>
                     <a:lnR w="6350" cap="flat" cmpd="sng" algn="ctr">
                       <a:solidFill>
-                        <a:srgbClr val="FFEDD5"/>
+                        <a:srgbClr val="EFEAE3"/>
                       </a:solidFill>
                       <a:prstDash val="solid"/>
                       <a:round/>
@@ -5991,7 +6152,7 @@
                     </a:lnR>
                     <a:lnT w="6350" cap="flat" cmpd="sng" algn="ctr">
                       <a:solidFill>
-                        <a:srgbClr val="FFEDD5"/>
+                        <a:srgbClr val="EFEAE3"/>
                       </a:solidFill>
                       <a:prstDash val="solid"/>
                       <a:round/>
@@ -6000,7 +6161,7 @@
                     </a:lnT>
                     <a:lnB w="6350" cap="flat" cmpd="sng" algn="ctr">
                       <a:solidFill>
-                        <a:srgbClr val="FFEDD5"/>
+                        <a:srgbClr val="EFEAE3"/>
                       </a:solidFill>
                       <a:prstDash val="solid"/>
                       <a:round/>
@@ -6008,7 +6169,7 @@
                       <a:tailEnd type="none" w="med" len="med"/>
                     </a:lnB>
                     <a:solidFill>
-                      <a:srgbClr val="FFF7ED"/>
+                      <a:srgbClr val="F8F4F0"/>
                     </a:solidFill>
                   </a:tcPr>
                 </a:tc>
@@ -6021,27 +6182,27 @@
                         <a:buNone/>
                       </a:pPr>
                       <a:r>
-                        <a:rPr lang="en-US" sz="1050" dirty="0">
+                        <a:rPr lang="en-US" sz="1200" dirty="0">
                           <a:solidFill>
-                            <a:srgbClr val="1E293B"/>
+                            <a:srgbClr val="2D2D3A"/>
                           </a:solidFill>
-                          <a:latin typeface="Calibri" pitchFamily="34" charset="0"/>
-                          <a:ea typeface="Calibri" pitchFamily="34" charset="-122"/>
-                          <a:cs typeface="Calibri" pitchFamily="34" charset="-120"/>
+                          <a:latin typeface="Times New Roman" pitchFamily="34" charset="0"/>
+                          <a:ea typeface="Times New Roman" pitchFamily="34" charset="-122"/>
+                          <a:cs typeface="Times New Roman" pitchFamily="34" charset="-120"/>
                         </a:rPr>
                         <a:t>Синхронный пул соединений</a:t>
                       </a:r>
-                      <a:endParaRPr lang="en-US" sz="1050" dirty="0">
-                        <a:latin typeface="Calibri" charset="0"/>
-                        <a:ea typeface="Calibri" charset="0"/>
-                        <a:cs typeface="Calibri" charset="0"/>
+                      <a:endParaRPr lang="en-US" sz="1200" dirty="0">
+                        <a:latin typeface="Times New Roman" charset="0"/>
+                        <a:ea typeface="Times New Roman" charset="0"/>
+                        <a:cs typeface="Times New Roman" charset="0"/>
                       </a:endParaRPr>
                     </a:p>
                   </a:txBody>
                   <a:tcPr marL="91440" marR="91440" marT="45720" marB="45720" anchor="ctr">
                     <a:lnL w="6350" cap="flat" cmpd="sng" algn="ctr">
                       <a:solidFill>
-                        <a:srgbClr val="FFEDD5"/>
+                        <a:srgbClr val="EFEAE3"/>
                       </a:solidFill>
                       <a:prstDash val="solid"/>
                       <a:round/>
@@ -6050,7 +6211,7 @@
                     </a:lnL>
                     <a:lnR w="6350" cap="flat" cmpd="sng" algn="ctr">
                       <a:solidFill>
-                        <a:srgbClr val="FFEDD5"/>
+                        <a:srgbClr val="EFEAE3"/>
                       </a:solidFill>
                       <a:prstDash val="solid"/>
                       <a:round/>
@@ -6059,7 +6220,7 @@
                     </a:lnR>
                     <a:lnT w="6350" cap="flat" cmpd="sng" algn="ctr">
                       <a:solidFill>
-                        <a:srgbClr val="FFEDD5"/>
+                        <a:srgbClr val="EFEAE3"/>
                       </a:solidFill>
                       <a:prstDash val="solid"/>
                       <a:round/>
@@ -6068,7 +6229,7 @@
                     </a:lnT>
                     <a:lnB w="6350" cap="flat" cmpd="sng" algn="ctr">
                       <a:solidFill>
-                        <a:srgbClr val="FFEDD5"/>
+                        <a:srgbClr val="EFEAE3"/>
                       </a:solidFill>
                       <a:prstDash val="solid"/>
                       <a:round/>
@@ -6076,7 +6237,7 @@
                       <a:tailEnd type="none" w="med" len="med"/>
                     </a:lnB>
                     <a:solidFill>
-                      <a:srgbClr val="FFF7ED"/>
+                      <a:srgbClr val="F8F4F0"/>
                     </a:solidFill>
                   </a:tcPr>
                 </a:tc>
@@ -6091,27 +6252,27 @@
                         <a:buNone/>
                       </a:pPr>
                       <a:r>
-                        <a:rPr lang="en-US" sz="1050" dirty="0">
+                        <a:rPr lang="en-US" sz="1200" dirty="0">
                           <a:solidFill>
-                            <a:srgbClr val="1E293B"/>
+                            <a:srgbClr val="2D2D3A"/>
                           </a:solidFill>
-                          <a:latin typeface="Calibri" pitchFamily="34" charset="0"/>
-                          <a:ea typeface="Calibri" pitchFamily="34" charset="-122"/>
-                          <a:cs typeface="Calibri" pitchFamily="34" charset="-120"/>
+                          <a:latin typeface="Times New Roman" pitchFamily="34" charset="0"/>
+                          <a:ea typeface="Times New Roman" pitchFamily="34" charset="-122"/>
+                          <a:cs typeface="Times New Roman" pitchFamily="34" charset="-120"/>
                         </a:rPr>
                         <a:t>Backend ↔ S3 MinIO</a:t>
                       </a:r>
-                      <a:endParaRPr lang="en-US" sz="1050" dirty="0">
-                        <a:latin typeface="Calibri" charset="0"/>
-                        <a:ea typeface="Calibri" charset="0"/>
-                        <a:cs typeface="Calibri" charset="0"/>
+                      <a:endParaRPr lang="en-US" sz="1200" dirty="0">
+                        <a:latin typeface="Times New Roman" charset="0"/>
+                        <a:ea typeface="Times New Roman" charset="0"/>
+                        <a:cs typeface="Times New Roman" charset="0"/>
                       </a:endParaRPr>
                     </a:p>
                   </a:txBody>
                   <a:tcPr marL="91440" marR="91440" marT="45720" marB="45720" anchor="ctr">
                     <a:lnL w="6350" cap="flat" cmpd="sng" algn="ctr">
                       <a:solidFill>
-                        <a:srgbClr val="FFEDD5"/>
+                        <a:srgbClr val="EFEAE3"/>
                       </a:solidFill>
                       <a:prstDash val="solid"/>
                       <a:round/>
@@ -6120,7 +6281,7 @@
                     </a:lnL>
                     <a:lnR w="6350" cap="flat" cmpd="sng" algn="ctr">
                       <a:solidFill>
-                        <a:srgbClr val="FFEDD5"/>
+                        <a:srgbClr val="EFEAE3"/>
                       </a:solidFill>
                       <a:prstDash val="solid"/>
                       <a:round/>
@@ -6129,7 +6290,7 @@
                     </a:lnR>
                     <a:lnT w="6350" cap="flat" cmpd="sng" algn="ctr">
                       <a:solidFill>
-                        <a:srgbClr val="FFEDD5"/>
+                        <a:srgbClr val="EFEAE3"/>
                       </a:solidFill>
                       <a:prstDash val="solid"/>
                       <a:round/>
@@ -6138,7 +6299,7 @@
                     </a:lnT>
                     <a:lnB w="6350" cap="flat" cmpd="sng" algn="ctr">
                       <a:solidFill>
-                        <a:srgbClr val="FFEDD5"/>
+                        <a:srgbClr val="EFEAE3"/>
                       </a:solidFill>
                       <a:prstDash val="solid"/>
                       <a:round/>
@@ -6159,27 +6320,27 @@
                         <a:buNone/>
                       </a:pPr>
                       <a:r>
-                        <a:rPr lang="en-US" sz="1050" dirty="0">
+                        <a:rPr lang="en-US" sz="1200" dirty="0">
                           <a:solidFill>
-                            <a:srgbClr val="1E293B"/>
+                            <a:srgbClr val="2D2D3A"/>
                           </a:solidFill>
-                          <a:latin typeface="Calibri" pitchFamily="34" charset="0"/>
-                          <a:ea typeface="Calibri" pitchFamily="34" charset="-122"/>
-                          <a:cs typeface="Calibri" pitchFamily="34" charset="-120"/>
+                          <a:latin typeface="Times New Roman" pitchFamily="34" charset="0"/>
+                          <a:ea typeface="Times New Roman" pitchFamily="34" charset="-122"/>
+                          <a:cs typeface="Times New Roman" pitchFamily="34" charset="-120"/>
                         </a:rPr>
                         <a:t>AWS SDK S3 API</a:t>
                       </a:r>
-                      <a:endParaRPr lang="en-US" sz="1050" dirty="0">
-                        <a:latin typeface="Calibri" charset="0"/>
-                        <a:ea typeface="Calibri" charset="0"/>
-                        <a:cs typeface="Calibri" charset="0"/>
+                      <a:endParaRPr lang="en-US" sz="1200" dirty="0">
+                        <a:latin typeface="Times New Roman" charset="0"/>
+                        <a:ea typeface="Times New Roman" charset="0"/>
+                        <a:cs typeface="Times New Roman" charset="0"/>
                       </a:endParaRPr>
                     </a:p>
                   </a:txBody>
                   <a:tcPr marL="91440" marR="91440" marT="45720" marB="45720" anchor="ctr">
                     <a:lnL w="6350" cap="flat" cmpd="sng" algn="ctr">
                       <a:solidFill>
-                        <a:srgbClr val="FFEDD5"/>
+                        <a:srgbClr val="EFEAE3"/>
                       </a:solidFill>
                       <a:prstDash val="solid"/>
                       <a:round/>
@@ -6188,7 +6349,7 @@
                     </a:lnL>
                     <a:lnR w="6350" cap="flat" cmpd="sng" algn="ctr">
                       <a:solidFill>
-                        <a:srgbClr val="FFEDD5"/>
+                        <a:srgbClr val="EFEAE3"/>
                       </a:solidFill>
                       <a:prstDash val="solid"/>
                       <a:round/>
@@ -6197,7 +6358,7 @@
                     </a:lnR>
                     <a:lnT w="6350" cap="flat" cmpd="sng" algn="ctr">
                       <a:solidFill>
-                        <a:srgbClr val="FFEDD5"/>
+                        <a:srgbClr val="EFEAE3"/>
                       </a:solidFill>
                       <a:prstDash val="solid"/>
                       <a:round/>
@@ -6206,7 +6367,7 @@
                     </a:lnT>
                     <a:lnB w="6350" cap="flat" cmpd="sng" algn="ctr">
                       <a:solidFill>
-                        <a:srgbClr val="FFEDD5"/>
+                        <a:srgbClr val="EFEAE3"/>
                       </a:solidFill>
                       <a:prstDash val="solid"/>
                       <a:round/>
@@ -6227,27 +6388,27 @@
                         <a:buNone/>
                       </a:pPr>
                       <a:r>
-                        <a:rPr lang="en-US" sz="1050" dirty="0">
+                        <a:rPr lang="en-US" sz="1200" dirty="0">
                           <a:solidFill>
-                            <a:srgbClr val="1E293B"/>
+                            <a:srgbClr val="2D2D3A"/>
                           </a:solidFill>
-                          <a:latin typeface="Calibri" pitchFamily="34" charset="0"/>
-                          <a:ea typeface="Calibri" pitchFamily="34" charset="-122"/>
-                          <a:cs typeface="Calibri" pitchFamily="34" charset="-120"/>
+                          <a:latin typeface="Times New Roman" pitchFamily="34" charset="0"/>
+                          <a:ea typeface="Times New Roman" pitchFamily="34" charset="-122"/>
+                          <a:cs typeface="Times New Roman" pitchFamily="34" charset="-120"/>
                         </a:rPr>
                         <a:t>Синхронный (запросы presigned URLs)</a:t>
                       </a:r>
-                      <a:endParaRPr lang="en-US" sz="1050" dirty="0">
-                        <a:latin typeface="Calibri" charset="0"/>
-                        <a:ea typeface="Calibri" charset="0"/>
-                        <a:cs typeface="Calibri" charset="0"/>
+                      <a:endParaRPr lang="en-US" sz="1200" dirty="0">
+                        <a:latin typeface="Times New Roman" charset="0"/>
+                        <a:ea typeface="Times New Roman" charset="0"/>
+                        <a:cs typeface="Times New Roman" charset="0"/>
                       </a:endParaRPr>
                     </a:p>
                   </a:txBody>
                   <a:tcPr marL="91440" marR="91440" marT="45720" marB="45720" anchor="ctr">
                     <a:lnL w="6350" cap="flat" cmpd="sng" algn="ctr">
                       <a:solidFill>
-                        <a:srgbClr val="FFEDD5"/>
+                        <a:srgbClr val="EFEAE3"/>
                       </a:solidFill>
                       <a:prstDash val="solid"/>
                       <a:round/>
@@ -6256,7 +6417,7 @@
                     </a:lnL>
                     <a:lnR w="6350" cap="flat" cmpd="sng" algn="ctr">
                       <a:solidFill>
-                        <a:srgbClr val="FFEDD5"/>
+                        <a:srgbClr val="EFEAE3"/>
                       </a:solidFill>
                       <a:prstDash val="solid"/>
                       <a:round/>
@@ -6265,7 +6426,7 @@
                     </a:lnR>
                     <a:lnT w="6350" cap="flat" cmpd="sng" algn="ctr">
                       <a:solidFill>
-                        <a:srgbClr val="FFEDD5"/>
+                        <a:srgbClr val="EFEAE3"/>
                       </a:solidFill>
                       <a:prstDash val="solid"/>
                       <a:round/>
@@ -6274,7 +6435,7 @@
                     </a:lnT>
                     <a:lnB w="6350" cap="flat" cmpd="sng" algn="ctr">
                       <a:solidFill>
-                        <a:srgbClr val="FFEDD5"/>
+                        <a:srgbClr val="EFEAE3"/>
                       </a:solidFill>
                       <a:prstDash val="solid"/>
                       <a:round/>
@@ -6297,27 +6458,27 @@
                         <a:buNone/>
                       </a:pPr>
                       <a:r>
-                        <a:rPr lang="en-US" sz="1050" dirty="0">
+                        <a:rPr lang="en-US" sz="1200" dirty="0">
                           <a:solidFill>
-                            <a:srgbClr val="1E293B"/>
+                            <a:srgbClr val="2D2D3A"/>
                           </a:solidFill>
-                          <a:latin typeface="Calibri" pitchFamily="34" charset="0"/>
-                          <a:ea typeface="Calibri" pitchFamily="34" charset="-122"/>
-                          <a:cs typeface="Calibri" pitchFamily="34" charset="-120"/>
+                          <a:latin typeface="Times New Roman" pitchFamily="34" charset="0"/>
+                          <a:ea typeface="Times New Roman" pitchFamily="34" charset="-122"/>
+                          <a:cs typeface="Times New Roman" pitchFamily="34" charset="-120"/>
                         </a:rPr>
                         <a:t>Frontend ↔ S3 MinIO</a:t>
                       </a:r>
-                      <a:endParaRPr lang="en-US" sz="1050" dirty="0">
-                        <a:latin typeface="Calibri" charset="0"/>
-                        <a:ea typeface="Calibri" charset="0"/>
-                        <a:cs typeface="Calibri" charset="0"/>
+                      <a:endParaRPr lang="en-US" sz="1200" dirty="0">
+                        <a:latin typeface="Times New Roman" charset="0"/>
+                        <a:ea typeface="Times New Roman" charset="0"/>
+                        <a:cs typeface="Times New Roman" charset="0"/>
                       </a:endParaRPr>
                     </a:p>
                   </a:txBody>
                   <a:tcPr marL="91440" marR="91440" marT="45720" marB="45720" anchor="ctr">
                     <a:lnL w="6350" cap="flat" cmpd="sng" algn="ctr">
                       <a:solidFill>
-                        <a:srgbClr val="FFEDD5"/>
+                        <a:srgbClr val="EFEAE3"/>
                       </a:solidFill>
                       <a:prstDash val="solid"/>
                       <a:round/>
@@ -6326,7 +6487,7 @@
                     </a:lnL>
                     <a:lnR w="6350" cap="flat" cmpd="sng" algn="ctr">
                       <a:solidFill>
-                        <a:srgbClr val="FFEDD5"/>
+                        <a:srgbClr val="EFEAE3"/>
                       </a:solidFill>
                       <a:prstDash val="solid"/>
                       <a:round/>
@@ -6335,7 +6496,7 @@
                     </a:lnR>
                     <a:lnT w="6350" cap="flat" cmpd="sng" algn="ctr">
                       <a:solidFill>
-                        <a:srgbClr val="FFEDD5"/>
+                        <a:srgbClr val="EFEAE3"/>
                       </a:solidFill>
                       <a:prstDash val="solid"/>
                       <a:round/>
@@ -6344,7 +6505,7 @@
                     </a:lnT>
                     <a:lnB w="6350" cap="flat" cmpd="sng" algn="ctr">
                       <a:solidFill>
-                        <a:srgbClr val="FFEDD5"/>
+                        <a:srgbClr val="EFEAE3"/>
                       </a:solidFill>
                       <a:prstDash val="solid"/>
                       <a:round/>
@@ -6352,7 +6513,7 @@
                       <a:tailEnd type="none" w="med" len="med"/>
                     </a:lnB>
                     <a:solidFill>
-                      <a:srgbClr val="FFF7ED"/>
+                      <a:srgbClr val="F8F4F0"/>
                     </a:solidFill>
                   </a:tcPr>
                 </a:tc>
@@ -6365,27 +6526,27 @@
                         <a:buNone/>
                       </a:pPr>
                       <a:r>
-                        <a:rPr lang="en-US" sz="1050" dirty="0">
+                        <a:rPr lang="en-US" sz="1200" dirty="0">
                           <a:solidFill>
-                            <a:srgbClr val="1E293B"/>
+                            <a:srgbClr val="2D2D3A"/>
                           </a:solidFill>
-                          <a:latin typeface="Calibri" pitchFamily="34" charset="0"/>
-                          <a:ea typeface="Calibri" pitchFamily="34" charset="-122"/>
-                          <a:cs typeface="Calibri" pitchFamily="34" charset="-120"/>
+                          <a:latin typeface="Times New Roman" pitchFamily="34" charset="0"/>
+                          <a:ea typeface="Times New Roman" pitchFamily="34" charset="-122"/>
+                          <a:cs typeface="Times New Roman" pitchFamily="34" charset="-120"/>
                         </a:rPr>
                         <a:t>HTTP PUT / Direct binary</a:t>
                       </a:r>
-                      <a:endParaRPr lang="en-US" sz="1050" dirty="0">
-                        <a:latin typeface="Calibri" charset="0"/>
-                        <a:ea typeface="Calibri" charset="0"/>
-                        <a:cs typeface="Calibri" charset="0"/>
+                      <a:endParaRPr lang="en-US" sz="1200" dirty="0">
+                        <a:latin typeface="Times New Roman" charset="0"/>
+                        <a:ea typeface="Times New Roman" charset="0"/>
+                        <a:cs typeface="Times New Roman" charset="0"/>
                       </a:endParaRPr>
                     </a:p>
                   </a:txBody>
                   <a:tcPr marL="91440" marR="91440" marT="45720" marB="45720" anchor="ctr">
                     <a:lnL w="6350" cap="flat" cmpd="sng" algn="ctr">
                       <a:solidFill>
-                        <a:srgbClr val="FFEDD5"/>
+                        <a:srgbClr val="EFEAE3"/>
                       </a:solidFill>
                       <a:prstDash val="solid"/>
                       <a:round/>
@@ -6394,7 +6555,7 @@
                     </a:lnL>
                     <a:lnR w="6350" cap="flat" cmpd="sng" algn="ctr">
                       <a:solidFill>
-                        <a:srgbClr val="FFEDD5"/>
+                        <a:srgbClr val="EFEAE3"/>
                       </a:solidFill>
                       <a:prstDash val="solid"/>
                       <a:round/>
@@ -6403,7 +6564,7 @@
                     </a:lnR>
                     <a:lnT w="6350" cap="flat" cmpd="sng" algn="ctr">
                       <a:solidFill>
-                        <a:srgbClr val="FFEDD5"/>
+                        <a:srgbClr val="EFEAE3"/>
                       </a:solidFill>
                       <a:prstDash val="solid"/>
                       <a:round/>
@@ -6412,7 +6573,7 @@
                     </a:lnT>
                     <a:lnB w="6350" cap="flat" cmpd="sng" algn="ctr">
                       <a:solidFill>
-                        <a:srgbClr val="FFEDD5"/>
+                        <a:srgbClr val="EFEAE3"/>
                       </a:solidFill>
                       <a:prstDash val="solid"/>
                       <a:round/>
@@ -6420,7 +6581,7 @@
                       <a:tailEnd type="none" w="med" len="med"/>
                     </a:lnB>
                     <a:solidFill>
-                      <a:srgbClr val="FFF7ED"/>
+                      <a:srgbClr val="F8F4F0"/>
                     </a:solidFill>
                   </a:tcPr>
                 </a:tc>
@@ -6433,27 +6594,27 @@
                         <a:buNone/>
                       </a:pPr>
                       <a:r>
-                        <a:rPr lang="en-US" sz="1050" dirty="0">
+                        <a:rPr lang="en-US" sz="1200" dirty="0">
                           <a:solidFill>
-                            <a:srgbClr val="1E293B"/>
+                            <a:srgbClr val="2D2D3A"/>
                           </a:solidFill>
-                          <a:latin typeface="Calibri" pitchFamily="34" charset="0"/>
-                          <a:ea typeface="Calibri" pitchFamily="34" charset="-122"/>
-                          <a:cs typeface="Calibri" pitchFamily="34" charset="-120"/>
+                          <a:latin typeface="Times New Roman" pitchFamily="34" charset="0"/>
+                          <a:ea typeface="Times New Roman" pitchFamily="34" charset="-122"/>
+                          <a:cs typeface="Times New Roman" pitchFamily="34" charset="-120"/>
                         </a:rPr>
                         <a:t>Прямая бинарная загрузка в обход API</a:t>
                       </a:r>
-                      <a:endParaRPr lang="en-US" sz="1050" dirty="0">
-                        <a:latin typeface="Calibri" charset="0"/>
-                        <a:ea typeface="Calibri" charset="0"/>
-                        <a:cs typeface="Calibri" charset="0"/>
+                      <a:endParaRPr lang="en-US" sz="1200" dirty="0">
+                        <a:latin typeface="Times New Roman" charset="0"/>
+                        <a:ea typeface="Times New Roman" charset="0"/>
+                        <a:cs typeface="Times New Roman" charset="0"/>
                       </a:endParaRPr>
                     </a:p>
                   </a:txBody>
                   <a:tcPr marL="91440" marR="91440" marT="45720" marB="45720" anchor="ctr">
                     <a:lnL w="6350" cap="flat" cmpd="sng" algn="ctr">
                       <a:solidFill>
-                        <a:srgbClr val="FFEDD5"/>
+                        <a:srgbClr val="EFEAE3"/>
                       </a:solidFill>
                       <a:prstDash val="solid"/>
                       <a:round/>
@@ -6462,7 +6623,7 @@
                     </a:lnL>
                     <a:lnR w="6350" cap="flat" cmpd="sng" algn="ctr">
                       <a:solidFill>
-                        <a:srgbClr val="FFEDD5"/>
+                        <a:srgbClr val="EFEAE3"/>
                       </a:solidFill>
                       <a:prstDash val="solid"/>
                       <a:round/>
@@ -6471,7 +6632,7 @@
                     </a:lnR>
                     <a:lnT w="6350" cap="flat" cmpd="sng" algn="ctr">
                       <a:solidFill>
-                        <a:srgbClr val="FFEDD5"/>
+                        <a:srgbClr val="EFEAE3"/>
                       </a:solidFill>
                       <a:prstDash val="solid"/>
                       <a:round/>
@@ -6480,7 +6641,7 @@
                     </a:lnT>
                     <a:lnB w="6350" cap="flat" cmpd="sng" algn="ctr">
                       <a:solidFill>
-                        <a:srgbClr val="FFEDD5"/>
+                        <a:srgbClr val="EFEAE3"/>
                       </a:solidFill>
                       <a:prstDash val="solid"/>
                       <a:round/>
@@ -6488,7 +6649,7 @@
                       <a:tailEnd type="none" w="med" len="med"/>
                     </a:lnB>
                     <a:solidFill>
-                      <a:srgbClr val="FFF7ED"/>
+                      <a:srgbClr val="F8F4F0"/>
                     </a:solidFill>
                   </a:tcPr>
                 </a:tc>
@@ -6503,27 +6664,27 @@
                         <a:buNone/>
                       </a:pPr>
                       <a:r>
-                        <a:rPr lang="en-US" sz="1050" dirty="0">
+                        <a:rPr lang="en-US" sz="1200" dirty="0">
                           <a:solidFill>
-                            <a:srgbClr val="1E293B"/>
+                            <a:srgbClr val="2D2D3A"/>
                           </a:solidFill>
-                          <a:latin typeface="Calibri" pitchFamily="34" charset="0"/>
-                          <a:ea typeface="Calibri" pitchFamily="34" charset="-122"/>
-                          <a:cs typeface="Calibri" pitchFamily="34" charset="-120"/>
+                          <a:latin typeface="Times New Roman" pitchFamily="34" charset="0"/>
+                          <a:ea typeface="Times New Roman" pitchFamily="34" charset="-122"/>
+                          <a:cs typeface="Times New Roman" pitchFamily="34" charset="-120"/>
                         </a:rPr>
                         <a:t>Backend ↔ 1C Replica</a:t>
                       </a:r>
-                      <a:endParaRPr lang="en-US" sz="1050" dirty="0">
-                        <a:latin typeface="Calibri" charset="0"/>
-                        <a:ea typeface="Calibri" charset="0"/>
-                        <a:cs typeface="Calibri" charset="0"/>
+                      <a:endParaRPr lang="en-US" sz="1200" dirty="0">
+                        <a:latin typeface="Times New Roman" charset="0"/>
+                        <a:ea typeface="Times New Roman" charset="0"/>
+                        <a:cs typeface="Times New Roman" charset="0"/>
                       </a:endParaRPr>
                     </a:p>
                   </a:txBody>
                   <a:tcPr marL="91440" marR="91440" marT="45720" marB="45720" anchor="ctr">
                     <a:lnL w="6350" cap="flat" cmpd="sng" algn="ctr">
                       <a:solidFill>
-                        <a:srgbClr val="FFEDD5"/>
+                        <a:srgbClr val="EFEAE3"/>
                       </a:solidFill>
                       <a:prstDash val="solid"/>
                       <a:round/>
@@ -6532,7 +6693,7 @@
                     </a:lnL>
                     <a:lnR w="6350" cap="flat" cmpd="sng" algn="ctr">
                       <a:solidFill>
-                        <a:srgbClr val="FFEDD5"/>
+                        <a:srgbClr val="EFEAE3"/>
                       </a:solidFill>
                       <a:prstDash val="solid"/>
                       <a:round/>
@@ -6541,7 +6702,7 @@
                     </a:lnR>
                     <a:lnT w="6350" cap="flat" cmpd="sng" algn="ctr">
                       <a:solidFill>
-                        <a:srgbClr val="FFEDD5"/>
+                        <a:srgbClr val="EFEAE3"/>
                       </a:solidFill>
                       <a:prstDash val="solid"/>
                       <a:round/>
@@ -6550,7 +6711,7 @@
                     </a:lnT>
                     <a:lnB w="6350" cap="flat" cmpd="sng" algn="ctr">
                       <a:solidFill>
-                        <a:srgbClr val="FFEDD5"/>
+                        <a:srgbClr val="EFEAE3"/>
                       </a:solidFill>
                       <a:prstDash val="solid"/>
                       <a:round/>
@@ -6571,27 +6732,27 @@
                         <a:buNone/>
                       </a:pPr>
                       <a:r>
-                        <a:rPr lang="en-US" sz="1050" dirty="0">
+                        <a:rPr lang="en-US" sz="1200" dirty="0">
                           <a:solidFill>
-                            <a:srgbClr val="1E293B"/>
+                            <a:srgbClr val="2D2D3A"/>
                           </a:solidFill>
-                          <a:latin typeface="Calibri" pitchFamily="34" charset="0"/>
-                          <a:ea typeface="Calibri" pitchFamily="34" charset="-122"/>
-                          <a:cs typeface="Calibri" pitchFamily="34" charset="-120"/>
+                          <a:latin typeface="Times New Roman" pitchFamily="34" charset="0"/>
+                          <a:ea typeface="Times New Roman" pitchFamily="34" charset="-122"/>
+                          <a:cs typeface="Times New Roman" pitchFamily="34" charset="-120"/>
                         </a:rPr>
                         <a:t>PostgreSQL / pg Client</a:t>
                       </a:r>
-                      <a:endParaRPr lang="en-US" sz="1050" dirty="0">
-                        <a:latin typeface="Calibri" charset="0"/>
-                        <a:ea typeface="Calibri" charset="0"/>
-                        <a:cs typeface="Calibri" charset="0"/>
+                      <a:endParaRPr lang="en-US" sz="1200" dirty="0">
+                        <a:latin typeface="Times New Roman" charset="0"/>
+                        <a:ea typeface="Times New Roman" charset="0"/>
+                        <a:cs typeface="Times New Roman" charset="0"/>
                       </a:endParaRPr>
                     </a:p>
                   </a:txBody>
                   <a:tcPr marL="91440" marR="91440" marT="45720" marB="45720" anchor="ctr">
                     <a:lnL w="6350" cap="flat" cmpd="sng" algn="ctr">
                       <a:solidFill>
-                        <a:srgbClr val="FFEDD5"/>
+                        <a:srgbClr val="EFEAE3"/>
                       </a:solidFill>
                       <a:prstDash val="solid"/>
                       <a:round/>
@@ -6600,7 +6761,7 @@
                     </a:lnL>
                     <a:lnR w="6350" cap="flat" cmpd="sng" algn="ctr">
                       <a:solidFill>
-                        <a:srgbClr val="FFEDD5"/>
+                        <a:srgbClr val="EFEAE3"/>
                       </a:solidFill>
                       <a:prstDash val="solid"/>
                       <a:round/>
@@ -6609,7 +6770,7 @@
                     </a:lnR>
                     <a:lnT w="6350" cap="flat" cmpd="sng" algn="ctr">
                       <a:solidFill>
-                        <a:srgbClr val="FFEDD5"/>
+                        <a:srgbClr val="EFEAE3"/>
                       </a:solidFill>
                       <a:prstDash val="solid"/>
                       <a:round/>
@@ -6618,7 +6779,7 @@
                     </a:lnT>
                     <a:lnB w="6350" cap="flat" cmpd="sng" algn="ctr">
                       <a:solidFill>
-                        <a:srgbClr val="FFEDD5"/>
+                        <a:srgbClr val="EFEAE3"/>
                       </a:solidFill>
                       <a:prstDash val="solid"/>
                       <a:round/>
@@ -6639,27 +6800,27 @@
                         <a:buNone/>
                       </a:pPr>
                       <a:r>
-                        <a:rPr lang="en-US" sz="1050" dirty="0">
+                        <a:rPr lang="en-US" sz="1200" dirty="0">
                           <a:solidFill>
-                            <a:srgbClr val="1E293B"/>
+                            <a:srgbClr val="2D2D3A"/>
                           </a:solidFill>
-                          <a:latin typeface="Calibri" pitchFamily="34" charset="0"/>
-                          <a:ea typeface="Calibri" pitchFamily="34" charset="-122"/>
-                          <a:cs typeface="Calibri" pitchFamily="34" charset="-120"/>
+                          <a:latin typeface="Times New Roman" pitchFamily="34" charset="0"/>
+                          <a:ea typeface="Times New Roman" pitchFamily="34" charset="-122"/>
+                          <a:cs typeface="Times New Roman" pitchFamily="34" charset="-120"/>
                         </a:rPr>
                         <a:t>Асинхронная очередь (Outbox pattern)</a:t>
                       </a:r>
-                      <a:endParaRPr lang="en-US" sz="1050" dirty="0">
-                        <a:latin typeface="Calibri" charset="0"/>
-                        <a:ea typeface="Calibri" charset="0"/>
-                        <a:cs typeface="Calibri" charset="0"/>
+                      <a:endParaRPr lang="en-US" sz="1200" dirty="0">
+                        <a:latin typeface="Times New Roman" charset="0"/>
+                        <a:ea typeface="Times New Roman" charset="0"/>
+                        <a:cs typeface="Times New Roman" charset="0"/>
                       </a:endParaRPr>
                     </a:p>
                   </a:txBody>
                   <a:tcPr marL="91440" marR="91440" marT="45720" marB="45720" anchor="ctr">
                     <a:lnL w="6350" cap="flat" cmpd="sng" algn="ctr">
                       <a:solidFill>
-                        <a:srgbClr val="FFEDD5"/>
+                        <a:srgbClr val="EFEAE3"/>
                       </a:solidFill>
                       <a:prstDash val="solid"/>
                       <a:round/>
@@ -6668,7 +6829,7 @@
                     </a:lnL>
                     <a:lnR w="6350" cap="flat" cmpd="sng" algn="ctr">
                       <a:solidFill>
-                        <a:srgbClr val="FFEDD5"/>
+                        <a:srgbClr val="EFEAE3"/>
                       </a:solidFill>
                       <a:prstDash val="solid"/>
                       <a:round/>
@@ -6677,7 +6838,7 @@
                     </a:lnR>
                     <a:lnT w="6350" cap="flat" cmpd="sng" algn="ctr">
                       <a:solidFill>
-                        <a:srgbClr val="FFEDD5"/>
+                        <a:srgbClr val="EFEAE3"/>
                       </a:solidFill>
                       <a:prstDash val="solid"/>
                       <a:round/>
@@ -6686,7 +6847,7 @@
                     </a:lnT>
                     <a:lnB w="6350" cap="flat" cmpd="sng" algn="ctr">
                       <a:solidFill>
-                        <a:srgbClr val="FFEDD5"/>
+                        <a:srgbClr val="EFEAE3"/>
                       </a:solidFill>
                       <a:prstDash val="solid"/>
                       <a:round/>
@@ -6703,654 +6864,6 @@
           </a:graphicData>
         </a:graphic>
       </p:graphicFrame>
-    </p:spTree>
-  </p:cSld>
-  <p:clrMapOvr>
-    <a:masterClrMapping/>
-  </p:clrMapOvr>
-</p:sld>
-</file>
-
-<file path=ppt/slides/slide5.xml><?xml version="1.0" encoding="utf-8"?>
-<p:sld xmlns:a="http://schemas.openxmlformats.org/drawingml/2006/main" xmlns:r="http://schemas.openxmlformats.org/officeDocument/2006/relationships" xmlns:p="http://schemas.openxmlformats.org/presentationml/2006/main">
-  <p:cSld name="Slide 5">
-    <p:bg>
-      <p:bgPr>
-        <a:solidFill>
-          <a:srgbClr val="FFFFFF"/>
-        </a:solidFill>
-      </p:bgPr>
-    </p:bg>
-    <p:spTree>
-      <p:nvGrpSpPr>
-        <p:cNvPr id="1" name=""/>
-        <p:cNvGrpSpPr/>
-        <p:nvPr/>
-      </p:nvGrpSpPr>
-      <p:grpSpPr>
-        <a:xfrm>
-          <a:off x="0" y="0"/>
-          <a:ext cx="0" cy="0"/>
-          <a:chOff x="0" y="0"/>
-          <a:chExt cx="0" cy="0"/>
-        </a:xfrm>
-      </p:grpSpPr>
-      <p:sp>
-        <p:nvSpPr>
-          <p:cNvPr id="2" name="Text 0"/>
-          <p:cNvSpPr/>
-          <p:nvPr/>
-        </p:nvSpPr>
-        <p:spPr>
-          <a:xfrm>
-            <a:off x="384048" y="164592"/>
-            <a:ext cx="8375904" cy="548640"/>
-          </a:xfrm>
-          <a:prstGeom prst="rect">
-            <a:avLst/>
-          </a:prstGeom>
-          <a:noFill/>
-          <a:ln/>
-        </p:spPr>
-        <p:txBody>
-          <a:bodyPr wrap="square" rtlCol="0" anchor="b"/>
-          <a:lstStyle/>
-          <a:p>
-            <a:pPr algn="l" indent="0" marL="0">
-              <a:buNone/>
-            </a:pPr>
-            <a:r>
-              <a:rPr lang="en-US" sz="2000" b="1" dirty="0">
-                <a:solidFill>
-                  <a:srgbClr val="0F1E36"/>
-                </a:solidFill>
-                <a:latin typeface="Cambria" pitchFamily="34" charset="0"/>
-                <a:ea typeface="Cambria" pitchFamily="34" charset="-122"/>
-                <a:cs typeface="Cambria" pitchFamily="34" charset="-120"/>
-              </a:rPr>
-              <a:t>Диаграмма компонентов UML (Component Diagram)</a:t>
-            </a:r>
-            <a:endParaRPr lang="en-US" sz="2000" dirty="0"/>
-          </a:p>
-        </p:txBody>
-      </p:sp>
-      <p:sp>
-        <p:nvSpPr>
-          <p:cNvPr id="3" name="Shape 1"/>
-          <p:cNvSpPr/>
-          <p:nvPr/>
-        </p:nvSpPr>
-        <p:spPr>
-          <a:xfrm>
-            <a:off x="457200" y="1005840"/>
-            <a:ext cx="2011680" cy="914400"/>
-          </a:xfrm>
-          <a:prstGeom prst="roundRect">
-            <a:avLst>
-              <a:gd name="adj" fmla="val 8000"/>
-            </a:avLst>
-          </a:prstGeom>
-          <a:solidFill>
-            <a:srgbClr val="FFF7ED"/>
-          </a:solidFill>
-          <a:ln w="12700">
-            <a:solidFill>
-              <a:srgbClr val="EA580C"/>
-            </a:solidFill>
-            <a:prstDash val="solid"/>
-          </a:ln>
-        </p:spPr>
-      </p:sp>
-      <p:sp>
-        <p:nvSpPr>
-          <p:cNvPr id="4" name="Text 2"/>
-          <p:cNvSpPr/>
-          <p:nvPr/>
-        </p:nvSpPr>
-        <p:spPr>
-          <a:xfrm>
-            <a:off x="457200" y="1005840"/>
-            <a:ext cx="2011680" cy="914400"/>
-          </a:xfrm>
-          <a:prstGeom prst="rect">
-            <a:avLst/>
-          </a:prstGeom>
-          <a:noFill/>
-          <a:ln/>
-        </p:spPr>
-        <p:txBody>
-          <a:bodyPr wrap="square" rtlCol="0" anchor="ctr"/>
-          <a:lstStyle/>
-          <a:p>
-            <a:pPr algn="ctr" indent="0" marL="0">
-              <a:buNone/>
-            </a:pPr>
-            <a:r>
-              <a:rPr lang="en-US" sz="1100" b="1" dirty="0">
-                <a:solidFill>
-                  <a:srgbClr val="0F1E36"/>
-                </a:solidFill>
-              </a:rPr>
-              <a:t>Web / Mobile Client</a:t>
-            </a:r>
-            <a:endParaRPr lang="en-US" sz="1100" dirty="0"/>
-          </a:p>
-          <a:p>
-            <a:pPr algn="ctr" indent="0" marL="0">
-              <a:buNone/>
-            </a:pPr>
-            <a:r>
-              <a:rPr lang="en-US" sz="1100" b="1" dirty="0">
-                <a:solidFill>
-                  <a:srgbClr val="0F1E36"/>
-                </a:solidFill>
-              </a:rPr>
-              <a:t>(Frontend)</a:t>
-            </a:r>
-            <a:endParaRPr lang="en-US" sz="1100" dirty="0"/>
-          </a:p>
-        </p:txBody>
-      </p:sp>
-      <p:sp>
-        <p:nvSpPr>
-          <p:cNvPr id="5" name="Shape 3"/>
-          <p:cNvSpPr/>
-          <p:nvPr/>
-        </p:nvSpPr>
-        <p:spPr>
-          <a:xfrm>
-            <a:off x="3200400" y="1005840"/>
-            <a:ext cx="2286000" cy="914400"/>
-          </a:xfrm>
-          <a:prstGeom prst="roundRect">
-            <a:avLst>
-              <a:gd name="adj" fmla="val 8000"/>
-            </a:avLst>
-          </a:prstGeom>
-          <a:solidFill>
-            <a:srgbClr val="FFF7ED"/>
-          </a:solidFill>
-          <a:ln w="12700">
-            <a:solidFill>
-              <a:srgbClr val="EA580C"/>
-            </a:solidFill>
-            <a:prstDash val="solid"/>
-          </a:ln>
-        </p:spPr>
-      </p:sp>
-      <p:sp>
-        <p:nvSpPr>
-          <p:cNvPr id="6" name="Text 4"/>
-          <p:cNvSpPr/>
-          <p:nvPr/>
-        </p:nvSpPr>
-        <p:spPr>
-          <a:xfrm>
-            <a:off x="3200400" y="1005840"/>
-            <a:ext cx="2286000" cy="914400"/>
-          </a:xfrm>
-          <a:prstGeom prst="rect">
-            <a:avLst/>
-          </a:prstGeom>
-          <a:noFill/>
-          <a:ln/>
-        </p:spPr>
-        <p:txBody>
-          <a:bodyPr wrap="square" rtlCol="0" anchor="ctr"/>
-          <a:lstStyle/>
-          <a:p>
-            <a:pPr algn="ctr" indent="0" marL="0">
-              <a:buNone/>
-            </a:pPr>
-            <a:r>
-              <a:rPr lang="en-US" sz="1100" b="1" dirty="0">
-                <a:solidFill>
-                  <a:srgbClr val="0F1E36"/>
-                </a:solidFill>
-              </a:rPr>
-              <a:t>Backend API</a:t>
-            </a:r>
-            <a:endParaRPr lang="en-US" sz="1100" dirty="0"/>
-          </a:p>
-          <a:p>
-            <a:pPr algn="ctr" indent="0" marL="0">
-              <a:buNone/>
-            </a:pPr>
-            <a:r>
-              <a:rPr lang="en-US" sz="1100" b="1" dirty="0">
-                <a:solidFill>
-                  <a:srgbClr val="0F1E36"/>
-                </a:solidFill>
-              </a:rPr>
-              <a:t>(Node.js + Express)</a:t>
-            </a:r>
-            <a:endParaRPr lang="en-US" sz="1100" dirty="0"/>
-          </a:p>
-        </p:txBody>
-      </p:sp>
-      <p:sp>
-        <p:nvSpPr>
-          <p:cNvPr id="7" name="Shape 5"/>
-          <p:cNvSpPr/>
-          <p:nvPr/>
-        </p:nvSpPr>
-        <p:spPr>
-          <a:xfrm>
-            <a:off x="6217920" y="1005840"/>
-            <a:ext cx="2011680" cy="914400"/>
-          </a:xfrm>
-          <a:prstGeom prst="roundRect">
-            <a:avLst>
-              <a:gd name="adj" fmla="val 8000"/>
-            </a:avLst>
-          </a:prstGeom>
-          <a:solidFill>
-            <a:srgbClr val="FFF7ED"/>
-          </a:solidFill>
-          <a:ln w="12700">
-            <a:solidFill>
-              <a:srgbClr val="EA580C"/>
-            </a:solidFill>
-            <a:prstDash val="solid"/>
-          </a:ln>
-        </p:spPr>
-      </p:sp>
-      <p:sp>
-        <p:nvSpPr>
-          <p:cNvPr id="8" name="Text 6"/>
-          <p:cNvSpPr/>
-          <p:nvPr/>
-        </p:nvSpPr>
-        <p:spPr>
-          <a:xfrm>
-            <a:off x="6217920" y="1005840"/>
-            <a:ext cx="2011680" cy="914400"/>
-          </a:xfrm>
-          <a:prstGeom prst="rect">
-            <a:avLst/>
-          </a:prstGeom>
-          <a:noFill/>
-          <a:ln/>
-        </p:spPr>
-        <p:txBody>
-          <a:bodyPr wrap="square" rtlCol="0" anchor="ctr"/>
-          <a:lstStyle/>
-          <a:p>
-            <a:pPr algn="ctr" indent="0" marL="0">
-              <a:buNone/>
-            </a:pPr>
-            <a:r>
-              <a:rPr lang="en-US" sz="1100" b="1" dirty="0">
-                <a:solidFill>
-                  <a:srgbClr val="0F1E36"/>
-                </a:solidFill>
-              </a:rPr>
-              <a:t>Internal DB</a:t>
-            </a:r>
-            <a:endParaRPr lang="en-US" sz="1100" dirty="0"/>
-          </a:p>
-          <a:p>
-            <a:pPr algn="ctr" indent="0" marL="0">
-              <a:buNone/>
-            </a:pPr>
-            <a:r>
-              <a:rPr lang="en-US" sz="1100" b="1" dirty="0">
-                <a:solidFill>
-                  <a:srgbClr val="0F1E36"/>
-                </a:solidFill>
-              </a:rPr>
-              <a:t>(PostgreSQL)</a:t>
-            </a:r>
-            <a:endParaRPr lang="en-US" sz="1100" dirty="0"/>
-          </a:p>
-        </p:txBody>
-      </p:sp>
-      <p:sp>
-        <p:nvSpPr>
-          <p:cNvPr id="9" name="Shape 7"/>
-          <p:cNvSpPr/>
-          <p:nvPr/>
-        </p:nvSpPr>
-        <p:spPr>
-          <a:xfrm>
-            <a:off x="2743200" y="2651760"/>
-            <a:ext cx="2560320" cy="914400"/>
-          </a:xfrm>
-          <a:prstGeom prst="roundRect">
-            <a:avLst>
-              <a:gd name="adj" fmla="val 8000"/>
-            </a:avLst>
-          </a:prstGeom>
-          <a:solidFill>
-            <a:srgbClr val="FFF7ED"/>
-          </a:solidFill>
-          <a:ln w="12700">
-            <a:solidFill>
-              <a:srgbClr val="EA580C"/>
-            </a:solidFill>
-            <a:prstDash val="solid"/>
-          </a:ln>
-        </p:spPr>
-      </p:sp>
-      <p:sp>
-        <p:nvSpPr>
-          <p:cNvPr id="10" name="Text 8"/>
-          <p:cNvSpPr/>
-          <p:nvPr/>
-        </p:nvSpPr>
-        <p:spPr>
-          <a:xfrm>
-            <a:off x="2743200" y="2651760"/>
-            <a:ext cx="2560320" cy="914400"/>
-          </a:xfrm>
-          <a:prstGeom prst="rect">
-            <a:avLst/>
-          </a:prstGeom>
-          <a:noFill/>
-          <a:ln/>
-        </p:spPr>
-        <p:txBody>
-          <a:bodyPr wrap="square" rtlCol="0" anchor="ctr"/>
-          <a:lstStyle/>
-          <a:p>
-            <a:pPr algn="ctr" indent="0" marL="0">
-              <a:buNone/>
-            </a:pPr>
-            <a:r>
-              <a:rPr lang="en-US" sz="1100" b="1" dirty="0">
-                <a:solidFill>
-                  <a:srgbClr val="0F1E36"/>
-                </a:solidFill>
-              </a:rPr>
-              <a:t>S3 Storage</a:t>
-            </a:r>
-            <a:endParaRPr lang="en-US" sz="1100" dirty="0"/>
-          </a:p>
-          <a:p>
-            <a:pPr algn="ctr" indent="0" marL="0">
-              <a:buNone/>
-            </a:pPr>
-            <a:r>
-              <a:rPr lang="en-US" sz="1100" b="1" dirty="0">
-                <a:solidFill>
-                  <a:srgbClr val="0F1E36"/>
-                </a:solidFill>
-              </a:rPr>
-              <a:t>(MinIO)</a:t>
-            </a:r>
-            <a:endParaRPr lang="en-US" sz="1100" dirty="0"/>
-          </a:p>
-        </p:txBody>
-      </p:sp>
-      <p:sp>
-        <p:nvSpPr>
-          <p:cNvPr id="11" name="Shape 9"/>
-          <p:cNvSpPr/>
-          <p:nvPr/>
-        </p:nvSpPr>
-        <p:spPr>
-          <a:xfrm>
-            <a:off x="457200" y="2651760"/>
-            <a:ext cx="1645920" cy="914400"/>
-          </a:xfrm>
-          <a:prstGeom prst="roundRect">
-            <a:avLst>
-              <a:gd name="adj" fmla="val 8000"/>
-            </a:avLst>
-          </a:prstGeom>
-          <a:solidFill>
-            <a:srgbClr val="FFF7ED"/>
-          </a:solidFill>
-          <a:ln w="12700">
-            <a:solidFill>
-              <a:srgbClr val="EA580C"/>
-            </a:solidFill>
-            <a:prstDash val="solid"/>
-          </a:ln>
-        </p:spPr>
-      </p:sp>
-      <p:sp>
-        <p:nvSpPr>
-          <p:cNvPr id="12" name="Text 10"/>
-          <p:cNvSpPr/>
-          <p:nvPr/>
-        </p:nvSpPr>
-        <p:spPr>
-          <a:xfrm>
-            <a:off x="457200" y="2651760"/>
-            <a:ext cx="1645920" cy="914400"/>
-          </a:xfrm>
-          <a:prstGeom prst="rect">
-            <a:avLst/>
-          </a:prstGeom>
-          <a:noFill/>
-          <a:ln/>
-        </p:spPr>
-        <p:txBody>
-          <a:bodyPr wrap="square" rtlCol="0" anchor="ctr"/>
-          <a:lstStyle/>
-          <a:p>
-            <a:pPr algn="ctr" indent="0" marL="0">
-              <a:buNone/>
-            </a:pPr>
-            <a:r>
-              <a:rPr lang="en-US" sz="1100" b="1" dirty="0">
-                <a:solidFill>
-                  <a:srgbClr val="0F1E36"/>
-                </a:solidFill>
-              </a:rPr>
-              <a:t>Sync Service</a:t>
-            </a:r>
-            <a:endParaRPr lang="en-US" sz="1100" dirty="0"/>
-          </a:p>
-          <a:p>
-            <a:pPr algn="ctr" indent="0" marL="0">
-              <a:buNone/>
-            </a:pPr>
-            <a:r>
-              <a:rPr lang="en-US" sz="1100" b="1" dirty="0">
-                <a:solidFill>
-                  <a:srgbClr val="0F1E36"/>
-                </a:solidFill>
-              </a:rPr>
-              <a:t>(Inbound/Outbox)</a:t>
-            </a:r>
-            <a:endParaRPr lang="en-US" sz="1100" dirty="0"/>
-          </a:p>
-        </p:txBody>
-      </p:sp>
-      <p:sp>
-        <p:nvSpPr>
-          <p:cNvPr id="13" name="Shape 11"/>
-          <p:cNvSpPr/>
-          <p:nvPr/>
-        </p:nvSpPr>
-        <p:spPr>
-          <a:xfrm>
-            <a:off x="5943600" y="2834640"/>
-            <a:ext cx="2286000" cy="914400"/>
-          </a:xfrm>
-          <a:prstGeom prst="roundRect">
-            <a:avLst>
-              <a:gd name="adj" fmla="val 8000"/>
-            </a:avLst>
-          </a:prstGeom>
-          <a:solidFill>
-            <a:srgbClr val="FFF7ED"/>
-          </a:solidFill>
-          <a:ln w="12700">
-            <a:solidFill>
-              <a:srgbClr val="EA580C"/>
-            </a:solidFill>
-            <a:prstDash val="solid"/>
-          </a:ln>
-        </p:spPr>
-      </p:sp>
-      <p:sp>
-        <p:nvSpPr>
-          <p:cNvPr id="14" name="Text 12"/>
-          <p:cNvSpPr/>
-          <p:nvPr/>
-        </p:nvSpPr>
-        <p:spPr>
-          <a:xfrm>
-            <a:off x="5943600" y="2834640"/>
-            <a:ext cx="2286000" cy="914400"/>
-          </a:xfrm>
-          <a:prstGeom prst="rect">
-            <a:avLst/>
-          </a:prstGeom>
-          <a:noFill/>
-          <a:ln/>
-        </p:spPr>
-        <p:txBody>
-          <a:bodyPr wrap="square" rtlCol="0" anchor="ctr"/>
-          <a:lstStyle/>
-          <a:p>
-            <a:pPr algn="ctr" indent="0" marL="0">
-              <a:buNone/>
-            </a:pPr>
-            <a:r>
-              <a:rPr lang="en-US" sz="1100" b="1" dirty="0">
-                <a:solidFill>
-                  <a:srgbClr val="0F1E36"/>
-                </a:solidFill>
-              </a:rPr>
-              <a:t>External DB</a:t>
-            </a:r>
-            <a:endParaRPr lang="en-US" sz="1100" dirty="0"/>
-          </a:p>
-          <a:p>
-            <a:pPr algn="ctr" indent="0" marL="0">
-              <a:buNone/>
-            </a:pPr>
-            <a:r>
-              <a:rPr lang="en-US" sz="1100" b="1" dirty="0">
-                <a:solidFill>
-                  <a:srgbClr val="0F1E36"/>
-                </a:solidFill>
-              </a:rPr>
-              <a:t>(1C Simulation)</a:t>
-            </a:r>
-            <a:endParaRPr lang="en-US" sz="1100" dirty="0"/>
-          </a:p>
-        </p:txBody>
-      </p:sp>
-      <p:sp>
-        <p:nvSpPr>
-          <p:cNvPr id="15" name="Shape 13"/>
-          <p:cNvSpPr/>
-          <p:nvPr/>
-        </p:nvSpPr>
-        <p:spPr>
-          <a:xfrm>
-            <a:off x="2468880" y="1463040"/>
-            <a:ext cx="731520" cy="0"/>
-          </a:xfrm>
-          <a:prstGeom prst="line">
-            <a:avLst/>
-          </a:prstGeom>
-          <a:noFill/>
-          <a:ln w="12700">
-            <a:solidFill>
-              <a:srgbClr val="EA580C"/>
-            </a:solidFill>
-            <a:prstDash val="solid"/>
-          </a:ln>
-        </p:spPr>
-      </p:sp>
-      <p:sp>
-        <p:nvSpPr>
-          <p:cNvPr id="16" name="Shape 14"/>
-          <p:cNvSpPr/>
-          <p:nvPr/>
-        </p:nvSpPr>
-        <p:spPr>
-          <a:xfrm>
-            <a:off x="5486400" y="1463040"/>
-            <a:ext cx="731520" cy="0"/>
-          </a:xfrm>
-          <a:prstGeom prst="line">
-            <a:avLst/>
-          </a:prstGeom>
-          <a:noFill/>
-          <a:ln w="12700">
-            <a:solidFill>
-              <a:srgbClr val="EA580C"/>
-            </a:solidFill>
-            <a:prstDash val="solid"/>
-          </a:ln>
-        </p:spPr>
-      </p:sp>
-      <p:sp>
-        <p:nvSpPr>
-          <p:cNvPr id="17" name="Shape 15"/>
-          <p:cNvSpPr/>
-          <p:nvPr/>
-        </p:nvSpPr>
-        <p:spPr>
-          <a:xfrm>
-            <a:off x="4023360" y="1920240"/>
-            <a:ext cx="0" cy="731520"/>
-          </a:xfrm>
-          <a:prstGeom prst="line">
-            <a:avLst/>
-          </a:prstGeom>
-          <a:noFill/>
-          <a:ln w="12700">
-            <a:solidFill>
-              <a:srgbClr val="EA580C"/>
-            </a:solidFill>
-            <a:prstDash val="solid"/>
-          </a:ln>
-        </p:spPr>
-      </p:sp>
-      <p:sp>
-        <p:nvSpPr>
-          <p:cNvPr id="18" name="Shape 16"/>
-          <p:cNvSpPr/>
-          <p:nvPr/>
-        </p:nvSpPr>
-        <p:spPr>
-          <a:xfrm>
-            <a:off x="1280160" y="1920240"/>
-            <a:ext cx="0" cy="731520"/>
-          </a:xfrm>
-          <a:prstGeom prst="line">
-            <a:avLst/>
-          </a:prstGeom>
-          <a:noFill/>
-          <a:ln w="12700">
-            <a:solidFill>
-              <a:srgbClr val="EA580C"/>
-            </a:solidFill>
-            <a:prstDash val="solid"/>
-          </a:ln>
-        </p:spPr>
-      </p:sp>
-      <p:sp>
-        <p:nvSpPr>
-          <p:cNvPr id="19" name="Shape 17"/>
-          <p:cNvSpPr/>
-          <p:nvPr/>
-        </p:nvSpPr>
-        <p:spPr>
-          <a:xfrm>
-            <a:off x="5303520" y="3108960"/>
-            <a:ext cx="640080" cy="0"/>
-          </a:xfrm>
-          <a:prstGeom prst="line">
-            <a:avLst/>
-          </a:prstGeom>
-          <a:noFill/>
-          <a:ln w="12700">
-            <a:solidFill>
-              <a:srgbClr val="EA580C"/>
-            </a:solidFill>
-            <a:prstDash val="solid"/>
-          </a:ln>
-        </p:spPr>
-      </p:sp>
     </p:spTree>
   </p:cSld>
   <p:clrMapOvr>
@@ -7408,23 +6921,671 @@
               <a:buNone/>
             </a:pPr>
             <a:r>
-              <a:rPr lang="en-US" sz="2000" b="1" dirty="0">
+              <a:rPr lang="en-US" sz="1600" b="1" dirty="0">
                 <a:solidFill>
-                  <a:srgbClr val="0F1E36"/>
+                  <a:srgbClr val="1A1A2E"/>
                 </a:solidFill>
-                <a:latin typeface="Cambria" pitchFamily="34" charset="0"/>
-                <a:ea typeface="Cambria" pitchFamily="34" charset="-122"/>
-                <a:cs typeface="Cambria" pitchFamily="34" charset="-120"/>
+                <a:latin typeface="Georgia" pitchFamily="34" charset="0"/>
+                <a:ea typeface="Georgia" pitchFamily="34" charset="-122"/>
+                <a:cs typeface="Georgia" pitchFamily="34" charset="-120"/>
+              </a:rPr>
+              <a:t>Диаграмма компонентов UML (Component Diagram)</a:t>
+            </a:r>
+            <a:endParaRPr lang="en-US" sz="1600" dirty="0"/>
+          </a:p>
+        </p:txBody>
+      </p:sp>
+      <p:sp>
+        <p:nvSpPr>
+          <p:cNvPr id="3" name="Shape 1"/>
+          <p:cNvSpPr/>
+          <p:nvPr/>
+        </p:nvSpPr>
+        <p:spPr>
+          <a:xfrm>
+            <a:off x="457200" y="1005840"/>
+            <a:ext cx="2011680" cy="914400"/>
+          </a:xfrm>
+          <a:prstGeom prst="roundRect">
+            <a:avLst>
+              <a:gd name="adj" fmla="val 8000"/>
+            </a:avLst>
+          </a:prstGeom>
+          <a:solidFill>
+            <a:srgbClr val="F8F4F0"/>
+          </a:solidFill>
+          <a:ln w="12700">
+            <a:solidFill>
+              <a:srgbClr val="E94560"/>
+            </a:solidFill>
+            <a:prstDash val="solid"/>
+          </a:ln>
+        </p:spPr>
+      </p:sp>
+      <p:sp>
+        <p:nvSpPr>
+          <p:cNvPr id="4" name="Text 2"/>
+          <p:cNvSpPr/>
+          <p:nvPr/>
+        </p:nvSpPr>
+        <p:spPr>
+          <a:xfrm>
+            <a:off x="457200" y="1005840"/>
+            <a:ext cx="2011680" cy="914400"/>
+          </a:xfrm>
+          <a:prstGeom prst="rect">
+            <a:avLst/>
+          </a:prstGeom>
+          <a:noFill/>
+          <a:ln/>
+        </p:spPr>
+        <p:txBody>
+          <a:bodyPr wrap="square" rtlCol="0" anchor="ctr"/>
+          <a:lstStyle/>
+          <a:p>
+            <a:pPr algn="ctr" indent="0" marL="0">
+              <a:buNone/>
+            </a:pPr>
+            <a:r>
+              <a:rPr lang="en-US" sz="1100" b="1" dirty="0">
+                <a:solidFill>
+                  <a:srgbClr val="1A1A2E"/>
+                </a:solidFill>
+              </a:rPr>
+              <a:t>Web / Mobile Client</a:t>
+            </a:r>
+            <a:endParaRPr lang="en-US" sz="1100" dirty="0"/>
+          </a:p>
+          <a:p>
+            <a:pPr algn="ctr" indent="0" marL="0">
+              <a:buNone/>
+            </a:pPr>
+            <a:r>
+              <a:rPr lang="en-US" sz="1100" b="1" dirty="0">
+                <a:solidFill>
+                  <a:srgbClr val="1A1A2E"/>
+                </a:solidFill>
+              </a:rPr>
+              <a:t>(Frontend)</a:t>
+            </a:r>
+            <a:endParaRPr lang="en-US" sz="1100" dirty="0"/>
+          </a:p>
+        </p:txBody>
+      </p:sp>
+      <p:sp>
+        <p:nvSpPr>
+          <p:cNvPr id="5" name="Shape 3"/>
+          <p:cNvSpPr/>
+          <p:nvPr/>
+        </p:nvSpPr>
+        <p:spPr>
+          <a:xfrm>
+            <a:off x="3200400" y="1005840"/>
+            <a:ext cx="2286000" cy="914400"/>
+          </a:xfrm>
+          <a:prstGeom prst="roundRect">
+            <a:avLst>
+              <a:gd name="adj" fmla="val 8000"/>
+            </a:avLst>
+          </a:prstGeom>
+          <a:solidFill>
+            <a:srgbClr val="F8F4F0"/>
+          </a:solidFill>
+          <a:ln w="12700">
+            <a:solidFill>
+              <a:srgbClr val="E94560"/>
+            </a:solidFill>
+            <a:prstDash val="solid"/>
+          </a:ln>
+        </p:spPr>
+      </p:sp>
+      <p:sp>
+        <p:nvSpPr>
+          <p:cNvPr id="6" name="Text 4"/>
+          <p:cNvSpPr/>
+          <p:nvPr/>
+        </p:nvSpPr>
+        <p:spPr>
+          <a:xfrm>
+            <a:off x="3200400" y="1005840"/>
+            <a:ext cx="2286000" cy="914400"/>
+          </a:xfrm>
+          <a:prstGeom prst="rect">
+            <a:avLst/>
+          </a:prstGeom>
+          <a:noFill/>
+          <a:ln/>
+        </p:spPr>
+        <p:txBody>
+          <a:bodyPr wrap="square" rtlCol="0" anchor="ctr"/>
+          <a:lstStyle/>
+          <a:p>
+            <a:pPr algn="ctr" indent="0" marL="0">
+              <a:buNone/>
+            </a:pPr>
+            <a:r>
+              <a:rPr lang="en-US" sz="1100" b="1" dirty="0">
+                <a:solidFill>
+                  <a:srgbClr val="1A1A2E"/>
+                </a:solidFill>
+              </a:rPr>
+              <a:t>Backend API</a:t>
+            </a:r>
+            <a:endParaRPr lang="en-US" sz="1100" dirty="0"/>
+          </a:p>
+          <a:p>
+            <a:pPr algn="ctr" indent="0" marL="0">
+              <a:buNone/>
+            </a:pPr>
+            <a:r>
+              <a:rPr lang="en-US" sz="1100" b="1" dirty="0">
+                <a:solidFill>
+                  <a:srgbClr val="1A1A2E"/>
+                </a:solidFill>
+              </a:rPr>
+              <a:t>(Node.js + Express)</a:t>
+            </a:r>
+            <a:endParaRPr lang="en-US" sz="1100" dirty="0"/>
+          </a:p>
+        </p:txBody>
+      </p:sp>
+      <p:sp>
+        <p:nvSpPr>
+          <p:cNvPr id="7" name="Shape 5"/>
+          <p:cNvSpPr/>
+          <p:nvPr/>
+        </p:nvSpPr>
+        <p:spPr>
+          <a:xfrm>
+            <a:off x="6217920" y="1005840"/>
+            <a:ext cx="2011680" cy="914400"/>
+          </a:xfrm>
+          <a:prstGeom prst="roundRect">
+            <a:avLst>
+              <a:gd name="adj" fmla="val 8000"/>
+            </a:avLst>
+          </a:prstGeom>
+          <a:solidFill>
+            <a:srgbClr val="F8F4F0"/>
+          </a:solidFill>
+          <a:ln w="12700">
+            <a:solidFill>
+              <a:srgbClr val="E94560"/>
+            </a:solidFill>
+            <a:prstDash val="solid"/>
+          </a:ln>
+        </p:spPr>
+      </p:sp>
+      <p:sp>
+        <p:nvSpPr>
+          <p:cNvPr id="8" name="Text 6"/>
+          <p:cNvSpPr/>
+          <p:nvPr/>
+        </p:nvSpPr>
+        <p:spPr>
+          <a:xfrm>
+            <a:off x="6217920" y="1005840"/>
+            <a:ext cx="2011680" cy="914400"/>
+          </a:xfrm>
+          <a:prstGeom prst="rect">
+            <a:avLst/>
+          </a:prstGeom>
+          <a:noFill/>
+          <a:ln/>
+        </p:spPr>
+        <p:txBody>
+          <a:bodyPr wrap="square" rtlCol="0" anchor="ctr"/>
+          <a:lstStyle/>
+          <a:p>
+            <a:pPr algn="ctr" indent="0" marL="0">
+              <a:buNone/>
+            </a:pPr>
+            <a:r>
+              <a:rPr lang="en-US" sz="1100" b="1" dirty="0">
+                <a:solidFill>
+                  <a:srgbClr val="1A1A2E"/>
+                </a:solidFill>
+              </a:rPr>
+              <a:t>Internal DB</a:t>
+            </a:r>
+            <a:endParaRPr lang="en-US" sz="1100" dirty="0"/>
+          </a:p>
+          <a:p>
+            <a:pPr algn="ctr" indent="0" marL="0">
+              <a:buNone/>
+            </a:pPr>
+            <a:r>
+              <a:rPr lang="en-US" sz="1100" b="1" dirty="0">
+                <a:solidFill>
+                  <a:srgbClr val="1A1A2E"/>
+                </a:solidFill>
+              </a:rPr>
+              <a:t>(PostgreSQL)</a:t>
+            </a:r>
+            <a:endParaRPr lang="en-US" sz="1100" dirty="0"/>
+          </a:p>
+        </p:txBody>
+      </p:sp>
+      <p:sp>
+        <p:nvSpPr>
+          <p:cNvPr id="9" name="Shape 7"/>
+          <p:cNvSpPr/>
+          <p:nvPr/>
+        </p:nvSpPr>
+        <p:spPr>
+          <a:xfrm>
+            <a:off x="2743200" y="2651760"/>
+            <a:ext cx="2560320" cy="914400"/>
+          </a:xfrm>
+          <a:prstGeom prst="roundRect">
+            <a:avLst>
+              <a:gd name="adj" fmla="val 8000"/>
+            </a:avLst>
+          </a:prstGeom>
+          <a:solidFill>
+            <a:srgbClr val="F8F4F0"/>
+          </a:solidFill>
+          <a:ln w="12700">
+            <a:solidFill>
+              <a:srgbClr val="E94560"/>
+            </a:solidFill>
+            <a:prstDash val="solid"/>
+          </a:ln>
+        </p:spPr>
+      </p:sp>
+      <p:sp>
+        <p:nvSpPr>
+          <p:cNvPr id="10" name="Text 8"/>
+          <p:cNvSpPr/>
+          <p:nvPr/>
+        </p:nvSpPr>
+        <p:spPr>
+          <a:xfrm>
+            <a:off x="2743200" y="2651760"/>
+            <a:ext cx="2560320" cy="914400"/>
+          </a:xfrm>
+          <a:prstGeom prst="rect">
+            <a:avLst/>
+          </a:prstGeom>
+          <a:noFill/>
+          <a:ln/>
+        </p:spPr>
+        <p:txBody>
+          <a:bodyPr wrap="square" rtlCol="0" anchor="ctr"/>
+          <a:lstStyle/>
+          <a:p>
+            <a:pPr algn="ctr" indent="0" marL="0">
+              <a:buNone/>
+            </a:pPr>
+            <a:r>
+              <a:rPr lang="en-US" sz="1100" b="1" dirty="0">
+                <a:solidFill>
+                  <a:srgbClr val="1A1A2E"/>
+                </a:solidFill>
+              </a:rPr>
+              <a:t>S3 Storage</a:t>
+            </a:r>
+            <a:endParaRPr lang="en-US" sz="1100" dirty="0"/>
+          </a:p>
+          <a:p>
+            <a:pPr algn="ctr" indent="0" marL="0">
+              <a:buNone/>
+            </a:pPr>
+            <a:r>
+              <a:rPr lang="en-US" sz="1100" b="1" dirty="0">
+                <a:solidFill>
+                  <a:srgbClr val="1A1A2E"/>
+                </a:solidFill>
+              </a:rPr>
+              <a:t>(MinIO)</a:t>
+            </a:r>
+            <a:endParaRPr lang="en-US" sz="1100" dirty="0"/>
+          </a:p>
+        </p:txBody>
+      </p:sp>
+      <p:sp>
+        <p:nvSpPr>
+          <p:cNvPr id="11" name="Shape 9"/>
+          <p:cNvSpPr/>
+          <p:nvPr/>
+        </p:nvSpPr>
+        <p:spPr>
+          <a:xfrm>
+            <a:off x="457200" y="2651760"/>
+            <a:ext cx="1645920" cy="914400"/>
+          </a:xfrm>
+          <a:prstGeom prst="roundRect">
+            <a:avLst>
+              <a:gd name="adj" fmla="val 8000"/>
+            </a:avLst>
+          </a:prstGeom>
+          <a:solidFill>
+            <a:srgbClr val="F8F4F0"/>
+          </a:solidFill>
+          <a:ln w="12700">
+            <a:solidFill>
+              <a:srgbClr val="E94560"/>
+            </a:solidFill>
+            <a:prstDash val="solid"/>
+          </a:ln>
+        </p:spPr>
+      </p:sp>
+      <p:sp>
+        <p:nvSpPr>
+          <p:cNvPr id="12" name="Text 10"/>
+          <p:cNvSpPr/>
+          <p:nvPr/>
+        </p:nvSpPr>
+        <p:spPr>
+          <a:xfrm>
+            <a:off x="457200" y="2651760"/>
+            <a:ext cx="1645920" cy="914400"/>
+          </a:xfrm>
+          <a:prstGeom prst="rect">
+            <a:avLst/>
+          </a:prstGeom>
+          <a:noFill/>
+          <a:ln/>
+        </p:spPr>
+        <p:txBody>
+          <a:bodyPr wrap="square" rtlCol="0" anchor="ctr"/>
+          <a:lstStyle/>
+          <a:p>
+            <a:pPr algn="ctr" indent="0" marL="0">
+              <a:buNone/>
+            </a:pPr>
+            <a:r>
+              <a:rPr lang="en-US" sz="1100" b="1" dirty="0">
+                <a:solidFill>
+                  <a:srgbClr val="1A1A2E"/>
+                </a:solidFill>
+              </a:rPr>
+              <a:t>Sync Service</a:t>
+            </a:r>
+            <a:endParaRPr lang="en-US" sz="1100" dirty="0"/>
+          </a:p>
+          <a:p>
+            <a:pPr algn="ctr" indent="0" marL="0">
+              <a:buNone/>
+            </a:pPr>
+            <a:r>
+              <a:rPr lang="en-US" sz="1100" b="1" dirty="0">
+                <a:solidFill>
+                  <a:srgbClr val="1A1A2E"/>
+                </a:solidFill>
+              </a:rPr>
+              <a:t>(Inbound/Outbox)</a:t>
+            </a:r>
+            <a:endParaRPr lang="en-US" sz="1100" dirty="0"/>
+          </a:p>
+        </p:txBody>
+      </p:sp>
+      <p:sp>
+        <p:nvSpPr>
+          <p:cNvPr id="13" name="Shape 11"/>
+          <p:cNvSpPr/>
+          <p:nvPr/>
+        </p:nvSpPr>
+        <p:spPr>
+          <a:xfrm>
+            <a:off x="5943600" y="2834640"/>
+            <a:ext cx="2286000" cy="914400"/>
+          </a:xfrm>
+          <a:prstGeom prst="roundRect">
+            <a:avLst>
+              <a:gd name="adj" fmla="val 8000"/>
+            </a:avLst>
+          </a:prstGeom>
+          <a:solidFill>
+            <a:srgbClr val="F8F4F0"/>
+          </a:solidFill>
+          <a:ln w="12700">
+            <a:solidFill>
+              <a:srgbClr val="E94560"/>
+            </a:solidFill>
+            <a:prstDash val="solid"/>
+          </a:ln>
+        </p:spPr>
+      </p:sp>
+      <p:sp>
+        <p:nvSpPr>
+          <p:cNvPr id="14" name="Text 12"/>
+          <p:cNvSpPr/>
+          <p:nvPr/>
+        </p:nvSpPr>
+        <p:spPr>
+          <a:xfrm>
+            <a:off x="5943600" y="2834640"/>
+            <a:ext cx="2286000" cy="914400"/>
+          </a:xfrm>
+          <a:prstGeom prst="rect">
+            <a:avLst/>
+          </a:prstGeom>
+          <a:noFill/>
+          <a:ln/>
+        </p:spPr>
+        <p:txBody>
+          <a:bodyPr wrap="square" rtlCol="0" anchor="ctr"/>
+          <a:lstStyle/>
+          <a:p>
+            <a:pPr algn="ctr" indent="0" marL="0">
+              <a:buNone/>
+            </a:pPr>
+            <a:r>
+              <a:rPr lang="en-US" sz="1100" b="1" dirty="0">
+                <a:solidFill>
+                  <a:srgbClr val="1A1A2E"/>
+                </a:solidFill>
+              </a:rPr>
+              <a:t>External DB</a:t>
+            </a:r>
+            <a:endParaRPr lang="en-US" sz="1100" dirty="0"/>
+          </a:p>
+          <a:p>
+            <a:pPr algn="ctr" indent="0" marL="0">
+              <a:buNone/>
+            </a:pPr>
+            <a:r>
+              <a:rPr lang="en-US" sz="1100" b="1" dirty="0">
+                <a:solidFill>
+                  <a:srgbClr val="1A1A2E"/>
+                </a:solidFill>
+              </a:rPr>
+              <a:t>(1C Simulation)</a:t>
+            </a:r>
+            <a:endParaRPr lang="en-US" sz="1100" dirty="0"/>
+          </a:p>
+        </p:txBody>
+      </p:sp>
+      <p:sp>
+        <p:nvSpPr>
+          <p:cNvPr id="15" name="Shape 13"/>
+          <p:cNvSpPr/>
+          <p:nvPr/>
+        </p:nvSpPr>
+        <p:spPr>
+          <a:xfrm>
+            <a:off x="2468880" y="1463040"/>
+            <a:ext cx="731520" cy="0"/>
+          </a:xfrm>
+          <a:prstGeom prst="line">
+            <a:avLst/>
+          </a:prstGeom>
+          <a:noFill/>
+          <a:ln w="12700">
+            <a:solidFill>
+              <a:srgbClr val="E94560"/>
+            </a:solidFill>
+            <a:prstDash val="solid"/>
+          </a:ln>
+        </p:spPr>
+      </p:sp>
+      <p:sp>
+        <p:nvSpPr>
+          <p:cNvPr id="16" name="Shape 14"/>
+          <p:cNvSpPr/>
+          <p:nvPr/>
+        </p:nvSpPr>
+        <p:spPr>
+          <a:xfrm>
+            <a:off x="5486400" y="1463040"/>
+            <a:ext cx="731520" cy="0"/>
+          </a:xfrm>
+          <a:prstGeom prst="line">
+            <a:avLst/>
+          </a:prstGeom>
+          <a:noFill/>
+          <a:ln w="12700">
+            <a:solidFill>
+              <a:srgbClr val="E94560"/>
+            </a:solidFill>
+            <a:prstDash val="solid"/>
+          </a:ln>
+        </p:spPr>
+      </p:sp>
+      <p:sp>
+        <p:nvSpPr>
+          <p:cNvPr id="17" name="Shape 15"/>
+          <p:cNvSpPr/>
+          <p:nvPr/>
+        </p:nvSpPr>
+        <p:spPr>
+          <a:xfrm>
+            <a:off x="4023360" y="1920240"/>
+            <a:ext cx="0" cy="731520"/>
+          </a:xfrm>
+          <a:prstGeom prst="line">
+            <a:avLst/>
+          </a:prstGeom>
+          <a:noFill/>
+          <a:ln w="12700">
+            <a:solidFill>
+              <a:srgbClr val="E94560"/>
+            </a:solidFill>
+            <a:prstDash val="solid"/>
+          </a:ln>
+        </p:spPr>
+      </p:sp>
+      <p:sp>
+        <p:nvSpPr>
+          <p:cNvPr id="18" name="Shape 16"/>
+          <p:cNvSpPr/>
+          <p:nvPr/>
+        </p:nvSpPr>
+        <p:spPr>
+          <a:xfrm>
+            <a:off x="1280160" y="1920240"/>
+            <a:ext cx="0" cy="731520"/>
+          </a:xfrm>
+          <a:prstGeom prst="line">
+            <a:avLst/>
+          </a:prstGeom>
+          <a:noFill/>
+          <a:ln w="12700">
+            <a:solidFill>
+              <a:srgbClr val="E94560"/>
+            </a:solidFill>
+            <a:prstDash val="solid"/>
+          </a:ln>
+        </p:spPr>
+      </p:sp>
+      <p:sp>
+        <p:nvSpPr>
+          <p:cNvPr id="19" name="Shape 17"/>
+          <p:cNvSpPr/>
+          <p:nvPr/>
+        </p:nvSpPr>
+        <p:spPr>
+          <a:xfrm>
+            <a:off x="5303520" y="3108960"/>
+            <a:ext cx="640080" cy="0"/>
+          </a:xfrm>
+          <a:prstGeom prst="line">
+            <a:avLst/>
+          </a:prstGeom>
+          <a:noFill/>
+          <a:ln w="12700">
+            <a:solidFill>
+              <a:srgbClr val="E94560"/>
+            </a:solidFill>
+            <a:prstDash val="solid"/>
+          </a:ln>
+        </p:spPr>
+      </p:sp>
+    </p:spTree>
+  </p:cSld>
+  <p:clrMapOvr>
+    <a:masterClrMapping/>
+  </p:clrMapOvr>
+</p:sld>
+</file>
+
+<file path=ppt/slides/slide7.xml><?xml version="1.0" encoding="utf-8"?>
+<p:sld xmlns:a="http://schemas.openxmlformats.org/drawingml/2006/main" xmlns:r="http://schemas.openxmlformats.org/officeDocument/2006/relationships" xmlns:p="http://schemas.openxmlformats.org/presentationml/2006/main">
+  <p:cSld name="Slide 7">
+    <p:bg>
+      <p:bgPr>
+        <a:solidFill>
+          <a:srgbClr val="FFFFFF"/>
+        </a:solidFill>
+      </p:bgPr>
+    </p:bg>
+    <p:spTree>
+      <p:nvGrpSpPr>
+        <p:cNvPr id="1" name=""/>
+        <p:cNvGrpSpPr/>
+        <p:nvPr/>
+      </p:nvGrpSpPr>
+      <p:grpSpPr>
+        <a:xfrm>
+          <a:off x="0" y="0"/>
+          <a:ext cx="0" cy="0"/>
+          <a:chOff x="0" y="0"/>
+          <a:chExt cx="0" cy="0"/>
+        </a:xfrm>
+      </p:grpSpPr>
+      <p:sp>
+        <p:nvSpPr>
+          <p:cNvPr id="2" name="Text 0"/>
+          <p:cNvSpPr/>
+          <p:nvPr/>
+        </p:nvSpPr>
+        <p:spPr>
+          <a:xfrm>
+            <a:off x="384048" y="164592"/>
+            <a:ext cx="8375904" cy="548640"/>
+          </a:xfrm>
+          <a:prstGeom prst="rect">
+            <a:avLst/>
+          </a:prstGeom>
+          <a:noFill/>
+          <a:ln/>
+        </p:spPr>
+        <p:txBody>
+          <a:bodyPr wrap="square" rtlCol="0" anchor="b"/>
+          <a:lstStyle/>
+          <a:p>
+            <a:pPr algn="l" indent="0" marL="0">
+              <a:buNone/>
+            </a:pPr>
+            <a:r>
+              <a:rPr lang="en-US" sz="1600" b="1" dirty="0">
+                <a:solidFill>
+                  <a:srgbClr val="1A1A2E"/>
+                </a:solidFill>
+                <a:latin typeface="Georgia" pitchFamily="34" charset="0"/>
+                <a:ea typeface="Georgia" pitchFamily="34" charset="-122"/>
+                <a:cs typeface="Georgia" pitchFamily="34" charset="-120"/>
               </a:rPr>
               <a:t>Спецификация REST API: /api/tickets</a:t>
             </a:r>
-            <a:endParaRPr lang="en-US" sz="2000" dirty="0"/>
+            <a:endParaRPr lang="en-US" sz="1600" dirty="0"/>
           </a:p>
         </p:txBody>
       </p:sp>
       <p:graphicFrame>
         <p:nvGraphicFramePr>
-          <p:cNvPr id="7" name="Table 0"/>
+          <p:cNvPr id="8" name="Table 0"/>
           <p:cNvGraphicFramePr>
             <a:graphicFrameLocks noGrp="1"/>
           </p:cNvGraphicFramePr>
@@ -7464,23 +7625,23 @@
                           <a:solidFill>
                             <a:srgbClr val="FFFFFF"/>
                           </a:solidFill>
-                          <a:latin typeface="Calibri" pitchFamily="34" charset="0"/>
-                          <a:ea typeface="Calibri" pitchFamily="34" charset="-122"/>
-                          <a:cs typeface="Calibri" pitchFamily="34" charset="-120"/>
+                          <a:latin typeface="Times New Roman" pitchFamily="34" charset="0"/>
+                          <a:ea typeface="Times New Roman" pitchFamily="34" charset="-122"/>
+                          <a:cs typeface="Times New Roman" pitchFamily="34" charset="-120"/>
                         </a:rPr>
                         <a:t>Метод HTTP</a:t>
                       </a:r>
                       <a:endParaRPr lang="en-US" sz="1100" dirty="0">
-                        <a:latin typeface="Calibri" charset="0"/>
-                        <a:ea typeface="Calibri" charset="0"/>
-                        <a:cs typeface="Calibri" charset="0"/>
+                        <a:latin typeface="Times New Roman" charset="0"/>
+                        <a:ea typeface="Times New Roman" charset="0"/>
+                        <a:cs typeface="Times New Roman" charset="0"/>
                       </a:endParaRPr>
                     </a:p>
                   </a:txBody>
                   <a:tcPr marL="91440" marR="91440" marT="45720" marB="45720" anchor="ctr">
                     <a:lnL w="6350" cap="flat" cmpd="sng" algn="ctr">
                       <a:solidFill>
-                        <a:srgbClr val="FFEDD5"/>
+                        <a:srgbClr val="EFEAE3"/>
                       </a:solidFill>
                       <a:prstDash val="solid"/>
                       <a:round/>
@@ -7489,7 +7650,7 @@
                     </a:lnL>
                     <a:lnR w="6350" cap="flat" cmpd="sng" algn="ctr">
                       <a:solidFill>
-                        <a:srgbClr val="FFEDD5"/>
+                        <a:srgbClr val="EFEAE3"/>
                       </a:solidFill>
                       <a:prstDash val="solid"/>
                       <a:round/>
@@ -7498,7 +7659,7 @@
                     </a:lnR>
                     <a:lnT w="6350" cap="flat" cmpd="sng" algn="ctr">
                       <a:solidFill>
-                        <a:srgbClr val="FFEDD5"/>
+                        <a:srgbClr val="EFEAE3"/>
                       </a:solidFill>
                       <a:prstDash val="solid"/>
                       <a:round/>
@@ -7507,7 +7668,7 @@
                     </a:lnT>
                     <a:lnB w="6350" cap="flat" cmpd="sng" algn="ctr">
                       <a:solidFill>
-                        <a:srgbClr val="FFEDD5"/>
+                        <a:srgbClr val="EFEAE3"/>
                       </a:solidFill>
                       <a:prstDash val="solid"/>
                       <a:round/>
@@ -7515,7 +7676,7 @@
                       <a:tailEnd type="none" w="med" len="med"/>
                     </a:lnB>
                     <a:solidFill>
-                      <a:srgbClr val="0F1E36"/>
+                      <a:srgbClr val="1A1A2E"/>
                     </a:solidFill>
                   </a:tcPr>
                 </a:tc>
@@ -7532,23 +7693,23 @@
                           <a:solidFill>
                             <a:srgbClr val="FFFFFF"/>
                           </a:solidFill>
-                          <a:latin typeface="Calibri" pitchFamily="34" charset="0"/>
-                          <a:ea typeface="Calibri" pitchFamily="34" charset="-122"/>
-                          <a:cs typeface="Calibri" pitchFamily="34" charset="-120"/>
+                          <a:latin typeface="Times New Roman" pitchFamily="34" charset="0"/>
+                          <a:ea typeface="Times New Roman" pitchFamily="34" charset="-122"/>
+                          <a:cs typeface="Times New Roman" pitchFamily="34" charset="-120"/>
                         </a:rPr>
                         <a:t>URL-путь</a:t>
                       </a:r>
                       <a:endParaRPr lang="en-US" sz="1100" dirty="0">
-                        <a:latin typeface="Calibri" charset="0"/>
-                        <a:ea typeface="Calibri" charset="0"/>
-                        <a:cs typeface="Calibri" charset="0"/>
+                        <a:latin typeface="Times New Roman" charset="0"/>
+                        <a:ea typeface="Times New Roman" charset="0"/>
+                        <a:cs typeface="Times New Roman" charset="0"/>
                       </a:endParaRPr>
                     </a:p>
                   </a:txBody>
                   <a:tcPr marL="91440" marR="91440" marT="45720" marB="45720" anchor="ctr">
                     <a:lnL w="6350" cap="flat" cmpd="sng" algn="ctr">
                       <a:solidFill>
-                        <a:srgbClr val="FFEDD5"/>
+                        <a:srgbClr val="EFEAE3"/>
                       </a:solidFill>
                       <a:prstDash val="solid"/>
                       <a:round/>
@@ -7557,7 +7718,7 @@
                     </a:lnL>
                     <a:lnR w="6350" cap="flat" cmpd="sng" algn="ctr">
                       <a:solidFill>
-                        <a:srgbClr val="FFEDD5"/>
+                        <a:srgbClr val="EFEAE3"/>
                       </a:solidFill>
                       <a:prstDash val="solid"/>
                       <a:round/>
@@ -7566,7 +7727,7 @@
                     </a:lnR>
                     <a:lnT w="6350" cap="flat" cmpd="sng" algn="ctr">
                       <a:solidFill>
-                        <a:srgbClr val="FFEDD5"/>
+                        <a:srgbClr val="EFEAE3"/>
                       </a:solidFill>
                       <a:prstDash val="solid"/>
                       <a:round/>
@@ -7575,7 +7736,7 @@
                     </a:lnT>
                     <a:lnB w="6350" cap="flat" cmpd="sng" algn="ctr">
                       <a:solidFill>
-                        <a:srgbClr val="FFEDD5"/>
+                        <a:srgbClr val="EFEAE3"/>
                       </a:solidFill>
                       <a:prstDash val="solid"/>
                       <a:round/>
@@ -7583,7 +7744,7 @@
                       <a:tailEnd type="none" w="med" len="med"/>
                     </a:lnB>
                     <a:solidFill>
-                      <a:srgbClr val="0F1E36"/>
+                      <a:srgbClr val="1A1A2E"/>
                     </a:solidFill>
                   </a:tcPr>
                 </a:tc>
@@ -7600,23 +7761,23 @@
                           <a:solidFill>
                             <a:srgbClr val="FFFFFF"/>
                           </a:solidFill>
-                          <a:latin typeface="Calibri" pitchFamily="34" charset="0"/>
-                          <a:ea typeface="Calibri" pitchFamily="34" charset="-122"/>
-                          <a:cs typeface="Calibri" pitchFamily="34" charset="-120"/>
+                          <a:latin typeface="Times New Roman" pitchFamily="34" charset="0"/>
+                          <a:ea typeface="Times New Roman" pitchFamily="34" charset="-122"/>
+                          <a:cs typeface="Times New Roman" pitchFamily="34" charset="-120"/>
                         </a:rPr>
                         <a:t>Параметры</a:t>
                       </a:r>
                       <a:endParaRPr lang="en-US" sz="1100" dirty="0">
-                        <a:latin typeface="Calibri" charset="0"/>
-                        <a:ea typeface="Calibri" charset="0"/>
-                        <a:cs typeface="Calibri" charset="0"/>
+                        <a:latin typeface="Times New Roman" charset="0"/>
+                        <a:ea typeface="Times New Roman" charset="0"/>
+                        <a:cs typeface="Times New Roman" charset="0"/>
                       </a:endParaRPr>
                     </a:p>
                   </a:txBody>
                   <a:tcPr marL="91440" marR="91440" marT="45720" marB="45720" anchor="ctr">
                     <a:lnL w="6350" cap="flat" cmpd="sng" algn="ctr">
                       <a:solidFill>
-                        <a:srgbClr val="FFEDD5"/>
+                        <a:srgbClr val="EFEAE3"/>
                       </a:solidFill>
                       <a:prstDash val="solid"/>
                       <a:round/>
@@ -7625,7 +7786,7 @@
                     </a:lnL>
                     <a:lnR w="6350" cap="flat" cmpd="sng" algn="ctr">
                       <a:solidFill>
-                        <a:srgbClr val="FFEDD5"/>
+                        <a:srgbClr val="EFEAE3"/>
                       </a:solidFill>
                       <a:prstDash val="solid"/>
                       <a:round/>
@@ -7634,7 +7795,7 @@
                     </a:lnR>
                     <a:lnT w="6350" cap="flat" cmpd="sng" algn="ctr">
                       <a:solidFill>
-                        <a:srgbClr val="FFEDD5"/>
+                        <a:srgbClr val="EFEAE3"/>
                       </a:solidFill>
                       <a:prstDash val="solid"/>
                       <a:round/>
@@ -7643,7 +7804,7 @@
                     </a:lnT>
                     <a:lnB w="6350" cap="flat" cmpd="sng" algn="ctr">
                       <a:solidFill>
-                        <a:srgbClr val="FFEDD5"/>
+                        <a:srgbClr val="EFEAE3"/>
                       </a:solidFill>
                       <a:prstDash val="solid"/>
                       <a:round/>
@@ -7651,7 +7812,7 @@
                       <a:tailEnd type="none" w="med" len="med"/>
                     </a:lnB>
                     <a:solidFill>
-                      <a:srgbClr val="0F1E36"/>
+                      <a:srgbClr val="1A1A2E"/>
                     </a:solidFill>
                   </a:tcPr>
                 </a:tc>
@@ -7668,23 +7829,23 @@
                           <a:solidFill>
                             <a:srgbClr val="FFFFFF"/>
                           </a:solidFill>
-                          <a:latin typeface="Calibri" pitchFamily="34" charset="0"/>
-                          <a:ea typeface="Calibri" pitchFamily="34" charset="-122"/>
-                          <a:cs typeface="Calibri" pitchFamily="34" charset="-120"/>
+                          <a:latin typeface="Times New Roman" pitchFamily="34" charset="0"/>
+                          <a:ea typeface="Times New Roman" pitchFamily="34" charset="-122"/>
+                          <a:cs typeface="Times New Roman" pitchFamily="34" charset="-120"/>
                         </a:rPr>
                         <a:t>Описание операции</a:t>
                       </a:r>
                       <a:endParaRPr lang="en-US" sz="1100" dirty="0">
-                        <a:latin typeface="Calibri" charset="0"/>
-                        <a:ea typeface="Calibri" charset="0"/>
-                        <a:cs typeface="Calibri" charset="0"/>
+                        <a:latin typeface="Times New Roman" charset="0"/>
+                        <a:ea typeface="Times New Roman" charset="0"/>
+                        <a:cs typeface="Times New Roman" charset="0"/>
                       </a:endParaRPr>
                     </a:p>
                   </a:txBody>
                   <a:tcPr marL="91440" marR="91440" marT="45720" marB="45720" anchor="ctr">
                     <a:lnL w="6350" cap="flat" cmpd="sng" algn="ctr">
                       <a:solidFill>
-                        <a:srgbClr val="FFEDD5"/>
+                        <a:srgbClr val="EFEAE3"/>
                       </a:solidFill>
                       <a:prstDash val="solid"/>
                       <a:round/>
@@ -7693,7 +7854,7 @@
                     </a:lnL>
                     <a:lnR w="6350" cap="flat" cmpd="sng" algn="ctr">
                       <a:solidFill>
-                        <a:srgbClr val="FFEDD5"/>
+                        <a:srgbClr val="EFEAE3"/>
                       </a:solidFill>
                       <a:prstDash val="solid"/>
                       <a:round/>
@@ -7702,7 +7863,7 @@
                     </a:lnR>
                     <a:lnT w="6350" cap="flat" cmpd="sng" algn="ctr">
                       <a:solidFill>
-                        <a:srgbClr val="FFEDD5"/>
+                        <a:srgbClr val="EFEAE3"/>
                       </a:solidFill>
                       <a:prstDash val="solid"/>
                       <a:round/>
@@ -7711,7 +7872,7 @@
                     </a:lnT>
                     <a:lnB w="6350" cap="flat" cmpd="sng" algn="ctr">
                       <a:solidFill>
-                        <a:srgbClr val="FFEDD5"/>
+                        <a:srgbClr val="EFEAE3"/>
                       </a:solidFill>
                       <a:prstDash val="solid"/>
                       <a:round/>
@@ -7719,7 +7880,7 @@
                       <a:tailEnd type="none" w="med" len="med"/>
                     </a:lnB>
                     <a:solidFill>
-                      <a:srgbClr val="0F1E36"/>
+                      <a:srgbClr val="1A1A2E"/>
                     </a:solidFill>
                   </a:tcPr>
                 </a:tc>
@@ -7736,25 +7897,25 @@
                       <a:r>
                         <a:rPr lang="en-US" sz="1100" dirty="0">
                           <a:solidFill>
-                            <a:srgbClr val="1E293B"/>
+                            <a:srgbClr val="2D2D3A"/>
                           </a:solidFill>
-                          <a:latin typeface="Calibri" pitchFamily="34" charset="0"/>
-                          <a:ea typeface="Calibri" pitchFamily="34" charset="-122"/>
-                          <a:cs typeface="Calibri" pitchFamily="34" charset="-120"/>
+                          <a:latin typeface="Times New Roman" pitchFamily="34" charset="0"/>
+                          <a:ea typeface="Times New Roman" pitchFamily="34" charset="-122"/>
+                          <a:cs typeface="Times New Roman" pitchFamily="34" charset="-120"/>
                         </a:rPr>
                         <a:t>GET</a:t>
                       </a:r>
                       <a:endParaRPr lang="en-US" sz="1100" dirty="0">
-                        <a:latin typeface="Calibri" charset="0"/>
-                        <a:ea typeface="Calibri" charset="0"/>
-                        <a:cs typeface="Calibri" charset="0"/>
+                        <a:latin typeface="Times New Roman" charset="0"/>
+                        <a:ea typeface="Times New Roman" charset="0"/>
+                        <a:cs typeface="Times New Roman" charset="0"/>
                       </a:endParaRPr>
                     </a:p>
                   </a:txBody>
                   <a:tcPr marL="91440" marR="91440" marT="45720" marB="45720" anchor="ctr">
                     <a:lnL w="6350" cap="flat" cmpd="sng" algn="ctr">
                       <a:solidFill>
-                        <a:srgbClr val="FFEDD5"/>
+                        <a:srgbClr val="EFEAE3"/>
                       </a:solidFill>
                       <a:prstDash val="solid"/>
                       <a:round/>
@@ -7763,7 +7924,7 @@
                     </a:lnL>
                     <a:lnR w="6350" cap="flat" cmpd="sng" algn="ctr">
                       <a:solidFill>
-                        <a:srgbClr val="FFEDD5"/>
+                        <a:srgbClr val="EFEAE3"/>
                       </a:solidFill>
                       <a:prstDash val="solid"/>
                       <a:round/>
@@ -7772,7 +7933,7 @@
                     </a:lnR>
                     <a:lnT w="6350" cap="flat" cmpd="sng" algn="ctr">
                       <a:solidFill>
-                        <a:srgbClr val="FFEDD5"/>
+                        <a:srgbClr val="EFEAE3"/>
                       </a:solidFill>
                       <a:prstDash val="solid"/>
                       <a:round/>
@@ -7781,7 +7942,7 @@
                     </a:lnT>
                     <a:lnB w="6350" cap="flat" cmpd="sng" algn="ctr">
                       <a:solidFill>
-                        <a:srgbClr val="FFEDD5"/>
+                        <a:srgbClr val="EFEAE3"/>
                       </a:solidFill>
                       <a:prstDash val="solid"/>
                       <a:round/>
@@ -7789,7 +7950,7 @@
                       <a:tailEnd type="none" w="med" len="med"/>
                     </a:lnB>
                     <a:solidFill>
-                      <a:srgbClr val="FFF7ED"/>
+                      <a:srgbClr val="F8F4F0"/>
                     </a:solidFill>
                   </a:tcPr>
                 </a:tc>
@@ -7804,25 +7965,25 @@
                       <a:r>
                         <a:rPr lang="en-US" sz="1100" dirty="0">
                           <a:solidFill>
-                            <a:srgbClr val="1E293B"/>
+                            <a:srgbClr val="2D2D3A"/>
                           </a:solidFill>
-                          <a:latin typeface="Calibri" pitchFamily="34" charset="0"/>
-                          <a:ea typeface="Calibri" pitchFamily="34" charset="-122"/>
-                          <a:cs typeface="Calibri" pitchFamily="34" charset="-120"/>
+                          <a:latin typeface="Times New Roman" pitchFamily="34" charset="0"/>
+                          <a:ea typeface="Times New Roman" pitchFamily="34" charset="-122"/>
+                          <a:cs typeface="Times New Roman" pitchFamily="34" charset="-120"/>
                         </a:rPr>
                         <a:t>/api/tickets</a:t>
                       </a:r>
                       <a:endParaRPr lang="en-US" sz="1100" dirty="0">
-                        <a:latin typeface="Calibri" charset="0"/>
-                        <a:ea typeface="Calibri" charset="0"/>
-                        <a:cs typeface="Calibri" charset="0"/>
+                        <a:latin typeface="Times New Roman" charset="0"/>
+                        <a:ea typeface="Times New Roman" charset="0"/>
+                        <a:cs typeface="Times New Roman" charset="0"/>
                       </a:endParaRPr>
                     </a:p>
                   </a:txBody>
                   <a:tcPr marL="91440" marR="91440" marT="45720" marB="45720" anchor="ctr">
                     <a:lnL w="6350" cap="flat" cmpd="sng" algn="ctr">
                       <a:solidFill>
-                        <a:srgbClr val="FFEDD5"/>
+                        <a:srgbClr val="EFEAE3"/>
                       </a:solidFill>
                       <a:prstDash val="solid"/>
                       <a:round/>
@@ -7831,7 +7992,7 @@
                     </a:lnL>
                     <a:lnR w="6350" cap="flat" cmpd="sng" algn="ctr">
                       <a:solidFill>
-                        <a:srgbClr val="FFEDD5"/>
+                        <a:srgbClr val="EFEAE3"/>
                       </a:solidFill>
                       <a:prstDash val="solid"/>
                       <a:round/>
@@ -7840,7 +8001,7 @@
                     </a:lnR>
                     <a:lnT w="6350" cap="flat" cmpd="sng" algn="ctr">
                       <a:solidFill>
-                        <a:srgbClr val="FFEDD5"/>
+                        <a:srgbClr val="EFEAE3"/>
                       </a:solidFill>
                       <a:prstDash val="solid"/>
                       <a:round/>
@@ -7849,7 +8010,7 @@
                     </a:lnT>
                     <a:lnB w="6350" cap="flat" cmpd="sng" algn="ctr">
                       <a:solidFill>
-                        <a:srgbClr val="FFEDD5"/>
+                        <a:srgbClr val="EFEAE3"/>
                       </a:solidFill>
                       <a:prstDash val="solid"/>
                       <a:round/>
@@ -7857,7 +8018,7 @@
                       <a:tailEnd type="none" w="med" len="med"/>
                     </a:lnB>
                     <a:solidFill>
-                      <a:srgbClr val="FFF7ED"/>
+                      <a:srgbClr val="F8F4F0"/>
                     </a:solidFill>
                   </a:tcPr>
                 </a:tc>
@@ -7872,25 +8033,25 @@
                       <a:r>
                         <a:rPr lang="en-US" sz="1100" dirty="0">
                           <a:solidFill>
-                            <a:srgbClr val="1E293B"/>
+                            <a:srgbClr val="2D2D3A"/>
                           </a:solidFill>
-                          <a:latin typeface="Calibri" pitchFamily="34" charset="0"/>
-                          <a:ea typeface="Calibri" pitchFamily="34" charset="-122"/>
-                          <a:cs typeface="Calibri" pitchFamily="34" charset="-120"/>
+                          <a:latin typeface="Times New Roman" pitchFamily="34" charset="0"/>
+                          <a:ea typeface="Times New Roman" pitchFamily="34" charset="-122"/>
+                          <a:cs typeface="Times New Roman" pitchFamily="34" charset="-120"/>
                         </a:rPr>
                         <a:t>page, status, search</a:t>
                       </a:r>
                       <a:endParaRPr lang="en-US" sz="1100" dirty="0">
-                        <a:latin typeface="Calibri" charset="0"/>
-                        <a:ea typeface="Calibri" charset="0"/>
-                        <a:cs typeface="Calibri" charset="0"/>
+                        <a:latin typeface="Times New Roman" charset="0"/>
+                        <a:ea typeface="Times New Roman" charset="0"/>
+                        <a:cs typeface="Times New Roman" charset="0"/>
                       </a:endParaRPr>
                     </a:p>
                   </a:txBody>
                   <a:tcPr marL="91440" marR="91440" marT="45720" marB="45720" anchor="ctr">
                     <a:lnL w="6350" cap="flat" cmpd="sng" algn="ctr">
                       <a:solidFill>
-                        <a:srgbClr val="FFEDD5"/>
+                        <a:srgbClr val="EFEAE3"/>
                       </a:solidFill>
                       <a:prstDash val="solid"/>
                       <a:round/>
@@ -7899,7 +8060,7 @@
                     </a:lnL>
                     <a:lnR w="6350" cap="flat" cmpd="sng" algn="ctr">
                       <a:solidFill>
-                        <a:srgbClr val="FFEDD5"/>
+                        <a:srgbClr val="EFEAE3"/>
                       </a:solidFill>
                       <a:prstDash val="solid"/>
                       <a:round/>
@@ -7908,7 +8069,7 @@
                     </a:lnR>
                     <a:lnT w="6350" cap="flat" cmpd="sng" algn="ctr">
                       <a:solidFill>
-                        <a:srgbClr val="FFEDD5"/>
+                        <a:srgbClr val="EFEAE3"/>
                       </a:solidFill>
                       <a:prstDash val="solid"/>
                       <a:round/>
@@ -7917,7 +8078,7 @@
                     </a:lnT>
                     <a:lnB w="6350" cap="flat" cmpd="sng" algn="ctr">
                       <a:solidFill>
-                        <a:srgbClr val="FFEDD5"/>
+                        <a:srgbClr val="EFEAE3"/>
                       </a:solidFill>
                       <a:prstDash val="solid"/>
                       <a:round/>
@@ -7925,7 +8086,7 @@
                       <a:tailEnd type="none" w="med" len="med"/>
                     </a:lnB>
                     <a:solidFill>
-                      <a:srgbClr val="FFF7ED"/>
+                      <a:srgbClr val="F8F4F0"/>
                     </a:solidFill>
                   </a:tcPr>
                 </a:tc>
@@ -7940,25 +8101,25 @@
                       <a:r>
                         <a:rPr lang="en-US" sz="1100" dirty="0">
                           <a:solidFill>
-                            <a:srgbClr val="1E293B"/>
+                            <a:srgbClr val="2D2D3A"/>
                           </a:solidFill>
-                          <a:latin typeface="Calibri" pitchFamily="34" charset="0"/>
-                          <a:ea typeface="Calibri" pitchFamily="34" charset="-122"/>
-                          <a:cs typeface="Calibri" pitchFamily="34" charset="-120"/>
+                          <a:latin typeface="Times New Roman" pitchFamily="34" charset="0"/>
+                          <a:ea typeface="Times New Roman" pitchFamily="34" charset="-122"/>
+                          <a:cs typeface="Times New Roman" pitchFamily="34" charset="-120"/>
                         </a:rPr>
                         <a:t>Получить постраничный список обращений</a:t>
                       </a:r>
                       <a:endParaRPr lang="en-US" sz="1100" dirty="0">
-                        <a:latin typeface="Calibri" charset="0"/>
-                        <a:ea typeface="Calibri" charset="0"/>
-                        <a:cs typeface="Calibri" charset="0"/>
+                        <a:latin typeface="Times New Roman" charset="0"/>
+                        <a:ea typeface="Times New Roman" charset="0"/>
+                        <a:cs typeface="Times New Roman" charset="0"/>
                       </a:endParaRPr>
                     </a:p>
                   </a:txBody>
                   <a:tcPr marL="91440" marR="91440" marT="45720" marB="45720" anchor="ctr">
                     <a:lnL w="6350" cap="flat" cmpd="sng" algn="ctr">
                       <a:solidFill>
-                        <a:srgbClr val="FFEDD5"/>
+                        <a:srgbClr val="EFEAE3"/>
                       </a:solidFill>
                       <a:prstDash val="solid"/>
                       <a:round/>
@@ -7967,7 +8128,7 @@
                     </a:lnL>
                     <a:lnR w="6350" cap="flat" cmpd="sng" algn="ctr">
                       <a:solidFill>
-                        <a:srgbClr val="FFEDD5"/>
+                        <a:srgbClr val="EFEAE3"/>
                       </a:solidFill>
                       <a:prstDash val="solid"/>
                       <a:round/>
@@ -7976,7 +8137,7 @@
                     </a:lnR>
                     <a:lnT w="6350" cap="flat" cmpd="sng" algn="ctr">
                       <a:solidFill>
-                        <a:srgbClr val="FFEDD5"/>
+                        <a:srgbClr val="EFEAE3"/>
                       </a:solidFill>
                       <a:prstDash val="solid"/>
                       <a:round/>
@@ -7985,7 +8146,7 @@
                     </a:lnT>
                     <a:lnB w="6350" cap="flat" cmpd="sng" algn="ctr">
                       <a:solidFill>
-                        <a:srgbClr val="FFEDD5"/>
+                        <a:srgbClr val="EFEAE3"/>
                       </a:solidFill>
                       <a:prstDash val="solid"/>
                       <a:round/>
@@ -7993,7 +8154,7 @@
                       <a:tailEnd type="none" w="med" len="med"/>
                     </a:lnB>
                     <a:solidFill>
-                      <a:srgbClr val="FFF7ED"/>
+                      <a:srgbClr val="F8F4F0"/>
                     </a:solidFill>
                   </a:tcPr>
                 </a:tc>
@@ -8010,25 +8171,25 @@
                       <a:r>
                         <a:rPr lang="en-US" sz="1100" dirty="0">
                           <a:solidFill>
-                            <a:srgbClr val="1E293B"/>
+                            <a:srgbClr val="2D2D3A"/>
                           </a:solidFill>
-                          <a:latin typeface="Calibri" pitchFamily="34" charset="0"/>
-                          <a:ea typeface="Calibri" pitchFamily="34" charset="-122"/>
-                          <a:cs typeface="Calibri" pitchFamily="34" charset="-120"/>
+                          <a:latin typeface="Times New Roman" pitchFamily="34" charset="0"/>
+                          <a:ea typeface="Times New Roman" pitchFamily="34" charset="-122"/>
+                          <a:cs typeface="Times New Roman" pitchFamily="34" charset="-120"/>
                         </a:rPr>
                         <a:t>POST</a:t>
                       </a:r>
                       <a:endParaRPr lang="en-US" sz="1100" dirty="0">
-                        <a:latin typeface="Calibri" charset="0"/>
-                        <a:ea typeface="Calibri" charset="0"/>
-                        <a:cs typeface="Calibri" charset="0"/>
+                        <a:latin typeface="Times New Roman" charset="0"/>
+                        <a:ea typeface="Times New Roman" charset="0"/>
+                        <a:cs typeface="Times New Roman" charset="0"/>
                       </a:endParaRPr>
                     </a:p>
                   </a:txBody>
                   <a:tcPr marL="91440" marR="91440" marT="45720" marB="45720" anchor="ctr">
                     <a:lnL w="6350" cap="flat" cmpd="sng" algn="ctr">
                       <a:solidFill>
-                        <a:srgbClr val="FFEDD5"/>
+                        <a:srgbClr val="EFEAE3"/>
                       </a:solidFill>
                       <a:prstDash val="solid"/>
                       <a:round/>
@@ -8037,7 +8198,7 @@
                     </a:lnL>
                     <a:lnR w="6350" cap="flat" cmpd="sng" algn="ctr">
                       <a:solidFill>
-                        <a:srgbClr val="FFEDD5"/>
+                        <a:srgbClr val="EFEAE3"/>
                       </a:solidFill>
                       <a:prstDash val="solid"/>
                       <a:round/>
@@ -8046,7 +8207,7 @@
                     </a:lnR>
                     <a:lnT w="6350" cap="flat" cmpd="sng" algn="ctr">
                       <a:solidFill>
-                        <a:srgbClr val="FFEDD5"/>
+                        <a:srgbClr val="EFEAE3"/>
                       </a:solidFill>
                       <a:prstDash val="solid"/>
                       <a:round/>
@@ -8055,7 +8216,7 @@
                     </a:lnT>
                     <a:lnB w="6350" cap="flat" cmpd="sng" algn="ctr">
                       <a:solidFill>
-                        <a:srgbClr val="FFEDD5"/>
+                        <a:srgbClr val="EFEAE3"/>
                       </a:solidFill>
                       <a:prstDash val="solid"/>
                       <a:round/>
@@ -8078,25 +8239,25 @@
                       <a:r>
                         <a:rPr lang="en-US" sz="1100" dirty="0">
                           <a:solidFill>
-                            <a:srgbClr val="1E293B"/>
+                            <a:srgbClr val="2D2D3A"/>
                           </a:solidFill>
-                          <a:latin typeface="Calibri" pitchFamily="34" charset="0"/>
-                          <a:ea typeface="Calibri" pitchFamily="34" charset="-122"/>
-                          <a:cs typeface="Calibri" pitchFamily="34" charset="-120"/>
+                          <a:latin typeface="Times New Roman" pitchFamily="34" charset="0"/>
+                          <a:ea typeface="Times New Roman" pitchFamily="34" charset="-122"/>
+                          <a:cs typeface="Times New Roman" pitchFamily="34" charset="-120"/>
                         </a:rPr>
                         <a:t>/api/tickets</a:t>
                       </a:r>
                       <a:endParaRPr lang="en-US" sz="1100" dirty="0">
-                        <a:latin typeface="Calibri" charset="0"/>
-                        <a:ea typeface="Calibri" charset="0"/>
-                        <a:cs typeface="Calibri" charset="0"/>
+                        <a:latin typeface="Times New Roman" charset="0"/>
+                        <a:ea typeface="Times New Roman" charset="0"/>
+                        <a:cs typeface="Times New Roman" charset="0"/>
                       </a:endParaRPr>
                     </a:p>
                   </a:txBody>
                   <a:tcPr marL="91440" marR="91440" marT="45720" marB="45720" anchor="ctr">
                     <a:lnL w="6350" cap="flat" cmpd="sng" algn="ctr">
                       <a:solidFill>
-                        <a:srgbClr val="FFEDD5"/>
+                        <a:srgbClr val="EFEAE3"/>
                       </a:solidFill>
                       <a:prstDash val="solid"/>
                       <a:round/>
@@ -8105,7 +8266,7 @@
                     </a:lnL>
                     <a:lnR w="6350" cap="flat" cmpd="sng" algn="ctr">
                       <a:solidFill>
-                        <a:srgbClr val="FFEDD5"/>
+                        <a:srgbClr val="EFEAE3"/>
                       </a:solidFill>
                       <a:prstDash val="solid"/>
                       <a:round/>
@@ -8114,7 +8275,7 @@
                     </a:lnR>
                     <a:lnT w="6350" cap="flat" cmpd="sng" algn="ctr">
                       <a:solidFill>
-                        <a:srgbClr val="FFEDD5"/>
+                        <a:srgbClr val="EFEAE3"/>
                       </a:solidFill>
                       <a:prstDash val="solid"/>
                       <a:round/>
@@ -8123,7 +8284,7 @@
                     </a:lnT>
                     <a:lnB w="6350" cap="flat" cmpd="sng" algn="ctr">
                       <a:solidFill>
-                        <a:srgbClr val="FFEDD5"/>
+                        <a:srgbClr val="EFEAE3"/>
                       </a:solidFill>
                       <a:prstDash val="solid"/>
                       <a:round/>
@@ -8146,25 +8307,25 @@
                       <a:r>
                         <a:rPr lang="en-US" sz="1100" dirty="0">
                           <a:solidFill>
-                            <a:srgbClr val="1E293B"/>
+                            <a:srgbClr val="2D2D3A"/>
                           </a:solidFill>
-                          <a:latin typeface="Calibri" pitchFamily="34" charset="0"/>
-                          <a:ea typeface="Calibri" pitchFamily="34" charset="-122"/>
-                          <a:cs typeface="Calibri" pitchFamily="34" charset="-120"/>
+                          <a:latin typeface="Times New Roman" pitchFamily="34" charset="0"/>
+                          <a:ea typeface="Times New Roman" pitchFamily="34" charset="-122"/>
+                          <a:cs typeface="Times New Roman" pitchFamily="34" charset="-120"/>
                         </a:rPr>
                         <a:t>title, description</a:t>
                       </a:r>
                       <a:endParaRPr lang="en-US" sz="1100" dirty="0">
-                        <a:latin typeface="Calibri" charset="0"/>
-                        <a:ea typeface="Calibri" charset="0"/>
-                        <a:cs typeface="Calibri" charset="0"/>
+                        <a:latin typeface="Times New Roman" charset="0"/>
+                        <a:ea typeface="Times New Roman" charset="0"/>
+                        <a:cs typeface="Times New Roman" charset="0"/>
                       </a:endParaRPr>
                     </a:p>
                   </a:txBody>
                   <a:tcPr marL="91440" marR="91440" marT="45720" marB="45720" anchor="ctr">
                     <a:lnL w="6350" cap="flat" cmpd="sng" algn="ctr">
                       <a:solidFill>
-                        <a:srgbClr val="FFEDD5"/>
+                        <a:srgbClr val="EFEAE3"/>
                       </a:solidFill>
                       <a:prstDash val="solid"/>
                       <a:round/>
@@ -8173,7 +8334,7 @@
                     </a:lnL>
                     <a:lnR w="6350" cap="flat" cmpd="sng" algn="ctr">
                       <a:solidFill>
-                        <a:srgbClr val="FFEDD5"/>
+                        <a:srgbClr val="EFEAE3"/>
                       </a:solidFill>
                       <a:prstDash val="solid"/>
                       <a:round/>
@@ -8182,7 +8343,7 @@
                     </a:lnR>
                     <a:lnT w="6350" cap="flat" cmpd="sng" algn="ctr">
                       <a:solidFill>
-                        <a:srgbClr val="FFEDD5"/>
+                        <a:srgbClr val="EFEAE3"/>
                       </a:solidFill>
                       <a:prstDash val="solid"/>
                       <a:round/>
@@ -8191,7 +8352,7 @@
                     </a:lnT>
                     <a:lnB w="6350" cap="flat" cmpd="sng" algn="ctr">
                       <a:solidFill>
-                        <a:srgbClr val="FFEDD5"/>
+                        <a:srgbClr val="EFEAE3"/>
                       </a:solidFill>
                       <a:prstDash val="solid"/>
                       <a:round/>
@@ -8214,25 +8375,25 @@
                       <a:r>
                         <a:rPr lang="en-US" sz="1100" dirty="0">
                           <a:solidFill>
-                            <a:srgbClr val="1E293B"/>
+                            <a:srgbClr val="2D2D3A"/>
                           </a:solidFill>
-                          <a:latin typeface="Calibri" pitchFamily="34" charset="0"/>
-                          <a:ea typeface="Calibri" pitchFamily="34" charset="-122"/>
-                          <a:cs typeface="Calibri" pitchFamily="34" charset="-120"/>
+                          <a:latin typeface="Times New Roman" pitchFamily="34" charset="0"/>
+                          <a:ea typeface="Times New Roman" pitchFamily="34" charset="-122"/>
+                          <a:cs typeface="Times New Roman" pitchFamily="34" charset="-120"/>
                         </a:rPr>
                         <a:t>Создать новое обращение клиента</a:t>
                       </a:r>
                       <a:endParaRPr lang="en-US" sz="1100" dirty="0">
-                        <a:latin typeface="Calibri" charset="0"/>
-                        <a:ea typeface="Calibri" charset="0"/>
-                        <a:cs typeface="Calibri" charset="0"/>
+                        <a:latin typeface="Times New Roman" charset="0"/>
+                        <a:ea typeface="Times New Roman" charset="0"/>
+                        <a:cs typeface="Times New Roman" charset="0"/>
                       </a:endParaRPr>
                     </a:p>
                   </a:txBody>
                   <a:tcPr marL="91440" marR="91440" marT="45720" marB="45720" anchor="ctr">
                     <a:lnL w="6350" cap="flat" cmpd="sng" algn="ctr">
                       <a:solidFill>
-                        <a:srgbClr val="FFEDD5"/>
+                        <a:srgbClr val="EFEAE3"/>
                       </a:solidFill>
                       <a:prstDash val="solid"/>
                       <a:round/>
@@ -8241,7 +8402,7 @@
                     </a:lnL>
                     <a:lnR w="6350" cap="flat" cmpd="sng" algn="ctr">
                       <a:solidFill>
-                        <a:srgbClr val="FFEDD5"/>
+                        <a:srgbClr val="EFEAE3"/>
                       </a:solidFill>
                       <a:prstDash val="solid"/>
                       <a:round/>
@@ -8250,7 +8411,7 @@
                     </a:lnR>
                     <a:lnT w="6350" cap="flat" cmpd="sng" algn="ctr">
                       <a:solidFill>
-                        <a:srgbClr val="FFEDD5"/>
+                        <a:srgbClr val="EFEAE3"/>
                       </a:solidFill>
                       <a:prstDash val="solid"/>
                       <a:round/>
@@ -8259,7 +8420,7 @@
                     </a:lnT>
                     <a:lnB w="6350" cap="flat" cmpd="sng" algn="ctr">
                       <a:solidFill>
-                        <a:srgbClr val="FFEDD5"/>
+                        <a:srgbClr val="EFEAE3"/>
                       </a:solidFill>
                       <a:prstDash val="solid"/>
                       <a:round/>
@@ -8284,25 +8445,25 @@
                       <a:r>
                         <a:rPr lang="en-US" sz="1100" dirty="0">
                           <a:solidFill>
-                            <a:srgbClr val="1E293B"/>
+                            <a:srgbClr val="2D2D3A"/>
                           </a:solidFill>
-                          <a:latin typeface="Calibri" pitchFamily="34" charset="0"/>
-                          <a:ea typeface="Calibri" pitchFamily="34" charset="-122"/>
-                          <a:cs typeface="Calibri" pitchFamily="34" charset="-120"/>
+                          <a:latin typeface="Times New Roman" pitchFamily="34" charset="0"/>
+                          <a:ea typeface="Times New Roman" pitchFamily="34" charset="-122"/>
+                          <a:cs typeface="Times New Roman" pitchFamily="34" charset="-120"/>
                         </a:rPr>
                         <a:t>GET</a:t>
                       </a:r>
                       <a:endParaRPr lang="en-US" sz="1100" dirty="0">
-                        <a:latin typeface="Calibri" charset="0"/>
-                        <a:ea typeface="Calibri" charset="0"/>
-                        <a:cs typeface="Calibri" charset="0"/>
+                        <a:latin typeface="Times New Roman" charset="0"/>
+                        <a:ea typeface="Times New Roman" charset="0"/>
+                        <a:cs typeface="Times New Roman" charset="0"/>
                       </a:endParaRPr>
                     </a:p>
                   </a:txBody>
                   <a:tcPr marL="91440" marR="91440" marT="45720" marB="45720" anchor="ctr">
                     <a:lnL w="6350" cap="flat" cmpd="sng" algn="ctr">
                       <a:solidFill>
-                        <a:srgbClr val="FFEDD5"/>
+                        <a:srgbClr val="EFEAE3"/>
                       </a:solidFill>
                       <a:prstDash val="solid"/>
                       <a:round/>
@@ -8311,7 +8472,7 @@
                     </a:lnL>
                     <a:lnR w="6350" cap="flat" cmpd="sng" algn="ctr">
                       <a:solidFill>
-                        <a:srgbClr val="FFEDD5"/>
+                        <a:srgbClr val="EFEAE3"/>
                       </a:solidFill>
                       <a:prstDash val="solid"/>
                       <a:round/>
@@ -8320,7 +8481,7 @@
                     </a:lnR>
                     <a:lnT w="6350" cap="flat" cmpd="sng" algn="ctr">
                       <a:solidFill>
-                        <a:srgbClr val="FFEDD5"/>
+                        <a:srgbClr val="EFEAE3"/>
                       </a:solidFill>
                       <a:prstDash val="solid"/>
                       <a:round/>
@@ -8329,7 +8490,7 @@
                     </a:lnT>
                     <a:lnB w="6350" cap="flat" cmpd="sng" algn="ctr">
                       <a:solidFill>
-                        <a:srgbClr val="FFEDD5"/>
+                        <a:srgbClr val="EFEAE3"/>
                       </a:solidFill>
                       <a:prstDash val="solid"/>
                       <a:round/>
@@ -8337,7 +8498,7 @@
                       <a:tailEnd type="none" w="med" len="med"/>
                     </a:lnB>
                     <a:solidFill>
-                      <a:srgbClr val="FFF7ED"/>
+                      <a:srgbClr val="F8F4F0"/>
                     </a:solidFill>
                   </a:tcPr>
                 </a:tc>
@@ -8352,25 +8513,25 @@
                       <a:r>
                         <a:rPr lang="en-US" sz="1100" dirty="0">
                           <a:solidFill>
-                            <a:srgbClr val="1E293B"/>
+                            <a:srgbClr val="2D2D3A"/>
                           </a:solidFill>
-                          <a:latin typeface="Calibri" pitchFamily="34" charset="0"/>
-                          <a:ea typeface="Calibri" pitchFamily="34" charset="-122"/>
-                          <a:cs typeface="Calibri" pitchFamily="34" charset="-120"/>
+                          <a:latin typeface="Times New Roman" pitchFamily="34" charset="0"/>
+                          <a:ea typeface="Times New Roman" pitchFamily="34" charset="-122"/>
+                          <a:cs typeface="Times New Roman" pitchFamily="34" charset="-120"/>
                         </a:rPr>
                         <a:t>/api/tickets/:id</a:t>
                       </a:r>
                       <a:endParaRPr lang="en-US" sz="1100" dirty="0">
-                        <a:latin typeface="Calibri" charset="0"/>
-                        <a:ea typeface="Calibri" charset="0"/>
-                        <a:cs typeface="Calibri" charset="0"/>
+                        <a:latin typeface="Times New Roman" charset="0"/>
+                        <a:ea typeface="Times New Roman" charset="0"/>
+                        <a:cs typeface="Times New Roman" charset="0"/>
                       </a:endParaRPr>
                     </a:p>
                   </a:txBody>
                   <a:tcPr marL="91440" marR="91440" marT="45720" marB="45720" anchor="ctr">
                     <a:lnL w="6350" cap="flat" cmpd="sng" algn="ctr">
                       <a:solidFill>
-                        <a:srgbClr val="FFEDD5"/>
+                        <a:srgbClr val="EFEAE3"/>
                       </a:solidFill>
                       <a:prstDash val="solid"/>
                       <a:round/>
@@ -8379,7 +8540,7 @@
                     </a:lnL>
                     <a:lnR w="6350" cap="flat" cmpd="sng" algn="ctr">
                       <a:solidFill>
-                        <a:srgbClr val="FFEDD5"/>
+                        <a:srgbClr val="EFEAE3"/>
                       </a:solidFill>
                       <a:prstDash val="solid"/>
                       <a:round/>
@@ -8388,7 +8549,7 @@
                     </a:lnR>
                     <a:lnT w="6350" cap="flat" cmpd="sng" algn="ctr">
                       <a:solidFill>
-                        <a:srgbClr val="FFEDD5"/>
+                        <a:srgbClr val="EFEAE3"/>
                       </a:solidFill>
                       <a:prstDash val="solid"/>
                       <a:round/>
@@ -8397,7 +8558,7 @@
                     </a:lnT>
                     <a:lnB w="6350" cap="flat" cmpd="sng" algn="ctr">
                       <a:solidFill>
-                        <a:srgbClr val="FFEDD5"/>
+                        <a:srgbClr val="EFEAE3"/>
                       </a:solidFill>
                       <a:prstDash val="solid"/>
                       <a:round/>
@@ -8405,7 +8566,7 @@
                       <a:tailEnd type="none" w="med" len="med"/>
                     </a:lnB>
                     <a:solidFill>
-                      <a:srgbClr val="FFF7ED"/>
+                      <a:srgbClr val="F8F4F0"/>
                     </a:solidFill>
                   </a:tcPr>
                 </a:tc>
@@ -8420,25 +8581,25 @@
                       <a:r>
                         <a:rPr lang="en-US" sz="1100" dirty="0">
                           <a:solidFill>
-                            <a:srgbClr val="1E293B"/>
+                            <a:srgbClr val="2D2D3A"/>
                           </a:solidFill>
-                          <a:latin typeface="Calibri" pitchFamily="34" charset="0"/>
-                          <a:ea typeface="Calibri" pitchFamily="34" charset="-122"/>
-                          <a:cs typeface="Calibri" pitchFamily="34" charset="-120"/>
+                          <a:latin typeface="Times New Roman" pitchFamily="34" charset="0"/>
+                          <a:ea typeface="Times New Roman" pitchFamily="34" charset="-122"/>
+                          <a:cs typeface="Times New Roman" pitchFamily="34" charset="-120"/>
                         </a:rPr>
                         <a:t>id (uuid)</a:t>
                       </a:r>
                       <a:endParaRPr lang="en-US" sz="1100" dirty="0">
-                        <a:latin typeface="Calibri" charset="0"/>
-                        <a:ea typeface="Calibri" charset="0"/>
-                        <a:cs typeface="Calibri" charset="0"/>
+                        <a:latin typeface="Times New Roman" charset="0"/>
+                        <a:ea typeface="Times New Roman" charset="0"/>
+                        <a:cs typeface="Times New Roman" charset="0"/>
                       </a:endParaRPr>
                     </a:p>
                   </a:txBody>
                   <a:tcPr marL="91440" marR="91440" marT="45720" marB="45720" anchor="ctr">
                     <a:lnL w="6350" cap="flat" cmpd="sng" algn="ctr">
                       <a:solidFill>
-                        <a:srgbClr val="FFEDD5"/>
+                        <a:srgbClr val="EFEAE3"/>
                       </a:solidFill>
                       <a:prstDash val="solid"/>
                       <a:round/>
@@ -8447,7 +8608,7 @@
                     </a:lnL>
                     <a:lnR w="6350" cap="flat" cmpd="sng" algn="ctr">
                       <a:solidFill>
-                        <a:srgbClr val="FFEDD5"/>
+                        <a:srgbClr val="EFEAE3"/>
                       </a:solidFill>
                       <a:prstDash val="solid"/>
                       <a:round/>
@@ -8456,7 +8617,7 @@
                     </a:lnR>
                     <a:lnT w="6350" cap="flat" cmpd="sng" algn="ctr">
                       <a:solidFill>
-                        <a:srgbClr val="FFEDD5"/>
+                        <a:srgbClr val="EFEAE3"/>
                       </a:solidFill>
                       <a:prstDash val="solid"/>
                       <a:round/>
@@ -8465,7 +8626,7 @@
                     </a:lnT>
                     <a:lnB w="6350" cap="flat" cmpd="sng" algn="ctr">
                       <a:solidFill>
-                        <a:srgbClr val="FFEDD5"/>
+                        <a:srgbClr val="EFEAE3"/>
                       </a:solidFill>
                       <a:prstDash val="solid"/>
                       <a:round/>
@@ -8473,7 +8634,7 @@
                       <a:tailEnd type="none" w="med" len="med"/>
                     </a:lnB>
                     <a:solidFill>
-                      <a:srgbClr val="FFF7ED"/>
+                      <a:srgbClr val="F8F4F0"/>
                     </a:solidFill>
                   </a:tcPr>
                 </a:tc>
@@ -8488,25 +8649,25 @@
                       <a:r>
                         <a:rPr lang="en-US" sz="1100" dirty="0">
                           <a:solidFill>
-                            <a:srgbClr val="1E293B"/>
+                            <a:srgbClr val="2D2D3A"/>
                           </a:solidFill>
-                          <a:latin typeface="Calibri" pitchFamily="34" charset="0"/>
-                          <a:ea typeface="Calibri" pitchFamily="34" charset="-122"/>
-                          <a:cs typeface="Calibri" pitchFamily="34" charset="-120"/>
+                          <a:latin typeface="Times New Roman" pitchFamily="34" charset="0"/>
+                          <a:ea typeface="Times New Roman" pitchFamily="34" charset="-122"/>
+                          <a:cs typeface="Times New Roman" pitchFamily="34" charset="-120"/>
                         </a:rPr>
                         <a:t>Получить полную карточку обращения</a:t>
                       </a:r>
                       <a:endParaRPr lang="en-US" sz="1100" dirty="0">
-                        <a:latin typeface="Calibri" charset="0"/>
-                        <a:ea typeface="Calibri" charset="0"/>
-                        <a:cs typeface="Calibri" charset="0"/>
+                        <a:latin typeface="Times New Roman" charset="0"/>
+                        <a:ea typeface="Times New Roman" charset="0"/>
+                        <a:cs typeface="Times New Roman" charset="0"/>
                       </a:endParaRPr>
                     </a:p>
                   </a:txBody>
                   <a:tcPr marL="91440" marR="91440" marT="45720" marB="45720" anchor="ctr">
                     <a:lnL w="6350" cap="flat" cmpd="sng" algn="ctr">
                       <a:solidFill>
-                        <a:srgbClr val="FFEDD5"/>
+                        <a:srgbClr val="EFEAE3"/>
                       </a:solidFill>
                       <a:prstDash val="solid"/>
                       <a:round/>
@@ -8515,7 +8676,7 @@
                     </a:lnL>
                     <a:lnR w="6350" cap="flat" cmpd="sng" algn="ctr">
                       <a:solidFill>
-                        <a:srgbClr val="FFEDD5"/>
+                        <a:srgbClr val="EFEAE3"/>
                       </a:solidFill>
                       <a:prstDash val="solid"/>
                       <a:round/>
@@ -8524,7 +8685,7 @@
                     </a:lnR>
                     <a:lnT w="6350" cap="flat" cmpd="sng" algn="ctr">
                       <a:solidFill>
-                        <a:srgbClr val="FFEDD5"/>
+                        <a:srgbClr val="EFEAE3"/>
                       </a:solidFill>
                       <a:prstDash val="solid"/>
                       <a:round/>
@@ -8533,7 +8694,7 @@
                     </a:lnT>
                     <a:lnB w="6350" cap="flat" cmpd="sng" algn="ctr">
                       <a:solidFill>
-                        <a:srgbClr val="FFEDD5"/>
+                        <a:srgbClr val="EFEAE3"/>
                       </a:solidFill>
                       <a:prstDash val="solid"/>
                       <a:round/>
@@ -8541,7 +8702,7 @@
                       <a:tailEnd type="none" w="med" len="med"/>
                     </a:lnB>
                     <a:solidFill>
-                      <a:srgbClr val="FFF7ED"/>
+                      <a:srgbClr val="F8F4F0"/>
                     </a:solidFill>
                   </a:tcPr>
                 </a:tc>
@@ -8558,25 +8719,25 @@
                       <a:r>
                         <a:rPr lang="en-US" sz="1100" dirty="0">
                           <a:solidFill>
-                            <a:srgbClr val="1E293B"/>
+                            <a:srgbClr val="2D2D3A"/>
                           </a:solidFill>
-                          <a:latin typeface="Calibri" pitchFamily="34" charset="0"/>
-                          <a:ea typeface="Calibri" pitchFamily="34" charset="-122"/>
-                          <a:cs typeface="Calibri" pitchFamily="34" charset="-120"/>
+                          <a:latin typeface="Times New Roman" pitchFamily="34" charset="0"/>
+                          <a:ea typeface="Times New Roman" pitchFamily="34" charset="-122"/>
+                          <a:cs typeface="Times New Roman" pitchFamily="34" charset="-120"/>
                         </a:rPr>
                         <a:t>PUT</a:t>
                       </a:r>
                       <a:endParaRPr lang="en-US" sz="1100" dirty="0">
-                        <a:latin typeface="Calibri" charset="0"/>
-                        <a:ea typeface="Calibri" charset="0"/>
-                        <a:cs typeface="Calibri" charset="0"/>
+                        <a:latin typeface="Times New Roman" charset="0"/>
+                        <a:ea typeface="Times New Roman" charset="0"/>
+                        <a:cs typeface="Times New Roman" charset="0"/>
                       </a:endParaRPr>
                     </a:p>
                   </a:txBody>
                   <a:tcPr marL="91440" marR="91440" marT="45720" marB="45720" anchor="ctr">
                     <a:lnL w="6350" cap="flat" cmpd="sng" algn="ctr">
                       <a:solidFill>
-                        <a:srgbClr val="FFEDD5"/>
+                        <a:srgbClr val="EFEAE3"/>
                       </a:solidFill>
                       <a:prstDash val="solid"/>
                       <a:round/>
@@ -8585,7 +8746,7 @@
                     </a:lnL>
                     <a:lnR w="6350" cap="flat" cmpd="sng" algn="ctr">
                       <a:solidFill>
-                        <a:srgbClr val="FFEDD5"/>
+                        <a:srgbClr val="EFEAE3"/>
                       </a:solidFill>
                       <a:prstDash val="solid"/>
                       <a:round/>
@@ -8594,7 +8755,7 @@
                     </a:lnR>
                     <a:lnT w="6350" cap="flat" cmpd="sng" algn="ctr">
                       <a:solidFill>
-                        <a:srgbClr val="FFEDD5"/>
+                        <a:srgbClr val="EFEAE3"/>
                       </a:solidFill>
                       <a:prstDash val="solid"/>
                       <a:round/>
@@ -8603,7 +8764,7 @@
                     </a:lnT>
                     <a:lnB w="6350" cap="flat" cmpd="sng" algn="ctr">
                       <a:solidFill>
-                        <a:srgbClr val="FFEDD5"/>
+                        <a:srgbClr val="EFEAE3"/>
                       </a:solidFill>
                       <a:prstDash val="solid"/>
                       <a:round/>
@@ -8626,25 +8787,25 @@
                       <a:r>
                         <a:rPr lang="en-US" sz="1100" dirty="0">
                           <a:solidFill>
-                            <a:srgbClr val="1E293B"/>
+                            <a:srgbClr val="2D2D3A"/>
                           </a:solidFill>
-                          <a:latin typeface="Calibri" pitchFamily="34" charset="0"/>
-                          <a:ea typeface="Calibri" pitchFamily="34" charset="-122"/>
-                          <a:cs typeface="Calibri" pitchFamily="34" charset="-120"/>
+                          <a:latin typeface="Times New Roman" pitchFamily="34" charset="0"/>
+                          <a:ea typeface="Times New Roman" pitchFamily="34" charset="-122"/>
+                          <a:cs typeface="Times New Roman" pitchFamily="34" charset="-120"/>
                         </a:rPr>
                         <a:t>/api/tickets/:id</a:t>
                       </a:r>
                       <a:endParaRPr lang="en-US" sz="1100" dirty="0">
-                        <a:latin typeface="Calibri" charset="0"/>
-                        <a:ea typeface="Calibri" charset="0"/>
-                        <a:cs typeface="Calibri" charset="0"/>
+                        <a:latin typeface="Times New Roman" charset="0"/>
+                        <a:ea typeface="Times New Roman" charset="0"/>
+                        <a:cs typeface="Times New Roman" charset="0"/>
                       </a:endParaRPr>
                     </a:p>
                   </a:txBody>
                   <a:tcPr marL="91440" marR="91440" marT="45720" marB="45720" anchor="ctr">
                     <a:lnL w="6350" cap="flat" cmpd="sng" algn="ctr">
                       <a:solidFill>
-                        <a:srgbClr val="FFEDD5"/>
+                        <a:srgbClr val="EFEAE3"/>
                       </a:solidFill>
                       <a:prstDash val="solid"/>
                       <a:round/>
@@ -8653,7 +8814,7 @@
                     </a:lnL>
                     <a:lnR w="6350" cap="flat" cmpd="sng" algn="ctr">
                       <a:solidFill>
-                        <a:srgbClr val="FFEDD5"/>
+                        <a:srgbClr val="EFEAE3"/>
                       </a:solidFill>
                       <a:prstDash val="solid"/>
                       <a:round/>
@@ -8662,7 +8823,7 @@
                     </a:lnR>
                     <a:lnT w="6350" cap="flat" cmpd="sng" algn="ctr">
                       <a:solidFill>
-                        <a:srgbClr val="FFEDD5"/>
+                        <a:srgbClr val="EFEAE3"/>
                       </a:solidFill>
                       <a:prstDash val="solid"/>
                       <a:round/>
@@ -8671,7 +8832,7 @@
                     </a:lnT>
                     <a:lnB w="6350" cap="flat" cmpd="sng" algn="ctr">
                       <a:solidFill>
-                        <a:srgbClr val="FFEDD5"/>
+                        <a:srgbClr val="EFEAE3"/>
                       </a:solidFill>
                       <a:prstDash val="solid"/>
                       <a:round/>
@@ -8694,25 +8855,25 @@
                       <a:r>
                         <a:rPr lang="en-US" sz="1100" dirty="0">
                           <a:solidFill>
-                            <a:srgbClr val="1E293B"/>
+                            <a:srgbClr val="2D2D3A"/>
                           </a:solidFill>
-                          <a:latin typeface="Calibri" pitchFamily="34" charset="0"/>
-                          <a:ea typeface="Calibri" pitchFamily="34" charset="-122"/>
-                          <a:cs typeface="Calibri" pitchFamily="34" charset="-120"/>
+                          <a:latin typeface="Times New Roman" pitchFamily="34" charset="0"/>
+                          <a:ea typeface="Times New Roman" pitchFamily="34" charset="-122"/>
+                          <a:cs typeface="Times New Roman" pitchFamily="34" charset="-120"/>
                         </a:rPr>
                         <a:t>id, title, version</a:t>
                       </a:r>
                       <a:endParaRPr lang="en-US" sz="1100" dirty="0">
-                        <a:latin typeface="Calibri" charset="0"/>
-                        <a:ea typeface="Calibri" charset="0"/>
-                        <a:cs typeface="Calibri" charset="0"/>
+                        <a:latin typeface="Times New Roman" charset="0"/>
+                        <a:ea typeface="Times New Roman" charset="0"/>
+                        <a:cs typeface="Times New Roman" charset="0"/>
                       </a:endParaRPr>
                     </a:p>
                   </a:txBody>
                   <a:tcPr marL="91440" marR="91440" marT="45720" marB="45720" anchor="ctr">
                     <a:lnL w="6350" cap="flat" cmpd="sng" algn="ctr">
                       <a:solidFill>
-                        <a:srgbClr val="FFEDD5"/>
+                        <a:srgbClr val="EFEAE3"/>
                       </a:solidFill>
                       <a:prstDash val="solid"/>
                       <a:round/>
@@ -8721,7 +8882,7 @@
                     </a:lnL>
                     <a:lnR w="6350" cap="flat" cmpd="sng" algn="ctr">
                       <a:solidFill>
-                        <a:srgbClr val="FFEDD5"/>
+                        <a:srgbClr val="EFEAE3"/>
                       </a:solidFill>
                       <a:prstDash val="solid"/>
                       <a:round/>
@@ -8730,7 +8891,7 @@
                     </a:lnR>
                     <a:lnT w="6350" cap="flat" cmpd="sng" algn="ctr">
                       <a:solidFill>
-                        <a:srgbClr val="FFEDD5"/>
+                        <a:srgbClr val="EFEAE3"/>
                       </a:solidFill>
                       <a:prstDash val="solid"/>
                       <a:round/>
@@ -8739,7 +8900,7 @@
                     </a:lnT>
                     <a:lnB w="6350" cap="flat" cmpd="sng" algn="ctr">
                       <a:solidFill>
-                        <a:srgbClr val="FFEDD5"/>
+                        <a:srgbClr val="EFEAE3"/>
                       </a:solidFill>
                       <a:prstDash val="solid"/>
                       <a:round/>
@@ -8762,25 +8923,25 @@
                       <a:r>
                         <a:rPr lang="en-US" sz="1100" dirty="0">
                           <a:solidFill>
-                            <a:srgbClr val="1E293B"/>
+                            <a:srgbClr val="2D2D3A"/>
                           </a:solidFill>
-                          <a:latin typeface="Calibri" pitchFamily="34" charset="0"/>
-                          <a:ea typeface="Calibri" pitchFamily="34" charset="-122"/>
-                          <a:cs typeface="Calibri" pitchFamily="34" charset="-120"/>
+                          <a:latin typeface="Times New Roman" pitchFamily="34" charset="0"/>
+                          <a:ea typeface="Times New Roman" pitchFamily="34" charset="-122"/>
+                          <a:cs typeface="Times New Roman" pitchFamily="34" charset="-120"/>
                         </a:rPr>
                         <a:t>Обновить поля обращения (locking)</a:t>
                       </a:r>
                       <a:endParaRPr lang="en-US" sz="1100" dirty="0">
-                        <a:latin typeface="Calibri" charset="0"/>
-                        <a:ea typeface="Calibri" charset="0"/>
-                        <a:cs typeface="Calibri" charset="0"/>
+                        <a:latin typeface="Times New Roman" charset="0"/>
+                        <a:ea typeface="Times New Roman" charset="0"/>
+                        <a:cs typeface="Times New Roman" charset="0"/>
                       </a:endParaRPr>
                     </a:p>
                   </a:txBody>
                   <a:tcPr marL="91440" marR="91440" marT="45720" marB="45720" anchor="ctr">
                     <a:lnL w="6350" cap="flat" cmpd="sng" algn="ctr">
                       <a:solidFill>
-                        <a:srgbClr val="FFEDD5"/>
+                        <a:srgbClr val="EFEAE3"/>
                       </a:solidFill>
                       <a:prstDash val="solid"/>
                       <a:round/>
@@ -8789,7 +8950,7 @@
                     </a:lnL>
                     <a:lnR w="6350" cap="flat" cmpd="sng" algn="ctr">
                       <a:solidFill>
-                        <a:srgbClr val="FFEDD5"/>
+                        <a:srgbClr val="EFEAE3"/>
                       </a:solidFill>
                       <a:prstDash val="solid"/>
                       <a:round/>
@@ -8798,7 +8959,7 @@
                     </a:lnR>
                     <a:lnT w="6350" cap="flat" cmpd="sng" algn="ctr">
                       <a:solidFill>
-                        <a:srgbClr val="FFEDD5"/>
+                        <a:srgbClr val="EFEAE3"/>
                       </a:solidFill>
                       <a:prstDash val="solid"/>
                       <a:round/>
@@ -8807,7 +8968,7 @@
                     </a:lnT>
                     <a:lnB w="6350" cap="flat" cmpd="sng" algn="ctr">
                       <a:solidFill>
-                        <a:srgbClr val="FFEDD5"/>
+                        <a:srgbClr val="EFEAE3"/>
                       </a:solidFill>
                       <a:prstDash val="solid"/>
                       <a:round/>
@@ -8832,25 +8993,25 @@
                       <a:r>
                         <a:rPr lang="en-US" sz="1100" dirty="0">
                           <a:solidFill>
-                            <a:srgbClr val="1E293B"/>
+                            <a:srgbClr val="2D2D3A"/>
                           </a:solidFill>
-                          <a:latin typeface="Calibri" pitchFamily="34" charset="0"/>
-                          <a:ea typeface="Calibri" pitchFamily="34" charset="-122"/>
-                          <a:cs typeface="Calibri" pitchFamily="34" charset="-120"/>
+                          <a:latin typeface="Times New Roman" pitchFamily="34" charset="0"/>
+                          <a:ea typeface="Times New Roman" pitchFamily="34" charset="-122"/>
+                          <a:cs typeface="Times New Roman" pitchFamily="34" charset="-120"/>
                         </a:rPr>
                         <a:t>GET</a:t>
                       </a:r>
                       <a:endParaRPr lang="en-US" sz="1100" dirty="0">
-                        <a:latin typeface="Calibri" charset="0"/>
-                        <a:ea typeface="Calibri" charset="0"/>
-                        <a:cs typeface="Calibri" charset="0"/>
+                        <a:latin typeface="Times New Roman" charset="0"/>
+                        <a:ea typeface="Times New Roman" charset="0"/>
+                        <a:cs typeface="Times New Roman" charset="0"/>
                       </a:endParaRPr>
                     </a:p>
                   </a:txBody>
                   <a:tcPr marL="91440" marR="91440" marT="45720" marB="45720" anchor="ctr">
                     <a:lnL w="6350" cap="flat" cmpd="sng" algn="ctr">
                       <a:solidFill>
-                        <a:srgbClr val="FFEDD5"/>
+                        <a:srgbClr val="EFEAE3"/>
                       </a:solidFill>
                       <a:prstDash val="solid"/>
                       <a:round/>
@@ -8859,7 +9020,7 @@
                     </a:lnL>
                     <a:lnR w="6350" cap="flat" cmpd="sng" algn="ctr">
                       <a:solidFill>
-                        <a:srgbClr val="FFEDD5"/>
+                        <a:srgbClr val="EFEAE3"/>
                       </a:solidFill>
                       <a:prstDash val="solid"/>
                       <a:round/>
@@ -8868,7 +9029,7 @@
                     </a:lnR>
                     <a:lnT w="6350" cap="flat" cmpd="sng" algn="ctr">
                       <a:solidFill>
-                        <a:srgbClr val="FFEDD5"/>
+                        <a:srgbClr val="EFEAE3"/>
                       </a:solidFill>
                       <a:prstDash val="solid"/>
                       <a:round/>
@@ -8877,7 +9038,7 @@
                     </a:lnT>
                     <a:lnB w="6350" cap="flat" cmpd="sng" algn="ctr">
                       <a:solidFill>
-                        <a:srgbClr val="FFEDD5"/>
+                        <a:srgbClr val="EFEAE3"/>
                       </a:solidFill>
                       <a:prstDash val="solid"/>
                       <a:round/>
@@ -8885,7 +9046,7 @@
                       <a:tailEnd type="none" w="med" len="med"/>
                     </a:lnB>
                     <a:solidFill>
-                      <a:srgbClr val="FFF7ED"/>
+                      <a:srgbClr val="F8F4F0"/>
                     </a:solidFill>
                   </a:tcPr>
                 </a:tc>
@@ -8900,25 +9061,25 @@
                       <a:r>
                         <a:rPr lang="en-US" sz="1100" dirty="0">
                           <a:solidFill>
-                            <a:srgbClr val="1E293B"/>
+                            <a:srgbClr val="2D2D3A"/>
                           </a:solidFill>
-                          <a:latin typeface="Calibri" pitchFamily="34" charset="0"/>
-                          <a:ea typeface="Calibri" pitchFamily="34" charset="-122"/>
-                          <a:cs typeface="Calibri" pitchFamily="34" charset="-120"/>
+                          <a:latin typeface="Times New Roman" pitchFamily="34" charset="0"/>
+                          <a:ea typeface="Times New Roman" pitchFamily="34" charset="-122"/>
+                          <a:cs typeface="Times New Roman" pitchFamily="34" charset="-120"/>
                         </a:rPr>
                         <a:t>/api/tickets/:id/chat</a:t>
                       </a:r>
                       <a:endParaRPr lang="en-US" sz="1100" dirty="0">
-                        <a:latin typeface="Calibri" charset="0"/>
-                        <a:ea typeface="Calibri" charset="0"/>
-                        <a:cs typeface="Calibri" charset="0"/>
+                        <a:latin typeface="Times New Roman" charset="0"/>
+                        <a:ea typeface="Times New Roman" charset="0"/>
+                        <a:cs typeface="Times New Roman" charset="0"/>
                       </a:endParaRPr>
                     </a:p>
                   </a:txBody>
                   <a:tcPr marL="91440" marR="91440" marT="45720" marB="45720" anchor="ctr">
                     <a:lnL w="6350" cap="flat" cmpd="sng" algn="ctr">
                       <a:solidFill>
-                        <a:srgbClr val="FFEDD5"/>
+                        <a:srgbClr val="EFEAE3"/>
                       </a:solidFill>
                       <a:prstDash val="solid"/>
                       <a:round/>
@@ -8927,7 +9088,7 @@
                     </a:lnL>
                     <a:lnR w="6350" cap="flat" cmpd="sng" algn="ctr">
                       <a:solidFill>
-                        <a:srgbClr val="FFEDD5"/>
+                        <a:srgbClr val="EFEAE3"/>
                       </a:solidFill>
                       <a:prstDash val="solid"/>
                       <a:round/>
@@ -8936,7 +9097,7 @@
                     </a:lnR>
                     <a:lnT w="6350" cap="flat" cmpd="sng" algn="ctr">
                       <a:solidFill>
-                        <a:srgbClr val="FFEDD5"/>
+                        <a:srgbClr val="EFEAE3"/>
                       </a:solidFill>
                       <a:prstDash val="solid"/>
                       <a:round/>
@@ -8945,7 +9106,7 @@
                     </a:lnT>
                     <a:lnB w="6350" cap="flat" cmpd="sng" algn="ctr">
                       <a:solidFill>
-                        <a:srgbClr val="FFEDD5"/>
+                        <a:srgbClr val="EFEAE3"/>
                       </a:solidFill>
                       <a:prstDash val="solid"/>
                       <a:round/>
@@ -8953,7 +9114,7 @@
                       <a:tailEnd type="none" w="med" len="med"/>
                     </a:lnB>
                     <a:solidFill>
-                      <a:srgbClr val="FFF7ED"/>
+                      <a:srgbClr val="F8F4F0"/>
                     </a:solidFill>
                   </a:tcPr>
                 </a:tc>
@@ -8968,25 +9129,25 @@
                       <a:r>
                         <a:rPr lang="en-US" sz="1100" dirty="0">
                           <a:solidFill>
-                            <a:srgbClr val="1E293B"/>
+                            <a:srgbClr val="2D2D3A"/>
                           </a:solidFill>
-                          <a:latin typeface="Calibri" pitchFamily="34" charset="0"/>
-                          <a:ea typeface="Calibri" pitchFamily="34" charset="-122"/>
-                          <a:cs typeface="Calibri" pitchFamily="34" charset="-120"/>
+                          <a:latin typeface="Times New Roman" pitchFamily="34" charset="0"/>
+                          <a:ea typeface="Times New Roman" pitchFamily="34" charset="-122"/>
+                          <a:cs typeface="Times New Roman" pitchFamily="34" charset="-120"/>
                         </a:rPr>
                         <a:t>id (uuid)</a:t>
                       </a:r>
                       <a:endParaRPr lang="en-US" sz="1100" dirty="0">
-                        <a:latin typeface="Calibri" charset="0"/>
-                        <a:ea typeface="Calibri" charset="0"/>
-                        <a:cs typeface="Calibri" charset="0"/>
+                        <a:latin typeface="Times New Roman" charset="0"/>
+                        <a:ea typeface="Times New Roman" charset="0"/>
+                        <a:cs typeface="Times New Roman" charset="0"/>
                       </a:endParaRPr>
                     </a:p>
                   </a:txBody>
                   <a:tcPr marL="91440" marR="91440" marT="45720" marB="45720" anchor="ctr">
                     <a:lnL w="6350" cap="flat" cmpd="sng" algn="ctr">
                       <a:solidFill>
-                        <a:srgbClr val="FFEDD5"/>
+                        <a:srgbClr val="EFEAE3"/>
                       </a:solidFill>
                       <a:prstDash val="solid"/>
                       <a:round/>
@@ -8995,7 +9156,7 @@
                     </a:lnL>
                     <a:lnR w="6350" cap="flat" cmpd="sng" algn="ctr">
                       <a:solidFill>
-                        <a:srgbClr val="FFEDD5"/>
+                        <a:srgbClr val="EFEAE3"/>
                       </a:solidFill>
                       <a:prstDash val="solid"/>
                       <a:round/>
@@ -9004,7 +9165,7 @@
                     </a:lnR>
                     <a:lnT w="6350" cap="flat" cmpd="sng" algn="ctr">
                       <a:solidFill>
-                        <a:srgbClr val="FFEDD5"/>
+                        <a:srgbClr val="EFEAE3"/>
                       </a:solidFill>
                       <a:prstDash val="solid"/>
                       <a:round/>
@@ -9013,7 +9174,7 @@
                     </a:lnT>
                     <a:lnB w="6350" cap="flat" cmpd="sng" algn="ctr">
                       <a:solidFill>
-                        <a:srgbClr val="FFEDD5"/>
+                        <a:srgbClr val="EFEAE3"/>
                       </a:solidFill>
                       <a:prstDash val="solid"/>
                       <a:round/>
@@ -9021,7 +9182,7 @@
                       <a:tailEnd type="none" w="med" len="med"/>
                     </a:lnB>
                     <a:solidFill>
-                      <a:srgbClr val="FFF7ED"/>
+                      <a:srgbClr val="F8F4F0"/>
                     </a:solidFill>
                   </a:tcPr>
                 </a:tc>
@@ -9036,25 +9197,25 @@
                       <a:r>
                         <a:rPr lang="en-US" sz="1100" dirty="0">
                           <a:solidFill>
-                            <a:srgbClr val="1E293B"/>
+                            <a:srgbClr val="2D2D3A"/>
                           </a:solidFill>
-                          <a:latin typeface="Calibri" pitchFamily="34" charset="0"/>
-                          <a:ea typeface="Calibri" pitchFamily="34" charset="-122"/>
-                          <a:cs typeface="Calibri" pitchFamily="34" charset="-120"/>
+                          <a:latin typeface="Times New Roman" pitchFamily="34" charset="0"/>
+                          <a:ea typeface="Times New Roman" pitchFamily="34" charset="-122"/>
+                          <a:cs typeface="Times New Roman" pitchFamily="34" charset="-120"/>
                         </a:rPr>
                         <a:t>Получить историю сообщений в чате</a:t>
                       </a:r>
                       <a:endParaRPr lang="en-US" sz="1100" dirty="0">
-                        <a:latin typeface="Calibri" charset="0"/>
-                        <a:ea typeface="Calibri" charset="0"/>
-                        <a:cs typeface="Calibri" charset="0"/>
+                        <a:latin typeface="Times New Roman" charset="0"/>
+                        <a:ea typeface="Times New Roman" charset="0"/>
+                        <a:cs typeface="Times New Roman" charset="0"/>
                       </a:endParaRPr>
                     </a:p>
                   </a:txBody>
                   <a:tcPr marL="91440" marR="91440" marT="45720" marB="45720" anchor="ctr">
                     <a:lnL w="6350" cap="flat" cmpd="sng" algn="ctr">
                       <a:solidFill>
-                        <a:srgbClr val="FFEDD5"/>
+                        <a:srgbClr val="EFEAE3"/>
                       </a:solidFill>
                       <a:prstDash val="solid"/>
                       <a:round/>
@@ -9063,7 +9224,7 @@
                     </a:lnL>
                     <a:lnR w="6350" cap="flat" cmpd="sng" algn="ctr">
                       <a:solidFill>
-                        <a:srgbClr val="FFEDD5"/>
+                        <a:srgbClr val="EFEAE3"/>
                       </a:solidFill>
                       <a:prstDash val="solid"/>
                       <a:round/>
@@ -9072,7 +9233,7 @@
                     </a:lnR>
                     <a:lnT w="6350" cap="flat" cmpd="sng" algn="ctr">
                       <a:solidFill>
-                        <a:srgbClr val="FFEDD5"/>
+                        <a:srgbClr val="EFEAE3"/>
                       </a:solidFill>
                       <a:prstDash val="solid"/>
                       <a:round/>
@@ -9081,7 +9242,7 @@
                     </a:lnT>
                     <a:lnB w="6350" cap="flat" cmpd="sng" algn="ctr">
                       <a:solidFill>
-                        <a:srgbClr val="FFEDD5"/>
+                        <a:srgbClr val="EFEAE3"/>
                       </a:solidFill>
                       <a:prstDash val="solid"/>
                       <a:round/>
@@ -9089,7 +9250,7 @@
                       <a:tailEnd type="none" w="med" len="med"/>
                     </a:lnB>
                     <a:solidFill>
-                      <a:srgbClr val="FFF7ED"/>
+                      <a:srgbClr val="F8F4F0"/>
                     </a:solidFill>
                   </a:tcPr>
                 </a:tc>
@@ -9098,335 +9259,6 @@
           </a:graphicData>
         </a:graphic>
       </p:graphicFrame>
-    </p:spTree>
-  </p:cSld>
-  <p:clrMapOvr>
-    <a:masterClrMapping/>
-  </p:clrMapOvr>
-</p:sld>
-</file>
-
-<file path=ppt/slides/slide7.xml><?xml version="1.0" encoding="utf-8"?>
-<p:sld xmlns:a="http://schemas.openxmlformats.org/drawingml/2006/main" xmlns:r="http://schemas.openxmlformats.org/officeDocument/2006/relationships" xmlns:p="http://schemas.openxmlformats.org/presentationml/2006/main">
-  <p:cSld name="Slide 7">
-    <p:bg>
-      <p:bgPr>
-        <a:solidFill>
-          <a:srgbClr val="FFFFFF"/>
-        </a:solidFill>
-      </p:bgPr>
-    </p:bg>
-    <p:spTree>
-      <p:nvGrpSpPr>
-        <p:cNvPr id="1" name=""/>
-        <p:cNvGrpSpPr/>
-        <p:nvPr/>
-      </p:nvGrpSpPr>
-      <p:grpSpPr>
-        <a:xfrm>
-          <a:off x="0" y="0"/>
-          <a:ext cx="0" cy="0"/>
-          <a:chOff x="0" y="0"/>
-          <a:chExt cx="0" cy="0"/>
-        </a:xfrm>
-      </p:grpSpPr>
-      <p:sp>
-        <p:nvSpPr>
-          <p:cNvPr id="2" name="Text 0"/>
-          <p:cNvSpPr/>
-          <p:nvPr/>
-        </p:nvSpPr>
-        <p:spPr>
-          <a:xfrm>
-            <a:off x="384048" y="164592"/>
-            <a:ext cx="8375904" cy="548640"/>
-          </a:xfrm>
-          <a:prstGeom prst="rect">
-            <a:avLst/>
-          </a:prstGeom>
-          <a:noFill/>
-          <a:ln/>
-        </p:spPr>
-        <p:txBody>
-          <a:bodyPr wrap="square" rtlCol="0" anchor="b"/>
-          <a:lstStyle/>
-          <a:p>
-            <a:pPr algn="l" indent="0" marL="0">
-              <a:buNone/>
-            </a:pPr>
-            <a:r>
-              <a:rPr lang="en-US" sz="2000" b="1" dirty="0">
-                <a:solidFill>
-                  <a:srgbClr val="0F1E36"/>
-                </a:solidFill>
-                <a:latin typeface="Cambria" pitchFamily="34" charset="0"/>
-                <a:ea typeface="Cambria" pitchFamily="34" charset="-122"/>
-                <a:cs typeface="Cambria" pitchFamily="34" charset="-120"/>
-              </a:rPr>
-              <a:t>REST API: Безопасность и Middleware</a:t>
-            </a:r>
-            <a:endParaRPr lang="en-US" sz="2000" dirty="0"/>
-          </a:p>
-        </p:txBody>
-      </p:sp>
-      <p:sp>
-        <p:nvSpPr>
-          <p:cNvPr id="3" name="Shape 1"/>
-          <p:cNvSpPr/>
-          <p:nvPr/>
-        </p:nvSpPr>
-        <p:spPr>
-          <a:xfrm>
-            <a:off x="384048" y="822960"/>
-            <a:ext cx="4023360" cy="4119372"/>
-          </a:xfrm>
-          <a:prstGeom prst="roundRect">
-            <a:avLst>
-              <a:gd name="adj" fmla="val 2273"/>
-            </a:avLst>
-          </a:prstGeom>
-          <a:solidFill>
-            <a:srgbClr val="FFF7ED"/>
-          </a:solidFill>
-          <a:ln w="12700">
-            <a:solidFill>
-              <a:srgbClr val="FFF7ED"/>
-            </a:solidFill>
-            <a:prstDash val="solid"/>
-          </a:ln>
-          <a:effectLst>
-            <a:outerShdw sx="100000" sy="100000" kx="0" ky="0" algn="bl" rotWithShape="0" blurRad="88900" dist="25400" dir="2700000">
-              <a:srgbClr val="000000">
-                <a:alpha val="9000"/>
-              </a:srgbClr>
-            </a:outerShdw>
-          </a:effectLst>
-        </p:spPr>
-      </p:sp>
-      <p:sp>
-        <p:nvSpPr>
-          <p:cNvPr id="4" name="Text 2"/>
-          <p:cNvSpPr/>
-          <p:nvPr/>
-        </p:nvSpPr>
-        <p:spPr>
-          <a:xfrm>
-            <a:off x="548640" y="932688"/>
-            <a:ext cx="3694176" cy="365760"/>
-          </a:xfrm>
-          <a:prstGeom prst="rect">
-            <a:avLst/>
-          </a:prstGeom>
-          <a:noFill/>
-          <a:ln/>
-        </p:spPr>
-        <p:txBody>
-          <a:bodyPr wrap="square" rtlCol="0" anchor="ctr"/>
-          <a:lstStyle/>
-          <a:p>
-            <a:pPr indent="0" marL="0">
-              <a:buNone/>
-            </a:pPr>
-            <a:r>
-              <a:rPr lang="en-US" sz="1300" b="1" dirty="0">
-                <a:solidFill>
-                  <a:srgbClr val="0F1E36"/>
-                </a:solidFill>
-                <a:latin typeface="Cambria" pitchFamily="34" charset="0"/>
-                <a:ea typeface="Cambria" pitchFamily="34" charset="-122"/>
-                <a:cs typeface="Cambria" pitchFamily="34" charset="-120"/>
-              </a:rPr>
-              <a:t>Проверка JWT-токенов (Auth Middleware)</a:t>
-            </a:r>
-            <a:endParaRPr lang="en-US" sz="1300" dirty="0"/>
-          </a:p>
-        </p:txBody>
-      </p:sp>
-      <p:sp>
-        <p:nvSpPr>
-          <p:cNvPr id="5" name="Text 3"/>
-          <p:cNvSpPr/>
-          <p:nvPr/>
-        </p:nvSpPr>
-        <p:spPr>
-          <a:xfrm>
-            <a:off x="548640" y="1389888"/>
-            <a:ext cx="3694176" cy="2926080"/>
-          </a:xfrm>
-          <a:prstGeom prst="rect">
-            <a:avLst/>
-          </a:prstGeom>
-          <a:noFill/>
-          <a:ln/>
-        </p:spPr>
-        <p:txBody>
-          <a:bodyPr wrap="square" rtlCol="0" anchor="ctr"/>
-          <a:lstStyle/>
-          <a:p>
-            <a:pPr indent="0" marL="0">
-              <a:buNone/>
-            </a:pPr>
-            <a:r>
-              <a:rPr lang="en-US" sz="1100" dirty="0">
-                <a:solidFill>
-                  <a:srgbClr val="1E293B"/>
-                </a:solidFill>
-                <a:latin typeface="Calibri" pitchFamily="34" charset="0"/>
-                <a:ea typeface="Calibri" pitchFamily="34" charset="-122"/>
-                <a:cs typeface="Calibri" pitchFamily="34" charset="-120"/>
-              </a:rPr>
-              <a:t>Каждый защищенный роут API проходит проверку в промежуточном слое `verifyToken`. Он считывает заголовок `Authorization: Bearer &lt;token&gt;`, валидирует подпись и извлекает `userId` и `role`, прикрепляя их к объекту запроса `req.user`.</a:t>
-            </a:r>
-            <a:endParaRPr lang="en-US" sz="1100" dirty="0"/>
-          </a:p>
-        </p:txBody>
-      </p:sp>
-      <p:sp>
-        <p:nvSpPr>
-          <p:cNvPr id="6" name="Shape 4"/>
-          <p:cNvSpPr/>
-          <p:nvPr/>
-        </p:nvSpPr>
-        <p:spPr>
-          <a:xfrm>
-            <a:off x="4681728" y="822960"/>
-            <a:ext cx="4078224" cy="4119372"/>
-          </a:xfrm>
-          <a:prstGeom prst="roundRect">
-            <a:avLst>
-              <a:gd name="adj" fmla="val 2242"/>
-            </a:avLst>
-          </a:prstGeom>
-          <a:solidFill>
-            <a:srgbClr val="D1FAE5"/>
-          </a:solidFill>
-          <a:ln w="12700">
-            <a:solidFill>
-              <a:srgbClr val="D1FAE5"/>
-            </a:solidFill>
-            <a:prstDash val="solid"/>
-          </a:ln>
-          <a:effectLst>
-            <a:outerShdw sx="100000" sy="100000" kx="0" ky="0" algn="bl" rotWithShape="0" blurRad="88900" dist="25400" dir="2700000">
-              <a:srgbClr val="000000">
-                <a:alpha val="9000"/>
-              </a:srgbClr>
-            </a:outerShdw>
-          </a:effectLst>
-        </p:spPr>
-      </p:sp>
-      <p:sp>
-        <p:nvSpPr>
-          <p:cNvPr id="7" name="Text 5"/>
-          <p:cNvSpPr/>
-          <p:nvPr/>
-        </p:nvSpPr>
-        <p:spPr>
-          <a:xfrm>
-            <a:off x="4846320" y="932688"/>
-            <a:ext cx="3749040" cy="365760"/>
-          </a:xfrm>
-          <a:prstGeom prst="rect">
-            <a:avLst/>
-          </a:prstGeom>
-          <a:noFill/>
-          <a:ln/>
-        </p:spPr>
-        <p:txBody>
-          <a:bodyPr wrap="square" rtlCol="0" anchor="ctr"/>
-          <a:lstStyle/>
-          <a:p>
-            <a:pPr indent="0" marL="0">
-              <a:buNone/>
-            </a:pPr>
-            <a:r>
-              <a:rPr lang="en-US" sz="1300" b="1" dirty="0">
-                <a:solidFill>
-                  <a:srgbClr val="0F1E36"/>
-                </a:solidFill>
-                <a:latin typeface="Cambria" pitchFamily="34" charset="0"/>
-                <a:ea typeface="Cambria" pitchFamily="34" charset="-122"/>
-                <a:cs typeface="Cambria" pitchFamily="34" charset="-120"/>
-              </a:rPr>
-              <a:t>Безопасное разграничение ролей (RBAC)</a:t>
-            </a:r>
-            <a:endParaRPr lang="en-US" sz="1300" dirty="0"/>
-          </a:p>
-        </p:txBody>
-      </p:sp>
-      <p:sp>
-        <p:nvSpPr>
-          <p:cNvPr id="8" name="Text 6"/>
-          <p:cNvSpPr/>
-          <p:nvPr/>
-        </p:nvSpPr>
-        <p:spPr>
-          <a:xfrm>
-            <a:off x="4846320" y="1389888"/>
-            <a:ext cx="3749040" cy="2926080"/>
-          </a:xfrm>
-          <a:prstGeom prst="rect">
-            <a:avLst/>
-          </a:prstGeom>
-          <a:noFill/>
-          <a:ln/>
-        </p:spPr>
-        <p:txBody>
-          <a:bodyPr wrap="square" rtlCol="0" anchor="ctr"/>
-          <a:lstStyle/>
-          <a:p>
-            <a:pPr indent="0" marL="0">
-              <a:buNone/>
-            </a:pPr>
-            <a:r>
-              <a:rPr lang="en-US" sz="1100" dirty="0">
-                <a:solidFill>
-                  <a:srgbClr val="1E293B"/>
-                </a:solidFill>
-                <a:latin typeface="Calibri" pitchFamily="34" charset="0"/>
-                <a:ea typeface="Calibri" pitchFamily="34" charset="-122"/>
-                <a:cs typeface="Calibri" pitchFamily="34" charset="-120"/>
-              </a:rPr>
-              <a:t>• Роуты `/api/tickets` доступны клиенту для чтения только своих обращений.</a:t>
-            </a:r>
-            <a:endParaRPr lang="en-US" sz="1100" dirty="0"/>
-          </a:p>
-          <a:p>
-            <a:pPr indent="0" marL="0">
-              <a:buNone/>
-            </a:pPr>
-            <a:r>
-              <a:rPr lang="en-US" sz="1100" dirty="0">
-                <a:solidFill>
-                  <a:srgbClr val="1E293B"/>
-                </a:solidFill>
-                <a:latin typeface="Calibri" pitchFamily="34" charset="0"/>
-                <a:ea typeface="Calibri" pitchFamily="34" charset="-122"/>
-                <a:cs typeface="Calibri" pitchFamily="34" charset="-120"/>
-              </a:rPr>
-              <a:t>• Роуты `/api/manager/*` доступны только пользователям с флагом `role='manager'`.</a:t>
-            </a:r>
-            <a:endParaRPr lang="en-US" sz="1100" dirty="0"/>
-          </a:p>
-          <a:p>
-            <a:pPr indent="0" marL="0">
-              <a:buNone/>
-            </a:pPr>
-            <a:r>
-              <a:rPr lang="en-US" sz="1100" dirty="0">
-                <a:solidFill>
-                  <a:srgbClr val="1E293B"/>
-                </a:solidFill>
-                <a:latin typeface="Calibri" pitchFamily="34" charset="0"/>
-                <a:ea typeface="Calibri" pitchFamily="34" charset="-122"/>
-                <a:cs typeface="Calibri" pitchFamily="34" charset="-120"/>
-              </a:rPr>
-              <a:t>• Любые несанкционированные попытки доступа блокируются ошибками 401 Unauthorized или 403 Forbidden.</a:t>
-            </a:r>
-            <a:endParaRPr lang="en-US" sz="1100" dirty="0"/>
-          </a:p>
-        </p:txBody>
-      </p:sp>
     </p:spTree>
   </p:cSld>
   <p:clrMapOvr>
@@ -9484,17 +9316,17 @@
               <a:buNone/>
             </a:pPr>
             <a:r>
-              <a:rPr lang="en-US" sz="2000" b="1" dirty="0">
+              <a:rPr lang="en-US" sz="1600" b="1" dirty="0">
                 <a:solidFill>
-                  <a:srgbClr val="0F1E36"/>
+                  <a:srgbClr val="1A1A2E"/>
                 </a:solidFill>
-                <a:latin typeface="Cambria" pitchFamily="34" charset="0"/>
-                <a:ea typeface="Cambria" pitchFamily="34" charset="-122"/>
-                <a:cs typeface="Cambria" pitchFamily="34" charset="-120"/>
+                <a:latin typeface="Georgia" pitchFamily="34" charset="0"/>
+                <a:ea typeface="Georgia" pitchFamily="34" charset="-122"/>
+                <a:cs typeface="Georgia" pitchFamily="34" charset="-120"/>
               </a:rPr>
-              <a:t>Интерфейс реального времени: WebSocket</a:t>
-            </a:r>
-            <a:endParaRPr lang="en-US" sz="2000" dirty="0"/>
+              <a:t>REST API: Безопасность и Middleware</a:t>
+            </a:r>
+            <a:endParaRPr lang="en-US" sz="1600" dirty="0"/>
           </a:p>
         </p:txBody>
       </p:sp>
@@ -9507,26 +9339,26 @@
         <p:spPr>
           <a:xfrm>
             <a:off x="384048" y="822960"/>
-            <a:ext cx="4023360" cy="4119372"/>
+            <a:ext cx="8375904" cy="4119372"/>
           </a:xfrm>
           <a:prstGeom prst="roundRect">
             <a:avLst>
-              <a:gd name="adj" fmla="val 2273"/>
+              <a:gd name="adj" fmla="val 2220"/>
             </a:avLst>
           </a:prstGeom>
           <a:solidFill>
-            <a:srgbClr val="FFF7ED"/>
+            <a:srgbClr val="F8F4F0"/>
           </a:solidFill>
           <a:ln w="12700">
             <a:solidFill>
-              <a:srgbClr val="FFF7ED"/>
+              <a:srgbClr val="EFEAE3"/>
             </a:solidFill>
             <a:prstDash val="solid"/>
           </a:ln>
           <a:effectLst>
-            <a:outerShdw sx="100000" sy="100000" kx="0" ky="0" algn="bl" rotWithShape="0" blurRad="88900" dist="25400" dir="2700000">
+            <a:outerShdw sx="100000" sy="100000" kx="0" ky="0" algn="bl" rotWithShape="0" blurRad="152400" dist="38100" dir="2700000">
               <a:srgbClr val="000000">
-                <a:alpha val="9000"/>
+                <a:alpha val="12000"/>
               </a:srgbClr>
             </a:outerShdw>
           </a:effectLst>
@@ -9541,7 +9373,7 @@
         <p:spPr>
           <a:xfrm>
             <a:off x="548640" y="932688"/>
-            <a:ext cx="3694176" cy="365760"/>
+            <a:ext cx="8046720" cy="411480"/>
           </a:xfrm>
           <a:prstGeom prst="rect">
             <a:avLst/>
@@ -9557,17 +9389,17 @@
               <a:buNone/>
             </a:pPr>
             <a:r>
-              <a:rPr lang="en-US" sz="1300" b="1" dirty="0">
+              <a:rPr lang="en-US" sz="1200" b="1" dirty="0">
                 <a:solidFill>
-                  <a:srgbClr val="0F1E36"/>
+                  <a:srgbClr val="1A1A2E"/>
                 </a:solidFill>
                 <a:latin typeface="Cambria" pitchFamily="34" charset="0"/>
                 <a:ea typeface="Cambria" pitchFamily="34" charset="-122"/>
                 <a:cs typeface="Cambria" pitchFamily="34" charset="-120"/>
               </a:rPr>
-              <a:t>Протокол и подключение</a:t>
-            </a:r>
-            <a:endParaRPr lang="en-US" sz="1300" dirty="0"/>
+              <a:t>Аутентификация, RBAC и защита API</a:t>
+            </a:r>
+            <a:endParaRPr lang="en-US" sz="1200" dirty="0"/>
           </a:p>
         </p:txBody>
       </p:sp>
@@ -9579,8 +9411,8 @@
         </p:nvSpPr>
         <p:spPr>
           <a:xfrm>
-            <a:off x="548640" y="1389888"/>
-            <a:ext cx="3694176" cy="2926080"/>
+            <a:off x="548640" y="1417320"/>
+            <a:ext cx="8046720" cy="3296412"/>
           </a:xfrm>
           <a:prstGeom prst="rect">
             <a:avLst/>
@@ -9589,170 +9421,115 @@
           <a:ln/>
         </p:spPr>
         <p:txBody>
-          <a:bodyPr wrap="square" rtlCol="0" anchor="ctr"/>
+          <a:bodyPr wrap="square" rtlCol="0" anchor="t"/>
           <a:lstStyle/>
           <a:p>
-            <a:pPr indent="0" marL="0">
-              <a:buNone/>
-            </a:pPr>
-            <a:r>
-              <a:rPr lang="en-US" sz="1100" dirty="0">
+            <a:pPr algn="l" indent="0" marL="0">
+              <a:buNone/>
+            </a:pPr>
+            <a:r>
+              <a:rPr lang="en-US" sz="1600" dirty="0">
                 <a:solidFill>
-                  <a:srgbClr val="1E293B"/>
+                  <a:srgbClr val="2D2D3A"/>
                 </a:solidFill>
-                <a:latin typeface="Calibri" pitchFamily="34" charset="0"/>
-                <a:ea typeface="Calibri" pitchFamily="34" charset="-122"/>
-                <a:cs typeface="Calibri" pitchFamily="34" charset="-120"/>
+                <a:latin typeface="Times New Roman" pitchFamily="34" charset="0"/>
+                <a:ea typeface="Times New Roman" pitchFamily="34" charset="-122"/>
+                <a:cs typeface="Times New Roman" pitchFamily="34" charset="-120"/>
               </a:rPr>
-              <a:t>WebSocket обеспечивает постоянный двусторонний обмен данными без оверхеда HTTP-заголовков. При открытии карточки тикета клиент подключается к сокет-серверу и подписывается на комнату `ticket:&lt;ticketId&gt;`, отправляя событие `join`.</a:t>
-            </a:r>
-            <a:endParaRPr lang="en-US" sz="1100" dirty="0"/>
-          </a:p>
-        </p:txBody>
-      </p:sp>
-      <p:sp>
-        <p:nvSpPr>
-          <p:cNvPr id="6" name="Shape 4"/>
-          <p:cNvSpPr/>
-          <p:nvPr/>
-        </p:nvSpPr>
-        <p:spPr>
-          <a:xfrm>
-            <a:off x="4681728" y="822960"/>
-            <a:ext cx="4078224" cy="4119372"/>
-          </a:xfrm>
-          <a:prstGeom prst="roundRect">
-            <a:avLst>
-              <a:gd name="adj" fmla="val 2242"/>
-            </a:avLst>
-          </a:prstGeom>
-          <a:solidFill>
-            <a:srgbClr val="D1FAE5"/>
-          </a:solidFill>
-          <a:ln w="12700">
-            <a:solidFill>
-              <a:srgbClr val="D1FAE5"/>
-            </a:solidFill>
-            <a:prstDash val="solid"/>
-          </a:ln>
-          <a:effectLst>
-            <a:outerShdw sx="100000" sy="100000" kx="0" ky="0" algn="bl" rotWithShape="0" blurRad="88900" dist="25400" dir="2700000">
-              <a:srgbClr val="000000">
-                <a:alpha val="9000"/>
-              </a:srgbClr>
-            </a:outerShdw>
-          </a:effectLst>
-        </p:spPr>
-      </p:sp>
-      <p:sp>
-        <p:nvSpPr>
-          <p:cNvPr id="7" name="Text 5"/>
-          <p:cNvSpPr/>
-          <p:nvPr/>
-        </p:nvSpPr>
-        <p:spPr>
-          <a:xfrm>
-            <a:off x="4846320" y="932688"/>
-            <a:ext cx="3749040" cy="365760"/>
-          </a:xfrm>
-          <a:prstGeom prst="rect">
-            <a:avLst/>
-          </a:prstGeom>
-          <a:noFill/>
-          <a:ln/>
-        </p:spPr>
-        <p:txBody>
-          <a:bodyPr wrap="square" rtlCol="0" anchor="ctr"/>
-          <a:lstStyle/>
-          <a:p>
-            <a:pPr indent="0" marL="0">
-              <a:buNone/>
-            </a:pPr>
-            <a:r>
-              <a:rPr lang="en-US" sz="1300" b="1" dirty="0">
+              <a:t>Проверка JWT-токенов (Auth Middleware):</a:t>
+            </a:r>
+            <a:endParaRPr lang="en-US" sz="1600" dirty="0"/>
+          </a:p>
+          <a:p>
+            <a:pPr algn="l" indent="0" marL="0">
+              <a:buNone/>
+            </a:pPr>
+            <a:r>
+              <a:rPr lang="en-US" sz="1600" dirty="0">
                 <a:solidFill>
-                  <a:srgbClr val="0F1E36"/>
+                  <a:srgbClr val="2D2D3A"/>
                 </a:solidFill>
-                <a:latin typeface="Cambria" pitchFamily="34" charset="0"/>
-                <a:ea typeface="Cambria" pitchFamily="34" charset="-122"/>
-                <a:cs typeface="Cambria" pitchFamily="34" charset="-120"/>
+                <a:latin typeface="Times New Roman" pitchFamily="34" charset="0"/>
+                <a:ea typeface="Times New Roman" pitchFamily="34" charset="-122"/>
+                <a:cs typeface="Times New Roman" pitchFamily="34" charset="-120"/>
               </a:rPr>
-              <a:t>События WebSocket-сервиса</a:t>
-            </a:r>
-            <a:endParaRPr lang="en-US" sz="1300" dirty="0"/>
-          </a:p>
-        </p:txBody>
-      </p:sp>
-      <p:sp>
-        <p:nvSpPr>
-          <p:cNvPr id="8" name="Text 6"/>
-          <p:cNvSpPr/>
-          <p:nvPr/>
-        </p:nvSpPr>
-        <p:spPr>
-          <a:xfrm>
-            <a:off x="4846320" y="1389888"/>
-            <a:ext cx="3749040" cy="2926080"/>
-          </a:xfrm>
-          <a:prstGeom prst="rect">
-            <a:avLst/>
-          </a:prstGeom>
-          <a:noFill/>
-          <a:ln/>
-        </p:spPr>
-        <p:txBody>
-          <a:bodyPr wrap="square" rtlCol="0" anchor="ctr"/>
-          <a:lstStyle/>
-          <a:p>
-            <a:pPr indent="0" marL="0">
-              <a:buNone/>
-            </a:pPr>
-            <a:r>
-              <a:rPr lang="en-US" sz="1100" dirty="0">
+              <a:t>Каждый защищенный роут API проходит проверку в промежуточном слое `verifyToken`. Он считывает заголовок `Authorization: Bearer &lt;token&gt;`, валидирует подпись и извлекает `userId` и `role`, прикрепляя их к объекту запроса `req.user`.</a:t>
+            </a:r>
+            <a:endParaRPr lang="en-US" sz="1600" dirty="0"/>
+          </a:p>
+          <a:p>
+            <a:pPr algn="l" indent="0" marL="0">
+              <a:buNone/>
+            </a:pPr>
+            <a:endParaRPr lang="en-US" sz="1600" dirty="0"/>
+          </a:p>
+          <a:p>
+            <a:pPr algn="l" indent="0" marL="0">
+              <a:buNone/>
+            </a:pPr>
+            <a:r>
+              <a:rPr lang="en-US" sz="1600" dirty="0">
                 <a:solidFill>
-                  <a:srgbClr val="1E293B"/>
+                  <a:srgbClr val="2D2D3A"/>
                 </a:solidFill>
-                <a:latin typeface="Calibri" pitchFamily="34" charset="0"/>
-                <a:ea typeface="Calibri" pitchFamily="34" charset="-122"/>
-                <a:cs typeface="Calibri" pitchFamily="34" charset="-120"/>
+                <a:latin typeface="Times New Roman" pitchFamily="34" charset="0"/>
+                <a:ea typeface="Times New Roman" pitchFamily="34" charset="-122"/>
+                <a:cs typeface="Times New Roman" pitchFamily="34" charset="-120"/>
               </a:rPr>
-              <a:t>• `message:send` — отправка нового сообщения в чат тикета.</a:t>
-            </a:r>
-            <a:endParaRPr lang="en-US" sz="1100" dirty="0"/>
-          </a:p>
-          <a:p>
-            <a:pPr indent="0" marL="0">
-              <a:buNone/>
-            </a:pPr>
-            <a:r>
-              <a:rPr lang="en-US" sz="1100" dirty="0">
+              <a:t>Безопасное разграничение ролей (RBAC):</a:t>
+            </a:r>
+            <a:endParaRPr lang="en-US" sz="1600" dirty="0"/>
+          </a:p>
+          <a:p>
+            <a:pPr algn="l" indent="0" marL="0">
+              <a:buNone/>
+            </a:pPr>
+            <a:r>
+              <a:rPr lang="en-US" sz="1600" dirty="0">
                 <a:solidFill>
-                  <a:srgbClr val="1E293B"/>
+                  <a:srgbClr val="2D2D3A"/>
                 </a:solidFill>
-                <a:latin typeface="Calibri" pitchFamily="34" charset="0"/>
-                <a:ea typeface="Calibri" pitchFamily="34" charset="-122"/>
-                <a:cs typeface="Calibri" pitchFamily="34" charset="-120"/>
+                <a:latin typeface="Times New Roman" pitchFamily="34" charset="0"/>
+                <a:ea typeface="Times New Roman" pitchFamily="34" charset="-122"/>
+                <a:cs typeface="Times New Roman" pitchFamily="34" charset="-120"/>
               </a:rPr>
-              <a:t>• `message:receive` — получение сообщения от собеседника в реальном времени.</a:t>
-            </a:r>
-            <a:endParaRPr lang="en-US" sz="1100" dirty="0"/>
-          </a:p>
-          <a:p>
-            <a:pPr indent="0" marL="0">
-              <a:buNone/>
-            </a:pPr>
-            <a:r>
-              <a:rPr lang="en-US" sz="1100" dirty="0">
+              <a:t>• Роуты `/api/tickets` доступны клиенту для чтения только своих обращений.</a:t>
+            </a:r>
+            <a:endParaRPr lang="en-US" sz="1600" dirty="0"/>
+          </a:p>
+          <a:p>
+            <a:pPr algn="l" indent="0" marL="0">
+              <a:buNone/>
+            </a:pPr>
+            <a:r>
+              <a:rPr lang="en-US" sz="1600" dirty="0">
                 <a:solidFill>
-                  <a:srgbClr val="1E293B"/>
+                  <a:srgbClr val="2D2D3A"/>
                 </a:solidFill>
-                <a:latin typeface="Calibri" pitchFamily="34" charset="0"/>
-                <a:ea typeface="Calibri" pitchFamily="34" charset="-122"/>
-                <a:cs typeface="Calibri" pitchFamily="34" charset="-120"/>
+                <a:latin typeface="Times New Roman" pitchFamily="34" charset="0"/>
+                <a:ea typeface="Times New Roman" pitchFamily="34" charset="-122"/>
+                <a:cs typeface="Times New Roman" pitchFamily="34" charset="-120"/>
               </a:rPr>
-              <a:t>• `ticket:status_changed` — push-оповещение клиента о смене статуса обращения менеджером или базой 1С.</a:t>
-            </a:r>
-            <a:endParaRPr lang="en-US" sz="1100" dirty="0"/>
+              <a:t>• Роуты `/api/manager/*` доступны только пользователям с флагом `role='manager'`.</a:t>
+            </a:r>
+            <a:endParaRPr lang="en-US" sz="1600" dirty="0"/>
+          </a:p>
+          <a:p>
+            <a:pPr algn="l" indent="0" marL="0">
+              <a:buNone/>
+            </a:pPr>
+            <a:r>
+              <a:rPr lang="en-US" sz="1600" dirty="0">
+                <a:solidFill>
+                  <a:srgbClr val="2D2D3A"/>
+                </a:solidFill>
+                <a:latin typeface="Times New Roman" pitchFamily="34" charset="0"/>
+                <a:ea typeface="Times New Roman" pitchFamily="34" charset="-122"/>
+                <a:cs typeface="Times New Roman" pitchFamily="34" charset="-120"/>
+              </a:rPr>
+              <a:t>• Любые несанкционированные попытки доступа блокируются ошибками 401 Unauthorized или 403 Forbidden.</a:t>
+            </a:r>
+            <a:endParaRPr lang="en-US" sz="1600" dirty="0"/>
           </a:p>
         </p:txBody>
       </p:sp>
@@ -9813,17 +9590,17 @@
               <a:buNone/>
             </a:pPr>
             <a:r>
-              <a:rPr lang="en-US" sz="2000" b="1" dirty="0">
+              <a:rPr lang="en-US" sz="1600" b="1" dirty="0">
                 <a:solidFill>
-                  <a:srgbClr val="0F1E36"/>
+                  <a:srgbClr val="1A1A2E"/>
                 </a:solidFill>
-                <a:latin typeface="Cambria" pitchFamily="34" charset="0"/>
-                <a:ea typeface="Cambria" pitchFamily="34" charset="-122"/>
-                <a:cs typeface="Cambria" pitchFamily="34" charset="-120"/>
+                <a:latin typeface="Georgia" pitchFamily="34" charset="0"/>
+                <a:ea typeface="Georgia" pitchFamily="34" charset="-122"/>
+                <a:cs typeface="Georgia" pitchFamily="34" charset="-120"/>
               </a:rPr>
-              <a:t>Интерфейс хранилища файлов: S3 Presigned URLs</a:t>
-            </a:r>
-            <a:endParaRPr lang="en-US" sz="2000" dirty="0"/>
+              <a:t>Интерфейс реального времени: WebSocket</a:t>
+            </a:r>
+            <a:endParaRPr lang="en-US" sz="1600" dirty="0"/>
           </a:p>
         </p:txBody>
       </p:sp>
@@ -9836,26 +9613,26 @@
         <p:spPr>
           <a:xfrm>
             <a:off x="384048" y="822960"/>
-            <a:ext cx="4023360" cy="4119372"/>
+            <a:ext cx="8375904" cy="4119372"/>
           </a:xfrm>
           <a:prstGeom prst="roundRect">
             <a:avLst>
-              <a:gd name="adj" fmla="val 2273"/>
+              <a:gd name="adj" fmla="val 2220"/>
             </a:avLst>
           </a:prstGeom>
           <a:solidFill>
-            <a:srgbClr val="FFF7ED"/>
+            <a:srgbClr val="F8F4F0"/>
           </a:solidFill>
           <a:ln w="12700">
             <a:solidFill>
-              <a:srgbClr val="FFF7ED"/>
+              <a:srgbClr val="EFEAE3"/>
             </a:solidFill>
             <a:prstDash val="solid"/>
           </a:ln>
           <a:effectLst>
-            <a:outerShdw sx="100000" sy="100000" kx="0" ky="0" algn="bl" rotWithShape="0" blurRad="88900" dist="25400" dir="2700000">
+            <a:outerShdw sx="100000" sy="100000" kx="0" ky="0" algn="bl" rotWithShape="0" blurRad="152400" dist="38100" dir="2700000">
               <a:srgbClr val="000000">
-                <a:alpha val="9000"/>
+                <a:alpha val="12000"/>
               </a:srgbClr>
             </a:outerShdw>
           </a:effectLst>
@@ -9870,7 +9647,7 @@
         <p:spPr>
           <a:xfrm>
             <a:off x="548640" y="932688"/>
-            <a:ext cx="3694176" cy="365760"/>
+            <a:ext cx="8046720" cy="411480"/>
           </a:xfrm>
           <a:prstGeom prst="rect">
             <a:avLst/>
@@ -9879,24 +9656,24 @@
           <a:ln/>
         </p:spPr>
         <p:txBody>
-          <a:bodyPr wrap="square" rtlCol="0" anchor="ctr"/>
+          <a:bodyPr wrap="square" rtlCol="0" anchor="t"/>
           <a:lstStyle/>
           <a:p>
-            <a:pPr indent="0" marL="0">
-              <a:buNone/>
-            </a:pPr>
-            <a:r>
-              <a:rPr lang="en-US" sz="1300" b="1" dirty="0">
+            <a:pPr algn="l" indent="0" marL="0">
+              <a:buNone/>
+            </a:pPr>
+            <a:r>
+              <a:rPr lang="en-US" sz="1200" b="1" dirty="0">
                 <a:solidFill>
-                  <a:srgbClr val="DC2626"/>
+                  <a:srgbClr val="1A1A2E"/>
                 </a:solidFill>
                 <a:latin typeface="Cambria" pitchFamily="34" charset="0"/>
                 <a:ea typeface="Cambria" pitchFamily="34" charset="-122"/>
                 <a:cs typeface="Cambria" pitchFamily="34" charset="-120"/>
               </a:rPr>
-              <a:t>Проблема классического подхода</a:t>
-            </a:r>
-            <a:endParaRPr lang="en-US" sz="1300" dirty="0"/>
+              <a:t>Протокол, подключение и события WebSocket</a:t>
+            </a:r>
+            <a:endParaRPr lang="en-US" sz="1200" dirty="0"/>
           </a:p>
         </p:txBody>
       </p:sp>
@@ -9908,8 +9685,8 @@
         </p:nvSpPr>
         <p:spPr>
           <a:xfrm>
-            <a:off x="548640" y="1389888"/>
-            <a:ext cx="3694176" cy="2926080"/>
+            <a:off x="548640" y="1417320"/>
+            <a:ext cx="8046720" cy="3296412"/>
           </a:xfrm>
           <a:prstGeom prst="rect">
             <a:avLst/>
@@ -9918,170 +9695,98 @@
           <a:ln/>
         </p:spPr>
         <p:txBody>
-          <a:bodyPr wrap="square" rtlCol="0" anchor="ctr"/>
+          <a:bodyPr wrap="square" rtlCol="0" anchor="t"/>
           <a:lstStyle/>
           <a:p>
-            <a:pPr indent="0" marL="0">
-              <a:buNone/>
-            </a:pPr>
-            <a:r>
-              <a:rPr lang="en-US" sz="1100" dirty="0">
+            <a:pPr algn="l" indent="0" marL="0">
+              <a:buNone/>
+            </a:pPr>
+            <a:r>
+              <a:rPr lang="en-US" sz="1600" dirty="0">
                 <a:solidFill>
-                  <a:srgbClr val="1E293B"/>
+                  <a:srgbClr val="2D2D3A"/>
                 </a:solidFill>
-                <a:latin typeface="Calibri" pitchFamily="34" charset="0"/>
-                <a:ea typeface="Calibri" pitchFamily="34" charset="-122"/>
-                <a:cs typeface="Calibri" pitchFamily="34" charset="-120"/>
+                <a:latin typeface="Times New Roman" pitchFamily="34" charset="0"/>
+                <a:ea typeface="Times New Roman" pitchFamily="34" charset="-122"/>
+                <a:cs typeface="Times New Roman" pitchFamily="34" charset="-120"/>
               </a:rPr>
-              <a:t>Обычно файлы загружают на бэкенд API-сервера, а тот перекладывает их в хранилище. Это забивает дисковый кэш, перегружает оперативную память Node.js бинарным буфером данных и блокирует поток событий (Event Loop) при загрузке тяжелых логов или баз 1С.</a:t>
-            </a:r>
-            <a:endParaRPr lang="en-US" sz="1100" dirty="0"/>
-          </a:p>
-        </p:txBody>
-      </p:sp>
-      <p:sp>
-        <p:nvSpPr>
-          <p:cNvPr id="6" name="Shape 4"/>
-          <p:cNvSpPr/>
-          <p:nvPr/>
-        </p:nvSpPr>
-        <p:spPr>
-          <a:xfrm>
-            <a:off x="4681728" y="822960"/>
-            <a:ext cx="4078224" cy="4119372"/>
-          </a:xfrm>
-          <a:prstGeom prst="roundRect">
-            <a:avLst>
-              <a:gd name="adj" fmla="val 2242"/>
-            </a:avLst>
-          </a:prstGeom>
-          <a:solidFill>
-            <a:srgbClr val="D1FAE5"/>
-          </a:solidFill>
-          <a:ln w="12700">
-            <a:solidFill>
-              <a:srgbClr val="D1FAE5"/>
-            </a:solidFill>
-            <a:prstDash val="solid"/>
-          </a:ln>
-          <a:effectLst>
-            <a:outerShdw sx="100000" sy="100000" kx="0" ky="0" algn="bl" rotWithShape="0" blurRad="88900" dist="25400" dir="2700000">
-              <a:srgbClr val="000000">
-                <a:alpha val="9000"/>
-              </a:srgbClr>
-            </a:outerShdw>
-          </a:effectLst>
-        </p:spPr>
-      </p:sp>
-      <p:sp>
-        <p:nvSpPr>
-          <p:cNvPr id="7" name="Text 5"/>
-          <p:cNvSpPr/>
-          <p:nvPr/>
-        </p:nvSpPr>
-        <p:spPr>
-          <a:xfrm>
-            <a:off x="4846320" y="932688"/>
-            <a:ext cx="3749040" cy="365760"/>
-          </a:xfrm>
-          <a:prstGeom prst="rect">
-            <a:avLst/>
-          </a:prstGeom>
-          <a:noFill/>
-          <a:ln/>
-        </p:spPr>
-        <p:txBody>
-          <a:bodyPr wrap="square" rtlCol="0" anchor="ctr"/>
-          <a:lstStyle/>
-          <a:p>
-            <a:pPr indent="0" marL="0">
-              <a:buNone/>
-            </a:pPr>
-            <a:r>
-              <a:rPr lang="en-US" sz="1300" b="1" dirty="0">
+              <a:t>WebSocket обеспечивает постоянный двусторонний обмен данными без оверхеда HTTP-заголовков. При открытии карточки тикета клиент подключается к сокет-серверу и подписывается на комнату `ticket:&lt;ticketId&gt;`, отправляя событие `join`.</a:t>
+            </a:r>
+            <a:endParaRPr lang="en-US" sz="1600" dirty="0"/>
+          </a:p>
+          <a:p>
+            <a:pPr algn="l" indent="0" marL="0">
+              <a:buNone/>
+            </a:pPr>
+            <a:endParaRPr lang="en-US" sz="1600" dirty="0"/>
+          </a:p>
+          <a:p>
+            <a:pPr algn="l" indent="0" marL="0">
+              <a:buNone/>
+            </a:pPr>
+            <a:r>
+              <a:rPr lang="en-US" sz="1600" dirty="0">
                 <a:solidFill>
-                  <a:srgbClr val="059669"/>
+                  <a:srgbClr val="2D2D3A"/>
                 </a:solidFill>
-                <a:latin typeface="Cambria" pitchFamily="34" charset="0"/>
-                <a:ea typeface="Cambria" pitchFamily="34" charset="-122"/>
-                <a:cs typeface="Cambria" pitchFamily="34" charset="-120"/>
+                <a:latin typeface="Times New Roman" pitchFamily="34" charset="0"/>
+                <a:ea typeface="Times New Roman" pitchFamily="34" charset="-122"/>
+                <a:cs typeface="Times New Roman" pitchFamily="34" charset="-120"/>
               </a:rPr>
-              <a:t>Решение: Временные ссылки S3</a:t>
-            </a:r>
-            <a:endParaRPr lang="en-US" sz="1300" dirty="0"/>
-          </a:p>
-        </p:txBody>
-      </p:sp>
-      <p:sp>
-        <p:nvSpPr>
-          <p:cNvPr id="8" name="Text 6"/>
-          <p:cNvSpPr/>
-          <p:nvPr/>
-        </p:nvSpPr>
-        <p:spPr>
-          <a:xfrm>
-            <a:off x="4846320" y="1389888"/>
-            <a:ext cx="3749040" cy="2926080"/>
-          </a:xfrm>
-          <a:prstGeom prst="rect">
-            <a:avLst/>
-          </a:prstGeom>
-          <a:noFill/>
-          <a:ln/>
-        </p:spPr>
-        <p:txBody>
-          <a:bodyPr wrap="square" rtlCol="0" anchor="ctr"/>
-          <a:lstStyle/>
-          <a:p>
-            <a:pPr indent="0" marL="0">
-              <a:buNone/>
-            </a:pPr>
-            <a:r>
-              <a:rPr lang="en-US" sz="1100" dirty="0">
+              <a:t>События WebSocket-сервиса:</a:t>
+            </a:r>
+            <a:endParaRPr lang="en-US" sz="1600" dirty="0"/>
+          </a:p>
+          <a:p>
+            <a:pPr algn="l" indent="0" marL="0">
+              <a:buNone/>
+            </a:pPr>
+            <a:r>
+              <a:rPr lang="en-US" sz="1600" dirty="0">
                 <a:solidFill>
-                  <a:srgbClr val="1E293B"/>
+                  <a:srgbClr val="2D2D3A"/>
                 </a:solidFill>
-                <a:latin typeface="Calibri" pitchFamily="34" charset="0"/>
-                <a:ea typeface="Calibri" pitchFamily="34" charset="-122"/>
-                <a:cs typeface="Calibri" pitchFamily="34" charset="-120"/>
+                <a:latin typeface="Times New Roman" pitchFamily="34" charset="0"/>
+                <a:ea typeface="Times New Roman" pitchFamily="34" charset="-122"/>
+                <a:cs typeface="Times New Roman" pitchFamily="34" charset="-120"/>
               </a:rPr>
-              <a:t>1. Фронтенд шлет запрос на `/api/files/presigned-put`.</a:t>
-            </a:r>
-            <a:endParaRPr lang="en-US" sz="1100" dirty="0"/>
-          </a:p>
-          <a:p>
-            <a:pPr indent="0" marL="0">
-              <a:buNone/>
-            </a:pPr>
-            <a:r>
-              <a:rPr lang="en-US" sz="1100" dirty="0">
+              <a:t>• `message:send` — отправка нового сообщения в чат тикета.</a:t>
+            </a:r>
+            <a:endParaRPr lang="en-US" sz="1600" dirty="0"/>
+          </a:p>
+          <a:p>
+            <a:pPr algn="l" indent="0" marL="0">
+              <a:buNone/>
+            </a:pPr>
+            <a:r>
+              <a:rPr lang="en-US" sz="1600" dirty="0">
                 <a:solidFill>
-                  <a:srgbClr val="1E293B"/>
+                  <a:srgbClr val="2D2D3A"/>
                 </a:solidFill>
-                <a:latin typeface="Calibri" pitchFamily="34" charset="0"/>
-                <a:ea typeface="Calibri" pitchFamily="34" charset="-122"/>
-                <a:cs typeface="Calibri" pitchFamily="34" charset="-120"/>
+                <a:latin typeface="Times New Roman" pitchFamily="34" charset="0"/>
+                <a:ea typeface="Times New Roman" pitchFamily="34" charset="-122"/>
+                <a:cs typeface="Times New Roman" pitchFamily="34" charset="-120"/>
               </a:rPr>
-              <a:t>2. Бэкенд за миллисекунду генерирует криптографически подписанный URL с лимитом жизни 15 минут.</a:t>
-            </a:r>
-            <a:endParaRPr lang="en-US" sz="1100" dirty="0"/>
-          </a:p>
-          <a:p>
-            <a:pPr indent="0" marL="0">
-              <a:buNone/>
-            </a:pPr>
-            <a:r>
-              <a:rPr lang="en-US" sz="1100" dirty="0">
+              <a:t>• `message:receive` — получение сообщения от собеседника в реальном времени.</a:t>
+            </a:r>
+            <a:endParaRPr lang="en-US" sz="1600" dirty="0"/>
+          </a:p>
+          <a:p>
+            <a:pPr algn="l" indent="0" marL="0">
+              <a:buNone/>
+            </a:pPr>
+            <a:r>
+              <a:rPr lang="en-US" sz="1600" dirty="0">
                 <a:solidFill>
-                  <a:srgbClr val="1E293B"/>
+                  <a:srgbClr val="2D2D3A"/>
                 </a:solidFill>
-                <a:latin typeface="Calibri" pitchFamily="34" charset="0"/>
-                <a:ea typeface="Calibri" pitchFamily="34" charset="-122"/>
-                <a:cs typeface="Calibri" pitchFamily="34" charset="-120"/>
+                <a:latin typeface="Times New Roman" pitchFamily="34" charset="0"/>
+                <a:ea typeface="Times New Roman" pitchFamily="34" charset="-122"/>
+                <a:cs typeface="Times New Roman" pitchFamily="34" charset="-120"/>
               </a:rPr>
-              <a:t>3. Фронтенд шлет бинарный файл напрямую в корзину MinIO. Бэкенд не нагружается.</a:t>
-            </a:r>
-            <a:endParaRPr lang="en-US" sz="1100" dirty="0"/>
+              <a:t>• `ticket:status_changed` — push-оповещение клиента о смене статуса обращения менеджером или базой 1С.</a:t>
+            </a:r>
+            <a:endParaRPr lang="en-US" sz="1600" dirty="0"/>
           </a:p>
         </p:txBody>
       </p:sp>

--- a/presentations/output/P3_Интерфейс_подсистем.pptx
+++ b/presentations/output/P3_Интерфейс_подсистем.pptx
@@ -2623,7 +2623,7 @@
               <a:buNone/>
             </a:pPr>
             <a:r>
-              <a:rPr lang="en-US" sz="1200" b="1" dirty="0">
+              <a:rPr lang="en-US" sz="1400" b="1" dirty="0">
                 <a:solidFill>
                   <a:srgbClr val="1A1A2E"/>
                 </a:solidFill>
@@ -2633,7 +2633,7 @@
               </a:rPr>
               <a:t>Проблема классического подхода и решение через presigned URLs</a:t>
             </a:r>
-            <a:endParaRPr lang="en-US" sz="1200" dirty="0"/>
+            <a:endParaRPr lang="en-US" sz="1400" dirty="0"/>
           </a:p>
         </p:txBody>
       </p:sp>
@@ -2662,7 +2662,7 @@
               <a:buNone/>
             </a:pPr>
             <a:r>
-              <a:rPr lang="en-US" sz="1600" dirty="0">
+              <a:rPr lang="en-US" sz="1800" dirty="0">
                 <a:solidFill>
                   <a:srgbClr val="2D2D3A"/>
                 </a:solidFill>
@@ -2672,20 +2672,20 @@
               </a:rPr>
               <a:t>Обычно файлы загружают на бэкенд API-сервера, а тот перекладывает их в хранилище. Это забивает дисковый кэш, перегружает оперативную память Node.js бинарным буфером данных и блокирует поток событий (Event Loop) при загрузке тяжелых логов или баз 1С.</a:t>
             </a:r>
-            <a:endParaRPr lang="en-US" sz="1600" dirty="0"/>
+            <a:endParaRPr lang="en-US" sz="1800" dirty="0"/>
           </a:p>
           <a:p>
             <a:pPr algn="l" indent="0" marL="0">
               <a:buNone/>
             </a:pPr>
-            <a:endParaRPr lang="en-US" sz="1600" dirty="0"/>
+            <a:endParaRPr lang="en-US" sz="1800" dirty="0"/>
           </a:p>
           <a:p>
             <a:pPr algn="l" indent="0" marL="0">
               <a:buNone/>
             </a:pPr>
             <a:r>
-              <a:rPr lang="en-US" sz="1600" dirty="0">
+              <a:rPr lang="en-US" sz="1800" dirty="0">
                 <a:solidFill>
                   <a:srgbClr val="2D2D3A"/>
                 </a:solidFill>
@@ -2695,14 +2695,14 @@
               </a:rPr>
               <a:t>Решение: Временные ссылки S3</a:t>
             </a:r>
-            <a:endParaRPr lang="en-US" sz="1600" dirty="0"/>
+            <a:endParaRPr lang="en-US" sz="1800" dirty="0"/>
           </a:p>
           <a:p>
             <a:pPr algn="l" indent="0" marL="0">
               <a:buNone/>
             </a:pPr>
             <a:r>
-              <a:rPr lang="en-US" sz="1600" dirty="0">
+              <a:rPr lang="en-US" sz="1800" dirty="0">
                 <a:solidFill>
                   <a:srgbClr val="2D2D3A"/>
                 </a:solidFill>
@@ -2712,14 +2712,14 @@
               </a:rPr>
               <a:t>1. Фронтенд шлет запрос на `/api/files/presigned-put`.</a:t>
             </a:r>
-            <a:endParaRPr lang="en-US" sz="1600" dirty="0"/>
+            <a:endParaRPr lang="en-US" sz="1800" dirty="0"/>
           </a:p>
           <a:p>
             <a:pPr algn="l" indent="0" marL="0">
               <a:buNone/>
             </a:pPr>
             <a:r>
-              <a:rPr lang="en-US" sz="1600" dirty="0">
+              <a:rPr lang="en-US" sz="1800" dirty="0">
                 <a:solidFill>
                   <a:srgbClr val="2D2D3A"/>
                 </a:solidFill>
@@ -2729,14 +2729,14 @@
               </a:rPr>
               <a:t>2. Бэкенд за миллисекунду генерирует криптографически подписанный URL с лимитом жизни 15 минут.</a:t>
             </a:r>
-            <a:endParaRPr lang="en-US" sz="1600" dirty="0"/>
+            <a:endParaRPr lang="en-US" sz="1800" dirty="0"/>
           </a:p>
           <a:p>
             <a:pPr algn="l" indent="0" marL="0">
               <a:buNone/>
             </a:pPr>
             <a:r>
-              <a:rPr lang="en-US" sz="1600" dirty="0">
+              <a:rPr lang="en-US" sz="1800" dirty="0">
                 <a:solidFill>
                   <a:srgbClr val="2D2D3A"/>
                 </a:solidFill>
@@ -2746,7 +2746,7 @@
               </a:rPr>
               <a:t>3. Фронтенд шлет бинарный файл напрямую в корзину MinIO. Бэкенд не нагружается.</a:t>
             </a:r>
-            <a:endParaRPr lang="en-US" sz="1600" dirty="0"/>
+            <a:endParaRPr lang="en-US" sz="1800" dirty="0"/>
           </a:p>
         </p:txBody>
       </p:sp>
@@ -2880,7 +2880,7 @@
               <a:buNone/>
             </a:pPr>
             <a:r>
-              <a:rPr lang="en-US" sz="1200" b="1" dirty="0">
+              <a:rPr lang="en-US" sz="1400" b="1" dirty="0">
                 <a:solidFill>
                   <a:srgbClr val="1A1A2E"/>
                 </a:solidFill>
@@ -2890,7 +2890,7 @@
               </a:rPr>
               <a:t>Пул соединений и преимущества Drizzle ORM</a:t>
             </a:r>
-            <a:endParaRPr lang="en-US" sz="1200" dirty="0"/>
+            <a:endParaRPr lang="en-US" sz="1400" dirty="0"/>
           </a:p>
         </p:txBody>
       </p:sp>
@@ -2919,7 +2919,7 @@
               <a:buNone/>
             </a:pPr>
             <a:r>
-              <a:rPr lang="en-US" sz="1600" dirty="0">
+              <a:rPr lang="en-US" sz="1800" dirty="0">
                 <a:solidFill>
                   <a:srgbClr val="2D2D3A"/>
                 </a:solidFill>
@@ -2929,20 +2929,20 @@
               </a:rPr>
               <a:t>Создание TCP-соединения с Postgres на каждый запрос — дорогая операция. Бэкенд инициализирует пул соединений `node-postgres` с лимитом от 10 до 20 активных сессий. Это позволяет мгновенно выполнять SQL-запросы за счет повторного использования открытых сокетов.</a:t>
             </a:r>
-            <a:endParaRPr lang="en-US" sz="1600" dirty="0"/>
+            <a:endParaRPr lang="en-US" sz="1800" dirty="0"/>
           </a:p>
           <a:p>
             <a:pPr algn="l" indent="0" marL="0">
               <a:buNone/>
             </a:pPr>
-            <a:endParaRPr lang="en-US" sz="1600" dirty="0"/>
+            <a:endParaRPr lang="en-US" sz="1800" dirty="0"/>
           </a:p>
           <a:p>
             <a:pPr algn="l" indent="0" marL="0">
               <a:buNone/>
             </a:pPr>
             <a:r>
-              <a:rPr lang="en-US" sz="1600" dirty="0">
+              <a:rPr lang="en-US" sz="1800" dirty="0">
                 <a:solidFill>
                   <a:srgbClr val="2D2D3A"/>
                 </a:solidFill>
@@ -2952,14 +2952,14 @@
               </a:rPr>
               <a:t>Преимущества Drizzle ORM:</a:t>
             </a:r>
-            <a:endParaRPr lang="en-US" sz="1600" dirty="0"/>
+            <a:endParaRPr lang="en-US" sz="1800" dirty="0"/>
           </a:p>
           <a:p>
             <a:pPr algn="l" indent="0" marL="0">
               <a:buNone/>
             </a:pPr>
             <a:r>
-              <a:rPr lang="en-US" sz="1600" dirty="0">
+              <a:rPr lang="en-US" sz="1800" dirty="0">
                 <a:solidFill>
                   <a:srgbClr val="2D2D3A"/>
                 </a:solidFill>
@@ -2969,14 +2969,14 @@
               </a:rPr>
               <a:t>• Полная типобезопасность возвращаемых строк.</a:t>
             </a:r>
-            <a:endParaRPr lang="en-US" sz="1600" dirty="0"/>
+            <a:endParaRPr lang="en-US" sz="1800" dirty="0"/>
           </a:p>
           <a:p>
             <a:pPr algn="l" indent="0" marL="0">
               <a:buNone/>
             </a:pPr>
             <a:r>
-              <a:rPr lang="en-US" sz="1600" dirty="0">
+              <a:rPr lang="en-US" sz="1800" dirty="0">
                 <a:solidFill>
                   <a:srgbClr val="2D2D3A"/>
                 </a:solidFill>
@@ -2986,14 +2986,14 @@
               </a:rPr>
               <a:t>• Отсутствие оверхеда традиционных тяжелых ORM (код Drizzle компилируется в эффективные нативные сырые SQL-запросы).</a:t>
             </a:r>
-            <a:endParaRPr lang="en-US" sz="1600" dirty="0"/>
+            <a:endParaRPr lang="en-US" sz="1800" dirty="0"/>
           </a:p>
           <a:p>
             <a:pPr algn="l" indent="0" marL="0">
               <a:buNone/>
             </a:pPr>
             <a:r>
-              <a:rPr lang="en-US" sz="1600" dirty="0">
+              <a:rPr lang="en-US" sz="1800" dirty="0">
                 <a:solidFill>
                   <a:srgbClr val="2D2D3A"/>
                 </a:solidFill>
@@ -3003,7 +3003,7 @@
               </a:rPr>
               <a:t>• Автоматическое управление миграциями и версионированием таблиц.</a:t>
             </a:r>
-            <a:endParaRPr lang="en-US" sz="1600" dirty="0"/>
+            <a:endParaRPr lang="en-US" sz="1800" dirty="0"/>
           </a:p>
         </p:txBody>
       </p:sp>
@@ -3137,7 +3137,7 @@
               <a:buNone/>
             </a:pPr>
             <a:r>
-              <a:rPr lang="en-US" sz="1200" b="1" dirty="0">
+              <a:rPr lang="en-US" sz="1400" b="1" dirty="0">
                 <a:solidFill>
                   <a:srgbClr val="1A1A2E"/>
                 </a:solidFill>
@@ -3147,7 +3147,7 @@
               </a:rPr>
               <a:t>Проблема синхронной интеграции и решение Outbox</a:t>
             </a:r>
-            <a:endParaRPr lang="en-US" sz="1200" dirty="0"/>
+            <a:endParaRPr lang="en-US" sz="1400" dirty="0"/>
           </a:p>
         </p:txBody>
       </p:sp>
@@ -3176,7 +3176,7 @@
               <a:buNone/>
             </a:pPr>
             <a:r>
-              <a:rPr lang="en-US" sz="1600" dirty="0">
+              <a:rPr lang="en-US" sz="1800" dirty="0">
                 <a:solidFill>
                   <a:srgbClr val="2D2D3A"/>
                 </a:solidFill>
@@ -3186,20 +3186,20 @@
               </a:rPr>
               <a:t>Если при нажатии кнопки 'Создать тикет' слать запрос напрямую в 1С по HTTP REST: при сбое связи, перегрузке или плановом перезапуске 1С клиент получит ошибку 500, а тикет будет потерян. Это недопустимо для бизнес-системы.</a:t>
             </a:r>
-            <a:endParaRPr lang="en-US" sz="1600" dirty="0"/>
+            <a:endParaRPr lang="en-US" sz="1800" dirty="0"/>
           </a:p>
           <a:p>
             <a:pPr algn="l" indent="0" marL="0">
               <a:buNone/>
             </a:pPr>
-            <a:endParaRPr lang="en-US" sz="1600" dirty="0"/>
+            <a:endParaRPr lang="en-US" sz="1800" dirty="0"/>
           </a:p>
           <a:p>
             <a:pPr algn="l" indent="0" marL="0">
               <a:buNone/>
             </a:pPr>
             <a:r>
-              <a:rPr lang="en-US" sz="1600" dirty="0">
+              <a:rPr lang="en-US" sz="1800" dirty="0">
                 <a:solidFill>
                   <a:srgbClr val="2D2D3A"/>
                 </a:solidFill>
@@ -3209,14 +3209,14 @@
               </a:rPr>
               <a:t>Асинхронное решение Outbox:</a:t>
             </a:r>
-            <a:endParaRPr lang="en-US" sz="1600" dirty="0"/>
+            <a:endParaRPr lang="en-US" sz="1800" dirty="0"/>
           </a:p>
           <a:p>
             <a:pPr algn="l" indent="0" marL="0">
               <a:buNone/>
             </a:pPr>
             <a:r>
-              <a:rPr lang="en-US" sz="1600" dirty="0">
+              <a:rPr lang="en-US" sz="1800" dirty="0">
                 <a:solidFill>
                   <a:srgbClr val="2D2D3A"/>
                 </a:solidFill>
@@ -3226,14 +3226,14 @@
               </a:rPr>
               <a:t>1. Тикет и событие в таблицу `outbox` пишутся в локальный Postgres в рамках одной ACID транзакции.</a:t>
             </a:r>
-            <a:endParaRPr lang="en-US" sz="1600" dirty="0"/>
+            <a:endParaRPr lang="en-US" sz="1800" dirty="0"/>
           </a:p>
           <a:p>
             <a:pPr algn="l" indent="0" marL="0">
               <a:buNone/>
             </a:pPr>
             <a:r>
-              <a:rPr lang="en-US" sz="1600" dirty="0">
+              <a:rPr lang="en-US" sz="1800" dirty="0">
                 <a:solidFill>
                   <a:srgbClr val="2D2D3A"/>
                 </a:solidFill>
@@ -3243,14 +3243,14 @@
               </a:rPr>
               <a:t>2. Фоновый воркер Node.js раз в 5с шлет события в симулятор 1С.</a:t>
             </a:r>
-            <a:endParaRPr lang="en-US" sz="1600" dirty="0"/>
+            <a:endParaRPr lang="en-US" sz="1800" dirty="0"/>
           </a:p>
           <a:p>
             <a:pPr algn="l" indent="0" marL="0">
               <a:buNone/>
             </a:pPr>
             <a:r>
-              <a:rPr lang="en-US" sz="1600" dirty="0">
+              <a:rPr lang="en-US" sz="1800" dirty="0">
                 <a:solidFill>
                   <a:srgbClr val="2D2D3A"/>
                 </a:solidFill>
@@ -3260,7 +3260,7 @@
               </a:rPr>
               <a:t>3. При успехе ставит статус `processed`. При сбое повторяет попытку с задержкой.</a:t>
             </a:r>
-            <a:endParaRPr lang="en-US" sz="1600" dirty="0"/>
+            <a:endParaRPr lang="en-US" sz="1800" dirty="0"/>
           </a:p>
         </p:txBody>
       </p:sp>
@@ -3394,7 +3394,7 @@
               <a:buNone/>
             </a:pPr>
             <a:r>
-              <a:rPr lang="en-US" sz="1200" b="1" dirty="0">
+              <a:rPr lang="en-US" sz="1400" b="1" dirty="0">
                 <a:solidFill>
                   <a:srgbClr val="1A1A2E"/>
                 </a:solidFill>
@@ -3404,7 +3404,7 @@
               </a:rPr>
               <a:t>Ограничение запросов и контроль источников</a:t>
             </a:r>
-            <a:endParaRPr lang="en-US" sz="1200" dirty="0"/>
+            <a:endParaRPr lang="en-US" sz="1400" dirty="0"/>
           </a:p>
         </p:txBody>
       </p:sp>
@@ -3433,7 +3433,7 @@
               <a:buNone/>
             </a:pPr>
             <a:r>
-              <a:rPr lang="en-US" sz="1600" dirty="0">
+              <a:rPr lang="en-US" sz="1800" dirty="0">
                 <a:solidFill>
                   <a:srgbClr val="2D2D3A"/>
                 </a:solidFill>
@@ -3443,14 +3443,14 @@
               </a:rPr>
               <a:t>Rate Limiting (Защита от DOS):</a:t>
             </a:r>
-            <a:endParaRPr lang="en-US" sz="1600" dirty="0"/>
+            <a:endParaRPr lang="en-US" sz="1800" dirty="0"/>
           </a:p>
           <a:p>
             <a:pPr algn="l" indent="0" marL="0">
               <a:buNone/>
             </a:pPr>
             <a:r>
-              <a:rPr lang="en-US" sz="1600" dirty="0">
+              <a:rPr lang="en-US" sz="1800" dirty="0">
                 <a:solidFill>
                   <a:srgbClr val="2D2D3A"/>
                 </a:solidFill>
@@ -3460,20 +3460,20 @@
               </a:rPr>
               <a:t>Чтобы злоумышленники не завалили базу запросами и не перегрузили СУБД, на бэкенде включен `express-rate-limit`. Ограничение: максимум 150 запросов в 1 минуту с одного IP-адреса. Для роутов отправки SMS-кодов лимит еще жестче: 3 запроса в минуту.</a:t>
             </a:r>
-            <a:endParaRPr lang="en-US" sz="1600" dirty="0"/>
+            <a:endParaRPr lang="en-US" sz="1800" dirty="0"/>
           </a:p>
           <a:p>
             <a:pPr algn="l" indent="0" marL="0">
               <a:buNone/>
             </a:pPr>
-            <a:endParaRPr lang="en-US" sz="1600" dirty="0"/>
+            <a:endParaRPr lang="en-US" sz="1800" dirty="0"/>
           </a:p>
           <a:p>
             <a:pPr algn="l" indent="0" marL="0">
               <a:buNone/>
             </a:pPr>
             <a:r>
-              <a:rPr lang="en-US" sz="1600" dirty="0">
+              <a:rPr lang="en-US" sz="1800" dirty="0">
                 <a:solidFill>
                   <a:srgbClr val="2D2D3A"/>
                 </a:solidFill>
@@ -3483,14 +3483,14 @@
               </a:rPr>
               <a:t>Cross-Origin Resource Sharing (CORS):</a:t>
             </a:r>
-            <a:endParaRPr lang="en-US" sz="1600" dirty="0"/>
+            <a:endParaRPr lang="en-US" sz="1800" dirty="0"/>
           </a:p>
           <a:p>
             <a:pPr algn="l" indent="0" marL="0">
               <a:buNone/>
             </a:pPr>
             <a:r>
-              <a:rPr lang="en-US" sz="1600" dirty="0">
+              <a:rPr lang="en-US" sz="1800" dirty="0">
                 <a:solidFill>
                   <a:srgbClr val="2D2D3A"/>
                 </a:solidFill>
@@ -3500,7 +3500,7 @@
               </a:rPr>
               <a:t>Бэкенд принимает запросы только со строго разрешенного списка доменов (White List), прописанных в переменной `CORS_ALLOWED_ORIGINS`. Попытки отправки AJAX-запросов со сторонних вредоносных фишинговых сайтов блокируются на уровне браузера.</a:t>
             </a:r>
-            <a:endParaRPr lang="en-US" sz="1600" dirty="0"/>
+            <a:endParaRPr lang="en-US" sz="1800" dirty="0"/>
           </a:p>
         </p:txBody>
       </p:sp>
@@ -3634,7 +3634,7 @@
               <a:buNone/>
             </a:pPr>
             <a:r>
-              <a:rPr lang="en-US" sz="1200" b="1" dirty="0">
+              <a:rPr lang="en-US" sz="1400" b="1" dirty="0">
                 <a:solidFill>
                   <a:srgbClr val="1A1A2E"/>
                 </a:solidFill>
@@ -3644,7 +3644,7 @@
               </a:rPr>
               <a:t>Замена S3-провайдера и масштабирование бэкенда</a:t>
             </a:r>
-            <a:endParaRPr lang="en-US" sz="1200" dirty="0"/>
+            <a:endParaRPr lang="en-US" sz="1400" dirty="0"/>
           </a:p>
         </p:txBody>
       </p:sp>
@@ -3673,7 +3673,7 @@
               <a:buNone/>
             </a:pPr>
             <a:r>
-              <a:rPr lang="en-US" sz="1600" dirty="0">
+              <a:rPr lang="en-US" sz="1800" dirty="0">
                 <a:solidFill>
                   <a:srgbClr val="2D2D3A"/>
                 </a:solidFill>
@@ -3683,14 +3683,14 @@
               </a:rPr>
               <a:t>Замена S3-провайдера за 1 минуту:</a:t>
             </a:r>
-            <a:endParaRPr lang="en-US" sz="1600" dirty="0"/>
+            <a:endParaRPr lang="en-US" sz="1800" dirty="0"/>
           </a:p>
           <a:p>
             <a:pPr algn="l" indent="0" marL="0">
               <a:buNone/>
             </a:pPr>
             <a:r>
-              <a:rPr lang="en-US" sz="1600" dirty="0">
+              <a:rPr lang="en-US" sz="1800" dirty="0">
                 <a:solidFill>
                   <a:srgbClr val="2D2D3A"/>
                 </a:solidFill>
@@ -3700,20 +3700,20 @@
               </a:rPr>
               <a:t>Поскольку загрузка файлов спроектирована по стандартному протоколу AWS S3 API, мы можем заменить локальный контейнер MinIO на коммерческое Яндекс.Облако (Yandex Object Storage) без изменения единой строчки кода бэкенда — просто изменив `S3_ENDPOINT` в `.env`.</a:t>
             </a:r>
-            <a:endParaRPr lang="en-US" sz="1600" dirty="0"/>
+            <a:endParaRPr lang="en-US" sz="1800" dirty="0"/>
           </a:p>
           <a:p>
             <a:pPr algn="l" indent="0" marL="0">
               <a:buNone/>
             </a:pPr>
-            <a:endParaRPr lang="en-US" sz="1600" dirty="0"/>
+            <a:endParaRPr lang="en-US" sz="1800" dirty="0"/>
           </a:p>
           <a:p>
             <a:pPr algn="l" indent="0" marL="0">
               <a:buNone/>
             </a:pPr>
             <a:r>
-              <a:rPr lang="en-US" sz="1600" dirty="0">
+              <a:rPr lang="en-US" sz="1800" dirty="0">
                 <a:solidFill>
                   <a:srgbClr val="2D2D3A"/>
                 </a:solidFill>
@@ -3723,14 +3723,14 @@
               </a:rPr>
               <a:t>Масштабирование бэкенда:</a:t>
             </a:r>
-            <a:endParaRPr lang="en-US" sz="1600" dirty="0"/>
+            <a:endParaRPr lang="en-US" sz="1800" dirty="0"/>
           </a:p>
           <a:p>
             <a:pPr algn="l" indent="0" marL="0">
               <a:buNone/>
             </a:pPr>
             <a:r>
-              <a:rPr lang="en-US" sz="1600" dirty="0">
+              <a:rPr lang="en-US" sz="1800" dirty="0">
                 <a:solidFill>
                   <a:srgbClr val="2D2D3A"/>
                 </a:solidFill>
@@ -3740,7 +3740,7 @@
               </a:rPr>
               <a:t>Так как бэкенд спроектирован по принципу 'Stateless' (состояние сессии не хранится в памяти Node.js, а пишется в СУБД Postgres), мы можем запустить 5 параллельных контейнеров Express за балансировщиком Nginx для распределения нагрузки.</a:t>
             </a:r>
-            <a:endParaRPr lang="en-US" sz="1600" dirty="0"/>
+            <a:endParaRPr lang="en-US" sz="1800" dirty="0"/>
           </a:p>
         </p:txBody>
       </p:sp>
@@ -3874,7 +3874,7 @@
               <a:buNone/>
             </a:pPr>
             <a:r>
-              <a:rPr lang="en-US" sz="1200" b="1" dirty="0">
+              <a:rPr lang="en-US" sz="1400" b="1" dirty="0">
                 <a:solidFill>
                   <a:srgbClr val="1A1A2E"/>
                 </a:solidFill>
@@ -3884,7 +3884,7 @@
               </a:rPr>
               <a:t>Сбои сети и конфликты API</a:t>
             </a:r>
-            <a:endParaRPr lang="en-US" sz="1200" dirty="0"/>
+            <a:endParaRPr lang="en-US" sz="1400" dirty="0"/>
           </a:p>
         </p:txBody>
       </p:sp>
@@ -3913,7 +3913,7 @@
               <a:buNone/>
             </a:pPr>
             <a:r>
-              <a:rPr lang="en-US" sz="1600" dirty="0">
+              <a:rPr lang="en-US" sz="1800" dirty="0">
                 <a:solidFill>
                   <a:srgbClr val="2D2D3A"/>
                 </a:solidFill>
@@ -3923,14 +3923,14 @@
               </a:rPr>
               <a:t>Сбои сетевого подключения (Offline-First WS):</a:t>
             </a:r>
-            <a:endParaRPr lang="en-US" sz="1600" dirty="0"/>
+            <a:endParaRPr lang="en-US" sz="1800" dirty="0"/>
           </a:p>
           <a:p>
             <a:pPr algn="l" indent="0" marL="0">
               <a:buNone/>
             </a:pPr>
             <a:r>
-              <a:rPr lang="en-US" sz="1600" dirty="0">
+              <a:rPr lang="en-US" sz="1800" dirty="0">
                 <a:solidFill>
                   <a:srgbClr val="2D2D3A"/>
                 </a:solidFill>
@@ -3940,20 +3940,20 @@
               </a:rPr>
               <a:t>При отсутствии интернета во время отправки сообщений по WebSocket, чат-клиент временно сохраняет сообщение в LocalStorage и включает статус 'Ожидание сети'. После реконнекта сокета сообщения отправляются автоматически с сохранением исходного порядка.</a:t>
             </a:r>
-            <a:endParaRPr lang="en-US" sz="1600" dirty="0"/>
+            <a:endParaRPr lang="en-US" sz="1800" dirty="0"/>
           </a:p>
           <a:p>
             <a:pPr algn="l" indent="0" marL="0">
               <a:buNone/>
             </a:pPr>
-            <a:endParaRPr lang="en-US" sz="1600" dirty="0"/>
+            <a:endParaRPr lang="en-US" sz="1800" dirty="0"/>
           </a:p>
           <a:p>
             <a:pPr algn="l" indent="0" marL="0">
               <a:buNone/>
             </a:pPr>
             <a:r>
-              <a:rPr lang="en-US" sz="1600" dirty="0">
+              <a:rPr lang="en-US" sz="1800" dirty="0">
                 <a:solidFill>
                   <a:srgbClr val="2D2D3A"/>
                 </a:solidFill>
@@ -3963,14 +3963,14 @@
               </a:rPr>
               <a:t>Конфликты API (Optimistic Locking):</a:t>
             </a:r>
-            <a:endParaRPr lang="en-US" sz="1600" dirty="0"/>
+            <a:endParaRPr lang="en-US" sz="1800" dirty="0"/>
           </a:p>
           <a:p>
             <a:pPr algn="l" indent="0" marL="0">
               <a:buNone/>
             </a:pPr>
             <a:r>
-              <a:rPr lang="en-US" sz="1600" dirty="0">
+              <a:rPr lang="en-US" sz="1800" dirty="0">
                 <a:solidFill>
                   <a:srgbClr val="2D2D3A"/>
                 </a:solidFill>
@@ -3980,7 +3980,7 @@
               </a:rPr>
               <a:t>Если клиент и менеджер редактируют одно обращение через REST-интерфейс одновременно, бэкенд сверяет поле 'version'. Первая транзакция успешно фиксируется, а второй возвращается код ошибки 409 Conflict с предложением обновить форму.</a:t>
             </a:r>
-            <a:endParaRPr lang="en-US" sz="1600" dirty="0"/>
+            <a:endParaRPr lang="en-US" sz="1800" dirty="0"/>
           </a:p>
         </p:txBody>
       </p:sp>
@@ -4227,7 +4227,7 @@
               <a:buNone/>
             </a:pPr>
             <a:r>
-              <a:rPr lang="en-US" sz="1200" b="1" dirty="0">
+              <a:rPr lang="en-US" sz="1400" b="1" dirty="0">
                 <a:solidFill>
                   <a:srgbClr val="1A1A2E"/>
                 </a:solidFill>
@@ -4237,7 +4237,7 @@
               </a:rPr>
               <a:t>Постановка практической задачи</a:t>
             </a:r>
-            <a:endParaRPr lang="en-US" sz="1200" dirty="0"/>
+            <a:endParaRPr lang="en-US" sz="1400" dirty="0"/>
           </a:p>
         </p:txBody>
       </p:sp>
@@ -4266,7 +4266,7 @@
               <a:buNone/>
             </a:pPr>
             <a:r>
-              <a:rPr lang="en-US" sz="1600" dirty="0">
+              <a:rPr lang="en-US" sz="1800" dirty="0">
                 <a:solidFill>
                   <a:srgbClr val="2D2D3A"/>
                 </a:solidFill>
@@ -4276,20 +4276,20 @@
               </a:rPr>
               <a:t>• Обеспечить стабильное взаимодействие Frontend, Backend, двух баз PostgreSQL, MinIO и внешней системы 1С.</a:t>
             </a:r>
-            <a:endParaRPr lang="en-US" sz="1600" dirty="0"/>
+            <a:endParaRPr lang="en-US" sz="1800" dirty="0"/>
           </a:p>
           <a:p>
             <a:pPr algn="l" indent="0" marL="0">
               <a:buNone/>
             </a:pPr>
-            <a:endParaRPr lang="en-US" sz="1600" dirty="0"/>
+            <a:endParaRPr lang="en-US" sz="1800" dirty="0"/>
           </a:p>
           <a:p>
             <a:pPr algn="l" indent="0" marL="0">
               <a:buNone/>
             </a:pPr>
             <a:r>
-              <a:rPr lang="en-US" sz="1600" dirty="0">
+              <a:rPr lang="en-US" sz="1800" dirty="0">
                 <a:solidFill>
                   <a:srgbClr val="2D2D3A"/>
                 </a:solidFill>
@@ -4299,14 +4299,14 @@
               </a:rPr>
               <a:t>Конкретная задача моделирования:</a:t>
             </a:r>
-            <a:endParaRPr lang="en-US" sz="1600" dirty="0"/>
+            <a:endParaRPr lang="en-US" sz="1800" dirty="0"/>
           </a:p>
           <a:p>
             <a:pPr algn="l" indent="0" marL="0">
               <a:buNone/>
             </a:pPr>
             <a:r>
-              <a:rPr lang="en-US" sz="1600" dirty="0">
+              <a:rPr lang="en-US" sz="1800" dirty="0">
                 <a:solidFill>
                   <a:srgbClr val="2D2D3A"/>
                 </a:solidFill>
@@ -4316,7 +4316,7 @@
               </a:rPr>
               <a:t>• Описать интерфейсы (контракты) между всеми подсистемами для достижения слабой связанности, масштабируемости и отказоустойчивости.</a:t>
             </a:r>
-            <a:endParaRPr lang="en-US" sz="1600" dirty="0"/>
+            <a:endParaRPr lang="en-US" sz="1800" dirty="0"/>
           </a:p>
         </p:txBody>
       </p:sp>
@@ -4450,7 +4450,7 @@
               <a:buNone/>
             </a:pPr>
             <a:r>
-              <a:rPr lang="en-US" sz="1200" b="1" dirty="0">
+              <a:rPr lang="en-US" sz="1400" b="1" dirty="0">
                 <a:solidFill>
                   <a:srgbClr val="1A1A2E"/>
                 </a:solidFill>
@@ -4460,7 +4460,7 @@
               </a:rPr>
               <a:t>Понятие интерфейса-контракта и зачем его проектировать</a:t>
             </a:r>
-            <a:endParaRPr lang="en-US" sz="1200" dirty="0"/>
+            <a:endParaRPr lang="en-US" sz="1400" dirty="0"/>
           </a:p>
         </p:txBody>
       </p:sp>
@@ -4489,7 +4489,7 @@
               <a:buNone/>
             </a:pPr>
             <a:r>
-              <a:rPr lang="en-US" sz="1600" dirty="0">
+              <a:rPr lang="en-US" sz="1800" dirty="0">
                 <a:solidFill>
                   <a:srgbClr val="2D2D3A"/>
                 </a:solidFill>
@@ -4499,20 +4499,20 @@
               </a:rPr>
               <a:t>Интерфейс — это четко определенная граница взаимодействия (стык) между независимыми частями системы. Он выступает в роли контракта: одна сторона обязуется предоставить данные строго определенного формата, а вторая — принять их.</a:t>
             </a:r>
-            <a:endParaRPr lang="en-US" sz="1600" dirty="0"/>
+            <a:endParaRPr lang="en-US" sz="1800" dirty="0"/>
           </a:p>
           <a:p>
             <a:pPr algn="l" indent="0" marL="0">
               <a:buNone/>
             </a:pPr>
-            <a:endParaRPr lang="en-US" sz="1600" dirty="0"/>
+            <a:endParaRPr lang="en-US" sz="1800" dirty="0"/>
           </a:p>
           <a:p>
             <a:pPr algn="l" indent="0" marL="0">
               <a:buNone/>
             </a:pPr>
             <a:r>
-              <a:rPr lang="en-US" sz="1600" dirty="0">
+              <a:rPr lang="en-US" sz="1800" dirty="0">
                 <a:solidFill>
                   <a:srgbClr val="2D2D3A"/>
                 </a:solidFill>
@@ -4522,14 +4522,14 @@
               </a:rPr>
               <a:t>Зачем проектировать интерфейсы?</a:t>
             </a:r>
-            <a:endParaRPr lang="en-US" sz="1600" dirty="0"/>
+            <a:endParaRPr lang="en-US" sz="1800" dirty="0"/>
           </a:p>
           <a:p>
             <a:pPr algn="l" indent="0" marL="0">
               <a:buNone/>
             </a:pPr>
             <a:r>
-              <a:rPr lang="en-US" sz="1600" dirty="0">
+              <a:rPr lang="en-US" sz="1800" dirty="0">
                 <a:solidFill>
                   <a:srgbClr val="2D2D3A"/>
                 </a:solidFill>
@@ -4539,14 +4539,14 @@
               </a:rPr>
               <a:t>• Полная инкапсуляция: скрытие деталей реализации подсистемы.</a:t>
             </a:r>
-            <a:endParaRPr lang="en-US" sz="1600" dirty="0"/>
+            <a:endParaRPr lang="en-US" sz="1800" dirty="0"/>
           </a:p>
           <a:p>
             <a:pPr algn="l" indent="0" marL="0">
               <a:buNone/>
             </a:pPr>
             <a:r>
-              <a:rPr lang="en-US" sz="1600" dirty="0">
+              <a:rPr lang="en-US" sz="1800" dirty="0">
                 <a:solidFill>
                   <a:srgbClr val="2D2D3A"/>
                 </a:solidFill>
@@ -4556,14 +4556,14 @@
               </a:rPr>
               <a:t>• Слабая связанность: замена бэкенда не ломает верстку фронтенда.</a:t>
             </a:r>
-            <a:endParaRPr lang="en-US" sz="1600" dirty="0"/>
+            <a:endParaRPr lang="en-US" sz="1800" dirty="0"/>
           </a:p>
           <a:p>
             <a:pPr algn="l" indent="0" marL="0">
               <a:buNone/>
             </a:pPr>
             <a:r>
-              <a:rPr lang="en-US" sz="1600" dirty="0">
+              <a:rPr lang="en-US" sz="1800" dirty="0">
                 <a:solidFill>
                   <a:srgbClr val="2D2D3A"/>
                 </a:solidFill>
@@ -4573,7 +4573,7 @@
               </a:rPr>
               <a:t>• Параллельная разработка команд по заранее согласованным мокам.</a:t>
             </a:r>
-            <a:endParaRPr lang="en-US" sz="1600" dirty="0"/>
+            <a:endParaRPr lang="en-US" sz="1800" dirty="0"/>
           </a:p>
         </p:txBody>
       </p:sp>
@@ -4707,7 +4707,7 @@
               <a:buNone/>
             </a:pPr>
             <a:r>
-              <a:rPr lang="en-US" sz="1200" b="1" dirty="0">
+              <a:rPr lang="en-US" sz="1400" b="1" dirty="0">
                 <a:solidFill>
                   <a:srgbClr val="1A1A2E"/>
                 </a:solidFill>
@@ -4717,7 +4717,7 @@
               </a:rPr>
               <a:t>1. Web / Mobile Frontend</a:t>
             </a:r>
-            <a:endParaRPr lang="en-US" sz="1200" dirty="0"/>
+            <a:endParaRPr lang="en-US" sz="1400" dirty="0"/>
           </a:p>
         </p:txBody>
       </p:sp>
@@ -4746,7 +4746,7 @@
               <a:buNone/>
             </a:pPr>
             <a:r>
-              <a:rPr lang="en-US" sz="1200" dirty="0">
+              <a:rPr lang="en-US" sz="1400" dirty="0">
                 <a:solidFill>
                   <a:srgbClr val="2D2D3A"/>
                 </a:solidFill>
@@ -4756,13 +4756,237 @@
               </a:rPr>
               <a:t>Клиентская часть на React. Отправляет JSON-запросы на Backend API, отрисовывает UI, рендерит чат и загружает файлы.</a:t>
             </a:r>
-            <a:endParaRPr lang="en-US" sz="1200" dirty="0"/>
+            <a:endParaRPr lang="en-US" sz="1400" dirty="0"/>
           </a:p>
         </p:txBody>
       </p:sp>
       <p:sp>
         <p:nvSpPr>
           <p:cNvPr id="6" name="Shape 4"/>
+          <p:cNvSpPr/>
+          <p:nvPr/>
+        </p:nvSpPr>
+        <p:spPr>
+          <a:xfrm>
+            <a:off x="384048" y="2226564"/>
+            <a:ext cx="4096512" cy="1312164"/>
+          </a:xfrm>
+          <a:prstGeom prst="roundRect">
+            <a:avLst>
+              <a:gd name="adj" fmla="val 6969"/>
+            </a:avLst>
+          </a:prstGeom>
+          <a:solidFill>
+            <a:srgbClr val="D4EDDA"/>
+          </a:solidFill>
+          <a:ln w="12700">
+            <a:solidFill>
+              <a:srgbClr val="EFEAE3"/>
+            </a:solidFill>
+            <a:prstDash val="solid"/>
+          </a:ln>
+          <a:effectLst>
+            <a:outerShdw sx="100000" sy="100000" kx="0" ky="0" algn="bl" rotWithShape="0" blurRad="152400" dist="38100" dir="2700000">
+              <a:srgbClr val="000000">
+                <a:alpha val="12000"/>
+              </a:srgbClr>
+            </a:outerShdw>
+          </a:effectLst>
+        </p:spPr>
+      </p:sp>
+      <p:sp>
+        <p:nvSpPr>
+          <p:cNvPr id="7" name="Text 5"/>
+          <p:cNvSpPr/>
+          <p:nvPr/>
+        </p:nvSpPr>
+        <p:spPr>
+          <a:xfrm>
+            <a:off x="521208" y="2299716"/>
+            <a:ext cx="3822192" cy="292608"/>
+          </a:xfrm>
+          <a:prstGeom prst="rect">
+            <a:avLst/>
+          </a:prstGeom>
+          <a:noFill/>
+          <a:ln/>
+        </p:spPr>
+        <p:txBody>
+          <a:bodyPr wrap="square" rtlCol="0" anchor="ctr"/>
+          <a:lstStyle/>
+          <a:p>
+            <a:pPr indent="0" marL="0">
+              <a:buNone/>
+            </a:pPr>
+            <a:r>
+              <a:rPr lang="en-US" sz="1400" b="1" dirty="0">
+                <a:solidFill>
+                  <a:srgbClr val="1A1A2E"/>
+                </a:solidFill>
+                <a:latin typeface="Cambria" pitchFamily="34" charset="0"/>
+                <a:ea typeface="Cambria" pitchFamily="34" charset="-122"/>
+                <a:cs typeface="Cambria" pitchFamily="34" charset="-120"/>
+              </a:rPr>
+              <a:t>3. PostgreSQL Database</a:t>
+            </a:r>
+            <a:endParaRPr lang="en-US" sz="1400" dirty="0"/>
+          </a:p>
+        </p:txBody>
+      </p:sp>
+      <p:sp>
+        <p:nvSpPr>
+          <p:cNvPr id="8" name="Text 6"/>
+          <p:cNvSpPr/>
+          <p:nvPr/>
+        </p:nvSpPr>
+        <p:spPr>
+          <a:xfrm>
+            <a:off x="521208" y="2610612"/>
+            <a:ext cx="3822192" cy="854964"/>
+          </a:xfrm>
+          <a:prstGeom prst="rect">
+            <a:avLst/>
+          </a:prstGeom>
+          <a:noFill/>
+          <a:ln/>
+        </p:spPr>
+        <p:txBody>
+          <a:bodyPr wrap="square" rtlCol="0" anchor="t"/>
+          <a:lstStyle/>
+          <a:p>
+            <a:pPr algn="l" indent="0" marL="0">
+              <a:buNone/>
+            </a:pPr>
+            <a:r>
+              <a:rPr lang="en-US" sz="1400" dirty="0">
+                <a:solidFill>
+                  <a:srgbClr val="2D2D3A"/>
+                </a:solidFill>
+                <a:latin typeface="Times New Roman" pitchFamily="34" charset="0"/>
+                <a:ea typeface="Times New Roman" pitchFamily="34" charset="-122"/>
+                <a:cs typeface="Times New Roman" pitchFamily="34" charset="-120"/>
+              </a:rPr>
+              <a:t>Основная реляционная БД портала. Хранит учетные записи пользователей, сессии чата, логи синхронизации и тикеты.</a:t>
+            </a:r>
+            <a:endParaRPr lang="en-US" sz="1400" dirty="0"/>
+          </a:p>
+        </p:txBody>
+      </p:sp>
+      <p:sp>
+        <p:nvSpPr>
+          <p:cNvPr id="9" name="Shape 7"/>
+          <p:cNvSpPr/>
+          <p:nvPr/>
+        </p:nvSpPr>
+        <p:spPr>
+          <a:xfrm>
+            <a:off x="384048" y="3630168"/>
+            <a:ext cx="4096512" cy="1312164"/>
+          </a:xfrm>
+          <a:prstGeom prst="roundRect">
+            <a:avLst>
+              <a:gd name="adj" fmla="val 6969"/>
+            </a:avLst>
+          </a:prstGeom>
+          <a:solidFill>
+            <a:srgbClr val="F8F4F0"/>
+          </a:solidFill>
+          <a:ln w="12700">
+            <a:solidFill>
+              <a:srgbClr val="EFEAE3"/>
+            </a:solidFill>
+            <a:prstDash val="solid"/>
+          </a:ln>
+          <a:effectLst>
+            <a:outerShdw sx="100000" sy="100000" kx="0" ky="0" algn="bl" rotWithShape="0" blurRad="152400" dist="38100" dir="2700000">
+              <a:srgbClr val="000000">
+                <a:alpha val="12000"/>
+              </a:srgbClr>
+            </a:outerShdw>
+          </a:effectLst>
+        </p:spPr>
+      </p:sp>
+      <p:sp>
+        <p:nvSpPr>
+          <p:cNvPr id="10" name="Text 8"/>
+          <p:cNvSpPr/>
+          <p:nvPr/>
+        </p:nvSpPr>
+        <p:spPr>
+          <a:xfrm>
+            <a:off x="521208" y="3703320"/>
+            <a:ext cx="3822192" cy="292608"/>
+          </a:xfrm>
+          <a:prstGeom prst="rect">
+            <a:avLst/>
+          </a:prstGeom>
+          <a:noFill/>
+          <a:ln/>
+        </p:spPr>
+        <p:txBody>
+          <a:bodyPr wrap="square" rtlCol="0" anchor="ctr"/>
+          <a:lstStyle/>
+          <a:p>
+            <a:pPr indent="0" marL="0">
+              <a:buNone/>
+            </a:pPr>
+            <a:r>
+              <a:rPr lang="en-US" sz="1400" b="1" dirty="0">
+                <a:solidFill>
+                  <a:srgbClr val="1A1A2E"/>
+                </a:solidFill>
+                <a:latin typeface="Cambria" pitchFamily="34" charset="0"/>
+                <a:ea typeface="Cambria" pitchFamily="34" charset="-122"/>
+                <a:cs typeface="Cambria" pitchFamily="34" charset="-120"/>
+              </a:rPr>
+              <a:t>5. WebSocket Service</a:t>
+            </a:r>
+            <a:endParaRPr lang="en-US" sz="1400" dirty="0"/>
+          </a:p>
+        </p:txBody>
+      </p:sp>
+      <p:sp>
+        <p:nvSpPr>
+          <p:cNvPr id="11" name="Text 9"/>
+          <p:cNvSpPr/>
+          <p:nvPr/>
+        </p:nvSpPr>
+        <p:spPr>
+          <a:xfrm>
+            <a:off x="521208" y="4014216"/>
+            <a:ext cx="3822192" cy="854964"/>
+          </a:xfrm>
+          <a:prstGeom prst="rect">
+            <a:avLst/>
+          </a:prstGeom>
+          <a:noFill/>
+          <a:ln/>
+        </p:spPr>
+        <p:txBody>
+          <a:bodyPr wrap="square" rtlCol="0" anchor="t"/>
+          <a:lstStyle/>
+          <a:p>
+            <a:pPr algn="l" indent="0" marL="0">
+              <a:buNone/>
+            </a:pPr>
+            <a:r>
+              <a:rPr lang="en-US" sz="1400" dirty="0">
+                <a:solidFill>
+                  <a:srgbClr val="2D2D3A"/>
+                </a:solidFill>
+                <a:latin typeface="Times New Roman" pitchFamily="34" charset="0"/>
+                <a:ea typeface="Times New Roman" pitchFamily="34" charset="-122"/>
+                <a:cs typeface="Times New Roman" pitchFamily="34" charset="-120"/>
+              </a:rPr>
+              <a:t>Служба мгновенной доставки сообщений и нотификаций. Держит постоянное дуплексное сетевое соединение.</a:t>
+            </a:r>
+            <a:endParaRPr lang="en-US" sz="1400" dirty="0"/>
+          </a:p>
+        </p:txBody>
+      </p:sp>
+      <p:sp>
+        <p:nvSpPr>
+          <p:cNvPr id="12" name="Shape 10"/>
           <p:cNvSpPr/>
           <p:nvPr/>
         </p:nvSpPr>
@@ -4796,7 +5020,7 @@
       </p:sp>
       <p:sp>
         <p:nvSpPr>
-          <p:cNvPr id="7" name="Text 5"/>
+          <p:cNvPr id="13" name="Text 11"/>
           <p:cNvSpPr/>
           <p:nvPr/>
         </p:nvSpPr>
@@ -4819,7 +5043,7 @@
               <a:buNone/>
             </a:pPr>
             <a:r>
-              <a:rPr lang="en-US" sz="1200" b="1" dirty="0">
+              <a:rPr lang="en-US" sz="1400" b="1" dirty="0">
                 <a:solidFill>
                   <a:srgbClr val="1A1A2E"/>
                 </a:solidFill>
@@ -4829,13 +5053,13 @@
               </a:rPr>
               <a:t>2. Backend API</a:t>
             </a:r>
-            <a:endParaRPr lang="en-US" sz="1200" dirty="0"/>
+            <a:endParaRPr lang="en-US" sz="1400" dirty="0"/>
           </a:p>
         </p:txBody>
       </p:sp>
       <p:sp>
         <p:nvSpPr>
-          <p:cNvPr id="8" name="Text 6"/>
+          <p:cNvPr id="14" name="Text 12"/>
           <p:cNvSpPr/>
           <p:nvPr/>
         </p:nvSpPr>
@@ -4858,7 +5082,7 @@
               <a:buNone/>
             </a:pPr>
             <a:r>
-              <a:rPr lang="en-US" sz="1200" dirty="0">
+              <a:rPr lang="en-US" sz="1400" dirty="0">
                 <a:solidFill>
                   <a:srgbClr val="2D2D3A"/>
                 </a:solidFill>
@@ -4868,19 +5092,19 @@
               </a:rPr>
               <a:t>Серверное ядро на Node.js (Express). Отвечает за роутинг, валидацию данных, JWT-авторизацию и фоновые задачи.</a:t>
             </a:r>
-            <a:endParaRPr lang="en-US" sz="1200" dirty="0"/>
+            <a:endParaRPr lang="en-US" sz="1400" dirty="0"/>
           </a:p>
         </p:txBody>
       </p:sp>
       <p:sp>
         <p:nvSpPr>
-          <p:cNvPr id="9" name="Shape 7"/>
+          <p:cNvPr id="15" name="Shape 13"/>
           <p:cNvSpPr/>
           <p:nvPr/>
         </p:nvSpPr>
         <p:spPr>
           <a:xfrm>
-            <a:off x="384048" y="2226564"/>
+            <a:off x="4663440" y="2226564"/>
             <a:ext cx="4096512" cy="1312164"/>
           </a:xfrm>
           <a:prstGeom prst="roundRect">
@@ -4908,119 +5132,7 @@
       </p:sp>
       <p:sp>
         <p:nvSpPr>
-          <p:cNvPr id="10" name="Text 8"/>
-          <p:cNvSpPr/>
-          <p:nvPr/>
-        </p:nvSpPr>
-        <p:spPr>
-          <a:xfrm>
-            <a:off x="521208" y="2299716"/>
-            <a:ext cx="3822192" cy="292608"/>
-          </a:xfrm>
-          <a:prstGeom prst="rect">
-            <a:avLst/>
-          </a:prstGeom>
-          <a:noFill/>
-          <a:ln/>
-        </p:spPr>
-        <p:txBody>
-          <a:bodyPr wrap="square" rtlCol="0" anchor="ctr"/>
-          <a:lstStyle/>
-          <a:p>
-            <a:pPr indent="0" marL="0">
-              <a:buNone/>
-            </a:pPr>
-            <a:r>
-              <a:rPr lang="en-US" sz="1200" b="1" dirty="0">
-                <a:solidFill>
-                  <a:srgbClr val="1A1A2E"/>
-                </a:solidFill>
-                <a:latin typeface="Cambria" pitchFamily="34" charset="0"/>
-                <a:ea typeface="Cambria" pitchFamily="34" charset="-122"/>
-                <a:cs typeface="Cambria" pitchFamily="34" charset="-120"/>
-              </a:rPr>
-              <a:t>3. PostgreSQL Database</a:t>
-            </a:r>
-            <a:endParaRPr lang="en-US" sz="1200" dirty="0"/>
-          </a:p>
-        </p:txBody>
-      </p:sp>
-      <p:sp>
-        <p:nvSpPr>
-          <p:cNvPr id="11" name="Text 9"/>
-          <p:cNvSpPr/>
-          <p:nvPr/>
-        </p:nvSpPr>
-        <p:spPr>
-          <a:xfrm>
-            <a:off x="521208" y="2610612"/>
-            <a:ext cx="3822192" cy="854964"/>
-          </a:xfrm>
-          <a:prstGeom prst="rect">
-            <a:avLst/>
-          </a:prstGeom>
-          <a:noFill/>
-          <a:ln/>
-        </p:spPr>
-        <p:txBody>
-          <a:bodyPr wrap="square" rtlCol="0" anchor="t"/>
-          <a:lstStyle/>
-          <a:p>
-            <a:pPr algn="l" indent="0" marL="0">
-              <a:buNone/>
-            </a:pPr>
-            <a:r>
-              <a:rPr lang="en-US" sz="1200" dirty="0">
-                <a:solidFill>
-                  <a:srgbClr val="2D2D3A"/>
-                </a:solidFill>
-                <a:latin typeface="Times New Roman" pitchFamily="34" charset="0"/>
-                <a:ea typeface="Times New Roman" pitchFamily="34" charset="-122"/>
-                <a:cs typeface="Times New Roman" pitchFamily="34" charset="-120"/>
-              </a:rPr>
-              <a:t>Основная реляционная БД портала. Хранит учетные записи пользователей, сессии чата, логи синхронизации и тикеты.</a:t>
-            </a:r>
-            <a:endParaRPr lang="en-US" sz="1200" dirty="0"/>
-          </a:p>
-        </p:txBody>
-      </p:sp>
-      <p:sp>
-        <p:nvSpPr>
-          <p:cNvPr id="12" name="Shape 10"/>
-          <p:cNvSpPr/>
-          <p:nvPr/>
-        </p:nvSpPr>
-        <p:spPr>
-          <a:xfrm>
-            <a:off x="4663440" y="2226564"/>
-            <a:ext cx="4096512" cy="1312164"/>
-          </a:xfrm>
-          <a:prstGeom prst="roundRect">
-            <a:avLst>
-              <a:gd name="adj" fmla="val 6969"/>
-            </a:avLst>
-          </a:prstGeom>
-          <a:solidFill>
-            <a:srgbClr val="D4EDDA"/>
-          </a:solidFill>
-          <a:ln w="12700">
-            <a:solidFill>
-              <a:srgbClr val="EFEAE3"/>
-            </a:solidFill>
-            <a:prstDash val="solid"/>
-          </a:ln>
-          <a:effectLst>
-            <a:outerShdw sx="100000" sy="100000" kx="0" ky="0" algn="bl" rotWithShape="0" blurRad="152400" dist="38100" dir="2700000">
-              <a:srgbClr val="000000">
-                <a:alpha val="12000"/>
-              </a:srgbClr>
-            </a:outerShdw>
-          </a:effectLst>
-        </p:spPr>
-      </p:sp>
-      <p:sp>
-        <p:nvSpPr>
-          <p:cNvPr id="13" name="Text 11"/>
+          <p:cNvPr id="16" name="Text 14"/>
           <p:cNvSpPr/>
           <p:nvPr/>
         </p:nvSpPr>
@@ -5043,7 +5155,7 @@
               <a:buNone/>
             </a:pPr>
             <a:r>
-              <a:rPr lang="en-US" sz="1200" b="1" dirty="0">
+              <a:rPr lang="en-US" sz="1400" b="1" dirty="0">
                 <a:solidFill>
                   <a:srgbClr val="1A1A2E"/>
                 </a:solidFill>
@@ -5053,13 +5165,13 @@
               </a:rPr>
               <a:t>4. S3 Storage MinIO</a:t>
             </a:r>
-            <a:endParaRPr lang="en-US" sz="1200" dirty="0"/>
+            <a:endParaRPr lang="en-US" sz="1400" dirty="0"/>
           </a:p>
         </p:txBody>
       </p:sp>
       <p:sp>
         <p:nvSpPr>
-          <p:cNvPr id="14" name="Text 12"/>
+          <p:cNvPr id="17" name="Text 15"/>
           <p:cNvSpPr/>
           <p:nvPr/>
         </p:nvSpPr>
@@ -5082,7 +5194,7 @@
               <a:buNone/>
             </a:pPr>
             <a:r>
-              <a:rPr lang="en-US" sz="1200" dirty="0">
+              <a:rPr lang="en-US" sz="1400" dirty="0">
                 <a:solidFill>
                   <a:srgbClr val="2D2D3A"/>
                 </a:solidFill>
@@ -5092,119 +5204,7 @@
               </a:rPr>
               <a:t>Объектное хранилище для тяжелых вложений (скриншоты ошибок, базы данных 1С клиентов, логи, отчеты).</a:t>
             </a:r>
-            <a:endParaRPr lang="en-US" sz="1200" dirty="0"/>
-          </a:p>
-        </p:txBody>
-      </p:sp>
-      <p:sp>
-        <p:nvSpPr>
-          <p:cNvPr id="15" name="Shape 13"/>
-          <p:cNvSpPr/>
-          <p:nvPr/>
-        </p:nvSpPr>
-        <p:spPr>
-          <a:xfrm>
-            <a:off x="384048" y="3630168"/>
-            <a:ext cx="4096512" cy="1312164"/>
-          </a:xfrm>
-          <a:prstGeom prst="roundRect">
-            <a:avLst>
-              <a:gd name="adj" fmla="val 6969"/>
-            </a:avLst>
-          </a:prstGeom>
-          <a:solidFill>
-            <a:srgbClr val="F8F4F0"/>
-          </a:solidFill>
-          <a:ln w="12700">
-            <a:solidFill>
-              <a:srgbClr val="EFEAE3"/>
-            </a:solidFill>
-            <a:prstDash val="solid"/>
-          </a:ln>
-          <a:effectLst>
-            <a:outerShdw sx="100000" sy="100000" kx="0" ky="0" algn="bl" rotWithShape="0" blurRad="152400" dist="38100" dir="2700000">
-              <a:srgbClr val="000000">
-                <a:alpha val="12000"/>
-              </a:srgbClr>
-            </a:outerShdw>
-          </a:effectLst>
-        </p:spPr>
-      </p:sp>
-      <p:sp>
-        <p:nvSpPr>
-          <p:cNvPr id="16" name="Text 14"/>
-          <p:cNvSpPr/>
-          <p:nvPr/>
-        </p:nvSpPr>
-        <p:spPr>
-          <a:xfrm>
-            <a:off x="521208" y="3703320"/>
-            <a:ext cx="3822192" cy="292608"/>
-          </a:xfrm>
-          <a:prstGeom prst="rect">
-            <a:avLst/>
-          </a:prstGeom>
-          <a:noFill/>
-          <a:ln/>
-        </p:spPr>
-        <p:txBody>
-          <a:bodyPr wrap="square" rtlCol="0" anchor="ctr"/>
-          <a:lstStyle/>
-          <a:p>
-            <a:pPr indent="0" marL="0">
-              <a:buNone/>
-            </a:pPr>
-            <a:r>
-              <a:rPr lang="en-US" sz="1200" b="1" dirty="0">
-                <a:solidFill>
-                  <a:srgbClr val="1A1A2E"/>
-                </a:solidFill>
-                <a:latin typeface="Cambria" pitchFamily="34" charset="0"/>
-                <a:ea typeface="Cambria" pitchFamily="34" charset="-122"/>
-                <a:cs typeface="Cambria" pitchFamily="34" charset="-120"/>
-              </a:rPr>
-              <a:t>5. WebSocket Service</a:t>
-            </a:r>
-            <a:endParaRPr lang="en-US" sz="1200" dirty="0"/>
-          </a:p>
-        </p:txBody>
-      </p:sp>
-      <p:sp>
-        <p:nvSpPr>
-          <p:cNvPr id="17" name="Text 15"/>
-          <p:cNvSpPr/>
-          <p:nvPr/>
-        </p:nvSpPr>
-        <p:spPr>
-          <a:xfrm>
-            <a:off x="521208" y="4014216"/>
-            <a:ext cx="3822192" cy="854964"/>
-          </a:xfrm>
-          <a:prstGeom prst="rect">
-            <a:avLst/>
-          </a:prstGeom>
-          <a:noFill/>
-          <a:ln/>
-        </p:spPr>
-        <p:txBody>
-          <a:bodyPr wrap="square" rtlCol="0" anchor="t"/>
-          <a:lstStyle/>
-          <a:p>
-            <a:pPr algn="l" indent="0" marL="0">
-              <a:buNone/>
-            </a:pPr>
-            <a:r>
-              <a:rPr lang="en-US" sz="1200" dirty="0">
-                <a:solidFill>
-                  <a:srgbClr val="2D2D3A"/>
-                </a:solidFill>
-                <a:latin typeface="Times New Roman" pitchFamily="34" charset="0"/>
-                <a:ea typeface="Times New Roman" pitchFamily="34" charset="-122"/>
-                <a:cs typeface="Times New Roman" pitchFamily="34" charset="-120"/>
-              </a:rPr>
-              <a:t>Служба мгновенной доставки сообщений и нотификаций. Держит постоянное дуплексное сетевое соединение.</a:t>
-            </a:r>
-            <a:endParaRPr lang="en-US" sz="1200" dirty="0"/>
+            <a:endParaRPr lang="en-US" sz="1400" dirty="0"/>
           </a:p>
         </p:txBody>
       </p:sp>
@@ -5267,7 +5267,7 @@
               <a:buNone/>
             </a:pPr>
             <a:r>
-              <a:rPr lang="en-US" sz="1200" b="1" dirty="0">
+              <a:rPr lang="en-US" sz="1400" b="1" dirty="0">
                 <a:solidFill>
                   <a:srgbClr val="1A1A2E"/>
                 </a:solidFill>
@@ -5277,7 +5277,7 @@
               </a:rPr>
               <a:t>6. Sync &amp; 1C Simulator</a:t>
             </a:r>
-            <a:endParaRPr lang="en-US" sz="1200" dirty="0"/>
+            <a:endParaRPr lang="en-US" sz="1400" dirty="0"/>
           </a:p>
         </p:txBody>
       </p:sp>
@@ -5306,7 +5306,7 @@
               <a:buNone/>
             </a:pPr>
             <a:r>
-              <a:rPr lang="en-US" sz="1200" dirty="0">
+              <a:rPr lang="en-US" sz="1400" dirty="0">
                 <a:solidFill>
                   <a:srgbClr val="2D2D3A"/>
                 </a:solidFill>
@@ -5316,7 +5316,7 @@
               </a:rPr>
               <a:t>Внешняя база-реплика и фоновые процессы обмена, симулирующие учетный контур 1С на предприятии.</a:t>
             </a:r>
-            <a:endParaRPr lang="en-US" sz="1200" dirty="0"/>
+            <a:endParaRPr lang="en-US" sz="1400" dirty="0"/>
           </a:p>
         </p:txBody>
       </p:sp>
@@ -5428,7 +5428,7 @@
                         <a:buNone/>
                       </a:pPr>
                       <a:r>
-                        <a:rPr lang="en-US" sz="1200" b="1" dirty="0">
+                        <a:rPr lang="en-US" sz="1300" b="1" dirty="0">
                           <a:solidFill>
                             <a:srgbClr val="FFFFFF"/>
                           </a:solidFill>
@@ -5438,7 +5438,7 @@
                         </a:rPr>
                         <a:t>Пара подсистем</a:t>
                       </a:r>
-                      <a:endParaRPr lang="en-US" sz="1200" dirty="0">
+                      <a:endParaRPr lang="en-US" sz="1300" dirty="0">
                         <a:latin typeface="Times New Roman" charset="0"/>
                         <a:ea typeface="Times New Roman" charset="0"/>
                         <a:cs typeface="Times New Roman" charset="0"/>
@@ -5496,7 +5496,7 @@
                         <a:buNone/>
                       </a:pPr>
                       <a:r>
-                        <a:rPr lang="en-US" sz="1200" b="1" dirty="0">
+                        <a:rPr lang="en-US" sz="1300" b="1" dirty="0">
                           <a:solidFill>
                             <a:srgbClr val="FFFFFF"/>
                           </a:solidFill>
@@ -5506,7 +5506,7 @@
                         </a:rPr>
                         <a:t>Протокол / Стык</a:t>
                       </a:r>
-                      <a:endParaRPr lang="en-US" sz="1200" dirty="0">
+                      <a:endParaRPr lang="en-US" sz="1300" dirty="0">
                         <a:latin typeface="Times New Roman" charset="0"/>
                         <a:ea typeface="Times New Roman" charset="0"/>
                         <a:cs typeface="Times New Roman" charset="0"/>
@@ -5564,7 +5564,7 @@
                         <a:buNone/>
                       </a:pPr>
                       <a:r>
-                        <a:rPr lang="en-US" sz="1200" b="1" dirty="0">
+                        <a:rPr lang="en-US" sz="1300" b="1" dirty="0">
                           <a:solidFill>
                             <a:srgbClr val="FFFFFF"/>
                           </a:solidFill>
@@ -5574,7 +5574,7 @@
                         </a:rPr>
                         <a:t>Характер передачи данных</a:t>
                       </a:r>
-                      <a:endParaRPr lang="en-US" sz="1200" dirty="0">
+                      <a:endParaRPr lang="en-US" sz="1300" dirty="0">
                         <a:latin typeface="Times New Roman" charset="0"/>
                         <a:ea typeface="Times New Roman" charset="0"/>
                         <a:cs typeface="Times New Roman" charset="0"/>
@@ -5634,7 +5634,7 @@
                         <a:buNone/>
                       </a:pPr>
                       <a:r>
-                        <a:rPr lang="en-US" sz="1200" dirty="0">
+                        <a:rPr lang="en-US" sz="1300" dirty="0">
                           <a:solidFill>
                             <a:srgbClr val="2D2D3A"/>
                           </a:solidFill>
@@ -5644,7 +5644,7 @@
                         </a:rPr>
                         <a:t>Frontend ↔ Backend API</a:t>
                       </a:r>
-                      <a:endParaRPr lang="en-US" sz="1200" dirty="0">
+                      <a:endParaRPr lang="en-US" sz="1300" dirty="0">
                         <a:latin typeface="Times New Roman" charset="0"/>
                         <a:ea typeface="Times New Roman" charset="0"/>
                         <a:cs typeface="Times New Roman" charset="0"/>
@@ -5702,7 +5702,7 @@
                         <a:buNone/>
                       </a:pPr>
                       <a:r>
-                        <a:rPr lang="en-US" sz="1200" dirty="0">
+                        <a:rPr lang="en-US" sz="1300" dirty="0">
                           <a:solidFill>
                             <a:srgbClr val="2D2D3A"/>
                           </a:solidFill>
@@ -5712,7 +5712,7 @@
                         </a:rPr>
                         <a:t>REST API (HTTP, JSON)</a:t>
                       </a:r>
-                      <a:endParaRPr lang="en-US" sz="1200" dirty="0">
+                      <a:endParaRPr lang="en-US" sz="1300" dirty="0">
                         <a:latin typeface="Times New Roman" charset="0"/>
                         <a:ea typeface="Times New Roman" charset="0"/>
                         <a:cs typeface="Times New Roman" charset="0"/>
@@ -5770,7 +5770,7 @@
                         <a:buNone/>
                       </a:pPr>
                       <a:r>
-                        <a:rPr lang="en-US" sz="1200" dirty="0">
+                        <a:rPr lang="en-US" sz="1300" dirty="0">
                           <a:solidFill>
                             <a:srgbClr val="2D2D3A"/>
                           </a:solidFill>
@@ -5780,7 +5780,7 @@
                         </a:rPr>
                         <a:t>Синхронный (запрос-ответ)</a:t>
                       </a:r>
-                      <a:endParaRPr lang="en-US" sz="1200" dirty="0">
+                      <a:endParaRPr lang="en-US" sz="1300" dirty="0">
                         <a:latin typeface="Times New Roman" charset="0"/>
                         <a:ea typeface="Times New Roman" charset="0"/>
                         <a:cs typeface="Times New Roman" charset="0"/>
@@ -5840,7 +5840,7 @@
                         <a:buNone/>
                       </a:pPr>
                       <a:r>
-                        <a:rPr lang="en-US" sz="1200" dirty="0">
+                        <a:rPr lang="en-US" sz="1300" dirty="0">
                           <a:solidFill>
                             <a:srgbClr val="2D2D3A"/>
                           </a:solidFill>
@@ -5850,7 +5850,7 @@
                         </a:rPr>
                         <a:t>Frontend ↔ WebSocket</a:t>
                       </a:r>
-                      <a:endParaRPr lang="en-US" sz="1200" dirty="0">
+                      <a:endParaRPr lang="en-US" sz="1300" dirty="0">
                         <a:latin typeface="Times New Roman" charset="0"/>
                         <a:ea typeface="Times New Roman" charset="0"/>
                         <a:cs typeface="Times New Roman" charset="0"/>
@@ -5908,7 +5908,7 @@
                         <a:buNone/>
                       </a:pPr>
                       <a:r>
-                        <a:rPr lang="en-US" sz="1200" dirty="0">
+                        <a:rPr lang="en-US" sz="1300" dirty="0">
                           <a:solidFill>
                             <a:srgbClr val="2D2D3A"/>
                           </a:solidFill>
@@ -5918,7 +5918,7 @@
                         </a:rPr>
                         <a:t>WebSocket (WS, JSON)</a:t>
                       </a:r>
-                      <a:endParaRPr lang="en-US" sz="1200" dirty="0">
+                      <a:endParaRPr lang="en-US" sz="1300" dirty="0">
                         <a:latin typeface="Times New Roman" charset="0"/>
                         <a:ea typeface="Times New Roman" charset="0"/>
                         <a:cs typeface="Times New Roman" charset="0"/>
@@ -5976,7 +5976,7 @@
                         <a:buNone/>
                       </a:pPr>
                       <a:r>
-                        <a:rPr lang="en-US" sz="1200" dirty="0">
+                        <a:rPr lang="en-US" sz="1300" dirty="0">
                           <a:solidFill>
                             <a:srgbClr val="2D2D3A"/>
                           </a:solidFill>
@@ -5986,7 +5986,7 @@
                         </a:rPr>
                         <a:t>Асинхронный дуплексный (push)</a:t>
                       </a:r>
-                      <a:endParaRPr lang="en-US" sz="1200" dirty="0">
+                      <a:endParaRPr lang="en-US" sz="1300" dirty="0">
                         <a:latin typeface="Times New Roman" charset="0"/>
                         <a:ea typeface="Times New Roman" charset="0"/>
                         <a:cs typeface="Times New Roman" charset="0"/>
@@ -6046,7 +6046,7 @@
                         <a:buNone/>
                       </a:pPr>
                       <a:r>
-                        <a:rPr lang="en-US" sz="1200" dirty="0">
+                        <a:rPr lang="en-US" sz="1300" dirty="0">
                           <a:solidFill>
                             <a:srgbClr val="2D2D3A"/>
                           </a:solidFill>
@@ -6056,7 +6056,7 @@
                         </a:rPr>
                         <a:t>Backend ↔ PostgreSQL</a:t>
                       </a:r>
-                      <a:endParaRPr lang="en-US" sz="1200" dirty="0">
+                      <a:endParaRPr lang="en-US" sz="1300" dirty="0">
                         <a:latin typeface="Times New Roman" charset="0"/>
                         <a:ea typeface="Times New Roman" charset="0"/>
                         <a:cs typeface="Times New Roman" charset="0"/>
@@ -6114,7 +6114,7 @@
                         <a:buNone/>
                       </a:pPr>
                       <a:r>
-                        <a:rPr lang="en-US" sz="1200" dirty="0">
+                        <a:rPr lang="en-US" sz="1300" dirty="0">
                           <a:solidFill>
                             <a:srgbClr val="2D2D3A"/>
                           </a:solidFill>
@@ -6124,7 +6124,7 @@
                         </a:rPr>
                         <a:t>TCP / PostgreSQL Driver</a:t>
                       </a:r>
-                      <a:endParaRPr lang="en-US" sz="1200" dirty="0">
+                      <a:endParaRPr lang="en-US" sz="1300" dirty="0">
                         <a:latin typeface="Times New Roman" charset="0"/>
                         <a:ea typeface="Times New Roman" charset="0"/>
                         <a:cs typeface="Times New Roman" charset="0"/>
@@ -6182,7 +6182,7 @@
                         <a:buNone/>
                       </a:pPr>
                       <a:r>
-                        <a:rPr lang="en-US" sz="1200" dirty="0">
+                        <a:rPr lang="en-US" sz="1300" dirty="0">
                           <a:solidFill>
                             <a:srgbClr val="2D2D3A"/>
                           </a:solidFill>
@@ -6192,7 +6192,7 @@
                         </a:rPr>
                         <a:t>Синхронный пул соединений</a:t>
                       </a:r>
-                      <a:endParaRPr lang="en-US" sz="1200" dirty="0">
+                      <a:endParaRPr lang="en-US" sz="1300" dirty="0">
                         <a:latin typeface="Times New Roman" charset="0"/>
                         <a:ea typeface="Times New Roman" charset="0"/>
                         <a:cs typeface="Times New Roman" charset="0"/>
@@ -6252,7 +6252,7 @@
                         <a:buNone/>
                       </a:pPr>
                       <a:r>
-                        <a:rPr lang="en-US" sz="1200" dirty="0">
+                        <a:rPr lang="en-US" sz="1300" dirty="0">
                           <a:solidFill>
                             <a:srgbClr val="2D2D3A"/>
                           </a:solidFill>
@@ -6262,7 +6262,7 @@
                         </a:rPr>
                         <a:t>Backend ↔ S3 MinIO</a:t>
                       </a:r>
-                      <a:endParaRPr lang="en-US" sz="1200" dirty="0">
+                      <a:endParaRPr lang="en-US" sz="1300" dirty="0">
                         <a:latin typeface="Times New Roman" charset="0"/>
                         <a:ea typeface="Times New Roman" charset="0"/>
                         <a:cs typeface="Times New Roman" charset="0"/>
@@ -6320,7 +6320,7 @@
                         <a:buNone/>
                       </a:pPr>
                       <a:r>
-                        <a:rPr lang="en-US" sz="1200" dirty="0">
+                        <a:rPr lang="en-US" sz="1300" dirty="0">
                           <a:solidFill>
                             <a:srgbClr val="2D2D3A"/>
                           </a:solidFill>
@@ -6330,7 +6330,7 @@
                         </a:rPr>
                         <a:t>AWS SDK S3 API</a:t>
                       </a:r>
-                      <a:endParaRPr lang="en-US" sz="1200" dirty="0">
+                      <a:endParaRPr lang="en-US" sz="1300" dirty="0">
                         <a:latin typeface="Times New Roman" charset="0"/>
                         <a:ea typeface="Times New Roman" charset="0"/>
                         <a:cs typeface="Times New Roman" charset="0"/>
@@ -6388,7 +6388,7 @@
                         <a:buNone/>
                       </a:pPr>
                       <a:r>
-                        <a:rPr lang="en-US" sz="1200" dirty="0">
+                        <a:rPr lang="en-US" sz="1300" dirty="0">
                           <a:solidFill>
                             <a:srgbClr val="2D2D3A"/>
                           </a:solidFill>
@@ -6398,7 +6398,7 @@
                         </a:rPr>
                         <a:t>Синхронный (запросы presigned URLs)</a:t>
                       </a:r>
-                      <a:endParaRPr lang="en-US" sz="1200" dirty="0">
+                      <a:endParaRPr lang="en-US" sz="1300" dirty="0">
                         <a:latin typeface="Times New Roman" charset="0"/>
                         <a:ea typeface="Times New Roman" charset="0"/>
                         <a:cs typeface="Times New Roman" charset="0"/>
@@ -6458,7 +6458,7 @@
                         <a:buNone/>
                       </a:pPr>
                       <a:r>
-                        <a:rPr lang="en-US" sz="1200" dirty="0">
+                        <a:rPr lang="en-US" sz="1300" dirty="0">
                           <a:solidFill>
                             <a:srgbClr val="2D2D3A"/>
                           </a:solidFill>
@@ -6468,7 +6468,7 @@
                         </a:rPr>
                         <a:t>Frontend ↔ S3 MinIO</a:t>
                       </a:r>
-                      <a:endParaRPr lang="en-US" sz="1200" dirty="0">
+                      <a:endParaRPr lang="en-US" sz="1300" dirty="0">
                         <a:latin typeface="Times New Roman" charset="0"/>
                         <a:ea typeface="Times New Roman" charset="0"/>
                         <a:cs typeface="Times New Roman" charset="0"/>
@@ -6526,7 +6526,7 @@
                         <a:buNone/>
                       </a:pPr>
                       <a:r>
-                        <a:rPr lang="en-US" sz="1200" dirty="0">
+                        <a:rPr lang="en-US" sz="1300" dirty="0">
                           <a:solidFill>
                             <a:srgbClr val="2D2D3A"/>
                           </a:solidFill>
@@ -6536,7 +6536,7 @@
                         </a:rPr>
                         <a:t>HTTP PUT / Direct binary</a:t>
                       </a:r>
-                      <a:endParaRPr lang="en-US" sz="1200" dirty="0">
+                      <a:endParaRPr lang="en-US" sz="1300" dirty="0">
                         <a:latin typeface="Times New Roman" charset="0"/>
                         <a:ea typeface="Times New Roman" charset="0"/>
                         <a:cs typeface="Times New Roman" charset="0"/>
@@ -6594,7 +6594,7 @@
                         <a:buNone/>
                       </a:pPr>
                       <a:r>
-                        <a:rPr lang="en-US" sz="1200" dirty="0">
+                        <a:rPr lang="en-US" sz="1300" dirty="0">
                           <a:solidFill>
                             <a:srgbClr val="2D2D3A"/>
                           </a:solidFill>
@@ -6604,7 +6604,7 @@
                         </a:rPr>
                         <a:t>Прямая бинарная загрузка в обход API</a:t>
                       </a:r>
-                      <a:endParaRPr lang="en-US" sz="1200" dirty="0">
+                      <a:endParaRPr lang="en-US" sz="1300" dirty="0">
                         <a:latin typeface="Times New Roman" charset="0"/>
                         <a:ea typeface="Times New Roman" charset="0"/>
                         <a:cs typeface="Times New Roman" charset="0"/>
@@ -6664,7 +6664,7 @@
                         <a:buNone/>
                       </a:pPr>
                       <a:r>
-                        <a:rPr lang="en-US" sz="1200" dirty="0">
+                        <a:rPr lang="en-US" sz="1300" dirty="0">
                           <a:solidFill>
                             <a:srgbClr val="2D2D3A"/>
                           </a:solidFill>
@@ -6674,7 +6674,7 @@
                         </a:rPr>
                         <a:t>Backend ↔ 1C Replica</a:t>
                       </a:r>
-                      <a:endParaRPr lang="en-US" sz="1200" dirty="0">
+                      <a:endParaRPr lang="en-US" sz="1300" dirty="0">
                         <a:latin typeface="Times New Roman" charset="0"/>
                         <a:ea typeface="Times New Roman" charset="0"/>
                         <a:cs typeface="Times New Roman" charset="0"/>
@@ -6732,7 +6732,7 @@
                         <a:buNone/>
                       </a:pPr>
                       <a:r>
-                        <a:rPr lang="en-US" sz="1200" dirty="0">
+                        <a:rPr lang="en-US" sz="1300" dirty="0">
                           <a:solidFill>
                             <a:srgbClr val="2D2D3A"/>
                           </a:solidFill>
@@ -6742,7 +6742,7 @@
                         </a:rPr>
                         <a:t>PostgreSQL / pg Client</a:t>
                       </a:r>
-                      <a:endParaRPr lang="en-US" sz="1200" dirty="0">
+                      <a:endParaRPr lang="en-US" sz="1300" dirty="0">
                         <a:latin typeface="Times New Roman" charset="0"/>
                         <a:ea typeface="Times New Roman" charset="0"/>
                         <a:cs typeface="Times New Roman" charset="0"/>
@@ -6800,7 +6800,7 @@
                         <a:buNone/>
                       </a:pPr>
                       <a:r>
-                        <a:rPr lang="en-US" sz="1200" dirty="0">
+                        <a:rPr lang="en-US" sz="1300" dirty="0">
                           <a:solidFill>
                             <a:srgbClr val="2D2D3A"/>
                           </a:solidFill>
@@ -6810,7 +6810,7 @@
                         </a:rPr>
                         <a:t>Асинхронная очередь (Outbox pattern)</a:t>
                       </a:r>
-                      <a:endParaRPr lang="en-US" sz="1200" dirty="0">
+                      <a:endParaRPr lang="en-US" sz="1300" dirty="0">
                         <a:latin typeface="Times New Roman" charset="0"/>
                         <a:ea typeface="Times New Roman" charset="0"/>
                         <a:cs typeface="Times New Roman" charset="0"/>
@@ -6987,28 +6987,28 @@
               <a:buNone/>
             </a:pPr>
             <a:r>
-              <a:rPr lang="en-US" sz="1100" b="1" dirty="0">
+              <a:rPr lang="en-US" sz="1300" b="1" dirty="0">
                 <a:solidFill>
                   <a:srgbClr val="1A1A2E"/>
                 </a:solidFill>
               </a:rPr>
               <a:t>Web / Mobile Client</a:t>
             </a:r>
-            <a:endParaRPr lang="en-US" sz="1100" dirty="0"/>
+            <a:endParaRPr lang="en-US" sz="1300" dirty="0"/>
           </a:p>
           <a:p>
             <a:pPr algn="ctr" indent="0" marL="0">
               <a:buNone/>
             </a:pPr>
             <a:r>
-              <a:rPr lang="en-US" sz="1100" b="1" dirty="0">
+              <a:rPr lang="en-US" sz="1300" b="1" dirty="0">
                 <a:solidFill>
                   <a:srgbClr val="1A1A2E"/>
                 </a:solidFill>
               </a:rPr>
               <a:t>(Frontend)</a:t>
             </a:r>
-            <a:endParaRPr lang="en-US" sz="1100" dirty="0"/>
+            <a:endParaRPr lang="en-US" sz="1300" dirty="0"/>
           </a:p>
         </p:txBody>
       </p:sp>
@@ -7064,28 +7064,28 @@
               <a:buNone/>
             </a:pPr>
             <a:r>
-              <a:rPr lang="en-US" sz="1100" b="1" dirty="0">
+              <a:rPr lang="en-US" sz="1300" b="1" dirty="0">
                 <a:solidFill>
                   <a:srgbClr val="1A1A2E"/>
                 </a:solidFill>
               </a:rPr>
               <a:t>Backend API</a:t>
             </a:r>
-            <a:endParaRPr lang="en-US" sz="1100" dirty="0"/>
+            <a:endParaRPr lang="en-US" sz="1300" dirty="0"/>
           </a:p>
           <a:p>
             <a:pPr algn="ctr" indent="0" marL="0">
               <a:buNone/>
             </a:pPr>
             <a:r>
-              <a:rPr lang="en-US" sz="1100" b="1" dirty="0">
+              <a:rPr lang="en-US" sz="1300" b="1" dirty="0">
                 <a:solidFill>
                   <a:srgbClr val="1A1A2E"/>
                 </a:solidFill>
               </a:rPr>
               <a:t>(Node.js + Express)</a:t>
             </a:r>
-            <a:endParaRPr lang="en-US" sz="1100" dirty="0"/>
+            <a:endParaRPr lang="en-US" sz="1300" dirty="0"/>
           </a:p>
         </p:txBody>
       </p:sp>
@@ -7141,28 +7141,28 @@
               <a:buNone/>
             </a:pPr>
             <a:r>
-              <a:rPr lang="en-US" sz="1100" b="1" dirty="0">
+              <a:rPr lang="en-US" sz="1300" b="1" dirty="0">
                 <a:solidFill>
                   <a:srgbClr val="1A1A2E"/>
                 </a:solidFill>
               </a:rPr>
               <a:t>Internal DB</a:t>
             </a:r>
-            <a:endParaRPr lang="en-US" sz="1100" dirty="0"/>
+            <a:endParaRPr lang="en-US" sz="1300" dirty="0"/>
           </a:p>
           <a:p>
             <a:pPr algn="ctr" indent="0" marL="0">
               <a:buNone/>
             </a:pPr>
             <a:r>
-              <a:rPr lang="en-US" sz="1100" b="1" dirty="0">
+              <a:rPr lang="en-US" sz="1300" b="1" dirty="0">
                 <a:solidFill>
                   <a:srgbClr val="1A1A2E"/>
                 </a:solidFill>
               </a:rPr>
               <a:t>(PostgreSQL)</a:t>
             </a:r>
-            <a:endParaRPr lang="en-US" sz="1100" dirty="0"/>
+            <a:endParaRPr lang="en-US" sz="1300" dirty="0"/>
           </a:p>
         </p:txBody>
       </p:sp>
@@ -7218,28 +7218,28 @@
               <a:buNone/>
             </a:pPr>
             <a:r>
-              <a:rPr lang="en-US" sz="1100" b="1" dirty="0">
+              <a:rPr lang="en-US" sz="1300" b="1" dirty="0">
                 <a:solidFill>
                   <a:srgbClr val="1A1A2E"/>
                 </a:solidFill>
               </a:rPr>
               <a:t>S3 Storage</a:t>
             </a:r>
-            <a:endParaRPr lang="en-US" sz="1100" dirty="0"/>
+            <a:endParaRPr lang="en-US" sz="1300" dirty="0"/>
           </a:p>
           <a:p>
             <a:pPr algn="ctr" indent="0" marL="0">
               <a:buNone/>
             </a:pPr>
             <a:r>
-              <a:rPr lang="en-US" sz="1100" b="1" dirty="0">
+              <a:rPr lang="en-US" sz="1300" b="1" dirty="0">
                 <a:solidFill>
                   <a:srgbClr val="1A1A2E"/>
                 </a:solidFill>
               </a:rPr>
               <a:t>(MinIO)</a:t>
             </a:r>
-            <a:endParaRPr lang="en-US" sz="1100" dirty="0"/>
+            <a:endParaRPr lang="en-US" sz="1300" dirty="0"/>
           </a:p>
         </p:txBody>
       </p:sp>
@@ -7295,28 +7295,28 @@
               <a:buNone/>
             </a:pPr>
             <a:r>
-              <a:rPr lang="en-US" sz="1100" b="1" dirty="0">
+              <a:rPr lang="en-US" sz="1300" b="1" dirty="0">
                 <a:solidFill>
                   <a:srgbClr val="1A1A2E"/>
                 </a:solidFill>
               </a:rPr>
               <a:t>Sync Service</a:t>
             </a:r>
-            <a:endParaRPr lang="en-US" sz="1100" dirty="0"/>
+            <a:endParaRPr lang="en-US" sz="1300" dirty="0"/>
           </a:p>
           <a:p>
             <a:pPr algn="ctr" indent="0" marL="0">
               <a:buNone/>
             </a:pPr>
             <a:r>
-              <a:rPr lang="en-US" sz="1100" b="1" dirty="0">
+              <a:rPr lang="en-US" sz="1300" b="1" dirty="0">
                 <a:solidFill>
                   <a:srgbClr val="1A1A2E"/>
                 </a:solidFill>
               </a:rPr>
               <a:t>(Inbound/Outbox)</a:t>
             </a:r>
-            <a:endParaRPr lang="en-US" sz="1100" dirty="0"/>
+            <a:endParaRPr lang="en-US" sz="1300" dirty="0"/>
           </a:p>
         </p:txBody>
       </p:sp>
@@ -7372,28 +7372,28 @@
               <a:buNone/>
             </a:pPr>
             <a:r>
-              <a:rPr lang="en-US" sz="1100" b="1" dirty="0">
+              <a:rPr lang="en-US" sz="1300" b="1" dirty="0">
                 <a:solidFill>
                   <a:srgbClr val="1A1A2E"/>
                 </a:solidFill>
               </a:rPr>
               <a:t>External DB</a:t>
             </a:r>
-            <a:endParaRPr lang="en-US" sz="1100" dirty="0"/>
+            <a:endParaRPr lang="en-US" sz="1300" dirty="0"/>
           </a:p>
           <a:p>
             <a:pPr algn="ctr" indent="0" marL="0">
               <a:buNone/>
             </a:pPr>
             <a:r>
-              <a:rPr lang="en-US" sz="1100" b="1" dirty="0">
+              <a:rPr lang="en-US" sz="1300" b="1" dirty="0">
                 <a:solidFill>
                   <a:srgbClr val="1A1A2E"/>
                 </a:solidFill>
               </a:rPr>
               <a:t>(1C Simulation)</a:t>
             </a:r>
-            <a:endParaRPr lang="en-US" sz="1100" dirty="0"/>
+            <a:endParaRPr lang="en-US" sz="1300" dirty="0"/>
           </a:p>
         </p:txBody>
       </p:sp>
@@ -7621,7 +7621,7 @@
                         <a:buNone/>
                       </a:pPr>
                       <a:r>
-                        <a:rPr lang="en-US" sz="1100" b="1" dirty="0">
+                        <a:rPr lang="en-US" sz="1300" b="1" dirty="0">
                           <a:solidFill>
                             <a:srgbClr val="FFFFFF"/>
                           </a:solidFill>
@@ -7631,7 +7631,7 @@
                         </a:rPr>
                         <a:t>Метод HTTP</a:t>
                       </a:r>
-                      <a:endParaRPr lang="en-US" sz="1100" dirty="0">
+                      <a:endParaRPr lang="en-US" sz="1300" dirty="0">
                         <a:latin typeface="Times New Roman" charset="0"/>
                         <a:ea typeface="Times New Roman" charset="0"/>
                         <a:cs typeface="Times New Roman" charset="0"/>
@@ -7689,7 +7689,7 @@
                         <a:buNone/>
                       </a:pPr>
                       <a:r>
-                        <a:rPr lang="en-US" sz="1100" b="1" dirty="0">
+                        <a:rPr lang="en-US" sz="1300" b="1" dirty="0">
                           <a:solidFill>
                             <a:srgbClr val="FFFFFF"/>
                           </a:solidFill>
@@ -7699,7 +7699,7 @@
                         </a:rPr>
                         <a:t>URL-путь</a:t>
                       </a:r>
-                      <a:endParaRPr lang="en-US" sz="1100" dirty="0">
+                      <a:endParaRPr lang="en-US" sz="1300" dirty="0">
                         <a:latin typeface="Times New Roman" charset="0"/>
                         <a:ea typeface="Times New Roman" charset="0"/>
                         <a:cs typeface="Times New Roman" charset="0"/>
@@ -7757,7 +7757,7 @@
                         <a:buNone/>
                       </a:pPr>
                       <a:r>
-                        <a:rPr lang="en-US" sz="1100" b="1" dirty="0">
+                        <a:rPr lang="en-US" sz="1300" b="1" dirty="0">
                           <a:solidFill>
                             <a:srgbClr val="FFFFFF"/>
                           </a:solidFill>
@@ -7767,7 +7767,7 @@
                         </a:rPr>
                         <a:t>Параметры</a:t>
                       </a:r>
-                      <a:endParaRPr lang="en-US" sz="1100" dirty="0">
+                      <a:endParaRPr lang="en-US" sz="1300" dirty="0">
                         <a:latin typeface="Times New Roman" charset="0"/>
                         <a:ea typeface="Times New Roman" charset="0"/>
                         <a:cs typeface="Times New Roman" charset="0"/>
@@ -7825,7 +7825,7 @@
                         <a:buNone/>
                       </a:pPr>
                       <a:r>
-                        <a:rPr lang="en-US" sz="1100" b="1" dirty="0">
+                        <a:rPr lang="en-US" sz="1300" b="1" dirty="0">
                           <a:solidFill>
                             <a:srgbClr val="FFFFFF"/>
                           </a:solidFill>
@@ -7835,7 +7835,7 @@
                         </a:rPr>
                         <a:t>Описание операции</a:t>
                       </a:r>
-                      <a:endParaRPr lang="en-US" sz="1100" dirty="0">
+                      <a:endParaRPr lang="en-US" sz="1300" dirty="0">
                         <a:latin typeface="Times New Roman" charset="0"/>
                         <a:ea typeface="Times New Roman" charset="0"/>
                         <a:cs typeface="Times New Roman" charset="0"/>
@@ -7895,7 +7895,7 @@
                         <a:buNone/>
                       </a:pPr>
                       <a:r>
-                        <a:rPr lang="en-US" sz="1100" dirty="0">
+                        <a:rPr lang="en-US" sz="1300" dirty="0">
                           <a:solidFill>
                             <a:srgbClr val="2D2D3A"/>
                           </a:solidFill>
@@ -7905,7 +7905,7 @@
                         </a:rPr>
                         <a:t>GET</a:t>
                       </a:r>
-                      <a:endParaRPr lang="en-US" sz="1100" dirty="0">
+                      <a:endParaRPr lang="en-US" sz="1300" dirty="0">
                         <a:latin typeface="Times New Roman" charset="0"/>
                         <a:ea typeface="Times New Roman" charset="0"/>
                         <a:cs typeface="Times New Roman" charset="0"/>
@@ -7963,7 +7963,7 @@
                         <a:buNone/>
                       </a:pPr>
                       <a:r>
-                        <a:rPr lang="en-US" sz="1100" dirty="0">
+                        <a:rPr lang="en-US" sz="1300" dirty="0">
                           <a:solidFill>
                             <a:srgbClr val="2D2D3A"/>
                           </a:solidFill>
@@ -7973,7 +7973,7 @@
                         </a:rPr>
                         <a:t>/api/tickets</a:t>
                       </a:r>
-                      <a:endParaRPr lang="en-US" sz="1100" dirty="0">
+                      <a:endParaRPr lang="en-US" sz="1300" dirty="0">
                         <a:latin typeface="Times New Roman" charset="0"/>
                         <a:ea typeface="Times New Roman" charset="0"/>
                         <a:cs typeface="Times New Roman" charset="0"/>
@@ -8031,7 +8031,7 @@
                         <a:buNone/>
                       </a:pPr>
                       <a:r>
-                        <a:rPr lang="en-US" sz="1100" dirty="0">
+                        <a:rPr lang="en-US" sz="1300" dirty="0">
                           <a:solidFill>
                             <a:srgbClr val="2D2D3A"/>
                           </a:solidFill>
@@ -8041,7 +8041,7 @@
                         </a:rPr>
                         <a:t>page, status, search</a:t>
                       </a:r>
-                      <a:endParaRPr lang="en-US" sz="1100" dirty="0">
+                      <a:endParaRPr lang="en-US" sz="1300" dirty="0">
                         <a:latin typeface="Times New Roman" charset="0"/>
                         <a:ea typeface="Times New Roman" charset="0"/>
                         <a:cs typeface="Times New Roman" charset="0"/>
@@ -8099,7 +8099,7 @@
                         <a:buNone/>
                       </a:pPr>
                       <a:r>
-                        <a:rPr lang="en-US" sz="1100" dirty="0">
+                        <a:rPr lang="en-US" sz="1300" dirty="0">
                           <a:solidFill>
                             <a:srgbClr val="2D2D3A"/>
                           </a:solidFill>
@@ -8109,7 +8109,7 @@
                         </a:rPr>
                         <a:t>Получить постраничный список обращений</a:t>
                       </a:r>
-                      <a:endParaRPr lang="en-US" sz="1100" dirty="0">
+                      <a:endParaRPr lang="en-US" sz="1300" dirty="0">
                         <a:latin typeface="Times New Roman" charset="0"/>
                         <a:ea typeface="Times New Roman" charset="0"/>
                         <a:cs typeface="Times New Roman" charset="0"/>
@@ -8169,7 +8169,7 @@
                         <a:buNone/>
                       </a:pPr>
                       <a:r>
-                        <a:rPr lang="en-US" sz="1100" dirty="0">
+                        <a:rPr lang="en-US" sz="1300" dirty="0">
                           <a:solidFill>
                             <a:srgbClr val="2D2D3A"/>
                           </a:solidFill>
@@ -8179,7 +8179,7 @@
                         </a:rPr>
                         <a:t>POST</a:t>
                       </a:r>
-                      <a:endParaRPr lang="en-US" sz="1100" dirty="0">
+                      <a:endParaRPr lang="en-US" sz="1300" dirty="0">
                         <a:latin typeface="Times New Roman" charset="0"/>
                         <a:ea typeface="Times New Roman" charset="0"/>
                         <a:cs typeface="Times New Roman" charset="0"/>
@@ -8237,7 +8237,7 @@
                         <a:buNone/>
                       </a:pPr>
                       <a:r>
-                        <a:rPr lang="en-US" sz="1100" dirty="0">
+                        <a:rPr lang="en-US" sz="1300" dirty="0">
                           <a:solidFill>
                             <a:srgbClr val="2D2D3A"/>
                           </a:solidFill>
@@ -8247,7 +8247,7 @@
                         </a:rPr>
                         <a:t>/api/tickets</a:t>
                       </a:r>
-                      <a:endParaRPr lang="en-US" sz="1100" dirty="0">
+                      <a:endParaRPr lang="en-US" sz="1300" dirty="0">
                         <a:latin typeface="Times New Roman" charset="0"/>
                         <a:ea typeface="Times New Roman" charset="0"/>
                         <a:cs typeface="Times New Roman" charset="0"/>
@@ -8305,7 +8305,7 @@
                         <a:buNone/>
                       </a:pPr>
                       <a:r>
-                        <a:rPr lang="en-US" sz="1100" dirty="0">
+                        <a:rPr lang="en-US" sz="1300" dirty="0">
                           <a:solidFill>
                             <a:srgbClr val="2D2D3A"/>
                           </a:solidFill>
@@ -8315,7 +8315,7 @@
                         </a:rPr>
                         <a:t>title, description</a:t>
                       </a:r>
-                      <a:endParaRPr lang="en-US" sz="1100" dirty="0">
+                      <a:endParaRPr lang="en-US" sz="1300" dirty="0">
                         <a:latin typeface="Times New Roman" charset="0"/>
                         <a:ea typeface="Times New Roman" charset="0"/>
                         <a:cs typeface="Times New Roman" charset="0"/>
@@ -8373,7 +8373,7 @@
                         <a:buNone/>
                       </a:pPr>
                       <a:r>
-                        <a:rPr lang="en-US" sz="1100" dirty="0">
+                        <a:rPr lang="en-US" sz="1300" dirty="0">
                           <a:solidFill>
                             <a:srgbClr val="2D2D3A"/>
                           </a:solidFill>
@@ -8383,7 +8383,7 @@
                         </a:rPr>
                         <a:t>Создать новое обращение клиента</a:t>
                       </a:r>
-                      <a:endParaRPr lang="en-US" sz="1100" dirty="0">
+                      <a:endParaRPr lang="en-US" sz="1300" dirty="0">
                         <a:latin typeface="Times New Roman" charset="0"/>
                         <a:ea typeface="Times New Roman" charset="0"/>
                         <a:cs typeface="Times New Roman" charset="0"/>
@@ -8443,7 +8443,7 @@
                         <a:buNone/>
                       </a:pPr>
                       <a:r>
-                        <a:rPr lang="en-US" sz="1100" dirty="0">
+                        <a:rPr lang="en-US" sz="1300" dirty="0">
                           <a:solidFill>
                             <a:srgbClr val="2D2D3A"/>
                           </a:solidFill>
@@ -8453,7 +8453,7 @@
                         </a:rPr>
                         <a:t>GET</a:t>
                       </a:r>
-                      <a:endParaRPr lang="en-US" sz="1100" dirty="0">
+                      <a:endParaRPr lang="en-US" sz="1300" dirty="0">
                         <a:latin typeface="Times New Roman" charset="0"/>
                         <a:ea typeface="Times New Roman" charset="0"/>
                         <a:cs typeface="Times New Roman" charset="0"/>
@@ -8511,7 +8511,7 @@
                         <a:buNone/>
                       </a:pPr>
                       <a:r>
-                        <a:rPr lang="en-US" sz="1100" dirty="0">
+                        <a:rPr lang="en-US" sz="1300" dirty="0">
                           <a:solidFill>
                             <a:srgbClr val="2D2D3A"/>
                           </a:solidFill>
@@ -8521,7 +8521,7 @@
                         </a:rPr>
                         <a:t>/api/tickets/:id</a:t>
                       </a:r>
-                      <a:endParaRPr lang="en-US" sz="1100" dirty="0">
+                      <a:endParaRPr lang="en-US" sz="1300" dirty="0">
                         <a:latin typeface="Times New Roman" charset="0"/>
                         <a:ea typeface="Times New Roman" charset="0"/>
                         <a:cs typeface="Times New Roman" charset="0"/>
@@ -8579,7 +8579,7 @@
                         <a:buNone/>
                       </a:pPr>
                       <a:r>
-                        <a:rPr lang="en-US" sz="1100" dirty="0">
+                        <a:rPr lang="en-US" sz="1300" dirty="0">
                           <a:solidFill>
                             <a:srgbClr val="2D2D3A"/>
                           </a:solidFill>
@@ -8589,7 +8589,7 @@
                         </a:rPr>
                         <a:t>id (uuid)</a:t>
                       </a:r>
-                      <a:endParaRPr lang="en-US" sz="1100" dirty="0">
+                      <a:endParaRPr lang="en-US" sz="1300" dirty="0">
                         <a:latin typeface="Times New Roman" charset="0"/>
                         <a:ea typeface="Times New Roman" charset="0"/>
                         <a:cs typeface="Times New Roman" charset="0"/>
@@ -8647,7 +8647,7 @@
                         <a:buNone/>
                       </a:pPr>
                       <a:r>
-                        <a:rPr lang="en-US" sz="1100" dirty="0">
+                        <a:rPr lang="en-US" sz="1300" dirty="0">
                           <a:solidFill>
                             <a:srgbClr val="2D2D3A"/>
                           </a:solidFill>
@@ -8657,7 +8657,7 @@
                         </a:rPr>
                         <a:t>Получить полную карточку обращения</a:t>
                       </a:r>
-                      <a:endParaRPr lang="en-US" sz="1100" dirty="0">
+                      <a:endParaRPr lang="en-US" sz="1300" dirty="0">
                         <a:latin typeface="Times New Roman" charset="0"/>
                         <a:ea typeface="Times New Roman" charset="0"/>
                         <a:cs typeface="Times New Roman" charset="0"/>
@@ -8717,7 +8717,7 @@
                         <a:buNone/>
                       </a:pPr>
                       <a:r>
-                        <a:rPr lang="en-US" sz="1100" dirty="0">
+                        <a:rPr lang="en-US" sz="1300" dirty="0">
                           <a:solidFill>
                             <a:srgbClr val="2D2D3A"/>
                           </a:solidFill>
@@ -8727,7 +8727,7 @@
                         </a:rPr>
                         <a:t>PUT</a:t>
                       </a:r>
-                      <a:endParaRPr lang="en-US" sz="1100" dirty="0">
+                      <a:endParaRPr lang="en-US" sz="1300" dirty="0">
                         <a:latin typeface="Times New Roman" charset="0"/>
                         <a:ea typeface="Times New Roman" charset="0"/>
                         <a:cs typeface="Times New Roman" charset="0"/>
@@ -8785,7 +8785,7 @@
                         <a:buNone/>
                       </a:pPr>
                       <a:r>
-                        <a:rPr lang="en-US" sz="1100" dirty="0">
+                        <a:rPr lang="en-US" sz="1300" dirty="0">
                           <a:solidFill>
                             <a:srgbClr val="2D2D3A"/>
                           </a:solidFill>
@@ -8795,7 +8795,7 @@
                         </a:rPr>
                         <a:t>/api/tickets/:id</a:t>
                       </a:r>
-                      <a:endParaRPr lang="en-US" sz="1100" dirty="0">
+                      <a:endParaRPr lang="en-US" sz="1300" dirty="0">
                         <a:latin typeface="Times New Roman" charset="0"/>
                         <a:ea typeface="Times New Roman" charset="0"/>
                         <a:cs typeface="Times New Roman" charset="0"/>
@@ -8853,7 +8853,7 @@
                         <a:buNone/>
                       </a:pPr>
                       <a:r>
-                        <a:rPr lang="en-US" sz="1100" dirty="0">
+                        <a:rPr lang="en-US" sz="1300" dirty="0">
                           <a:solidFill>
                             <a:srgbClr val="2D2D3A"/>
                           </a:solidFill>
@@ -8863,7 +8863,7 @@
                         </a:rPr>
                         <a:t>id, title, version</a:t>
                       </a:r>
-                      <a:endParaRPr lang="en-US" sz="1100" dirty="0">
+                      <a:endParaRPr lang="en-US" sz="1300" dirty="0">
                         <a:latin typeface="Times New Roman" charset="0"/>
                         <a:ea typeface="Times New Roman" charset="0"/>
                         <a:cs typeface="Times New Roman" charset="0"/>
@@ -8921,7 +8921,7 @@
                         <a:buNone/>
                       </a:pPr>
                       <a:r>
-                        <a:rPr lang="en-US" sz="1100" dirty="0">
+                        <a:rPr lang="en-US" sz="1300" dirty="0">
                           <a:solidFill>
                             <a:srgbClr val="2D2D3A"/>
                           </a:solidFill>
@@ -8931,7 +8931,7 @@
                         </a:rPr>
                         <a:t>Обновить поля обращения (locking)</a:t>
                       </a:r>
-                      <a:endParaRPr lang="en-US" sz="1100" dirty="0">
+                      <a:endParaRPr lang="en-US" sz="1300" dirty="0">
                         <a:latin typeface="Times New Roman" charset="0"/>
                         <a:ea typeface="Times New Roman" charset="0"/>
                         <a:cs typeface="Times New Roman" charset="0"/>
@@ -8991,7 +8991,7 @@
                         <a:buNone/>
                       </a:pPr>
                       <a:r>
-                        <a:rPr lang="en-US" sz="1100" dirty="0">
+                        <a:rPr lang="en-US" sz="1300" dirty="0">
                           <a:solidFill>
                             <a:srgbClr val="2D2D3A"/>
                           </a:solidFill>
@@ -9001,7 +9001,7 @@
                         </a:rPr>
                         <a:t>GET</a:t>
                       </a:r>
-                      <a:endParaRPr lang="en-US" sz="1100" dirty="0">
+                      <a:endParaRPr lang="en-US" sz="1300" dirty="0">
                         <a:latin typeface="Times New Roman" charset="0"/>
                         <a:ea typeface="Times New Roman" charset="0"/>
                         <a:cs typeface="Times New Roman" charset="0"/>
@@ -9059,7 +9059,7 @@
                         <a:buNone/>
                       </a:pPr>
                       <a:r>
-                        <a:rPr lang="en-US" sz="1100" dirty="0">
+                        <a:rPr lang="en-US" sz="1300" dirty="0">
                           <a:solidFill>
                             <a:srgbClr val="2D2D3A"/>
                           </a:solidFill>
@@ -9069,7 +9069,7 @@
                         </a:rPr>
                         <a:t>/api/tickets/:id/chat</a:t>
                       </a:r>
-                      <a:endParaRPr lang="en-US" sz="1100" dirty="0">
+                      <a:endParaRPr lang="en-US" sz="1300" dirty="0">
                         <a:latin typeface="Times New Roman" charset="0"/>
                         <a:ea typeface="Times New Roman" charset="0"/>
                         <a:cs typeface="Times New Roman" charset="0"/>
@@ -9127,7 +9127,7 @@
                         <a:buNone/>
                       </a:pPr>
                       <a:r>
-                        <a:rPr lang="en-US" sz="1100" dirty="0">
+                        <a:rPr lang="en-US" sz="1300" dirty="0">
                           <a:solidFill>
                             <a:srgbClr val="2D2D3A"/>
                           </a:solidFill>
@@ -9137,7 +9137,7 @@
                         </a:rPr>
                         <a:t>id (uuid)</a:t>
                       </a:r>
-                      <a:endParaRPr lang="en-US" sz="1100" dirty="0">
+                      <a:endParaRPr lang="en-US" sz="1300" dirty="0">
                         <a:latin typeface="Times New Roman" charset="0"/>
                         <a:ea typeface="Times New Roman" charset="0"/>
                         <a:cs typeface="Times New Roman" charset="0"/>
@@ -9195,7 +9195,7 @@
                         <a:buNone/>
                       </a:pPr>
                       <a:r>
-                        <a:rPr lang="en-US" sz="1100" dirty="0">
+                        <a:rPr lang="en-US" sz="1300" dirty="0">
                           <a:solidFill>
                             <a:srgbClr val="2D2D3A"/>
                           </a:solidFill>
@@ -9205,7 +9205,7 @@
                         </a:rPr>
                         <a:t>Получить историю сообщений в чате</a:t>
                       </a:r>
-                      <a:endParaRPr lang="en-US" sz="1100" dirty="0">
+                      <a:endParaRPr lang="en-US" sz="1300" dirty="0">
                         <a:latin typeface="Times New Roman" charset="0"/>
                         <a:ea typeface="Times New Roman" charset="0"/>
                         <a:cs typeface="Times New Roman" charset="0"/>
@@ -9389,7 +9389,7 @@
               <a:buNone/>
             </a:pPr>
             <a:r>
-              <a:rPr lang="en-US" sz="1200" b="1" dirty="0">
+              <a:rPr lang="en-US" sz="1400" b="1" dirty="0">
                 <a:solidFill>
                   <a:srgbClr val="1A1A2E"/>
                 </a:solidFill>
@@ -9399,7 +9399,7 @@
               </a:rPr>
               <a:t>Аутентификация, RBAC и защита API</a:t>
             </a:r>
-            <a:endParaRPr lang="en-US" sz="1200" dirty="0"/>
+            <a:endParaRPr lang="en-US" sz="1400" dirty="0"/>
           </a:p>
         </p:txBody>
       </p:sp>
@@ -9428,7 +9428,7 @@
               <a:buNone/>
             </a:pPr>
             <a:r>
-              <a:rPr lang="en-US" sz="1600" dirty="0">
+              <a:rPr lang="en-US" sz="1800" dirty="0">
                 <a:solidFill>
                   <a:srgbClr val="2D2D3A"/>
                 </a:solidFill>
@@ -9438,14 +9438,14 @@
               </a:rPr>
               <a:t>Проверка JWT-токенов (Auth Middleware):</a:t>
             </a:r>
-            <a:endParaRPr lang="en-US" sz="1600" dirty="0"/>
+            <a:endParaRPr lang="en-US" sz="1800" dirty="0"/>
           </a:p>
           <a:p>
             <a:pPr algn="l" indent="0" marL="0">
               <a:buNone/>
             </a:pPr>
             <a:r>
-              <a:rPr lang="en-US" sz="1600" dirty="0">
+              <a:rPr lang="en-US" sz="1800" dirty="0">
                 <a:solidFill>
                   <a:srgbClr val="2D2D3A"/>
                 </a:solidFill>
@@ -9455,20 +9455,20 @@
               </a:rPr>
               <a:t>Каждый защищенный роут API проходит проверку в промежуточном слое `verifyToken`. Он считывает заголовок `Authorization: Bearer &lt;token&gt;`, валидирует подпись и извлекает `userId` и `role`, прикрепляя их к объекту запроса `req.user`.</a:t>
             </a:r>
-            <a:endParaRPr lang="en-US" sz="1600" dirty="0"/>
+            <a:endParaRPr lang="en-US" sz="1800" dirty="0"/>
           </a:p>
           <a:p>
             <a:pPr algn="l" indent="0" marL="0">
               <a:buNone/>
             </a:pPr>
-            <a:endParaRPr lang="en-US" sz="1600" dirty="0"/>
+            <a:endParaRPr lang="en-US" sz="1800" dirty="0"/>
           </a:p>
           <a:p>
             <a:pPr algn="l" indent="0" marL="0">
               <a:buNone/>
             </a:pPr>
             <a:r>
-              <a:rPr lang="en-US" sz="1600" dirty="0">
+              <a:rPr lang="en-US" sz="1800" dirty="0">
                 <a:solidFill>
                   <a:srgbClr val="2D2D3A"/>
                 </a:solidFill>
@@ -9478,14 +9478,14 @@
               </a:rPr>
               <a:t>Безопасное разграничение ролей (RBAC):</a:t>
             </a:r>
-            <a:endParaRPr lang="en-US" sz="1600" dirty="0"/>
+            <a:endParaRPr lang="en-US" sz="1800" dirty="0"/>
           </a:p>
           <a:p>
             <a:pPr algn="l" indent="0" marL="0">
               <a:buNone/>
             </a:pPr>
             <a:r>
-              <a:rPr lang="en-US" sz="1600" dirty="0">
+              <a:rPr lang="en-US" sz="1800" dirty="0">
                 <a:solidFill>
                   <a:srgbClr val="2D2D3A"/>
                 </a:solidFill>
@@ -9495,14 +9495,14 @@
               </a:rPr>
               <a:t>• Роуты `/api/tickets` доступны клиенту для чтения только своих обращений.</a:t>
             </a:r>
-            <a:endParaRPr lang="en-US" sz="1600" dirty="0"/>
+            <a:endParaRPr lang="en-US" sz="1800" dirty="0"/>
           </a:p>
           <a:p>
             <a:pPr algn="l" indent="0" marL="0">
               <a:buNone/>
             </a:pPr>
             <a:r>
-              <a:rPr lang="en-US" sz="1600" dirty="0">
+              <a:rPr lang="en-US" sz="1800" dirty="0">
                 <a:solidFill>
                   <a:srgbClr val="2D2D3A"/>
                 </a:solidFill>
@@ -9512,14 +9512,14 @@
               </a:rPr>
               <a:t>• Роуты `/api/manager/*` доступны только пользователям с флагом `role='manager'`.</a:t>
             </a:r>
-            <a:endParaRPr lang="en-US" sz="1600" dirty="0"/>
+            <a:endParaRPr lang="en-US" sz="1800" dirty="0"/>
           </a:p>
           <a:p>
             <a:pPr algn="l" indent="0" marL="0">
               <a:buNone/>
             </a:pPr>
             <a:r>
-              <a:rPr lang="en-US" sz="1600" dirty="0">
+              <a:rPr lang="en-US" sz="1800" dirty="0">
                 <a:solidFill>
                   <a:srgbClr val="2D2D3A"/>
                 </a:solidFill>
@@ -9529,7 +9529,7 @@
               </a:rPr>
               <a:t>• Любые несанкционированные попытки доступа блокируются ошибками 401 Unauthorized или 403 Forbidden.</a:t>
             </a:r>
-            <a:endParaRPr lang="en-US" sz="1600" dirty="0"/>
+            <a:endParaRPr lang="en-US" sz="1800" dirty="0"/>
           </a:p>
         </p:txBody>
       </p:sp>
@@ -9663,7 +9663,7 @@
               <a:buNone/>
             </a:pPr>
             <a:r>
-              <a:rPr lang="en-US" sz="1200" b="1" dirty="0">
+              <a:rPr lang="en-US" sz="1400" b="1" dirty="0">
                 <a:solidFill>
                   <a:srgbClr val="1A1A2E"/>
                 </a:solidFill>
@@ -9673,7 +9673,7 @@
               </a:rPr>
               <a:t>Протокол, подключение и события WebSocket</a:t>
             </a:r>
-            <a:endParaRPr lang="en-US" sz="1200" dirty="0"/>
+            <a:endParaRPr lang="en-US" sz="1400" dirty="0"/>
           </a:p>
         </p:txBody>
       </p:sp>
@@ -9702,7 +9702,7 @@
               <a:buNone/>
             </a:pPr>
             <a:r>
-              <a:rPr lang="en-US" sz="1600" dirty="0">
+              <a:rPr lang="en-US" sz="1800" dirty="0">
                 <a:solidFill>
                   <a:srgbClr val="2D2D3A"/>
                 </a:solidFill>
@@ -9712,20 +9712,20 @@
               </a:rPr>
               <a:t>WebSocket обеспечивает постоянный двусторонний обмен данными без оверхеда HTTP-заголовков. При открытии карточки тикета клиент подключается к сокет-серверу и подписывается на комнату `ticket:&lt;ticketId&gt;`, отправляя событие `join`.</a:t>
             </a:r>
-            <a:endParaRPr lang="en-US" sz="1600" dirty="0"/>
+            <a:endParaRPr lang="en-US" sz="1800" dirty="0"/>
           </a:p>
           <a:p>
             <a:pPr algn="l" indent="0" marL="0">
               <a:buNone/>
             </a:pPr>
-            <a:endParaRPr lang="en-US" sz="1600" dirty="0"/>
+            <a:endParaRPr lang="en-US" sz="1800" dirty="0"/>
           </a:p>
           <a:p>
             <a:pPr algn="l" indent="0" marL="0">
               <a:buNone/>
             </a:pPr>
             <a:r>
-              <a:rPr lang="en-US" sz="1600" dirty="0">
+              <a:rPr lang="en-US" sz="1800" dirty="0">
                 <a:solidFill>
                   <a:srgbClr val="2D2D3A"/>
                 </a:solidFill>
@@ -9735,14 +9735,14 @@
               </a:rPr>
               <a:t>События WebSocket-сервиса:</a:t>
             </a:r>
-            <a:endParaRPr lang="en-US" sz="1600" dirty="0"/>
+            <a:endParaRPr lang="en-US" sz="1800" dirty="0"/>
           </a:p>
           <a:p>
             <a:pPr algn="l" indent="0" marL="0">
               <a:buNone/>
             </a:pPr>
             <a:r>
-              <a:rPr lang="en-US" sz="1600" dirty="0">
+              <a:rPr lang="en-US" sz="1800" dirty="0">
                 <a:solidFill>
                   <a:srgbClr val="2D2D3A"/>
                 </a:solidFill>
@@ -9752,14 +9752,14 @@
               </a:rPr>
               <a:t>• `message:send` — отправка нового сообщения в чат тикета.</a:t>
             </a:r>
-            <a:endParaRPr lang="en-US" sz="1600" dirty="0"/>
+            <a:endParaRPr lang="en-US" sz="1800" dirty="0"/>
           </a:p>
           <a:p>
             <a:pPr algn="l" indent="0" marL="0">
               <a:buNone/>
             </a:pPr>
             <a:r>
-              <a:rPr lang="en-US" sz="1600" dirty="0">
+              <a:rPr lang="en-US" sz="1800" dirty="0">
                 <a:solidFill>
                   <a:srgbClr val="2D2D3A"/>
                 </a:solidFill>
@@ -9769,14 +9769,14 @@
               </a:rPr>
               <a:t>• `message:receive` — получение сообщения от собеседника в реальном времени.</a:t>
             </a:r>
-            <a:endParaRPr lang="en-US" sz="1600" dirty="0"/>
+            <a:endParaRPr lang="en-US" sz="1800" dirty="0"/>
           </a:p>
           <a:p>
             <a:pPr algn="l" indent="0" marL="0">
               <a:buNone/>
             </a:pPr>
             <a:r>
-              <a:rPr lang="en-US" sz="1600" dirty="0">
+              <a:rPr lang="en-US" sz="1800" dirty="0">
                 <a:solidFill>
                   <a:srgbClr val="2D2D3A"/>
                 </a:solidFill>
@@ -9786,7 +9786,7 @@
               </a:rPr>
               <a:t>• `ticket:status_changed` — push-оповещение клиента о смене статуса обращения менеджером или базой 1С.</a:t>
             </a:r>
-            <a:endParaRPr lang="en-US" sz="1600" dirty="0"/>
+            <a:endParaRPr lang="en-US" sz="1800" dirty="0"/>
           </a:p>
         </p:txBody>
       </p:sp>
